--- a/assets/images/images_ppt.pptx
+++ b/assets/images/images_ppt.pptx
@@ -7,6 +7,7 @@
   <p:sldIdLst>
     <p:sldId id="256" r:id="rId2"/>
     <p:sldId id="257" r:id="rId3"/>
+    <p:sldId id="258" r:id="rId4"/>
   </p:sldIdLst>
   <p:sldSz cx="12192000" cy="6858000"/>
   <p:notesSz cx="7315200" cy="9601200"/>
@@ -106,6 +107,9 @@
     </a:lvl9pPr>
   </p:defaultTextStyle>
   <p:extLst>
+    <p:ext uri="{EFAFB233-063F-42B5-8137-9DF3F51BA10A}">
+      <p15:sldGuideLst xmlns:p15="http://schemas.microsoft.com/office/powerpoint/2012/main"/>
+    </p:ext>
     <p:ext uri="{2D200454-40CA-4A62-9FC3-DE9A4176ACB9}">
       <p15:notesGuideLst xmlns:p15="http://schemas.microsoft.com/office/powerpoint/2012/main">
         <p15:guide id="1" orient="horz" pos="3024">
@@ -33174,7 +33178,7 @@
         </p:blipFill>
         <p:spPr>
           <a:xfrm>
-            <a:off x="6726099" y="3626496"/>
+            <a:off x="6679795" y="3626496"/>
             <a:ext cx="3694496" cy="1487553"/>
           </a:xfrm>
           <a:prstGeom prst="rect">
@@ -33312,152 +33316,5318 @@
           </a:p>
         </p:txBody>
       </p:sp>
-      <p:sp>
-        <p:nvSpPr>
-          <p:cNvPr id="16" name="Freeform: Shape 15">
+      <p:pic>
+        <p:nvPicPr>
+          <p:cNvPr id="4" name="그림 3">
             <a:extLst>
               <a:ext uri="{FF2B5EF4-FFF2-40B4-BE49-F238E27FC236}">
-                <a16:creationId xmlns:a16="http://schemas.microsoft.com/office/drawing/2014/main" id="{D7E66F82-C01A-F4B4-3248-1E31340B64F6}"/>
+                <a16:creationId xmlns:a16="http://schemas.microsoft.com/office/drawing/2014/main" id="{119CF767-903A-CF5C-1B60-668CB7FEDC7C}"/>
               </a:ext>
             </a:extLst>
           </p:cNvPr>
-          <p:cNvSpPr/>
+          <p:cNvPicPr>
+            <a:picLocks noChangeAspect="1"/>
+          </p:cNvPicPr>
           <p:nvPr/>
-        </p:nvSpPr>
-        <p:spPr bwMode="gray">
+        </p:nvPicPr>
+        <p:blipFill>
+          <a:blip r:embed="rId5">
+            <a:extLst>
+              <a:ext uri="{28A0092B-C50C-407E-A947-70E740481C1C}">
+                <a14:useLocalDpi xmlns:a14="http://schemas.microsoft.com/office/drawing/2010/main" val="0"/>
+              </a:ext>
+            </a:extLst>
+          </a:blip>
+          <a:stretch>
+            <a:fillRect/>
+          </a:stretch>
+        </p:blipFill>
+        <p:spPr>
           <a:xfrm>
-            <a:off x="5392167" y="2462588"/>
-            <a:ext cx="2707252" cy="1089892"/>
+            <a:off x="9113270" y="1759263"/>
+            <a:ext cx="3804818" cy="1531625"/>
           </a:xfrm>
-          <a:custGeom>
+          <a:prstGeom prst="rect">
             <a:avLst/>
-            <a:gdLst>
-              <a:gd name="csX0" fmla="*/ 159388 w 2707252"/>
-              <a:gd name="csY0" fmla="*/ 0 h 1089892"/>
-              <a:gd name="csX1" fmla="*/ 2547864 w 2707252"/>
-              <a:gd name="csY1" fmla="*/ 0 h 1089892"/>
-              <a:gd name="csX2" fmla="*/ 2707252 w 2707252"/>
-              <a:gd name="csY2" fmla="*/ 159388 h 1089892"/>
-              <a:gd name="csX3" fmla="*/ 2707252 w 2707252"/>
-              <a:gd name="csY3" fmla="*/ 930504 h 1089892"/>
-              <a:gd name="csX4" fmla="*/ 2547864 w 2707252"/>
-              <a:gd name="csY4" fmla="*/ 1089892 h 1089892"/>
-              <a:gd name="csX5" fmla="*/ 159388 w 2707252"/>
-              <a:gd name="csY5" fmla="*/ 1089892 h 1089892"/>
-              <a:gd name="csX6" fmla="*/ 0 w 2707252"/>
-              <a:gd name="csY6" fmla="*/ 930504 h 1089892"/>
-              <a:gd name="csX7" fmla="*/ 0 w 2707252"/>
-              <a:gd name="csY7" fmla="*/ 159388 h 1089892"/>
-              <a:gd name="csX8" fmla="*/ 159388 w 2707252"/>
-              <a:gd name="csY8" fmla="*/ 0 h 1089892"/>
-            </a:gdLst>
-            <a:ahLst/>
-            <a:cxnLst>
-              <a:cxn ang="0">
-                <a:pos x="csX0" y="csY0"/>
-              </a:cxn>
-              <a:cxn ang="0">
-                <a:pos x="csX1" y="csY1"/>
-              </a:cxn>
-              <a:cxn ang="0">
-                <a:pos x="csX2" y="csY2"/>
-              </a:cxn>
-              <a:cxn ang="0">
-                <a:pos x="csX3" y="csY3"/>
-              </a:cxn>
-              <a:cxn ang="0">
-                <a:pos x="csX4" y="csY4"/>
-              </a:cxn>
-              <a:cxn ang="0">
-                <a:pos x="csX5" y="csY5"/>
-              </a:cxn>
-              <a:cxn ang="0">
-                <a:pos x="csX6" y="csY6"/>
-              </a:cxn>
-              <a:cxn ang="0">
-                <a:pos x="csX7" y="csY7"/>
-              </a:cxn>
-              <a:cxn ang="0">
-                <a:pos x="csX8" y="csY8"/>
-              </a:cxn>
-            </a:cxnLst>
-            <a:rect l="l" t="t" r="r" b="b"/>
-            <a:pathLst>
-              <a:path w="2707252" h="1089892">
-                <a:moveTo>
-                  <a:pt x="159388" y="0"/>
-                </a:moveTo>
-                <a:lnTo>
-                  <a:pt x="2547864" y="0"/>
-                </a:lnTo>
-                <a:cubicBezTo>
-                  <a:pt x="2547864" y="88028"/>
-                  <a:pt x="2619224" y="159388"/>
-                  <a:pt x="2707252" y="159388"/>
-                </a:cubicBezTo>
-                <a:lnTo>
-                  <a:pt x="2707252" y="930504"/>
-                </a:lnTo>
-                <a:cubicBezTo>
-                  <a:pt x="2619224" y="930504"/>
-                  <a:pt x="2547864" y="1001864"/>
-                  <a:pt x="2547864" y="1089892"/>
-                </a:cubicBezTo>
-                <a:lnTo>
-                  <a:pt x="159388" y="1089892"/>
-                </a:lnTo>
-                <a:cubicBezTo>
-                  <a:pt x="159388" y="1001864"/>
-                  <a:pt x="88028" y="930504"/>
-                  <a:pt x="0" y="930504"/>
-                </a:cubicBezTo>
-                <a:lnTo>
-                  <a:pt x="0" y="159388"/>
-                </a:lnTo>
-                <a:cubicBezTo>
-                  <a:pt x="88028" y="159388"/>
-                  <a:pt x="159388" y="88028"/>
-                  <a:pt x="159388" y="0"/>
-                </a:cubicBezTo>
-                <a:close/>
-              </a:path>
-            </a:pathLst>
-          </a:custGeom>
-          <a:solidFill>
-            <a:schemeClr val="accent3"/>
-          </a:solidFill>
-          <a:ln w="19050" algn="ctr">
+          </a:prstGeom>
+        </p:spPr>
+      </p:pic>
+      <p:grpSp>
+        <p:nvGrpSpPr>
+          <p:cNvPr id="20" name="그룹 19">
+            <a:extLst>
+              <a:ext uri="{FF2B5EF4-FFF2-40B4-BE49-F238E27FC236}">
+                <a16:creationId xmlns:a16="http://schemas.microsoft.com/office/drawing/2014/main" id="{1A3B0819-F5BD-2332-E87C-62C3F6CD89F5}"/>
+              </a:ext>
+            </a:extLst>
+          </p:cNvPr>
+          <p:cNvGrpSpPr/>
+          <p:nvPr/>
+        </p:nvGrpSpPr>
+        <p:grpSpPr>
+          <a:xfrm>
+            <a:off x="677717" y="2434934"/>
+            <a:ext cx="3697200" cy="1486800"/>
+            <a:chOff x="677717" y="2434934"/>
+            <a:chExt cx="3697200" cy="1486800"/>
+          </a:xfrm>
+        </p:grpSpPr>
+        <p:sp>
+          <p:nvSpPr>
+            <p:cNvPr id="10" name="자유형: 도형 9">
+              <a:extLst>
+                <a:ext uri="{FF2B5EF4-FFF2-40B4-BE49-F238E27FC236}">
+                  <a16:creationId xmlns:a16="http://schemas.microsoft.com/office/drawing/2014/main" id="{660E7A5F-BBB9-118D-9595-1C98E67241E7}"/>
+                </a:ext>
+              </a:extLst>
+            </p:cNvPr>
+            <p:cNvSpPr/>
+            <p:nvPr/>
+          </p:nvSpPr>
+          <p:spPr bwMode="gray">
+            <a:xfrm>
+              <a:off x="677717" y="2434934"/>
+              <a:ext cx="3697200" cy="1486800"/>
+            </a:xfrm>
+            <a:custGeom>
+              <a:avLst/>
+              <a:gdLst>
+                <a:gd name="csX0" fmla="*/ 0 w 3697200"/>
+                <a:gd name="csY0" fmla="*/ 0 h 1486800"/>
+                <a:gd name="csX1" fmla="*/ 3697200 w 3697200"/>
+                <a:gd name="csY1" fmla="*/ 0 h 1486800"/>
+                <a:gd name="csX2" fmla="*/ 3697200 w 3697200"/>
+                <a:gd name="csY2" fmla="*/ 517650 h 1486800"/>
+                <a:gd name="csX3" fmla="*/ 3691379 w 3697200"/>
+                <a:gd name="csY3" fmla="*/ 517063 h 1486800"/>
+                <a:gd name="csX4" fmla="*/ 3465042 w 3697200"/>
+                <a:gd name="csY4" fmla="*/ 743400 h 1486800"/>
+                <a:gd name="csX5" fmla="*/ 3691379 w 3697200"/>
+                <a:gd name="csY5" fmla="*/ 969737 h 1486800"/>
+                <a:gd name="csX6" fmla="*/ 3697200 w 3697200"/>
+                <a:gd name="csY6" fmla="*/ 969150 h 1486800"/>
+                <a:gd name="csX7" fmla="*/ 3697200 w 3697200"/>
+                <a:gd name="csY7" fmla="*/ 1486800 h 1486800"/>
+                <a:gd name="csX8" fmla="*/ 0 w 3697200"/>
+                <a:gd name="csY8" fmla="*/ 1486800 h 1486800"/>
+                <a:gd name="csX9" fmla="*/ 0 w 3697200"/>
+                <a:gd name="csY9" fmla="*/ 969150 h 1486800"/>
+                <a:gd name="csX10" fmla="*/ 5821 w 3697200"/>
+                <a:gd name="csY10" fmla="*/ 969737 h 1486800"/>
+                <a:gd name="csX11" fmla="*/ 232158 w 3697200"/>
+                <a:gd name="csY11" fmla="*/ 743400 h 1486800"/>
+                <a:gd name="csX12" fmla="*/ 5821 w 3697200"/>
+                <a:gd name="csY12" fmla="*/ 517063 h 1486800"/>
+                <a:gd name="csX13" fmla="*/ 0 w 3697200"/>
+                <a:gd name="csY13" fmla="*/ 517650 h 1486800"/>
+              </a:gdLst>
+              <a:ahLst/>
+              <a:cxnLst>
+                <a:cxn ang="0">
+                  <a:pos x="csX0" y="csY0"/>
+                </a:cxn>
+                <a:cxn ang="0">
+                  <a:pos x="csX1" y="csY1"/>
+                </a:cxn>
+                <a:cxn ang="0">
+                  <a:pos x="csX2" y="csY2"/>
+                </a:cxn>
+                <a:cxn ang="0">
+                  <a:pos x="csX3" y="csY3"/>
+                </a:cxn>
+                <a:cxn ang="0">
+                  <a:pos x="csX4" y="csY4"/>
+                </a:cxn>
+                <a:cxn ang="0">
+                  <a:pos x="csX5" y="csY5"/>
+                </a:cxn>
+                <a:cxn ang="0">
+                  <a:pos x="csX6" y="csY6"/>
+                </a:cxn>
+                <a:cxn ang="0">
+                  <a:pos x="csX7" y="csY7"/>
+                </a:cxn>
+                <a:cxn ang="0">
+                  <a:pos x="csX8" y="csY8"/>
+                </a:cxn>
+                <a:cxn ang="0">
+                  <a:pos x="csX9" y="csY9"/>
+                </a:cxn>
+                <a:cxn ang="0">
+                  <a:pos x="csX10" y="csY10"/>
+                </a:cxn>
+                <a:cxn ang="0">
+                  <a:pos x="csX11" y="csY11"/>
+                </a:cxn>
+                <a:cxn ang="0">
+                  <a:pos x="csX12" y="csY12"/>
+                </a:cxn>
+                <a:cxn ang="0">
+                  <a:pos x="csX13" y="csY13"/>
+                </a:cxn>
+              </a:cxnLst>
+              <a:rect l="l" t="t" r="r" b="b"/>
+              <a:pathLst>
+                <a:path w="3697200" h="1486800">
+                  <a:moveTo>
+                    <a:pt x="0" y="0"/>
+                  </a:moveTo>
+                  <a:lnTo>
+                    <a:pt x="3697200" y="0"/>
+                  </a:lnTo>
+                  <a:lnTo>
+                    <a:pt x="3697200" y="517650"/>
+                  </a:lnTo>
+                  <a:lnTo>
+                    <a:pt x="3691379" y="517063"/>
+                  </a:lnTo>
+                  <a:cubicBezTo>
+                    <a:pt x="3566377" y="517063"/>
+                    <a:pt x="3465042" y="618398"/>
+                    <a:pt x="3465042" y="743400"/>
+                  </a:cubicBezTo>
+                  <a:cubicBezTo>
+                    <a:pt x="3465042" y="868402"/>
+                    <a:pt x="3566377" y="969737"/>
+                    <a:pt x="3691379" y="969737"/>
+                  </a:cubicBezTo>
+                  <a:lnTo>
+                    <a:pt x="3697200" y="969150"/>
+                  </a:lnTo>
+                  <a:lnTo>
+                    <a:pt x="3697200" y="1486800"/>
+                  </a:lnTo>
+                  <a:lnTo>
+                    <a:pt x="0" y="1486800"/>
+                  </a:lnTo>
+                  <a:lnTo>
+                    <a:pt x="0" y="969150"/>
+                  </a:lnTo>
+                  <a:lnTo>
+                    <a:pt x="5821" y="969737"/>
+                  </a:lnTo>
+                  <a:cubicBezTo>
+                    <a:pt x="130823" y="969737"/>
+                    <a:pt x="232158" y="868402"/>
+                    <a:pt x="232158" y="743400"/>
+                  </a:cubicBezTo>
+                  <a:cubicBezTo>
+                    <a:pt x="232158" y="618398"/>
+                    <a:pt x="130823" y="517063"/>
+                    <a:pt x="5821" y="517063"/>
+                  </a:cubicBezTo>
+                  <a:lnTo>
+                    <a:pt x="0" y="517650"/>
+                  </a:lnTo>
+                  <a:close/>
+                </a:path>
+              </a:pathLst>
+            </a:custGeom>
+            <a:solidFill>
+              <a:srgbClr val="DFEAC0"/>
+            </a:solidFill>
+            <a:ln w="3175" algn="ctr">
+              <a:solidFill>
+                <a:schemeClr val="bg1">
+                  <a:lumMod val="65000"/>
+                </a:schemeClr>
+              </a:solidFill>
+              <a:miter lim="800000"/>
+              <a:headEnd/>
+              <a:tailEnd/>
+            </a:ln>
+          </p:spPr>
+          <p:txBody>
+            <a:bodyPr wrap="square" lIns="88900" tIns="88900" rIns="88900" bIns="88900" rtlCol="0" anchor="ctr">
+              <a:noAutofit/>
+            </a:bodyPr>
+            <a:lstStyle/>
+            <a:p>
+              <a:pPr algn="ctr">
+                <a:lnSpc>
+                  <a:spcPct val="106000"/>
+                </a:lnSpc>
+                <a:buFont typeface="Wingdings 2" pitchFamily="18" charset="2"/>
+                <a:buNone/>
+              </a:pPr>
+              <a:endParaRPr lang="ko-KR" altLang="en-US" sz="1600" b="1" dirty="0">
+                <a:solidFill>
+                  <a:schemeClr val="bg1"/>
+                </a:solidFill>
+              </a:endParaRPr>
+            </a:p>
+          </p:txBody>
+        </p:sp>
+        <p:sp>
+          <p:nvSpPr>
+            <p:cNvPr id="17" name="자유형: 도형 16">
+              <a:extLst>
+                <a:ext uri="{FF2B5EF4-FFF2-40B4-BE49-F238E27FC236}">
+                  <a16:creationId xmlns:a16="http://schemas.microsoft.com/office/drawing/2014/main" id="{9A678E3F-1816-5204-CD17-9FBACD85DA5C}"/>
+                </a:ext>
+              </a:extLst>
+            </p:cNvPr>
+            <p:cNvSpPr/>
+            <p:nvPr/>
+          </p:nvSpPr>
+          <p:spPr bwMode="gray">
+            <a:xfrm>
+              <a:off x="970713" y="2610952"/>
+              <a:ext cx="3144088" cy="1200486"/>
+            </a:xfrm>
+            <a:custGeom>
+              <a:avLst/>
+              <a:gdLst>
+                <a:gd name="csX0" fmla="*/ 161925 w 2864644"/>
+                <a:gd name="csY0" fmla="*/ 0 h 1093788"/>
+                <a:gd name="csX1" fmla="*/ 2702719 w 2864644"/>
+                <a:gd name="csY1" fmla="*/ 0 h 1093788"/>
+                <a:gd name="csX2" fmla="*/ 2864644 w 2864644"/>
+                <a:gd name="csY2" fmla="*/ 161925 h 1093788"/>
+                <a:gd name="csX3" fmla="*/ 2864644 w 2864644"/>
+                <a:gd name="csY3" fmla="*/ 931863 h 1093788"/>
+                <a:gd name="csX4" fmla="*/ 2702719 w 2864644"/>
+                <a:gd name="csY4" fmla="*/ 1093788 h 1093788"/>
+                <a:gd name="csX5" fmla="*/ 161925 w 2864644"/>
+                <a:gd name="csY5" fmla="*/ 1093788 h 1093788"/>
+                <a:gd name="csX6" fmla="*/ 0 w 2864644"/>
+                <a:gd name="csY6" fmla="*/ 931863 h 1093788"/>
+                <a:gd name="csX7" fmla="*/ 0 w 2864644"/>
+                <a:gd name="csY7" fmla="*/ 161925 h 1093788"/>
+                <a:gd name="csX8" fmla="*/ 161925 w 2864644"/>
+                <a:gd name="csY8" fmla="*/ 0 h 1093788"/>
+              </a:gdLst>
+              <a:ahLst/>
+              <a:cxnLst>
+                <a:cxn ang="0">
+                  <a:pos x="csX0" y="csY0"/>
+                </a:cxn>
+                <a:cxn ang="0">
+                  <a:pos x="csX1" y="csY1"/>
+                </a:cxn>
+                <a:cxn ang="0">
+                  <a:pos x="csX2" y="csY2"/>
+                </a:cxn>
+                <a:cxn ang="0">
+                  <a:pos x="csX3" y="csY3"/>
+                </a:cxn>
+                <a:cxn ang="0">
+                  <a:pos x="csX4" y="csY4"/>
+                </a:cxn>
+                <a:cxn ang="0">
+                  <a:pos x="csX5" y="csY5"/>
+                </a:cxn>
+                <a:cxn ang="0">
+                  <a:pos x="csX6" y="csY6"/>
+                </a:cxn>
+                <a:cxn ang="0">
+                  <a:pos x="csX7" y="csY7"/>
+                </a:cxn>
+                <a:cxn ang="0">
+                  <a:pos x="csX8" y="csY8"/>
+                </a:cxn>
+              </a:cxnLst>
+              <a:rect l="l" t="t" r="r" b="b"/>
+              <a:pathLst>
+                <a:path w="2864644" h="1093788">
+                  <a:moveTo>
+                    <a:pt x="161925" y="0"/>
+                  </a:moveTo>
+                  <a:lnTo>
+                    <a:pt x="2702719" y="0"/>
+                  </a:lnTo>
+                  <a:cubicBezTo>
+                    <a:pt x="2702719" y="89429"/>
+                    <a:pt x="2775215" y="161925"/>
+                    <a:pt x="2864644" y="161925"/>
+                  </a:cubicBezTo>
+                  <a:lnTo>
+                    <a:pt x="2864644" y="931863"/>
+                  </a:lnTo>
+                  <a:cubicBezTo>
+                    <a:pt x="2775215" y="931863"/>
+                    <a:pt x="2702719" y="1004359"/>
+                    <a:pt x="2702719" y="1093788"/>
+                  </a:cubicBezTo>
+                  <a:lnTo>
+                    <a:pt x="161925" y="1093788"/>
+                  </a:lnTo>
+                  <a:cubicBezTo>
+                    <a:pt x="161925" y="1004359"/>
+                    <a:pt x="89429" y="931863"/>
+                    <a:pt x="0" y="931863"/>
+                  </a:cubicBezTo>
+                  <a:lnTo>
+                    <a:pt x="0" y="161925"/>
+                  </a:lnTo>
+                  <a:cubicBezTo>
+                    <a:pt x="89429" y="161925"/>
+                    <a:pt x="161925" y="89429"/>
+                    <a:pt x="161925" y="0"/>
+                  </a:cubicBezTo>
+                  <a:close/>
+                </a:path>
+              </a:pathLst>
+            </a:custGeom>
+            <a:solidFill>
+              <a:srgbClr val="E6E6E6"/>
+            </a:solidFill>
+            <a:ln w="3175" algn="ctr">
+              <a:solidFill>
+                <a:schemeClr val="bg1">
+                  <a:lumMod val="65000"/>
+                </a:schemeClr>
+              </a:solidFill>
+              <a:miter lim="800000"/>
+              <a:headEnd/>
+              <a:tailEnd/>
+            </a:ln>
+          </p:spPr>
+          <p:txBody>
+            <a:bodyPr wrap="square" lIns="88900" tIns="88900" rIns="88900" bIns="88900" rtlCol="0" anchor="ctr">
+              <a:noAutofit/>
+            </a:bodyPr>
+            <a:lstStyle/>
+            <a:p>
+              <a:pPr algn="ctr">
+                <a:lnSpc>
+                  <a:spcPct val="106000"/>
+                </a:lnSpc>
+                <a:buFont typeface="Wingdings 2" pitchFamily="18" charset="2"/>
+                <a:buNone/>
+              </a:pPr>
+              <a:r>
+                <a:rPr lang="en-US" altLang="ko-KR" sz="1600" b="1" dirty="0">
+                  <a:solidFill>
+                    <a:schemeClr val="bg1"/>
+                  </a:solidFill>
+                </a:rPr>
+                <a:t>`</a:t>
+              </a:r>
+              <a:endParaRPr lang="ko-KR" altLang="en-US" sz="1600" b="1" dirty="0">
+                <a:solidFill>
+                  <a:schemeClr val="bg1"/>
+                </a:solidFill>
+              </a:endParaRPr>
+            </a:p>
+          </p:txBody>
+        </p:sp>
+        <p:sp>
+          <p:nvSpPr>
+            <p:cNvPr id="18" name="직사각형 17">
+              <a:extLst>
+                <a:ext uri="{FF2B5EF4-FFF2-40B4-BE49-F238E27FC236}">
+                  <a16:creationId xmlns:a16="http://schemas.microsoft.com/office/drawing/2014/main" id="{D529AB05-0E9C-002C-1BAF-FAF520F629E1}"/>
+                </a:ext>
+              </a:extLst>
+            </p:cNvPr>
+            <p:cNvSpPr/>
+            <p:nvPr/>
+          </p:nvSpPr>
+          <p:spPr bwMode="gray">
+            <a:xfrm>
+              <a:off x="1105658" y="2813050"/>
+              <a:ext cx="717550" cy="762000"/>
+            </a:xfrm>
+            <a:prstGeom prst="rect">
+              <a:avLst/>
+            </a:prstGeom>
             <a:noFill/>
-            <a:miter lim="800000"/>
-            <a:headEnd/>
-            <a:tailEnd/>
-          </a:ln>
-        </p:spPr>
-        <p:txBody>
-          <a:bodyPr wrap="square" lIns="88900" tIns="88900" rIns="88900" bIns="88900" rtlCol="0" anchor="ctr">
-            <a:noAutofit/>
-          </a:bodyPr>
-          <a:lstStyle/>
-          <a:p>
-            <a:pPr algn="ctr">
-              <a:lnSpc>
-                <a:spcPct val="106000"/>
-              </a:lnSpc>
-              <a:buFont typeface="Wingdings 2" pitchFamily="18" charset="2"/>
-              <a:buNone/>
-            </a:pPr>
-            <a:endParaRPr lang="ko-KR" altLang="en-US" sz="1600" b="1" dirty="0">
-              <a:solidFill>
-                <a:schemeClr val="bg1"/>
-              </a:solidFill>
-            </a:endParaRPr>
-          </a:p>
-        </p:txBody>
-      </p:sp>
+            <a:ln w="19050" algn="ctr">
+              <a:noFill/>
+              <a:miter lim="800000"/>
+              <a:headEnd/>
+              <a:tailEnd/>
+            </a:ln>
+          </p:spPr>
+          <p:txBody>
+            <a:bodyPr wrap="none" lIns="88900" tIns="88900" rIns="88900" bIns="88900" rtlCol="0" anchor="ctr"/>
+            <a:lstStyle/>
+            <a:p>
+              <a:pPr algn="ctr">
+                <a:lnSpc>
+                  <a:spcPct val="106000"/>
+                </a:lnSpc>
+                <a:buFont typeface="Wingdings 2" pitchFamily="18" charset="2"/>
+                <a:buNone/>
+              </a:pPr>
+              <a:r>
+                <a:rPr lang="en-US" altLang="ko-KR" sz="4400" b="1" dirty="0">
+                  <a:latin typeface="나눔고딕" panose="020D0604000000000000" pitchFamily="50" charset="-127"/>
+                  <a:ea typeface="나눔고딕" panose="020D0604000000000000" pitchFamily="50" charset="-127"/>
+                </a:rPr>
+                <a:t>A</a:t>
+              </a:r>
+              <a:r>
+                <a:rPr lang="ko-KR" altLang="en-US" sz="4400" b="1" dirty="0">
+                  <a:latin typeface="나눔고딕" panose="020D0604000000000000" pitchFamily="50" charset="-127"/>
+                  <a:ea typeface="나눔고딕" panose="020D0604000000000000" pitchFamily="50" charset="-127"/>
+                </a:rPr>
+                <a:t>상</a:t>
+              </a:r>
+            </a:p>
+          </p:txBody>
+        </p:sp>
+        <p:sp>
+          <p:nvSpPr>
+            <p:cNvPr id="19" name="직사각형 18">
+              <a:extLst>
+                <a:ext uri="{FF2B5EF4-FFF2-40B4-BE49-F238E27FC236}">
+                  <a16:creationId xmlns:a16="http://schemas.microsoft.com/office/drawing/2014/main" id="{D632847A-17CF-6857-54F4-F42BDDDF8E7F}"/>
+                </a:ext>
+              </a:extLst>
+            </p:cNvPr>
+            <p:cNvSpPr/>
+            <p:nvPr/>
+          </p:nvSpPr>
+          <p:spPr bwMode="gray">
+            <a:xfrm>
+              <a:off x="1958153" y="2714920"/>
+              <a:ext cx="2057666" cy="1096518"/>
+            </a:xfrm>
+            <a:prstGeom prst="rect">
+              <a:avLst/>
+            </a:prstGeom>
+            <a:noFill/>
+            <a:ln w="19050" algn="ctr">
+              <a:noFill/>
+              <a:miter lim="800000"/>
+              <a:headEnd/>
+              <a:tailEnd/>
+            </a:ln>
+          </p:spPr>
+          <p:txBody>
+            <a:bodyPr wrap="none" lIns="88900" tIns="88900" rIns="88900" bIns="88900" rtlCol="0" anchor="ctr"/>
+            <a:lstStyle/>
+            <a:p>
+              <a:pPr algn="ctr">
+                <a:lnSpc>
+                  <a:spcPct val="106000"/>
+                </a:lnSpc>
+                <a:buFont typeface="Wingdings 2" pitchFamily="18" charset="2"/>
+                <a:buNone/>
+              </a:pPr>
+              <a:r>
+                <a:rPr lang="ko-KR" altLang="en-US" sz="1600" b="1" dirty="0" err="1">
+                  <a:latin typeface="나눔고딕" panose="020D0604000000000000" pitchFamily="50" charset="-127"/>
+                  <a:ea typeface="나눔고딕" panose="020D0604000000000000" pitchFamily="50" charset="-127"/>
+                </a:rPr>
+                <a:t>기노모토</a:t>
+              </a:r>
+              <a:r>
+                <a:rPr lang="ko-KR" altLang="en-US" sz="1600" b="1" dirty="0">
+                  <a:latin typeface="나눔고딕" panose="020D0604000000000000" pitchFamily="50" charset="-127"/>
+                  <a:ea typeface="나눔고딕" panose="020D0604000000000000" pitchFamily="50" charset="-127"/>
+                </a:rPr>
+                <a:t> 사쿠라 피규어</a:t>
+              </a:r>
+              <a:endParaRPr lang="en-US" altLang="ko-KR" sz="1600" b="1" dirty="0">
+                <a:latin typeface="나눔고딕" panose="020D0604000000000000" pitchFamily="50" charset="-127"/>
+                <a:ea typeface="나눔고딕" panose="020D0604000000000000" pitchFamily="50" charset="-127"/>
+              </a:endParaRPr>
+            </a:p>
+            <a:p>
+              <a:pPr algn="ctr">
+                <a:lnSpc>
+                  <a:spcPct val="106000"/>
+                </a:lnSpc>
+                <a:buFont typeface="Wingdings 2" pitchFamily="18" charset="2"/>
+                <a:buNone/>
+              </a:pPr>
+              <a:r>
+                <a:rPr lang="en-US" altLang="ko-KR" sz="1600" b="1" dirty="0">
+                  <a:latin typeface="나눔고딕" panose="020D0604000000000000" pitchFamily="50" charset="-127"/>
+                  <a:ea typeface="나눔고딕" panose="020D0604000000000000" pitchFamily="50" charset="-127"/>
+                </a:rPr>
+                <a:t>-</a:t>
+              </a:r>
+              <a:r>
+                <a:rPr lang="ko-KR" altLang="en-US" sz="1600" b="1" dirty="0">
+                  <a:latin typeface="나눔고딕" panose="020D0604000000000000" pitchFamily="50" charset="-127"/>
+                  <a:ea typeface="나눔고딕" panose="020D0604000000000000" pitchFamily="50" charset="-127"/>
+                </a:rPr>
+                <a:t>사쿠라 </a:t>
+              </a:r>
+              <a:r>
+                <a:rPr lang="ko-KR" altLang="en-US" sz="1600" b="1" dirty="0" err="1">
+                  <a:latin typeface="나눔고딕" panose="020D0604000000000000" pitchFamily="50" charset="-127"/>
+                  <a:ea typeface="나눔고딕" panose="020D0604000000000000" pitchFamily="50" charset="-127"/>
+                </a:rPr>
+                <a:t>카드편</a:t>
+              </a:r>
+              <a:r>
+                <a:rPr lang="en-US" altLang="ko-KR" sz="1600" b="1" dirty="0">
+                  <a:latin typeface="나눔고딕" panose="020D0604000000000000" pitchFamily="50" charset="-127"/>
+                  <a:ea typeface="나눔고딕" panose="020D0604000000000000" pitchFamily="50" charset="-127"/>
+                </a:rPr>
+                <a:t>-</a:t>
+              </a:r>
+              <a:endParaRPr lang="ko-KR" altLang="en-US" sz="1600" b="1" dirty="0">
+                <a:latin typeface="나눔고딕" panose="020D0604000000000000" pitchFamily="50" charset="-127"/>
+                <a:ea typeface="나눔고딕" panose="020D0604000000000000" pitchFamily="50" charset="-127"/>
+              </a:endParaRPr>
+            </a:p>
+          </p:txBody>
+        </p:sp>
+      </p:grpSp>
     </p:spTree>
     <p:extLst>
       <p:ext uri="{BB962C8B-B14F-4D97-AF65-F5344CB8AC3E}">
         <p14:creationId xmlns:p14="http://schemas.microsoft.com/office/powerpoint/2010/main" val="2122464491"/>
+      </p:ext>
+    </p:extLst>
+  </p:cSld>
+  <p:clrMapOvr>
+    <a:masterClrMapping/>
+  </p:clrMapOvr>
+  <p:transition>
+    <p:fade/>
+  </p:transition>
+</p:sld>
+</file>
+
+<file path=ppt/slides/slide3.xml><?xml version="1.0" encoding="utf-8"?>
+<p:sld xmlns:a="http://schemas.openxmlformats.org/drawingml/2006/main" xmlns:r="http://schemas.openxmlformats.org/officeDocument/2006/relationships" xmlns:p="http://schemas.openxmlformats.org/presentationml/2006/main">
+  <p:cSld>
+    <p:spTree>
+      <p:nvGrpSpPr>
+        <p:cNvPr id="1" name="">
+          <a:extLst>
+            <a:ext uri="{FF2B5EF4-FFF2-40B4-BE49-F238E27FC236}">
+              <a16:creationId xmlns:a16="http://schemas.microsoft.com/office/drawing/2014/main" id="{C7BA396D-978C-B7B5-508F-2FFAF8B181B2}"/>
+            </a:ext>
+          </a:extLst>
+        </p:cNvPr>
+        <p:cNvGrpSpPr/>
+        <p:nvPr/>
+      </p:nvGrpSpPr>
+      <p:grpSpPr>
+        <a:xfrm>
+          <a:off x="0" y="0"/>
+          <a:ext cx="0" cy="0"/>
+          <a:chOff x="0" y="0"/>
+          <a:chExt cx="0" cy="0"/>
+        </a:xfrm>
+      </p:grpSpPr>
+      <p:graphicFrame>
+        <p:nvGraphicFramePr>
+          <p:cNvPr id="9" name="think-cell data - do not delete" hidden="1">
+            <a:extLst>
+              <a:ext uri="{FF2B5EF4-FFF2-40B4-BE49-F238E27FC236}">
+                <a16:creationId xmlns:a16="http://schemas.microsoft.com/office/drawing/2014/main" id="{F4B91352-8B66-7D27-5547-413E99463F9E}"/>
+              </a:ext>
+            </a:extLst>
+          </p:cNvPr>
+          <p:cNvGraphicFramePr>
+            <a:graphicFrameLocks noChangeAspect="1"/>
+          </p:cNvGraphicFramePr>
+          <p:nvPr>
+            <p:custDataLst>
+              <p:tags r:id="rId1"/>
+            </p:custDataLst>
+          </p:nvPr>
+        </p:nvGraphicFramePr>
+        <p:xfrm>
+          <a:off x="1588" y="1588"/>
+          <a:ext cx="1588" cy="1588"/>
+        </p:xfrm>
+        <a:graphic>
+          <a:graphicData uri="http://schemas.openxmlformats.org/presentationml/2006/ole">
+            <mc:AlternateContent xmlns:mc="http://schemas.openxmlformats.org/markup-compatibility/2006">
+              <mc:Choice xmlns:v="urn:schemas-microsoft-com:vml" Requires="v">
+                <p:oleObj name="think-cell Slide" r:id="rId3" imgW="404" imgH="406" progId="TCLayout.ActiveDocument.1">
+                  <p:embed/>
+                </p:oleObj>
+              </mc:Choice>
+              <mc:Fallback>
+                <p:oleObj name="think-cell Slide" r:id="rId3" imgW="404" imgH="406" progId="TCLayout.ActiveDocument.1">
+                  <p:embed/>
+                  <p:pic>
+                    <p:nvPicPr>
+                      <p:cNvPr id="9" name="think-cell data - do not delete" hidden="1">
+                        <a:extLst>
+                          <a:ext uri="{FF2B5EF4-FFF2-40B4-BE49-F238E27FC236}">
+                            <a16:creationId xmlns:a16="http://schemas.microsoft.com/office/drawing/2014/main" id="{1376A4EB-3EDB-F70F-84E2-EA4627A397BA}"/>
+                          </a:ext>
+                        </a:extLst>
+                      </p:cNvPr>
+                      <p:cNvPicPr/>
+                      <p:nvPr/>
+                    </p:nvPicPr>
+                    <p:blipFill>
+                      <a:blip r:embed="rId4"/>
+                      <a:stretch>
+                        <a:fillRect/>
+                      </a:stretch>
+                    </p:blipFill>
+                    <p:spPr>
+                      <a:xfrm>
+                        <a:off x="1588" y="1588"/>
+                        <a:ext cx="1588" cy="1588"/>
+                      </a:xfrm>
+                      <a:prstGeom prst="rect">
+                        <a:avLst/>
+                      </a:prstGeom>
+                    </p:spPr>
+                  </p:pic>
+                </p:oleObj>
+              </mc:Fallback>
+            </mc:AlternateContent>
+          </a:graphicData>
+        </a:graphic>
+      </p:graphicFrame>
+      <p:sp>
+        <p:nvSpPr>
+          <p:cNvPr id="3" name="Text Placeholder 2">
+            <a:extLst>
+              <a:ext uri="{FF2B5EF4-FFF2-40B4-BE49-F238E27FC236}">
+                <a16:creationId xmlns:a16="http://schemas.microsoft.com/office/drawing/2014/main" id="{C359630F-C248-680C-8762-EFF4A854548F}"/>
+              </a:ext>
+            </a:extLst>
+          </p:cNvPr>
+          <p:cNvSpPr>
+            <a:spLocks noGrp="1"/>
+          </p:cNvSpPr>
+          <p:nvPr>
+            <p:ph type="body" sz="quarter" idx="10"/>
+          </p:nvPr>
+        </p:nvSpPr>
+        <p:spPr/>
+        <p:txBody>
+          <a:bodyPr/>
+          <a:lstStyle/>
+          <a:p>
+            <a:endParaRPr lang="ko-KR" altLang="en-US"/>
+          </a:p>
+        </p:txBody>
+      </p:sp>
+      <p:grpSp>
+        <p:nvGrpSpPr>
+          <p:cNvPr id="20" name="그룹 19">
+            <a:extLst>
+              <a:ext uri="{FF2B5EF4-FFF2-40B4-BE49-F238E27FC236}">
+                <a16:creationId xmlns:a16="http://schemas.microsoft.com/office/drawing/2014/main" id="{19558E47-1AFB-9921-28D4-9943390AF1CF}"/>
+              </a:ext>
+            </a:extLst>
+          </p:cNvPr>
+          <p:cNvGrpSpPr/>
+          <p:nvPr/>
+        </p:nvGrpSpPr>
+        <p:grpSpPr>
+          <a:xfrm>
+            <a:off x="576117" y="1190334"/>
+            <a:ext cx="3697200" cy="1486800"/>
+            <a:chOff x="677717" y="2434934"/>
+            <a:chExt cx="3697200" cy="1486800"/>
+          </a:xfrm>
+        </p:grpSpPr>
+        <p:sp>
+          <p:nvSpPr>
+            <p:cNvPr id="10" name="자유형: 도형 9">
+              <a:extLst>
+                <a:ext uri="{FF2B5EF4-FFF2-40B4-BE49-F238E27FC236}">
+                  <a16:creationId xmlns:a16="http://schemas.microsoft.com/office/drawing/2014/main" id="{FB923340-8BF0-93FB-5592-79F129428429}"/>
+                </a:ext>
+              </a:extLst>
+            </p:cNvPr>
+            <p:cNvSpPr/>
+            <p:nvPr/>
+          </p:nvSpPr>
+          <p:spPr bwMode="gray">
+            <a:xfrm>
+              <a:off x="677717" y="2434934"/>
+              <a:ext cx="3697200" cy="1486800"/>
+            </a:xfrm>
+            <a:custGeom>
+              <a:avLst/>
+              <a:gdLst>
+                <a:gd name="csX0" fmla="*/ 0 w 3697200"/>
+                <a:gd name="csY0" fmla="*/ 0 h 1486800"/>
+                <a:gd name="csX1" fmla="*/ 3697200 w 3697200"/>
+                <a:gd name="csY1" fmla="*/ 0 h 1486800"/>
+                <a:gd name="csX2" fmla="*/ 3697200 w 3697200"/>
+                <a:gd name="csY2" fmla="*/ 517650 h 1486800"/>
+                <a:gd name="csX3" fmla="*/ 3691379 w 3697200"/>
+                <a:gd name="csY3" fmla="*/ 517063 h 1486800"/>
+                <a:gd name="csX4" fmla="*/ 3465042 w 3697200"/>
+                <a:gd name="csY4" fmla="*/ 743400 h 1486800"/>
+                <a:gd name="csX5" fmla="*/ 3691379 w 3697200"/>
+                <a:gd name="csY5" fmla="*/ 969737 h 1486800"/>
+                <a:gd name="csX6" fmla="*/ 3697200 w 3697200"/>
+                <a:gd name="csY6" fmla="*/ 969150 h 1486800"/>
+                <a:gd name="csX7" fmla="*/ 3697200 w 3697200"/>
+                <a:gd name="csY7" fmla="*/ 1486800 h 1486800"/>
+                <a:gd name="csX8" fmla="*/ 0 w 3697200"/>
+                <a:gd name="csY8" fmla="*/ 1486800 h 1486800"/>
+                <a:gd name="csX9" fmla="*/ 0 w 3697200"/>
+                <a:gd name="csY9" fmla="*/ 969150 h 1486800"/>
+                <a:gd name="csX10" fmla="*/ 5821 w 3697200"/>
+                <a:gd name="csY10" fmla="*/ 969737 h 1486800"/>
+                <a:gd name="csX11" fmla="*/ 232158 w 3697200"/>
+                <a:gd name="csY11" fmla="*/ 743400 h 1486800"/>
+                <a:gd name="csX12" fmla="*/ 5821 w 3697200"/>
+                <a:gd name="csY12" fmla="*/ 517063 h 1486800"/>
+                <a:gd name="csX13" fmla="*/ 0 w 3697200"/>
+                <a:gd name="csY13" fmla="*/ 517650 h 1486800"/>
+              </a:gdLst>
+              <a:ahLst/>
+              <a:cxnLst>
+                <a:cxn ang="0">
+                  <a:pos x="csX0" y="csY0"/>
+                </a:cxn>
+                <a:cxn ang="0">
+                  <a:pos x="csX1" y="csY1"/>
+                </a:cxn>
+                <a:cxn ang="0">
+                  <a:pos x="csX2" y="csY2"/>
+                </a:cxn>
+                <a:cxn ang="0">
+                  <a:pos x="csX3" y="csY3"/>
+                </a:cxn>
+                <a:cxn ang="0">
+                  <a:pos x="csX4" y="csY4"/>
+                </a:cxn>
+                <a:cxn ang="0">
+                  <a:pos x="csX5" y="csY5"/>
+                </a:cxn>
+                <a:cxn ang="0">
+                  <a:pos x="csX6" y="csY6"/>
+                </a:cxn>
+                <a:cxn ang="0">
+                  <a:pos x="csX7" y="csY7"/>
+                </a:cxn>
+                <a:cxn ang="0">
+                  <a:pos x="csX8" y="csY8"/>
+                </a:cxn>
+                <a:cxn ang="0">
+                  <a:pos x="csX9" y="csY9"/>
+                </a:cxn>
+                <a:cxn ang="0">
+                  <a:pos x="csX10" y="csY10"/>
+                </a:cxn>
+                <a:cxn ang="0">
+                  <a:pos x="csX11" y="csY11"/>
+                </a:cxn>
+                <a:cxn ang="0">
+                  <a:pos x="csX12" y="csY12"/>
+                </a:cxn>
+                <a:cxn ang="0">
+                  <a:pos x="csX13" y="csY13"/>
+                </a:cxn>
+              </a:cxnLst>
+              <a:rect l="l" t="t" r="r" b="b"/>
+              <a:pathLst>
+                <a:path w="3697200" h="1486800">
+                  <a:moveTo>
+                    <a:pt x="0" y="0"/>
+                  </a:moveTo>
+                  <a:lnTo>
+                    <a:pt x="3697200" y="0"/>
+                  </a:lnTo>
+                  <a:lnTo>
+                    <a:pt x="3697200" y="517650"/>
+                  </a:lnTo>
+                  <a:lnTo>
+                    <a:pt x="3691379" y="517063"/>
+                  </a:lnTo>
+                  <a:cubicBezTo>
+                    <a:pt x="3566377" y="517063"/>
+                    <a:pt x="3465042" y="618398"/>
+                    <a:pt x="3465042" y="743400"/>
+                  </a:cubicBezTo>
+                  <a:cubicBezTo>
+                    <a:pt x="3465042" y="868402"/>
+                    <a:pt x="3566377" y="969737"/>
+                    <a:pt x="3691379" y="969737"/>
+                  </a:cubicBezTo>
+                  <a:lnTo>
+                    <a:pt x="3697200" y="969150"/>
+                  </a:lnTo>
+                  <a:lnTo>
+                    <a:pt x="3697200" y="1486800"/>
+                  </a:lnTo>
+                  <a:lnTo>
+                    <a:pt x="0" y="1486800"/>
+                  </a:lnTo>
+                  <a:lnTo>
+                    <a:pt x="0" y="969150"/>
+                  </a:lnTo>
+                  <a:lnTo>
+                    <a:pt x="5821" y="969737"/>
+                  </a:lnTo>
+                  <a:cubicBezTo>
+                    <a:pt x="130823" y="969737"/>
+                    <a:pt x="232158" y="868402"/>
+                    <a:pt x="232158" y="743400"/>
+                  </a:cubicBezTo>
+                  <a:cubicBezTo>
+                    <a:pt x="232158" y="618398"/>
+                    <a:pt x="130823" y="517063"/>
+                    <a:pt x="5821" y="517063"/>
+                  </a:cubicBezTo>
+                  <a:lnTo>
+                    <a:pt x="0" y="517650"/>
+                  </a:lnTo>
+                  <a:close/>
+                </a:path>
+              </a:pathLst>
+            </a:custGeom>
+            <a:solidFill>
+              <a:srgbClr val="DFEAC0"/>
+            </a:solidFill>
+            <a:ln w="3175" algn="ctr">
+              <a:solidFill>
+                <a:schemeClr val="bg1">
+                  <a:lumMod val="65000"/>
+                </a:schemeClr>
+              </a:solidFill>
+              <a:miter lim="800000"/>
+              <a:headEnd/>
+              <a:tailEnd/>
+            </a:ln>
+          </p:spPr>
+          <p:txBody>
+            <a:bodyPr wrap="square" lIns="88900" tIns="88900" rIns="88900" bIns="88900" rtlCol="0" anchor="ctr">
+              <a:noAutofit/>
+            </a:bodyPr>
+            <a:lstStyle/>
+            <a:p>
+              <a:pPr algn="ctr">
+                <a:lnSpc>
+                  <a:spcPct val="106000"/>
+                </a:lnSpc>
+                <a:buFont typeface="Wingdings 2" pitchFamily="18" charset="2"/>
+                <a:buNone/>
+              </a:pPr>
+              <a:endParaRPr lang="ko-KR" altLang="en-US" sz="1600" b="1" dirty="0">
+                <a:solidFill>
+                  <a:schemeClr val="bg1"/>
+                </a:solidFill>
+              </a:endParaRPr>
+            </a:p>
+          </p:txBody>
+        </p:sp>
+        <p:sp>
+          <p:nvSpPr>
+            <p:cNvPr id="17" name="자유형: 도형 16">
+              <a:extLst>
+                <a:ext uri="{FF2B5EF4-FFF2-40B4-BE49-F238E27FC236}">
+                  <a16:creationId xmlns:a16="http://schemas.microsoft.com/office/drawing/2014/main" id="{5136F9A7-FC95-389B-A409-BBE43FDFA630}"/>
+                </a:ext>
+              </a:extLst>
+            </p:cNvPr>
+            <p:cNvSpPr/>
+            <p:nvPr/>
+          </p:nvSpPr>
+          <p:spPr bwMode="gray">
+            <a:xfrm>
+              <a:off x="970713" y="2610952"/>
+              <a:ext cx="3144088" cy="1200486"/>
+            </a:xfrm>
+            <a:custGeom>
+              <a:avLst/>
+              <a:gdLst>
+                <a:gd name="csX0" fmla="*/ 161925 w 2864644"/>
+                <a:gd name="csY0" fmla="*/ 0 h 1093788"/>
+                <a:gd name="csX1" fmla="*/ 2702719 w 2864644"/>
+                <a:gd name="csY1" fmla="*/ 0 h 1093788"/>
+                <a:gd name="csX2" fmla="*/ 2864644 w 2864644"/>
+                <a:gd name="csY2" fmla="*/ 161925 h 1093788"/>
+                <a:gd name="csX3" fmla="*/ 2864644 w 2864644"/>
+                <a:gd name="csY3" fmla="*/ 931863 h 1093788"/>
+                <a:gd name="csX4" fmla="*/ 2702719 w 2864644"/>
+                <a:gd name="csY4" fmla="*/ 1093788 h 1093788"/>
+                <a:gd name="csX5" fmla="*/ 161925 w 2864644"/>
+                <a:gd name="csY5" fmla="*/ 1093788 h 1093788"/>
+                <a:gd name="csX6" fmla="*/ 0 w 2864644"/>
+                <a:gd name="csY6" fmla="*/ 931863 h 1093788"/>
+                <a:gd name="csX7" fmla="*/ 0 w 2864644"/>
+                <a:gd name="csY7" fmla="*/ 161925 h 1093788"/>
+                <a:gd name="csX8" fmla="*/ 161925 w 2864644"/>
+                <a:gd name="csY8" fmla="*/ 0 h 1093788"/>
+              </a:gdLst>
+              <a:ahLst/>
+              <a:cxnLst>
+                <a:cxn ang="0">
+                  <a:pos x="csX0" y="csY0"/>
+                </a:cxn>
+                <a:cxn ang="0">
+                  <a:pos x="csX1" y="csY1"/>
+                </a:cxn>
+                <a:cxn ang="0">
+                  <a:pos x="csX2" y="csY2"/>
+                </a:cxn>
+                <a:cxn ang="0">
+                  <a:pos x="csX3" y="csY3"/>
+                </a:cxn>
+                <a:cxn ang="0">
+                  <a:pos x="csX4" y="csY4"/>
+                </a:cxn>
+                <a:cxn ang="0">
+                  <a:pos x="csX5" y="csY5"/>
+                </a:cxn>
+                <a:cxn ang="0">
+                  <a:pos x="csX6" y="csY6"/>
+                </a:cxn>
+                <a:cxn ang="0">
+                  <a:pos x="csX7" y="csY7"/>
+                </a:cxn>
+                <a:cxn ang="0">
+                  <a:pos x="csX8" y="csY8"/>
+                </a:cxn>
+              </a:cxnLst>
+              <a:rect l="l" t="t" r="r" b="b"/>
+              <a:pathLst>
+                <a:path w="2864644" h="1093788">
+                  <a:moveTo>
+                    <a:pt x="161925" y="0"/>
+                  </a:moveTo>
+                  <a:lnTo>
+                    <a:pt x="2702719" y="0"/>
+                  </a:lnTo>
+                  <a:cubicBezTo>
+                    <a:pt x="2702719" y="89429"/>
+                    <a:pt x="2775215" y="161925"/>
+                    <a:pt x="2864644" y="161925"/>
+                  </a:cubicBezTo>
+                  <a:lnTo>
+                    <a:pt x="2864644" y="931863"/>
+                  </a:lnTo>
+                  <a:cubicBezTo>
+                    <a:pt x="2775215" y="931863"/>
+                    <a:pt x="2702719" y="1004359"/>
+                    <a:pt x="2702719" y="1093788"/>
+                  </a:cubicBezTo>
+                  <a:lnTo>
+                    <a:pt x="161925" y="1093788"/>
+                  </a:lnTo>
+                  <a:cubicBezTo>
+                    <a:pt x="161925" y="1004359"/>
+                    <a:pt x="89429" y="931863"/>
+                    <a:pt x="0" y="931863"/>
+                  </a:cubicBezTo>
+                  <a:lnTo>
+                    <a:pt x="0" y="161925"/>
+                  </a:lnTo>
+                  <a:cubicBezTo>
+                    <a:pt x="89429" y="161925"/>
+                    <a:pt x="161925" y="89429"/>
+                    <a:pt x="161925" y="0"/>
+                  </a:cubicBezTo>
+                  <a:close/>
+                </a:path>
+              </a:pathLst>
+            </a:custGeom>
+            <a:solidFill>
+              <a:srgbClr val="E6E6E6"/>
+            </a:solidFill>
+            <a:ln w="3175" algn="ctr">
+              <a:solidFill>
+                <a:schemeClr val="bg1">
+                  <a:lumMod val="65000"/>
+                </a:schemeClr>
+              </a:solidFill>
+              <a:miter lim="800000"/>
+              <a:headEnd/>
+              <a:tailEnd/>
+            </a:ln>
+          </p:spPr>
+          <p:txBody>
+            <a:bodyPr wrap="square" lIns="88900" tIns="88900" rIns="88900" bIns="88900" rtlCol="0" anchor="ctr">
+              <a:noAutofit/>
+            </a:bodyPr>
+            <a:lstStyle/>
+            <a:p>
+              <a:pPr algn="ctr">
+                <a:lnSpc>
+                  <a:spcPct val="106000"/>
+                </a:lnSpc>
+                <a:buFont typeface="Wingdings 2" pitchFamily="18" charset="2"/>
+                <a:buNone/>
+              </a:pPr>
+              <a:r>
+                <a:rPr lang="en-US" altLang="ko-KR" sz="1600" b="1" dirty="0">
+                  <a:solidFill>
+                    <a:schemeClr val="bg1"/>
+                  </a:solidFill>
+                </a:rPr>
+                <a:t>`</a:t>
+              </a:r>
+              <a:endParaRPr lang="ko-KR" altLang="en-US" sz="1600" b="1" dirty="0">
+                <a:solidFill>
+                  <a:schemeClr val="bg1"/>
+                </a:solidFill>
+              </a:endParaRPr>
+            </a:p>
+          </p:txBody>
+        </p:sp>
+        <p:sp>
+          <p:nvSpPr>
+            <p:cNvPr id="18" name="직사각형 17">
+              <a:extLst>
+                <a:ext uri="{FF2B5EF4-FFF2-40B4-BE49-F238E27FC236}">
+                  <a16:creationId xmlns:a16="http://schemas.microsoft.com/office/drawing/2014/main" id="{551EA3B0-94DC-889F-0A9B-B06EDC3A70E9}"/>
+                </a:ext>
+              </a:extLst>
+            </p:cNvPr>
+            <p:cNvSpPr/>
+            <p:nvPr/>
+          </p:nvSpPr>
+          <p:spPr bwMode="gray">
+            <a:xfrm>
+              <a:off x="1105658" y="2813050"/>
+              <a:ext cx="717550" cy="762000"/>
+            </a:xfrm>
+            <a:prstGeom prst="rect">
+              <a:avLst/>
+            </a:prstGeom>
+            <a:noFill/>
+            <a:ln w="19050" algn="ctr">
+              <a:noFill/>
+              <a:miter lim="800000"/>
+              <a:headEnd/>
+              <a:tailEnd/>
+            </a:ln>
+          </p:spPr>
+          <p:txBody>
+            <a:bodyPr wrap="none" lIns="88900" tIns="88900" rIns="88900" bIns="88900" rtlCol="0" anchor="ctr"/>
+            <a:lstStyle/>
+            <a:p>
+              <a:pPr algn="ctr">
+                <a:lnSpc>
+                  <a:spcPct val="106000"/>
+                </a:lnSpc>
+                <a:buFont typeface="Wingdings 2" pitchFamily="18" charset="2"/>
+                <a:buNone/>
+              </a:pPr>
+              <a:r>
+                <a:rPr lang="en-US" altLang="ko-KR" sz="4400" b="1" dirty="0">
+                  <a:latin typeface="나눔고딕" panose="020D0604000000000000" pitchFamily="50" charset="-127"/>
+                  <a:ea typeface="나눔고딕" panose="020D0604000000000000" pitchFamily="50" charset="-127"/>
+                </a:rPr>
+                <a:t>A</a:t>
+              </a:r>
+              <a:r>
+                <a:rPr lang="ko-KR" altLang="en-US" sz="4400" b="1" dirty="0">
+                  <a:latin typeface="나눔고딕" panose="020D0604000000000000" pitchFamily="50" charset="-127"/>
+                  <a:ea typeface="나눔고딕" panose="020D0604000000000000" pitchFamily="50" charset="-127"/>
+                </a:rPr>
+                <a:t>상</a:t>
+              </a:r>
+            </a:p>
+          </p:txBody>
+        </p:sp>
+        <p:sp>
+          <p:nvSpPr>
+            <p:cNvPr id="19" name="직사각형 18">
+              <a:extLst>
+                <a:ext uri="{FF2B5EF4-FFF2-40B4-BE49-F238E27FC236}">
+                  <a16:creationId xmlns:a16="http://schemas.microsoft.com/office/drawing/2014/main" id="{BCCD341E-C2EA-8725-6EA0-0A443D99CBBA}"/>
+                </a:ext>
+              </a:extLst>
+            </p:cNvPr>
+            <p:cNvSpPr/>
+            <p:nvPr/>
+          </p:nvSpPr>
+          <p:spPr bwMode="gray">
+            <a:xfrm>
+              <a:off x="1977203" y="2662936"/>
+              <a:ext cx="2057666" cy="1096518"/>
+            </a:xfrm>
+            <a:prstGeom prst="rect">
+              <a:avLst/>
+            </a:prstGeom>
+            <a:noFill/>
+            <a:ln w="19050" algn="ctr">
+              <a:noFill/>
+              <a:miter lim="800000"/>
+              <a:headEnd/>
+              <a:tailEnd/>
+            </a:ln>
+          </p:spPr>
+          <p:txBody>
+            <a:bodyPr wrap="none" lIns="88900" tIns="88900" rIns="88900" bIns="88900" rtlCol="0" anchor="ctr"/>
+            <a:lstStyle/>
+            <a:p>
+              <a:pPr algn="ctr">
+                <a:lnSpc>
+                  <a:spcPct val="106000"/>
+                </a:lnSpc>
+                <a:buFont typeface="Wingdings 2" pitchFamily="18" charset="2"/>
+                <a:buNone/>
+              </a:pPr>
+              <a:r>
+                <a:rPr lang="ko-KR" altLang="en-US" sz="1600" b="1" dirty="0" err="1">
+                  <a:latin typeface="나눔고딕" panose="020D0604000000000000" pitchFamily="50" charset="-127"/>
+                  <a:ea typeface="나눔고딕" panose="020D0604000000000000" pitchFamily="50" charset="-127"/>
+                </a:rPr>
+                <a:t>기노모토</a:t>
+              </a:r>
+              <a:r>
+                <a:rPr lang="ko-KR" altLang="en-US" sz="1600" b="1" dirty="0">
+                  <a:latin typeface="나눔고딕" panose="020D0604000000000000" pitchFamily="50" charset="-127"/>
+                  <a:ea typeface="나눔고딕" panose="020D0604000000000000" pitchFamily="50" charset="-127"/>
+                </a:rPr>
+                <a:t> 사쿠라 피규어</a:t>
+              </a:r>
+              <a:endParaRPr lang="en-US" altLang="ko-KR" sz="1600" b="1" dirty="0">
+                <a:latin typeface="나눔고딕" panose="020D0604000000000000" pitchFamily="50" charset="-127"/>
+                <a:ea typeface="나눔고딕" panose="020D0604000000000000" pitchFamily="50" charset="-127"/>
+              </a:endParaRPr>
+            </a:p>
+            <a:p>
+              <a:pPr algn="ctr">
+                <a:lnSpc>
+                  <a:spcPct val="106000"/>
+                </a:lnSpc>
+                <a:buFont typeface="Wingdings 2" pitchFamily="18" charset="2"/>
+                <a:buNone/>
+              </a:pPr>
+              <a:r>
+                <a:rPr lang="en-US" altLang="ko-KR" sz="1600" b="1" dirty="0">
+                  <a:latin typeface="나눔고딕" panose="020D0604000000000000" pitchFamily="50" charset="-127"/>
+                  <a:ea typeface="나눔고딕" panose="020D0604000000000000" pitchFamily="50" charset="-127"/>
+                </a:rPr>
+                <a:t>-</a:t>
+              </a:r>
+              <a:r>
+                <a:rPr lang="ko-KR" altLang="en-US" sz="1600" b="1" dirty="0">
+                  <a:latin typeface="나눔고딕" panose="020D0604000000000000" pitchFamily="50" charset="-127"/>
+                  <a:ea typeface="나눔고딕" panose="020D0604000000000000" pitchFamily="50" charset="-127"/>
+                </a:rPr>
+                <a:t>사쿠라 </a:t>
+              </a:r>
+              <a:r>
+                <a:rPr lang="ko-KR" altLang="en-US" sz="1600" b="1" dirty="0" err="1">
+                  <a:latin typeface="나눔고딕" panose="020D0604000000000000" pitchFamily="50" charset="-127"/>
+                  <a:ea typeface="나눔고딕" panose="020D0604000000000000" pitchFamily="50" charset="-127"/>
+                </a:rPr>
+                <a:t>카드편</a:t>
+              </a:r>
+              <a:r>
+                <a:rPr lang="en-US" altLang="ko-KR" sz="1600" b="1" dirty="0">
+                  <a:latin typeface="나눔고딕" panose="020D0604000000000000" pitchFamily="50" charset="-127"/>
+                  <a:ea typeface="나눔고딕" panose="020D0604000000000000" pitchFamily="50" charset="-127"/>
+                </a:rPr>
+                <a:t>-</a:t>
+              </a:r>
+              <a:endParaRPr lang="ko-KR" altLang="en-US" sz="1600" b="1" dirty="0">
+                <a:latin typeface="나눔고딕" panose="020D0604000000000000" pitchFamily="50" charset="-127"/>
+                <a:ea typeface="나눔고딕" panose="020D0604000000000000" pitchFamily="50" charset="-127"/>
+              </a:endParaRPr>
+            </a:p>
+          </p:txBody>
+        </p:sp>
+      </p:grpSp>
+      <p:grpSp>
+        <p:nvGrpSpPr>
+          <p:cNvPr id="2" name="그룹 1">
+            <a:extLst>
+              <a:ext uri="{FF2B5EF4-FFF2-40B4-BE49-F238E27FC236}">
+                <a16:creationId xmlns:a16="http://schemas.microsoft.com/office/drawing/2014/main" id="{7E4BD747-62B7-7706-D387-4E927ED812BD}"/>
+              </a:ext>
+            </a:extLst>
+          </p:cNvPr>
+          <p:cNvGrpSpPr/>
+          <p:nvPr/>
+        </p:nvGrpSpPr>
+        <p:grpSpPr>
+          <a:xfrm>
+            <a:off x="4748067" y="1190334"/>
+            <a:ext cx="3697200" cy="1486800"/>
+            <a:chOff x="677717" y="2434934"/>
+            <a:chExt cx="3697200" cy="1486800"/>
+          </a:xfrm>
+        </p:grpSpPr>
+        <p:sp>
+          <p:nvSpPr>
+            <p:cNvPr id="5" name="자유형: 도형 4">
+              <a:extLst>
+                <a:ext uri="{FF2B5EF4-FFF2-40B4-BE49-F238E27FC236}">
+                  <a16:creationId xmlns:a16="http://schemas.microsoft.com/office/drawing/2014/main" id="{208E7552-8E85-AE03-DE25-441D69A84EE0}"/>
+                </a:ext>
+              </a:extLst>
+            </p:cNvPr>
+            <p:cNvSpPr/>
+            <p:nvPr/>
+          </p:nvSpPr>
+          <p:spPr bwMode="gray">
+            <a:xfrm>
+              <a:off x="677717" y="2434934"/>
+              <a:ext cx="3697200" cy="1486800"/>
+            </a:xfrm>
+            <a:custGeom>
+              <a:avLst/>
+              <a:gdLst>
+                <a:gd name="csX0" fmla="*/ 0 w 3697200"/>
+                <a:gd name="csY0" fmla="*/ 0 h 1486800"/>
+                <a:gd name="csX1" fmla="*/ 3697200 w 3697200"/>
+                <a:gd name="csY1" fmla="*/ 0 h 1486800"/>
+                <a:gd name="csX2" fmla="*/ 3697200 w 3697200"/>
+                <a:gd name="csY2" fmla="*/ 517650 h 1486800"/>
+                <a:gd name="csX3" fmla="*/ 3691379 w 3697200"/>
+                <a:gd name="csY3" fmla="*/ 517063 h 1486800"/>
+                <a:gd name="csX4" fmla="*/ 3465042 w 3697200"/>
+                <a:gd name="csY4" fmla="*/ 743400 h 1486800"/>
+                <a:gd name="csX5" fmla="*/ 3691379 w 3697200"/>
+                <a:gd name="csY5" fmla="*/ 969737 h 1486800"/>
+                <a:gd name="csX6" fmla="*/ 3697200 w 3697200"/>
+                <a:gd name="csY6" fmla="*/ 969150 h 1486800"/>
+                <a:gd name="csX7" fmla="*/ 3697200 w 3697200"/>
+                <a:gd name="csY7" fmla="*/ 1486800 h 1486800"/>
+                <a:gd name="csX8" fmla="*/ 0 w 3697200"/>
+                <a:gd name="csY8" fmla="*/ 1486800 h 1486800"/>
+                <a:gd name="csX9" fmla="*/ 0 w 3697200"/>
+                <a:gd name="csY9" fmla="*/ 969150 h 1486800"/>
+                <a:gd name="csX10" fmla="*/ 5821 w 3697200"/>
+                <a:gd name="csY10" fmla="*/ 969737 h 1486800"/>
+                <a:gd name="csX11" fmla="*/ 232158 w 3697200"/>
+                <a:gd name="csY11" fmla="*/ 743400 h 1486800"/>
+                <a:gd name="csX12" fmla="*/ 5821 w 3697200"/>
+                <a:gd name="csY12" fmla="*/ 517063 h 1486800"/>
+                <a:gd name="csX13" fmla="*/ 0 w 3697200"/>
+                <a:gd name="csY13" fmla="*/ 517650 h 1486800"/>
+              </a:gdLst>
+              <a:ahLst/>
+              <a:cxnLst>
+                <a:cxn ang="0">
+                  <a:pos x="csX0" y="csY0"/>
+                </a:cxn>
+                <a:cxn ang="0">
+                  <a:pos x="csX1" y="csY1"/>
+                </a:cxn>
+                <a:cxn ang="0">
+                  <a:pos x="csX2" y="csY2"/>
+                </a:cxn>
+                <a:cxn ang="0">
+                  <a:pos x="csX3" y="csY3"/>
+                </a:cxn>
+                <a:cxn ang="0">
+                  <a:pos x="csX4" y="csY4"/>
+                </a:cxn>
+                <a:cxn ang="0">
+                  <a:pos x="csX5" y="csY5"/>
+                </a:cxn>
+                <a:cxn ang="0">
+                  <a:pos x="csX6" y="csY6"/>
+                </a:cxn>
+                <a:cxn ang="0">
+                  <a:pos x="csX7" y="csY7"/>
+                </a:cxn>
+                <a:cxn ang="0">
+                  <a:pos x="csX8" y="csY8"/>
+                </a:cxn>
+                <a:cxn ang="0">
+                  <a:pos x="csX9" y="csY9"/>
+                </a:cxn>
+                <a:cxn ang="0">
+                  <a:pos x="csX10" y="csY10"/>
+                </a:cxn>
+                <a:cxn ang="0">
+                  <a:pos x="csX11" y="csY11"/>
+                </a:cxn>
+                <a:cxn ang="0">
+                  <a:pos x="csX12" y="csY12"/>
+                </a:cxn>
+                <a:cxn ang="0">
+                  <a:pos x="csX13" y="csY13"/>
+                </a:cxn>
+              </a:cxnLst>
+              <a:rect l="l" t="t" r="r" b="b"/>
+              <a:pathLst>
+                <a:path w="3697200" h="1486800">
+                  <a:moveTo>
+                    <a:pt x="0" y="0"/>
+                  </a:moveTo>
+                  <a:lnTo>
+                    <a:pt x="3697200" y="0"/>
+                  </a:lnTo>
+                  <a:lnTo>
+                    <a:pt x="3697200" y="517650"/>
+                  </a:lnTo>
+                  <a:lnTo>
+                    <a:pt x="3691379" y="517063"/>
+                  </a:lnTo>
+                  <a:cubicBezTo>
+                    <a:pt x="3566377" y="517063"/>
+                    <a:pt x="3465042" y="618398"/>
+                    <a:pt x="3465042" y="743400"/>
+                  </a:cubicBezTo>
+                  <a:cubicBezTo>
+                    <a:pt x="3465042" y="868402"/>
+                    <a:pt x="3566377" y="969737"/>
+                    <a:pt x="3691379" y="969737"/>
+                  </a:cubicBezTo>
+                  <a:lnTo>
+                    <a:pt x="3697200" y="969150"/>
+                  </a:lnTo>
+                  <a:lnTo>
+                    <a:pt x="3697200" y="1486800"/>
+                  </a:lnTo>
+                  <a:lnTo>
+                    <a:pt x="0" y="1486800"/>
+                  </a:lnTo>
+                  <a:lnTo>
+                    <a:pt x="0" y="969150"/>
+                  </a:lnTo>
+                  <a:lnTo>
+                    <a:pt x="5821" y="969737"/>
+                  </a:lnTo>
+                  <a:cubicBezTo>
+                    <a:pt x="130823" y="969737"/>
+                    <a:pt x="232158" y="868402"/>
+                    <a:pt x="232158" y="743400"/>
+                  </a:cubicBezTo>
+                  <a:cubicBezTo>
+                    <a:pt x="232158" y="618398"/>
+                    <a:pt x="130823" y="517063"/>
+                    <a:pt x="5821" y="517063"/>
+                  </a:cubicBezTo>
+                  <a:lnTo>
+                    <a:pt x="0" y="517650"/>
+                  </a:lnTo>
+                  <a:close/>
+                </a:path>
+              </a:pathLst>
+            </a:custGeom>
+            <a:solidFill>
+              <a:srgbClr val="DFEAC0"/>
+            </a:solidFill>
+            <a:ln w="3175" algn="ctr">
+              <a:solidFill>
+                <a:schemeClr val="bg1">
+                  <a:lumMod val="65000"/>
+                </a:schemeClr>
+              </a:solidFill>
+              <a:miter lim="800000"/>
+              <a:headEnd/>
+              <a:tailEnd/>
+            </a:ln>
+          </p:spPr>
+          <p:txBody>
+            <a:bodyPr wrap="square" lIns="88900" tIns="88900" rIns="88900" bIns="88900" rtlCol="0" anchor="ctr">
+              <a:noAutofit/>
+            </a:bodyPr>
+            <a:lstStyle/>
+            <a:p>
+              <a:pPr algn="ctr">
+                <a:lnSpc>
+                  <a:spcPct val="106000"/>
+                </a:lnSpc>
+                <a:buFont typeface="Wingdings 2" pitchFamily="18" charset="2"/>
+                <a:buNone/>
+              </a:pPr>
+              <a:endParaRPr lang="ko-KR" altLang="en-US" sz="1600" b="1" dirty="0">
+                <a:solidFill>
+                  <a:schemeClr val="bg1"/>
+                </a:solidFill>
+              </a:endParaRPr>
+            </a:p>
+          </p:txBody>
+        </p:sp>
+        <p:sp>
+          <p:nvSpPr>
+            <p:cNvPr id="6" name="자유형: 도형 5">
+              <a:extLst>
+                <a:ext uri="{FF2B5EF4-FFF2-40B4-BE49-F238E27FC236}">
+                  <a16:creationId xmlns:a16="http://schemas.microsoft.com/office/drawing/2014/main" id="{44E08EBE-7250-0EED-50A4-34C16F0754FF}"/>
+                </a:ext>
+              </a:extLst>
+            </p:cNvPr>
+            <p:cNvSpPr/>
+            <p:nvPr/>
+          </p:nvSpPr>
+          <p:spPr bwMode="gray">
+            <a:xfrm>
+              <a:off x="970713" y="2610952"/>
+              <a:ext cx="3144088" cy="1200486"/>
+            </a:xfrm>
+            <a:custGeom>
+              <a:avLst/>
+              <a:gdLst>
+                <a:gd name="csX0" fmla="*/ 161925 w 2864644"/>
+                <a:gd name="csY0" fmla="*/ 0 h 1093788"/>
+                <a:gd name="csX1" fmla="*/ 2702719 w 2864644"/>
+                <a:gd name="csY1" fmla="*/ 0 h 1093788"/>
+                <a:gd name="csX2" fmla="*/ 2864644 w 2864644"/>
+                <a:gd name="csY2" fmla="*/ 161925 h 1093788"/>
+                <a:gd name="csX3" fmla="*/ 2864644 w 2864644"/>
+                <a:gd name="csY3" fmla="*/ 931863 h 1093788"/>
+                <a:gd name="csX4" fmla="*/ 2702719 w 2864644"/>
+                <a:gd name="csY4" fmla="*/ 1093788 h 1093788"/>
+                <a:gd name="csX5" fmla="*/ 161925 w 2864644"/>
+                <a:gd name="csY5" fmla="*/ 1093788 h 1093788"/>
+                <a:gd name="csX6" fmla="*/ 0 w 2864644"/>
+                <a:gd name="csY6" fmla="*/ 931863 h 1093788"/>
+                <a:gd name="csX7" fmla="*/ 0 w 2864644"/>
+                <a:gd name="csY7" fmla="*/ 161925 h 1093788"/>
+                <a:gd name="csX8" fmla="*/ 161925 w 2864644"/>
+                <a:gd name="csY8" fmla="*/ 0 h 1093788"/>
+              </a:gdLst>
+              <a:ahLst/>
+              <a:cxnLst>
+                <a:cxn ang="0">
+                  <a:pos x="csX0" y="csY0"/>
+                </a:cxn>
+                <a:cxn ang="0">
+                  <a:pos x="csX1" y="csY1"/>
+                </a:cxn>
+                <a:cxn ang="0">
+                  <a:pos x="csX2" y="csY2"/>
+                </a:cxn>
+                <a:cxn ang="0">
+                  <a:pos x="csX3" y="csY3"/>
+                </a:cxn>
+                <a:cxn ang="0">
+                  <a:pos x="csX4" y="csY4"/>
+                </a:cxn>
+                <a:cxn ang="0">
+                  <a:pos x="csX5" y="csY5"/>
+                </a:cxn>
+                <a:cxn ang="0">
+                  <a:pos x="csX6" y="csY6"/>
+                </a:cxn>
+                <a:cxn ang="0">
+                  <a:pos x="csX7" y="csY7"/>
+                </a:cxn>
+                <a:cxn ang="0">
+                  <a:pos x="csX8" y="csY8"/>
+                </a:cxn>
+              </a:cxnLst>
+              <a:rect l="l" t="t" r="r" b="b"/>
+              <a:pathLst>
+                <a:path w="2864644" h="1093788">
+                  <a:moveTo>
+                    <a:pt x="161925" y="0"/>
+                  </a:moveTo>
+                  <a:lnTo>
+                    <a:pt x="2702719" y="0"/>
+                  </a:lnTo>
+                  <a:cubicBezTo>
+                    <a:pt x="2702719" y="89429"/>
+                    <a:pt x="2775215" y="161925"/>
+                    <a:pt x="2864644" y="161925"/>
+                  </a:cubicBezTo>
+                  <a:lnTo>
+                    <a:pt x="2864644" y="931863"/>
+                  </a:lnTo>
+                  <a:cubicBezTo>
+                    <a:pt x="2775215" y="931863"/>
+                    <a:pt x="2702719" y="1004359"/>
+                    <a:pt x="2702719" y="1093788"/>
+                  </a:cubicBezTo>
+                  <a:lnTo>
+                    <a:pt x="161925" y="1093788"/>
+                  </a:lnTo>
+                  <a:cubicBezTo>
+                    <a:pt x="161925" y="1004359"/>
+                    <a:pt x="89429" y="931863"/>
+                    <a:pt x="0" y="931863"/>
+                  </a:cubicBezTo>
+                  <a:lnTo>
+                    <a:pt x="0" y="161925"/>
+                  </a:lnTo>
+                  <a:cubicBezTo>
+                    <a:pt x="89429" y="161925"/>
+                    <a:pt x="161925" y="89429"/>
+                    <a:pt x="161925" y="0"/>
+                  </a:cubicBezTo>
+                  <a:close/>
+                </a:path>
+              </a:pathLst>
+            </a:custGeom>
+            <a:solidFill>
+              <a:srgbClr val="E6E6E6"/>
+            </a:solidFill>
+            <a:ln w="3175" algn="ctr">
+              <a:solidFill>
+                <a:schemeClr val="bg1">
+                  <a:lumMod val="65000"/>
+                </a:schemeClr>
+              </a:solidFill>
+              <a:miter lim="800000"/>
+              <a:headEnd/>
+              <a:tailEnd/>
+            </a:ln>
+          </p:spPr>
+          <p:txBody>
+            <a:bodyPr wrap="square" lIns="88900" tIns="88900" rIns="88900" bIns="88900" rtlCol="0" anchor="ctr">
+              <a:noAutofit/>
+            </a:bodyPr>
+            <a:lstStyle/>
+            <a:p>
+              <a:pPr algn="ctr">
+                <a:lnSpc>
+                  <a:spcPct val="106000"/>
+                </a:lnSpc>
+                <a:buFont typeface="Wingdings 2" pitchFamily="18" charset="2"/>
+                <a:buNone/>
+              </a:pPr>
+              <a:r>
+                <a:rPr lang="en-US" altLang="ko-KR" sz="1600" b="1" dirty="0">
+                  <a:solidFill>
+                    <a:schemeClr val="bg1"/>
+                  </a:solidFill>
+                </a:rPr>
+                <a:t>`</a:t>
+              </a:r>
+              <a:endParaRPr lang="ko-KR" altLang="en-US" sz="1600" b="1" dirty="0">
+                <a:solidFill>
+                  <a:schemeClr val="bg1"/>
+                </a:solidFill>
+              </a:endParaRPr>
+            </a:p>
+          </p:txBody>
+        </p:sp>
+        <p:sp>
+          <p:nvSpPr>
+            <p:cNvPr id="7" name="직사각형 6">
+              <a:extLst>
+                <a:ext uri="{FF2B5EF4-FFF2-40B4-BE49-F238E27FC236}">
+                  <a16:creationId xmlns:a16="http://schemas.microsoft.com/office/drawing/2014/main" id="{ADB7A896-F668-DB39-FB40-15B151E77A83}"/>
+                </a:ext>
+              </a:extLst>
+            </p:cNvPr>
+            <p:cNvSpPr/>
+            <p:nvPr/>
+          </p:nvSpPr>
+          <p:spPr bwMode="gray">
+            <a:xfrm>
+              <a:off x="1105658" y="2813050"/>
+              <a:ext cx="717550" cy="762000"/>
+            </a:xfrm>
+            <a:prstGeom prst="rect">
+              <a:avLst/>
+            </a:prstGeom>
+            <a:noFill/>
+            <a:ln w="19050" algn="ctr">
+              <a:noFill/>
+              <a:miter lim="800000"/>
+              <a:headEnd/>
+              <a:tailEnd/>
+            </a:ln>
+          </p:spPr>
+          <p:txBody>
+            <a:bodyPr wrap="none" lIns="88900" tIns="88900" rIns="88900" bIns="88900" rtlCol="0" anchor="ctr"/>
+            <a:lstStyle/>
+            <a:p>
+              <a:pPr algn="ctr">
+                <a:lnSpc>
+                  <a:spcPct val="106000"/>
+                </a:lnSpc>
+                <a:buFont typeface="Wingdings 2" pitchFamily="18" charset="2"/>
+                <a:buNone/>
+              </a:pPr>
+              <a:r>
+                <a:rPr lang="en-US" altLang="ko-KR" sz="4400" b="1" dirty="0">
+                  <a:latin typeface="나눔고딕" panose="020D0604000000000000" pitchFamily="50" charset="-127"/>
+                  <a:ea typeface="나눔고딕" panose="020D0604000000000000" pitchFamily="50" charset="-127"/>
+                </a:rPr>
+                <a:t>B</a:t>
+              </a:r>
+              <a:r>
+                <a:rPr lang="ko-KR" altLang="en-US" sz="4400" b="1" dirty="0">
+                  <a:latin typeface="나눔고딕" panose="020D0604000000000000" pitchFamily="50" charset="-127"/>
+                  <a:ea typeface="나눔고딕" panose="020D0604000000000000" pitchFamily="50" charset="-127"/>
+                </a:rPr>
+                <a:t>상</a:t>
+              </a:r>
+            </a:p>
+          </p:txBody>
+        </p:sp>
+        <p:sp>
+          <p:nvSpPr>
+            <p:cNvPr id="8" name="직사각형 7">
+              <a:extLst>
+                <a:ext uri="{FF2B5EF4-FFF2-40B4-BE49-F238E27FC236}">
+                  <a16:creationId xmlns:a16="http://schemas.microsoft.com/office/drawing/2014/main" id="{66499745-039F-4ABB-FEA2-14EEE1EB1D81}"/>
+                </a:ext>
+              </a:extLst>
+            </p:cNvPr>
+            <p:cNvSpPr/>
+            <p:nvPr/>
+          </p:nvSpPr>
+          <p:spPr bwMode="gray">
+            <a:xfrm>
+              <a:off x="1958153" y="2662936"/>
+              <a:ext cx="2057666" cy="1096518"/>
+            </a:xfrm>
+            <a:prstGeom prst="rect">
+              <a:avLst/>
+            </a:prstGeom>
+            <a:noFill/>
+            <a:ln w="19050" algn="ctr">
+              <a:noFill/>
+              <a:miter lim="800000"/>
+              <a:headEnd/>
+              <a:tailEnd/>
+            </a:ln>
+          </p:spPr>
+          <p:txBody>
+            <a:bodyPr wrap="none" lIns="88900" tIns="88900" rIns="88900" bIns="88900" rtlCol="0" anchor="ctr"/>
+            <a:lstStyle/>
+            <a:p>
+              <a:pPr algn="ctr">
+                <a:lnSpc>
+                  <a:spcPct val="106000"/>
+                </a:lnSpc>
+                <a:buFont typeface="Wingdings 2" pitchFamily="18" charset="2"/>
+                <a:buNone/>
+              </a:pPr>
+              <a:r>
+                <a:rPr lang="ko-KR" altLang="en-US" sz="1600" b="1" dirty="0">
+                  <a:latin typeface="나눔고딕" panose="020D0604000000000000" pitchFamily="50" charset="-127"/>
+                  <a:ea typeface="나눔고딕" panose="020D0604000000000000" pitchFamily="50" charset="-127"/>
+                </a:rPr>
+                <a:t>봉인 지팡이 </a:t>
+              </a:r>
+              <a:endParaRPr lang="en-US" altLang="ko-KR" sz="1600" b="1" dirty="0">
+                <a:latin typeface="나눔고딕" panose="020D0604000000000000" pitchFamily="50" charset="-127"/>
+                <a:ea typeface="나눔고딕" panose="020D0604000000000000" pitchFamily="50" charset="-127"/>
+              </a:endParaRPr>
+            </a:p>
+            <a:p>
+              <a:pPr algn="ctr">
+                <a:lnSpc>
+                  <a:spcPct val="106000"/>
+                </a:lnSpc>
+                <a:buFont typeface="Wingdings 2" pitchFamily="18" charset="2"/>
+                <a:buNone/>
+              </a:pPr>
+              <a:r>
+                <a:rPr lang="ko-KR" altLang="en-US" sz="1600" b="1" dirty="0">
+                  <a:latin typeface="나눔고딕" panose="020D0604000000000000" pitchFamily="50" charset="-127"/>
+                  <a:ea typeface="나눔고딕" panose="020D0604000000000000" pitchFamily="50" charset="-127"/>
+                </a:rPr>
+                <a:t>메이크업 </a:t>
+              </a:r>
+              <a:r>
+                <a:rPr lang="ko-KR" altLang="en-US" sz="1600" b="1" dirty="0" err="1">
+                  <a:latin typeface="나눔고딕" panose="020D0604000000000000" pitchFamily="50" charset="-127"/>
+                  <a:ea typeface="나눔고딕" panose="020D0604000000000000" pitchFamily="50" charset="-127"/>
+                </a:rPr>
+                <a:t>브러쉬</a:t>
+              </a:r>
+              <a:endParaRPr lang="ko-KR" altLang="en-US" sz="1600" b="1" dirty="0">
+                <a:latin typeface="나눔고딕" panose="020D0604000000000000" pitchFamily="50" charset="-127"/>
+                <a:ea typeface="나눔고딕" panose="020D0604000000000000" pitchFamily="50" charset="-127"/>
+              </a:endParaRPr>
+            </a:p>
+          </p:txBody>
+        </p:sp>
+      </p:grpSp>
+      <p:grpSp>
+        <p:nvGrpSpPr>
+          <p:cNvPr id="11" name="그룹 10">
+            <a:extLst>
+              <a:ext uri="{FF2B5EF4-FFF2-40B4-BE49-F238E27FC236}">
+                <a16:creationId xmlns:a16="http://schemas.microsoft.com/office/drawing/2014/main" id="{A0932A79-37C6-3F40-F71A-36E69C6BC1BB}"/>
+              </a:ext>
+            </a:extLst>
+          </p:cNvPr>
+          <p:cNvGrpSpPr/>
+          <p:nvPr/>
+        </p:nvGrpSpPr>
+        <p:grpSpPr>
+          <a:xfrm>
+            <a:off x="557147" y="3034691"/>
+            <a:ext cx="3697200" cy="1486800"/>
+            <a:chOff x="677717" y="2434934"/>
+            <a:chExt cx="3697200" cy="1486800"/>
+          </a:xfrm>
+        </p:grpSpPr>
+        <p:sp>
+          <p:nvSpPr>
+            <p:cNvPr id="12" name="자유형: 도형 11">
+              <a:extLst>
+                <a:ext uri="{FF2B5EF4-FFF2-40B4-BE49-F238E27FC236}">
+                  <a16:creationId xmlns:a16="http://schemas.microsoft.com/office/drawing/2014/main" id="{9EA0F0FA-BA03-93F3-2530-1B1C92941B3E}"/>
+                </a:ext>
+              </a:extLst>
+            </p:cNvPr>
+            <p:cNvSpPr/>
+            <p:nvPr/>
+          </p:nvSpPr>
+          <p:spPr bwMode="gray">
+            <a:xfrm>
+              <a:off x="677717" y="2434934"/>
+              <a:ext cx="3697200" cy="1486800"/>
+            </a:xfrm>
+            <a:custGeom>
+              <a:avLst/>
+              <a:gdLst>
+                <a:gd name="csX0" fmla="*/ 0 w 3697200"/>
+                <a:gd name="csY0" fmla="*/ 0 h 1486800"/>
+                <a:gd name="csX1" fmla="*/ 3697200 w 3697200"/>
+                <a:gd name="csY1" fmla="*/ 0 h 1486800"/>
+                <a:gd name="csX2" fmla="*/ 3697200 w 3697200"/>
+                <a:gd name="csY2" fmla="*/ 517650 h 1486800"/>
+                <a:gd name="csX3" fmla="*/ 3691379 w 3697200"/>
+                <a:gd name="csY3" fmla="*/ 517063 h 1486800"/>
+                <a:gd name="csX4" fmla="*/ 3465042 w 3697200"/>
+                <a:gd name="csY4" fmla="*/ 743400 h 1486800"/>
+                <a:gd name="csX5" fmla="*/ 3691379 w 3697200"/>
+                <a:gd name="csY5" fmla="*/ 969737 h 1486800"/>
+                <a:gd name="csX6" fmla="*/ 3697200 w 3697200"/>
+                <a:gd name="csY6" fmla="*/ 969150 h 1486800"/>
+                <a:gd name="csX7" fmla="*/ 3697200 w 3697200"/>
+                <a:gd name="csY7" fmla="*/ 1486800 h 1486800"/>
+                <a:gd name="csX8" fmla="*/ 0 w 3697200"/>
+                <a:gd name="csY8" fmla="*/ 1486800 h 1486800"/>
+                <a:gd name="csX9" fmla="*/ 0 w 3697200"/>
+                <a:gd name="csY9" fmla="*/ 969150 h 1486800"/>
+                <a:gd name="csX10" fmla="*/ 5821 w 3697200"/>
+                <a:gd name="csY10" fmla="*/ 969737 h 1486800"/>
+                <a:gd name="csX11" fmla="*/ 232158 w 3697200"/>
+                <a:gd name="csY11" fmla="*/ 743400 h 1486800"/>
+                <a:gd name="csX12" fmla="*/ 5821 w 3697200"/>
+                <a:gd name="csY12" fmla="*/ 517063 h 1486800"/>
+                <a:gd name="csX13" fmla="*/ 0 w 3697200"/>
+                <a:gd name="csY13" fmla="*/ 517650 h 1486800"/>
+              </a:gdLst>
+              <a:ahLst/>
+              <a:cxnLst>
+                <a:cxn ang="0">
+                  <a:pos x="csX0" y="csY0"/>
+                </a:cxn>
+                <a:cxn ang="0">
+                  <a:pos x="csX1" y="csY1"/>
+                </a:cxn>
+                <a:cxn ang="0">
+                  <a:pos x="csX2" y="csY2"/>
+                </a:cxn>
+                <a:cxn ang="0">
+                  <a:pos x="csX3" y="csY3"/>
+                </a:cxn>
+                <a:cxn ang="0">
+                  <a:pos x="csX4" y="csY4"/>
+                </a:cxn>
+                <a:cxn ang="0">
+                  <a:pos x="csX5" y="csY5"/>
+                </a:cxn>
+                <a:cxn ang="0">
+                  <a:pos x="csX6" y="csY6"/>
+                </a:cxn>
+                <a:cxn ang="0">
+                  <a:pos x="csX7" y="csY7"/>
+                </a:cxn>
+                <a:cxn ang="0">
+                  <a:pos x="csX8" y="csY8"/>
+                </a:cxn>
+                <a:cxn ang="0">
+                  <a:pos x="csX9" y="csY9"/>
+                </a:cxn>
+                <a:cxn ang="0">
+                  <a:pos x="csX10" y="csY10"/>
+                </a:cxn>
+                <a:cxn ang="0">
+                  <a:pos x="csX11" y="csY11"/>
+                </a:cxn>
+                <a:cxn ang="0">
+                  <a:pos x="csX12" y="csY12"/>
+                </a:cxn>
+                <a:cxn ang="0">
+                  <a:pos x="csX13" y="csY13"/>
+                </a:cxn>
+              </a:cxnLst>
+              <a:rect l="l" t="t" r="r" b="b"/>
+              <a:pathLst>
+                <a:path w="3697200" h="1486800">
+                  <a:moveTo>
+                    <a:pt x="0" y="0"/>
+                  </a:moveTo>
+                  <a:lnTo>
+                    <a:pt x="3697200" y="0"/>
+                  </a:lnTo>
+                  <a:lnTo>
+                    <a:pt x="3697200" y="517650"/>
+                  </a:lnTo>
+                  <a:lnTo>
+                    <a:pt x="3691379" y="517063"/>
+                  </a:lnTo>
+                  <a:cubicBezTo>
+                    <a:pt x="3566377" y="517063"/>
+                    <a:pt x="3465042" y="618398"/>
+                    <a:pt x="3465042" y="743400"/>
+                  </a:cubicBezTo>
+                  <a:cubicBezTo>
+                    <a:pt x="3465042" y="868402"/>
+                    <a:pt x="3566377" y="969737"/>
+                    <a:pt x="3691379" y="969737"/>
+                  </a:cubicBezTo>
+                  <a:lnTo>
+                    <a:pt x="3697200" y="969150"/>
+                  </a:lnTo>
+                  <a:lnTo>
+                    <a:pt x="3697200" y="1486800"/>
+                  </a:lnTo>
+                  <a:lnTo>
+                    <a:pt x="0" y="1486800"/>
+                  </a:lnTo>
+                  <a:lnTo>
+                    <a:pt x="0" y="969150"/>
+                  </a:lnTo>
+                  <a:lnTo>
+                    <a:pt x="5821" y="969737"/>
+                  </a:lnTo>
+                  <a:cubicBezTo>
+                    <a:pt x="130823" y="969737"/>
+                    <a:pt x="232158" y="868402"/>
+                    <a:pt x="232158" y="743400"/>
+                  </a:cubicBezTo>
+                  <a:cubicBezTo>
+                    <a:pt x="232158" y="618398"/>
+                    <a:pt x="130823" y="517063"/>
+                    <a:pt x="5821" y="517063"/>
+                  </a:cubicBezTo>
+                  <a:lnTo>
+                    <a:pt x="0" y="517650"/>
+                  </a:lnTo>
+                  <a:close/>
+                </a:path>
+              </a:pathLst>
+            </a:custGeom>
+            <a:solidFill>
+              <a:srgbClr val="DFEAC0"/>
+            </a:solidFill>
+            <a:ln w="3175" algn="ctr">
+              <a:solidFill>
+                <a:schemeClr val="bg1">
+                  <a:lumMod val="65000"/>
+                </a:schemeClr>
+              </a:solidFill>
+              <a:miter lim="800000"/>
+              <a:headEnd/>
+              <a:tailEnd/>
+            </a:ln>
+          </p:spPr>
+          <p:txBody>
+            <a:bodyPr wrap="square" lIns="88900" tIns="88900" rIns="88900" bIns="88900" rtlCol="0" anchor="ctr">
+              <a:noAutofit/>
+            </a:bodyPr>
+            <a:lstStyle/>
+            <a:p>
+              <a:pPr algn="ctr">
+                <a:lnSpc>
+                  <a:spcPct val="106000"/>
+                </a:lnSpc>
+                <a:buFont typeface="Wingdings 2" pitchFamily="18" charset="2"/>
+                <a:buNone/>
+              </a:pPr>
+              <a:endParaRPr lang="ko-KR" altLang="en-US" sz="1600" b="1" dirty="0">
+                <a:solidFill>
+                  <a:schemeClr val="bg1"/>
+                </a:solidFill>
+              </a:endParaRPr>
+            </a:p>
+          </p:txBody>
+        </p:sp>
+        <p:sp>
+          <p:nvSpPr>
+            <p:cNvPr id="13" name="자유형: 도형 12">
+              <a:extLst>
+                <a:ext uri="{FF2B5EF4-FFF2-40B4-BE49-F238E27FC236}">
+                  <a16:creationId xmlns:a16="http://schemas.microsoft.com/office/drawing/2014/main" id="{A672F243-07C3-55A3-F0C1-6BC7E675D2E1}"/>
+                </a:ext>
+              </a:extLst>
+            </p:cNvPr>
+            <p:cNvSpPr/>
+            <p:nvPr/>
+          </p:nvSpPr>
+          <p:spPr bwMode="gray">
+            <a:xfrm>
+              <a:off x="970713" y="2610952"/>
+              <a:ext cx="3144088" cy="1200486"/>
+            </a:xfrm>
+            <a:custGeom>
+              <a:avLst/>
+              <a:gdLst>
+                <a:gd name="csX0" fmla="*/ 161925 w 2864644"/>
+                <a:gd name="csY0" fmla="*/ 0 h 1093788"/>
+                <a:gd name="csX1" fmla="*/ 2702719 w 2864644"/>
+                <a:gd name="csY1" fmla="*/ 0 h 1093788"/>
+                <a:gd name="csX2" fmla="*/ 2864644 w 2864644"/>
+                <a:gd name="csY2" fmla="*/ 161925 h 1093788"/>
+                <a:gd name="csX3" fmla="*/ 2864644 w 2864644"/>
+                <a:gd name="csY3" fmla="*/ 931863 h 1093788"/>
+                <a:gd name="csX4" fmla="*/ 2702719 w 2864644"/>
+                <a:gd name="csY4" fmla="*/ 1093788 h 1093788"/>
+                <a:gd name="csX5" fmla="*/ 161925 w 2864644"/>
+                <a:gd name="csY5" fmla="*/ 1093788 h 1093788"/>
+                <a:gd name="csX6" fmla="*/ 0 w 2864644"/>
+                <a:gd name="csY6" fmla="*/ 931863 h 1093788"/>
+                <a:gd name="csX7" fmla="*/ 0 w 2864644"/>
+                <a:gd name="csY7" fmla="*/ 161925 h 1093788"/>
+                <a:gd name="csX8" fmla="*/ 161925 w 2864644"/>
+                <a:gd name="csY8" fmla="*/ 0 h 1093788"/>
+              </a:gdLst>
+              <a:ahLst/>
+              <a:cxnLst>
+                <a:cxn ang="0">
+                  <a:pos x="csX0" y="csY0"/>
+                </a:cxn>
+                <a:cxn ang="0">
+                  <a:pos x="csX1" y="csY1"/>
+                </a:cxn>
+                <a:cxn ang="0">
+                  <a:pos x="csX2" y="csY2"/>
+                </a:cxn>
+                <a:cxn ang="0">
+                  <a:pos x="csX3" y="csY3"/>
+                </a:cxn>
+                <a:cxn ang="0">
+                  <a:pos x="csX4" y="csY4"/>
+                </a:cxn>
+                <a:cxn ang="0">
+                  <a:pos x="csX5" y="csY5"/>
+                </a:cxn>
+                <a:cxn ang="0">
+                  <a:pos x="csX6" y="csY6"/>
+                </a:cxn>
+                <a:cxn ang="0">
+                  <a:pos x="csX7" y="csY7"/>
+                </a:cxn>
+                <a:cxn ang="0">
+                  <a:pos x="csX8" y="csY8"/>
+                </a:cxn>
+              </a:cxnLst>
+              <a:rect l="l" t="t" r="r" b="b"/>
+              <a:pathLst>
+                <a:path w="2864644" h="1093788">
+                  <a:moveTo>
+                    <a:pt x="161925" y="0"/>
+                  </a:moveTo>
+                  <a:lnTo>
+                    <a:pt x="2702719" y="0"/>
+                  </a:lnTo>
+                  <a:cubicBezTo>
+                    <a:pt x="2702719" y="89429"/>
+                    <a:pt x="2775215" y="161925"/>
+                    <a:pt x="2864644" y="161925"/>
+                  </a:cubicBezTo>
+                  <a:lnTo>
+                    <a:pt x="2864644" y="931863"/>
+                  </a:lnTo>
+                  <a:cubicBezTo>
+                    <a:pt x="2775215" y="931863"/>
+                    <a:pt x="2702719" y="1004359"/>
+                    <a:pt x="2702719" y="1093788"/>
+                  </a:cubicBezTo>
+                  <a:lnTo>
+                    <a:pt x="161925" y="1093788"/>
+                  </a:lnTo>
+                  <a:cubicBezTo>
+                    <a:pt x="161925" y="1004359"/>
+                    <a:pt x="89429" y="931863"/>
+                    <a:pt x="0" y="931863"/>
+                  </a:cubicBezTo>
+                  <a:lnTo>
+                    <a:pt x="0" y="161925"/>
+                  </a:lnTo>
+                  <a:cubicBezTo>
+                    <a:pt x="89429" y="161925"/>
+                    <a:pt x="161925" y="89429"/>
+                    <a:pt x="161925" y="0"/>
+                  </a:cubicBezTo>
+                  <a:close/>
+                </a:path>
+              </a:pathLst>
+            </a:custGeom>
+            <a:solidFill>
+              <a:srgbClr val="E6E6E6"/>
+            </a:solidFill>
+            <a:ln w="3175" algn="ctr">
+              <a:solidFill>
+                <a:schemeClr val="bg1">
+                  <a:lumMod val="65000"/>
+                </a:schemeClr>
+              </a:solidFill>
+              <a:miter lim="800000"/>
+              <a:headEnd/>
+              <a:tailEnd/>
+            </a:ln>
+          </p:spPr>
+          <p:txBody>
+            <a:bodyPr wrap="square" lIns="88900" tIns="88900" rIns="88900" bIns="88900" rtlCol="0" anchor="ctr">
+              <a:noAutofit/>
+            </a:bodyPr>
+            <a:lstStyle/>
+            <a:p>
+              <a:pPr algn="ctr">
+                <a:lnSpc>
+                  <a:spcPct val="106000"/>
+                </a:lnSpc>
+                <a:buFont typeface="Wingdings 2" pitchFamily="18" charset="2"/>
+                <a:buNone/>
+              </a:pPr>
+              <a:r>
+                <a:rPr lang="en-US" altLang="ko-KR" sz="1600" b="1" dirty="0">
+                  <a:solidFill>
+                    <a:schemeClr val="bg1"/>
+                  </a:solidFill>
+                </a:rPr>
+                <a:t>`</a:t>
+              </a:r>
+              <a:endParaRPr lang="ko-KR" altLang="en-US" sz="1600" b="1" dirty="0">
+                <a:solidFill>
+                  <a:schemeClr val="bg1"/>
+                </a:solidFill>
+              </a:endParaRPr>
+            </a:p>
+          </p:txBody>
+        </p:sp>
+        <p:sp>
+          <p:nvSpPr>
+            <p:cNvPr id="14" name="직사각형 13">
+              <a:extLst>
+                <a:ext uri="{FF2B5EF4-FFF2-40B4-BE49-F238E27FC236}">
+                  <a16:creationId xmlns:a16="http://schemas.microsoft.com/office/drawing/2014/main" id="{84F05F97-77F8-4843-8644-857FAC8ABAE1}"/>
+                </a:ext>
+              </a:extLst>
+            </p:cNvPr>
+            <p:cNvSpPr/>
+            <p:nvPr/>
+          </p:nvSpPr>
+          <p:spPr bwMode="gray">
+            <a:xfrm>
+              <a:off x="1105658" y="2813050"/>
+              <a:ext cx="717550" cy="762000"/>
+            </a:xfrm>
+            <a:prstGeom prst="rect">
+              <a:avLst/>
+            </a:prstGeom>
+            <a:noFill/>
+            <a:ln w="19050" algn="ctr">
+              <a:noFill/>
+              <a:miter lim="800000"/>
+              <a:headEnd/>
+              <a:tailEnd/>
+            </a:ln>
+          </p:spPr>
+          <p:txBody>
+            <a:bodyPr wrap="none" lIns="88900" tIns="88900" rIns="88900" bIns="88900" rtlCol="0" anchor="ctr"/>
+            <a:lstStyle/>
+            <a:p>
+              <a:pPr algn="ctr">
+                <a:lnSpc>
+                  <a:spcPct val="106000"/>
+                </a:lnSpc>
+                <a:buFont typeface="Wingdings 2" pitchFamily="18" charset="2"/>
+                <a:buNone/>
+              </a:pPr>
+              <a:r>
+                <a:rPr lang="en-US" altLang="ko-KR" sz="4400" b="1" dirty="0">
+                  <a:latin typeface="나눔고딕" panose="020D0604000000000000" pitchFamily="50" charset="-127"/>
+                  <a:ea typeface="나눔고딕" panose="020D0604000000000000" pitchFamily="50" charset="-127"/>
+                </a:rPr>
+                <a:t>C</a:t>
+              </a:r>
+              <a:r>
+                <a:rPr lang="ko-KR" altLang="en-US" sz="4400" b="1" dirty="0">
+                  <a:latin typeface="나눔고딕" panose="020D0604000000000000" pitchFamily="50" charset="-127"/>
+                  <a:ea typeface="나눔고딕" panose="020D0604000000000000" pitchFamily="50" charset="-127"/>
+                </a:rPr>
+                <a:t>상</a:t>
+              </a:r>
+            </a:p>
+          </p:txBody>
+        </p:sp>
+        <p:sp>
+          <p:nvSpPr>
+            <p:cNvPr id="15" name="직사각형 14">
+              <a:extLst>
+                <a:ext uri="{FF2B5EF4-FFF2-40B4-BE49-F238E27FC236}">
+                  <a16:creationId xmlns:a16="http://schemas.microsoft.com/office/drawing/2014/main" id="{1BAD280A-C202-8029-D615-7C11725BEB91}"/>
+                </a:ext>
+              </a:extLst>
+            </p:cNvPr>
+            <p:cNvSpPr/>
+            <p:nvPr/>
+          </p:nvSpPr>
+          <p:spPr bwMode="gray">
+            <a:xfrm>
+              <a:off x="1958153" y="2662936"/>
+              <a:ext cx="2057666" cy="1096518"/>
+            </a:xfrm>
+            <a:prstGeom prst="rect">
+              <a:avLst/>
+            </a:prstGeom>
+            <a:noFill/>
+            <a:ln w="19050" algn="ctr">
+              <a:noFill/>
+              <a:miter lim="800000"/>
+              <a:headEnd/>
+              <a:tailEnd/>
+            </a:ln>
+          </p:spPr>
+          <p:txBody>
+            <a:bodyPr wrap="none" lIns="88900" tIns="88900" rIns="88900" bIns="88900" rtlCol="0" anchor="ctr"/>
+            <a:lstStyle/>
+            <a:p>
+              <a:pPr algn="ctr">
+                <a:lnSpc>
+                  <a:spcPct val="106000"/>
+                </a:lnSpc>
+                <a:buFont typeface="Wingdings 2" pitchFamily="18" charset="2"/>
+                <a:buNone/>
+              </a:pPr>
+              <a:r>
+                <a:rPr lang="ko-KR" altLang="en-US" sz="1600" b="1" dirty="0" err="1">
+                  <a:latin typeface="나눔고딕" panose="020D0604000000000000" pitchFamily="50" charset="-127"/>
+                  <a:ea typeface="나눔고딕" panose="020D0604000000000000" pitchFamily="50" charset="-127"/>
+                </a:rPr>
+                <a:t>머그컵</a:t>
+              </a:r>
+              <a:endParaRPr lang="ko-KR" altLang="en-US" sz="1600" b="1" dirty="0">
+                <a:latin typeface="나눔고딕" panose="020D0604000000000000" pitchFamily="50" charset="-127"/>
+                <a:ea typeface="나눔고딕" panose="020D0604000000000000" pitchFamily="50" charset="-127"/>
+              </a:endParaRPr>
+            </a:p>
+          </p:txBody>
+        </p:sp>
+      </p:grpSp>
+      <p:grpSp>
+        <p:nvGrpSpPr>
+          <p:cNvPr id="25" name="그룹 24">
+            <a:extLst>
+              <a:ext uri="{FF2B5EF4-FFF2-40B4-BE49-F238E27FC236}">
+                <a16:creationId xmlns:a16="http://schemas.microsoft.com/office/drawing/2014/main" id="{AE3B9825-AEC7-4D35-0394-6FA64DACFF47}"/>
+              </a:ext>
+            </a:extLst>
+          </p:cNvPr>
+          <p:cNvGrpSpPr/>
+          <p:nvPr/>
+        </p:nvGrpSpPr>
+        <p:grpSpPr>
+          <a:xfrm>
+            <a:off x="4748067" y="3362934"/>
+            <a:ext cx="3697200" cy="1486800"/>
+            <a:chOff x="677717" y="2434934"/>
+            <a:chExt cx="3697200" cy="1486800"/>
+          </a:xfrm>
+        </p:grpSpPr>
+        <p:sp>
+          <p:nvSpPr>
+            <p:cNvPr id="26" name="자유형: 도형 25">
+              <a:extLst>
+                <a:ext uri="{FF2B5EF4-FFF2-40B4-BE49-F238E27FC236}">
+                  <a16:creationId xmlns:a16="http://schemas.microsoft.com/office/drawing/2014/main" id="{70A2C8F7-013D-BFF8-FE3E-9F57A18B99AB}"/>
+                </a:ext>
+              </a:extLst>
+            </p:cNvPr>
+            <p:cNvSpPr/>
+            <p:nvPr/>
+          </p:nvSpPr>
+          <p:spPr bwMode="gray">
+            <a:xfrm>
+              <a:off x="677717" y="2434934"/>
+              <a:ext cx="3697200" cy="1486800"/>
+            </a:xfrm>
+            <a:custGeom>
+              <a:avLst/>
+              <a:gdLst>
+                <a:gd name="csX0" fmla="*/ 0 w 3697200"/>
+                <a:gd name="csY0" fmla="*/ 0 h 1486800"/>
+                <a:gd name="csX1" fmla="*/ 3697200 w 3697200"/>
+                <a:gd name="csY1" fmla="*/ 0 h 1486800"/>
+                <a:gd name="csX2" fmla="*/ 3697200 w 3697200"/>
+                <a:gd name="csY2" fmla="*/ 517650 h 1486800"/>
+                <a:gd name="csX3" fmla="*/ 3691379 w 3697200"/>
+                <a:gd name="csY3" fmla="*/ 517063 h 1486800"/>
+                <a:gd name="csX4" fmla="*/ 3465042 w 3697200"/>
+                <a:gd name="csY4" fmla="*/ 743400 h 1486800"/>
+                <a:gd name="csX5" fmla="*/ 3691379 w 3697200"/>
+                <a:gd name="csY5" fmla="*/ 969737 h 1486800"/>
+                <a:gd name="csX6" fmla="*/ 3697200 w 3697200"/>
+                <a:gd name="csY6" fmla="*/ 969150 h 1486800"/>
+                <a:gd name="csX7" fmla="*/ 3697200 w 3697200"/>
+                <a:gd name="csY7" fmla="*/ 1486800 h 1486800"/>
+                <a:gd name="csX8" fmla="*/ 0 w 3697200"/>
+                <a:gd name="csY8" fmla="*/ 1486800 h 1486800"/>
+                <a:gd name="csX9" fmla="*/ 0 w 3697200"/>
+                <a:gd name="csY9" fmla="*/ 969150 h 1486800"/>
+                <a:gd name="csX10" fmla="*/ 5821 w 3697200"/>
+                <a:gd name="csY10" fmla="*/ 969737 h 1486800"/>
+                <a:gd name="csX11" fmla="*/ 232158 w 3697200"/>
+                <a:gd name="csY11" fmla="*/ 743400 h 1486800"/>
+                <a:gd name="csX12" fmla="*/ 5821 w 3697200"/>
+                <a:gd name="csY12" fmla="*/ 517063 h 1486800"/>
+                <a:gd name="csX13" fmla="*/ 0 w 3697200"/>
+                <a:gd name="csY13" fmla="*/ 517650 h 1486800"/>
+              </a:gdLst>
+              <a:ahLst/>
+              <a:cxnLst>
+                <a:cxn ang="0">
+                  <a:pos x="csX0" y="csY0"/>
+                </a:cxn>
+                <a:cxn ang="0">
+                  <a:pos x="csX1" y="csY1"/>
+                </a:cxn>
+                <a:cxn ang="0">
+                  <a:pos x="csX2" y="csY2"/>
+                </a:cxn>
+                <a:cxn ang="0">
+                  <a:pos x="csX3" y="csY3"/>
+                </a:cxn>
+                <a:cxn ang="0">
+                  <a:pos x="csX4" y="csY4"/>
+                </a:cxn>
+                <a:cxn ang="0">
+                  <a:pos x="csX5" y="csY5"/>
+                </a:cxn>
+                <a:cxn ang="0">
+                  <a:pos x="csX6" y="csY6"/>
+                </a:cxn>
+                <a:cxn ang="0">
+                  <a:pos x="csX7" y="csY7"/>
+                </a:cxn>
+                <a:cxn ang="0">
+                  <a:pos x="csX8" y="csY8"/>
+                </a:cxn>
+                <a:cxn ang="0">
+                  <a:pos x="csX9" y="csY9"/>
+                </a:cxn>
+                <a:cxn ang="0">
+                  <a:pos x="csX10" y="csY10"/>
+                </a:cxn>
+                <a:cxn ang="0">
+                  <a:pos x="csX11" y="csY11"/>
+                </a:cxn>
+                <a:cxn ang="0">
+                  <a:pos x="csX12" y="csY12"/>
+                </a:cxn>
+                <a:cxn ang="0">
+                  <a:pos x="csX13" y="csY13"/>
+                </a:cxn>
+              </a:cxnLst>
+              <a:rect l="l" t="t" r="r" b="b"/>
+              <a:pathLst>
+                <a:path w="3697200" h="1486800">
+                  <a:moveTo>
+                    <a:pt x="0" y="0"/>
+                  </a:moveTo>
+                  <a:lnTo>
+                    <a:pt x="3697200" y="0"/>
+                  </a:lnTo>
+                  <a:lnTo>
+                    <a:pt x="3697200" y="517650"/>
+                  </a:lnTo>
+                  <a:lnTo>
+                    <a:pt x="3691379" y="517063"/>
+                  </a:lnTo>
+                  <a:cubicBezTo>
+                    <a:pt x="3566377" y="517063"/>
+                    <a:pt x="3465042" y="618398"/>
+                    <a:pt x="3465042" y="743400"/>
+                  </a:cubicBezTo>
+                  <a:cubicBezTo>
+                    <a:pt x="3465042" y="868402"/>
+                    <a:pt x="3566377" y="969737"/>
+                    <a:pt x="3691379" y="969737"/>
+                  </a:cubicBezTo>
+                  <a:lnTo>
+                    <a:pt x="3697200" y="969150"/>
+                  </a:lnTo>
+                  <a:lnTo>
+                    <a:pt x="3697200" y="1486800"/>
+                  </a:lnTo>
+                  <a:lnTo>
+                    <a:pt x="0" y="1486800"/>
+                  </a:lnTo>
+                  <a:lnTo>
+                    <a:pt x="0" y="969150"/>
+                  </a:lnTo>
+                  <a:lnTo>
+                    <a:pt x="5821" y="969737"/>
+                  </a:lnTo>
+                  <a:cubicBezTo>
+                    <a:pt x="130823" y="969737"/>
+                    <a:pt x="232158" y="868402"/>
+                    <a:pt x="232158" y="743400"/>
+                  </a:cubicBezTo>
+                  <a:cubicBezTo>
+                    <a:pt x="232158" y="618398"/>
+                    <a:pt x="130823" y="517063"/>
+                    <a:pt x="5821" y="517063"/>
+                  </a:cubicBezTo>
+                  <a:lnTo>
+                    <a:pt x="0" y="517650"/>
+                  </a:lnTo>
+                  <a:close/>
+                </a:path>
+              </a:pathLst>
+            </a:custGeom>
+            <a:solidFill>
+              <a:srgbClr val="DFEAC0"/>
+            </a:solidFill>
+            <a:ln w="3175" algn="ctr">
+              <a:solidFill>
+                <a:schemeClr val="bg1">
+                  <a:lumMod val="65000"/>
+                </a:schemeClr>
+              </a:solidFill>
+              <a:miter lim="800000"/>
+              <a:headEnd/>
+              <a:tailEnd/>
+            </a:ln>
+          </p:spPr>
+          <p:txBody>
+            <a:bodyPr wrap="square" lIns="88900" tIns="88900" rIns="88900" bIns="88900" rtlCol="0" anchor="ctr">
+              <a:noAutofit/>
+            </a:bodyPr>
+            <a:lstStyle/>
+            <a:p>
+              <a:pPr algn="ctr">
+                <a:lnSpc>
+                  <a:spcPct val="106000"/>
+                </a:lnSpc>
+                <a:buFont typeface="Wingdings 2" pitchFamily="18" charset="2"/>
+                <a:buNone/>
+              </a:pPr>
+              <a:endParaRPr lang="ko-KR" altLang="en-US" sz="1600" b="1" dirty="0">
+                <a:solidFill>
+                  <a:schemeClr val="bg1"/>
+                </a:solidFill>
+              </a:endParaRPr>
+            </a:p>
+          </p:txBody>
+        </p:sp>
+        <p:sp>
+          <p:nvSpPr>
+            <p:cNvPr id="27" name="자유형: 도형 26">
+              <a:extLst>
+                <a:ext uri="{FF2B5EF4-FFF2-40B4-BE49-F238E27FC236}">
+                  <a16:creationId xmlns:a16="http://schemas.microsoft.com/office/drawing/2014/main" id="{4B2B94C5-7049-F578-08B7-82EBBACDEF1F}"/>
+                </a:ext>
+              </a:extLst>
+            </p:cNvPr>
+            <p:cNvSpPr/>
+            <p:nvPr/>
+          </p:nvSpPr>
+          <p:spPr bwMode="gray">
+            <a:xfrm>
+              <a:off x="970713" y="2610952"/>
+              <a:ext cx="3144088" cy="1200486"/>
+            </a:xfrm>
+            <a:custGeom>
+              <a:avLst/>
+              <a:gdLst>
+                <a:gd name="csX0" fmla="*/ 161925 w 2864644"/>
+                <a:gd name="csY0" fmla="*/ 0 h 1093788"/>
+                <a:gd name="csX1" fmla="*/ 2702719 w 2864644"/>
+                <a:gd name="csY1" fmla="*/ 0 h 1093788"/>
+                <a:gd name="csX2" fmla="*/ 2864644 w 2864644"/>
+                <a:gd name="csY2" fmla="*/ 161925 h 1093788"/>
+                <a:gd name="csX3" fmla="*/ 2864644 w 2864644"/>
+                <a:gd name="csY3" fmla="*/ 931863 h 1093788"/>
+                <a:gd name="csX4" fmla="*/ 2702719 w 2864644"/>
+                <a:gd name="csY4" fmla="*/ 1093788 h 1093788"/>
+                <a:gd name="csX5" fmla="*/ 161925 w 2864644"/>
+                <a:gd name="csY5" fmla="*/ 1093788 h 1093788"/>
+                <a:gd name="csX6" fmla="*/ 0 w 2864644"/>
+                <a:gd name="csY6" fmla="*/ 931863 h 1093788"/>
+                <a:gd name="csX7" fmla="*/ 0 w 2864644"/>
+                <a:gd name="csY7" fmla="*/ 161925 h 1093788"/>
+                <a:gd name="csX8" fmla="*/ 161925 w 2864644"/>
+                <a:gd name="csY8" fmla="*/ 0 h 1093788"/>
+              </a:gdLst>
+              <a:ahLst/>
+              <a:cxnLst>
+                <a:cxn ang="0">
+                  <a:pos x="csX0" y="csY0"/>
+                </a:cxn>
+                <a:cxn ang="0">
+                  <a:pos x="csX1" y="csY1"/>
+                </a:cxn>
+                <a:cxn ang="0">
+                  <a:pos x="csX2" y="csY2"/>
+                </a:cxn>
+                <a:cxn ang="0">
+                  <a:pos x="csX3" y="csY3"/>
+                </a:cxn>
+                <a:cxn ang="0">
+                  <a:pos x="csX4" y="csY4"/>
+                </a:cxn>
+                <a:cxn ang="0">
+                  <a:pos x="csX5" y="csY5"/>
+                </a:cxn>
+                <a:cxn ang="0">
+                  <a:pos x="csX6" y="csY6"/>
+                </a:cxn>
+                <a:cxn ang="0">
+                  <a:pos x="csX7" y="csY7"/>
+                </a:cxn>
+                <a:cxn ang="0">
+                  <a:pos x="csX8" y="csY8"/>
+                </a:cxn>
+              </a:cxnLst>
+              <a:rect l="l" t="t" r="r" b="b"/>
+              <a:pathLst>
+                <a:path w="2864644" h="1093788">
+                  <a:moveTo>
+                    <a:pt x="161925" y="0"/>
+                  </a:moveTo>
+                  <a:lnTo>
+                    <a:pt x="2702719" y="0"/>
+                  </a:lnTo>
+                  <a:cubicBezTo>
+                    <a:pt x="2702719" y="89429"/>
+                    <a:pt x="2775215" y="161925"/>
+                    <a:pt x="2864644" y="161925"/>
+                  </a:cubicBezTo>
+                  <a:lnTo>
+                    <a:pt x="2864644" y="931863"/>
+                  </a:lnTo>
+                  <a:cubicBezTo>
+                    <a:pt x="2775215" y="931863"/>
+                    <a:pt x="2702719" y="1004359"/>
+                    <a:pt x="2702719" y="1093788"/>
+                  </a:cubicBezTo>
+                  <a:lnTo>
+                    <a:pt x="161925" y="1093788"/>
+                  </a:lnTo>
+                  <a:cubicBezTo>
+                    <a:pt x="161925" y="1004359"/>
+                    <a:pt x="89429" y="931863"/>
+                    <a:pt x="0" y="931863"/>
+                  </a:cubicBezTo>
+                  <a:lnTo>
+                    <a:pt x="0" y="161925"/>
+                  </a:lnTo>
+                  <a:cubicBezTo>
+                    <a:pt x="89429" y="161925"/>
+                    <a:pt x="161925" y="89429"/>
+                    <a:pt x="161925" y="0"/>
+                  </a:cubicBezTo>
+                  <a:close/>
+                </a:path>
+              </a:pathLst>
+            </a:custGeom>
+            <a:solidFill>
+              <a:srgbClr val="E6E6E6"/>
+            </a:solidFill>
+            <a:ln w="3175" algn="ctr">
+              <a:solidFill>
+                <a:schemeClr val="bg1">
+                  <a:lumMod val="65000"/>
+                </a:schemeClr>
+              </a:solidFill>
+              <a:miter lim="800000"/>
+              <a:headEnd/>
+              <a:tailEnd/>
+            </a:ln>
+          </p:spPr>
+          <p:txBody>
+            <a:bodyPr wrap="square" lIns="88900" tIns="88900" rIns="88900" bIns="88900" rtlCol="0" anchor="ctr">
+              <a:noAutofit/>
+            </a:bodyPr>
+            <a:lstStyle/>
+            <a:p>
+              <a:pPr algn="ctr">
+                <a:lnSpc>
+                  <a:spcPct val="106000"/>
+                </a:lnSpc>
+                <a:buFont typeface="Wingdings 2" pitchFamily="18" charset="2"/>
+                <a:buNone/>
+              </a:pPr>
+              <a:r>
+                <a:rPr lang="en-US" altLang="ko-KR" sz="1600" b="1" dirty="0">
+                  <a:solidFill>
+                    <a:schemeClr val="bg1"/>
+                  </a:solidFill>
+                </a:rPr>
+                <a:t>`</a:t>
+              </a:r>
+              <a:endParaRPr lang="ko-KR" altLang="en-US" sz="1600" b="1" dirty="0">
+                <a:solidFill>
+                  <a:schemeClr val="bg1"/>
+                </a:solidFill>
+              </a:endParaRPr>
+            </a:p>
+          </p:txBody>
+        </p:sp>
+        <p:sp>
+          <p:nvSpPr>
+            <p:cNvPr id="28" name="직사각형 27">
+              <a:extLst>
+                <a:ext uri="{FF2B5EF4-FFF2-40B4-BE49-F238E27FC236}">
+                  <a16:creationId xmlns:a16="http://schemas.microsoft.com/office/drawing/2014/main" id="{5AA20E2E-B28E-AA44-7435-F40C2B79990B}"/>
+                </a:ext>
+              </a:extLst>
+            </p:cNvPr>
+            <p:cNvSpPr/>
+            <p:nvPr/>
+          </p:nvSpPr>
+          <p:spPr bwMode="gray">
+            <a:xfrm>
+              <a:off x="1105658" y="2813050"/>
+              <a:ext cx="717550" cy="762000"/>
+            </a:xfrm>
+            <a:prstGeom prst="rect">
+              <a:avLst/>
+            </a:prstGeom>
+            <a:noFill/>
+            <a:ln w="19050" algn="ctr">
+              <a:noFill/>
+              <a:miter lim="800000"/>
+              <a:headEnd/>
+              <a:tailEnd/>
+            </a:ln>
+          </p:spPr>
+          <p:txBody>
+            <a:bodyPr wrap="none" lIns="88900" tIns="88900" rIns="88900" bIns="88900" rtlCol="0" anchor="ctr"/>
+            <a:lstStyle/>
+            <a:p>
+              <a:pPr algn="ctr">
+                <a:lnSpc>
+                  <a:spcPct val="106000"/>
+                </a:lnSpc>
+                <a:buFont typeface="Wingdings 2" pitchFamily="18" charset="2"/>
+                <a:buNone/>
+              </a:pPr>
+              <a:r>
+                <a:rPr lang="en-US" altLang="ko-KR" sz="4400" b="1" dirty="0">
+                  <a:latin typeface="나눔고딕" panose="020D0604000000000000" pitchFamily="50" charset="-127"/>
+                  <a:ea typeface="나눔고딕" panose="020D0604000000000000" pitchFamily="50" charset="-127"/>
+                </a:rPr>
+                <a:t>D</a:t>
+              </a:r>
+              <a:r>
+                <a:rPr lang="ko-KR" altLang="en-US" sz="4400" b="1" dirty="0">
+                  <a:latin typeface="나눔고딕" panose="020D0604000000000000" pitchFamily="50" charset="-127"/>
+                  <a:ea typeface="나눔고딕" panose="020D0604000000000000" pitchFamily="50" charset="-127"/>
+                </a:rPr>
+                <a:t>상</a:t>
+              </a:r>
+            </a:p>
+          </p:txBody>
+        </p:sp>
+        <p:sp>
+          <p:nvSpPr>
+            <p:cNvPr id="29" name="직사각형 28">
+              <a:extLst>
+                <a:ext uri="{FF2B5EF4-FFF2-40B4-BE49-F238E27FC236}">
+                  <a16:creationId xmlns:a16="http://schemas.microsoft.com/office/drawing/2014/main" id="{351BB8B9-C6AA-5839-1139-1C0212153C40}"/>
+                </a:ext>
+              </a:extLst>
+            </p:cNvPr>
+            <p:cNvSpPr/>
+            <p:nvPr/>
+          </p:nvSpPr>
+          <p:spPr bwMode="gray">
+            <a:xfrm>
+              <a:off x="1958153" y="2662936"/>
+              <a:ext cx="2057666" cy="1096518"/>
+            </a:xfrm>
+            <a:prstGeom prst="rect">
+              <a:avLst/>
+            </a:prstGeom>
+            <a:noFill/>
+            <a:ln w="19050" algn="ctr">
+              <a:noFill/>
+              <a:miter lim="800000"/>
+              <a:headEnd/>
+              <a:tailEnd/>
+            </a:ln>
+          </p:spPr>
+          <p:txBody>
+            <a:bodyPr wrap="none" lIns="88900" tIns="88900" rIns="88900" bIns="88900" rtlCol="0" anchor="ctr"/>
+            <a:lstStyle/>
+            <a:p>
+              <a:pPr algn="ctr">
+                <a:lnSpc>
+                  <a:spcPct val="106000"/>
+                </a:lnSpc>
+                <a:buFont typeface="Wingdings 2" pitchFamily="18" charset="2"/>
+                <a:buNone/>
+              </a:pPr>
+              <a:r>
+                <a:rPr lang="ko-KR" altLang="en-US" sz="1600" b="1" dirty="0" err="1">
+                  <a:latin typeface="나눔고딕" panose="020D0604000000000000" pitchFamily="50" charset="-127"/>
+                  <a:ea typeface="나눔고딕" panose="020D0604000000000000" pitchFamily="50" charset="-127"/>
+                </a:rPr>
+                <a:t>컴팩트</a:t>
+              </a:r>
+              <a:r>
+                <a:rPr lang="ko-KR" altLang="en-US" sz="1600" b="1" dirty="0">
+                  <a:latin typeface="나눔고딕" panose="020D0604000000000000" pitchFamily="50" charset="-127"/>
+                  <a:ea typeface="나눔고딕" panose="020D0604000000000000" pitchFamily="50" charset="-127"/>
+                </a:rPr>
+                <a:t> 미러</a:t>
+              </a:r>
+            </a:p>
+          </p:txBody>
+        </p:sp>
+      </p:grpSp>
+      <p:grpSp>
+        <p:nvGrpSpPr>
+          <p:cNvPr id="30" name="그룹 29">
+            <a:extLst>
+              <a:ext uri="{FF2B5EF4-FFF2-40B4-BE49-F238E27FC236}">
+                <a16:creationId xmlns:a16="http://schemas.microsoft.com/office/drawing/2014/main" id="{6FEC1667-D3E9-3CC5-9531-1EB7E8F553D1}"/>
+              </a:ext>
+            </a:extLst>
+          </p:cNvPr>
+          <p:cNvGrpSpPr/>
+          <p:nvPr/>
+        </p:nvGrpSpPr>
+        <p:grpSpPr>
+          <a:xfrm>
+            <a:off x="8691417" y="1190334"/>
+            <a:ext cx="3697200" cy="1486800"/>
+            <a:chOff x="677717" y="2434934"/>
+            <a:chExt cx="3697200" cy="1486800"/>
+          </a:xfrm>
+        </p:grpSpPr>
+        <p:sp>
+          <p:nvSpPr>
+            <p:cNvPr id="31" name="자유형: 도형 30">
+              <a:extLst>
+                <a:ext uri="{FF2B5EF4-FFF2-40B4-BE49-F238E27FC236}">
+                  <a16:creationId xmlns:a16="http://schemas.microsoft.com/office/drawing/2014/main" id="{57D72888-E58C-0FB9-958B-D28BA6CD33F6}"/>
+                </a:ext>
+              </a:extLst>
+            </p:cNvPr>
+            <p:cNvSpPr/>
+            <p:nvPr/>
+          </p:nvSpPr>
+          <p:spPr bwMode="gray">
+            <a:xfrm>
+              <a:off x="677717" y="2434934"/>
+              <a:ext cx="3697200" cy="1486800"/>
+            </a:xfrm>
+            <a:custGeom>
+              <a:avLst/>
+              <a:gdLst>
+                <a:gd name="csX0" fmla="*/ 0 w 3697200"/>
+                <a:gd name="csY0" fmla="*/ 0 h 1486800"/>
+                <a:gd name="csX1" fmla="*/ 3697200 w 3697200"/>
+                <a:gd name="csY1" fmla="*/ 0 h 1486800"/>
+                <a:gd name="csX2" fmla="*/ 3697200 w 3697200"/>
+                <a:gd name="csY2" fmla="*/ 517650 h 1486800"/>
+                <a:gd name="csX3" fmla="*/ 3691379 w 3697200"/>
+                <a:gd name="csY3" fmla="*/ 517063 h 1486800"/>
+                <a:gd name="csX4" fmla="*/ 3465042 w 3697200"/>
+                <a:gd name="csY4" fmla="*/ 743400 h 1486800"/>
+                <a:gd name="csX5" fmla="*/ 3691379 w 3697200"/>
+                <a:gd name="csY5" fmla="*/ 969737 h 1486800"/>
+                <a:gd name="csX6" fmla="*/ 3697200 w 3697200"/>
+                <a:gd name="csY6" fmla="*/ 969150 h 1486800"/>
+                <a:gd name="csX7" fmla="*/ 3697200 w 3697200"/>
+                <a:gd name="csY7" fmla="*/ 1486800 h 1486800"/>
+                <a:gd name="csX8" fmla="*/ 0 w 3697200"/>
+                <a:gd name="csY8" fmla="*/ 1486800 h 1486800"/>
+                <a:gd name="csX9" fmla="*/ 0 w 3697200"/>
+                <a:gd name="csY9" fmla="*/ 969150 h 1486800"/>
+                <a:gd name="csX10" fmla="*/ 5821 w 3697200"/>
+                <a:gd name="csY10" fmla="*/ 969737 h 1486800"/>
+                <a:gd name="csX11" fmla="*/ 232158 w 3697200"/>
+                <a:gd name="csY11" fmla="*/ 743400 h 1486800"/>
+                <a:gd name="csX12" fmla="*/ 5821 w 3697200"/>
+                <a:gd name="csY12" fmla="*/ 517063 h 1486800"/>
+                <a:gd name="csX13" fmla="*/ 0 w 3697200"/>
+                <a:gd name="csY13" fmla="*/ 517650 h 1486800"/>
+              </a:gdLst>
+              <a:ahLst/>
+              <a:cxnLst>
+                <a:cxn ang="0">
+                  <a:pos x="csX0" y="csY0"/>
+                </a:cxn>
+                <a:cxn ang="0">
+                  <a:pos x="csX1" y="csY1"/>
+                </a:cxn>
+                <a:cxn ang="0">
+                  <a:pos x="csX2" y="csY2"/>
+                </a:cxn>
+                <a:cxn ang="0">
+                  <a:pos x="csX3" y="csY3"/>
+                </a:cxn>
+                <a:cxn ang="0">
+                  <a:pos x="csX4" y="csY4"/>
+                </a:cxn>
+                <a:cxn ang="0">
+                  <a:pos x="csX5" y="csY5"/>
+                </a:cxn>
+                <a:cxn ang="0">
+                  <a:pos x="csX6" y="csY6"/>
+                </a:cxn>
+                <a:cxn ang="0">
+                  <a:pos x="csX7" y="csY7"/>
+                </a:cxn>
+                <a:cxn ang="0">
+                  <a:pos x="csX8" y="csY8"/>
+                </a:cxn>
+                <a:cxn ang="0">
+                  <a:pos x="csX9" y="csY9"/>
+                </a:cxn>
+                <a:cxn ang="0">
+                  <a:pos x="csX10" y="csY10"/>
+                </a:cxn>
+                <a:cxn ang="0">
+                  <a:pos x="csX11" y="csY11"/>
+                </a:cxn>
+                <a:cxn ang="0">
+                  <a:pos x="csX12" y="csY12"/>
+                </a:cxn>
+                <a:cxn ang="0">
+                  <a:pos x="csX13" y="csY13"/>
+                </a:cxn>
+              </a:cxnLst>
+              <a:rect l="l" t="t" r="r" b="b"/>
+              <a:pathLst>
+                <a:path w="3697200" h="1486800">
+                  <a:moveTo>
+                    <a:pt x="0" y="0"/>
+                  </a:moveTo>
+                  <a:lnTo>
+                    <a:pt x="3697200" y="0"/>
+                  </a:lnTo>
+                  <a:lnTo>
+                    <a:pt x="3697200" y="517650"/>
+                  </a:lnTo>
+                  <a:lnTo>
+                    <a:pt x="3691379" y="517063"/>
+                  </a:lnTo>
+                  <a:cubicBezTo>
+                    <a:pt x="3566377" y="517063"/>
+                    <a:pt x="3465042" y="618398"/>
+                    <a:pt x="3465042" y="743400"/>
+                  </a:cubicBezTo>
+                  <a:cubicBezTo>
+                    <a:pt x="3465042" y="868402"/>
+                    <a:pt x="3566377" y="969737"/>
+                    <a:pt x="3691379" y="969737"/>
+                  </a:cubicBezTo>
+                  <a:lnTo>
+                    <a:pt x="3697200" y="969150"/>
+                  </a:lnTo>
+                  <a:lnTo>
+                    <a:pt x="3697200" y="1486800"/>
+                  </a:lnTo>
+                  <a:lnTo>
+                    <a:pt x="0" y="1486800"/>
+                  </a:lnTo>
+                  <a:lnTo>
+                    <a:pt x="0" y="969150"/>
+                  </a:lnTo>
+                  <a:lnTo>
+                    <a:pt x="5821" y="969737"/>
+                  </a:lnTo>
+                  <a:cubicBezTo>
+                    <a:pt x="130823" y="969737"/>
+                    <a:pt x="232158" y="868402"/>
+                    <a:pt x="232158" y="743400"/>
+                  </a:cubicBezTo>
+                  <a:cubicBezTo>
+                    <a:pt x="232158" y="618398"/>
+                    <a:pt x="130823" y="517063"/>
+                    <a:pt x="5821" y="517063"/>
+                  </a:cubicBezTo>
+                  <a:lnTo>
+                    <a:pt x="0" y="517650"/>
+                  </a:lnTo>
+                  <a:close/>
+                </a:path>
+              </a:pathLst>
+            </a:custGeom>
+            <a:solidFill>
+              <a:srgbClr val="DFEAC0"/>
+            </a:solidFill>
+            <a:ln w="3175" algn="ctr">
+              <a:solidFill>
+                <a:schemeClr val="bg1">
+                  <a:lumMod val="65000"/>
+                </a:schemeClr>
+              </a:solidFill>
+              <a:miter lim="800000"/>
+              <a:headEnd/>
+              <a:tailEnd/>
+            </a:ln>
+          </p:spPr>
+          <p:txBody>
+            <a:bodyPr wrap="square" lIns="88900" tIns="88900" rIns="88900" bIns="88900" rtlCol="0" anchor="ctr">
+              <a:noAutofit/>
+            </a:bodyPr>
+            <a:lstStyle/>
+            <a:p>
+              <a:pPr algn="ctr">
+                <a:lnSpc>
+                  <a:spcPct val="106000"/>
+                </a:lnSpc>
+                <a:buFont typeface="Wingdings 2" pitchFamily="18" charset="2"/>
+                <a:buNone/>
+              </a:pPr>
+              <a:endParaRPr lang="ko-KR" altLang="en-US" sz="1600" b="1" dirty="0">
+                <a:solidFill>
+                  <a:schemeClr val="bg1"/>
+                </a:solidFill>
+              </a:endParaRPr>
+            </a:p>
+          </p:txBody>
+        </p:sp>
+        <p:sp>
+          <p:nvSpPr>
+            <p:cNvPr id="32" name="자유형: 도형 31">
+              <a:extLst>
+                <a:ext uri="{FF2B5EF4-FFF2-40B4-BE49-F238E27FC236}">
+                  <a16:creationId xmlns:a16="http://schemas.microsoft.com/office/drawing/2014/main" id="{18BBDBB3-B15F-06F5-738B-9D536B840423}"/>
+                </a:ext>
+              </a:extLst>
+            </p:cNvPr>
+            <p:cNvSpPr/>
+            <p:nvPr/>
+          </p:nvSpPr>
+          <p:spPr bwMode="gray">
+            <a:xfrm>
+              <a:off x="970713" y="2610952"/>
+              <a:ext cx="3144088" cy="1200486"/>
+            </a:xfrm>
+            <a:custGeom>
+              <a:avLst/>
+              <a:gdLst>
+                <a:gd name="csX0" fmla="*/ 161925 w 2864644"/>
+                <a:gd name="csY0" fmla="*/ 0 h 1093788"/>
+                <a:gd name="csX1" fmla="*/ 2702719 w 2864644"/>
+                <a:gd name="csY1" fmla="*/ 0 h 1093788"/>
+                <a:gd name="csX2" fmla="*/ 2864644 w 2864644"/>
+                <a:gd name="csY2" fmla="*/ 161925 h 1093788"/>
+                <a:gd name="csX3" fmla="*/ 2864644 w 2864644"/>
+                <a:gd name="csY3" fmla="*/ 931863 h 1093788"/>
+                <a:gd name="csX4" fmla="*/ 2702719 w 2864644"/>
+                <a:gd name="csY4" fmla="*/ 1093788 h 1093788"/>
+                <a:gd name="csX5" fmla="*/ 161925 w 2864644"/>
+                <a:gd name="csY5" fmla="*/ 1093788 h 1093788"/>
+                <a:gd name="csX6" fmla="*/ 0 w 2864644"/>
+                <a:gd name="csY6" fmla="*/ 931863 h 1093788"/>
+                <a:gd name="csX7" fmla="*/ 0 w 2864644"/>
+                <a:gd name="csY7" fmla="*/ 161925 h 1093788"/>
+                <a:gd name="csX8" fmla="*/ 161925 w 2864644"/>
+                <a:gd name="csY8" fmla="*/ 0 h 1093788"/>
+              </a:gdLst>
+              <a:ahLst/>
+              <a:cxnLst>
+                <a:cxn ang="0">
+                  <a:pos x="csX0" y="csY0"/>
+                </a:cxn>
+                <a:cxn ang="0">
+                  <a:pos x="csX1" y="csY1"/>
+                </a:cxn>
+                <a:cxn ang="0">
+                  <a:pos x="csX2" y="csY2"/>
+                </a:cxn>
+                <a:cxn ang="0">
+                  <a:pos x="csX3" y="csY3"/>
+                </a:cxn>
+                <a:cxn ang="0">
+                  <a:pos x="csX4" y="csY4"/>
+                </a:cxn>
+                <a:cxn ang="0">
+                  <a:pos x="csX5" y="csY5"/>
+                </a:cxn>
+                <a:cxn ang="0">
+                  <a:pos x="csX6" y="csY6"/>
+                </a:cxn>
+                <a:cxn ang="0">
+                  <a:pos x="csX7" y="csY7"/>
+                </a:cxn>
+                <a:cxn ang="0">
+                  <a:pos x="csX8" y="csY8"/>
+                </a:cxn>
+              </a:cxnLst>
+              <a:rect l="l" t="t" r="r" b="b"/>
+              <a:pathLst>
+                <a:path w="2864644" h="1093788">
+                  <a:moveTo>
+                    <a:pt x="161925" y="0"/>
+                  </a:moveTo>
+                  <a:lnTo>
+                    <a:pt x="2702719" y="0"/>
+                  </a:lnTo>
+                  <a:cubicBezTo>
+                    <a:pt x="2702719" y="89429"/>
+                    <a:pt x="2775215" y="161925"/>
+                    <a:pt x="2864644" y="161925"/>
+                  </a:cubicBezTo>
+                  <a:lnTo>
+                    <a:pt x="2864644" y="931863"/>
+                  </a:lnTo>
+                  <a:cubicBezTo>
+                    <a:pt x="2775215" y="931863"/>
+                    <a:pt x="2702719" y="1004359"/>
+                    <a:pt x="2702719" y="1093788"/>
+                  </a:cubicBezTo>
+                  <a:lnTo>
+                    <a:pt x="161925" y="1093788"/>
+                  </a:lnTo>
+                  <a:cubicBezTo>
+                    <a:pt x="161925" y="1004359"/>
+                    <a:pt x="89429" y="931863"/>
+                    <a:pt x="0" y="931863"/>
+                  </a:cubicBezTo>
+                  <a:lnTo>
+                    <a:pt x="0" y="161925"/>
+                  </a:lnTo>
+                  <a:cubicBezTo>
+                    <a:pt x="89429" y="161925"/>
+                    <a:pt x="161925" y="89429"/>
+                    <a:pt x="161925" y="0"/>
+                  </a:cubicBezTo>
+                  <a:close/>
+                </a:path>
+              </a:pathLst>
+            </a:custGeom>
+            <a:solidFill>
+              <a:srgbClr val="E6E6E6"/>
+            </a:solidFill>
+            <a:ln w="3175" algn="ctr">
+              <a:solidFill>
+                <a:schemeClr val="bg1">
+                  <a:lumMod val="65000"/>
+                </a:schemeClr>
+              </a:solidFill>
+              <a:miter lim="800000"/>
+              <a:headEnd/>
+              <a:tailEnd/>
+            </a:ln>
+          </p:spPr>
+          <p:txBody>
+            <a:bodyPr wrap="square" lIns="88900" tIns="88900" rIns="88900" bIns="88900" rtlCol="0" anchor="ctr">
+              <a:noAutofit/>
+            </a:bodyPr>
+            <a:lstStyle/>
+            <a:p>
+              <a:pPr algn="ctr">
+                <a:lnSpc>
+                  <a:spcPct val="106000"/>
+                </a:lnSpc>
+                <a:buFont typeface="Wingdings 2" pitchFamily="18" charset="2"/>
+                <a:buNone/>
+              </a:pPr>
+              <a:r>
+                <a:rPr lang="en-US" altLang="ko-KR" sz="1600" b="1" dirty="0">
+                  <a:solidFill>
+                    <a:schemeClr val="bg1"/>
+                  </a:solidFill>
+                </a:rPr>
+                <a:t>`</a:t>
+              </a:r>
+              <a:endParaRPr lang="ko-KR" altLang="en-US" sz="1600" b="1" dirty="0">
+                <a:solidFill>
+                  <a:schemeClr val="bg1"/>
+                </a:solidFill>
+              </a:endParaRPr>
+            </a:p>
+          </p:txBody>
+        </p:sp>
+        <p:sp>
+          <p:nvSpPr>
+            <p:cNvPr id="33" name="직사각형 32">
+              <a:extLst>
+                <a:ext uri="{FF2B5EF4-FFF2-40B4-BE49-F238E27FC236}">
+                  <a16:creationId xmlns:a16="http://schemas.microsoft.com/office/drawing/2014/main" id="{98B7A1D0-85D8-5770-3F5D-75FF6A0D6D93}"/>
+                </a:ext>
+              </a:extLst>
+            </p:cNvPr>
+            <p:cNvSpPr/>
+            <p:nvPr/>
+          </p:nvSpPr>
+          <p:spPr bwMode="gray">
+            <a:xfrm>
+              <a:off x="1105658" y="2813050"/>
+              <a:ext cx="717550" cy="762000"/>
+            </a:xfrm>
+            <a:prstGeom prst="rect">
+              <a:avLst/>
+            </a:prstGeom>
+            <a:noFill/>
+            <a:ln w="19050" algn="ctr">
+              <a:noFill/>
+              <a:miter lim="800000"/>
+              <a:headEnd/>
+              <a:tailEnd/>
+            </a:ln>
+          </p:spPr>
+          <p:txBody>
+            <a:bodyPr wrap="none" lIns="88900" tIns="88900" rIns="88900" bIns="88900" rtlCol="0" anchor="ctr"/>
+            <a:lstStyle/>
+            <a:p>
+              <a:pPr algn="ctr">
+                <a:lnSpc>
+                  <a:spcPct val="106000"/>
+                </a:lnSpc>
+                <a:buFont typeface="Wingdings 2" pitchFamily="18" charset="2"/>
+                <a:buNone/>
+              </a:pPr>
+              <a:r>
+                <a:rPr lang="en-US" altLang="ko-KR" sz="4400" b="1" dirty="0">
+                  <a:latin typeface="나눔고딕" panose="020D0604000000000000" pitchFamily="50" charset="-127"/>
+                  <a:ea typeface="나눔고딕" panose="020D0604000000000000" pitchFamily="50" charset="-127"/>
+                </a:rPr>
+                <a:t>E</a:t>
+              </a:r>
+              <a:r>
+                <a:rPr lang="ko-KR" altLang="en-US" sz="4400" b="1" dirty="0">
+                  <a:latin typeface="나눔고딕" panose="020D0604000000000000" pitchFamily="50" charset="-127"/>
+                  <a:ea typeface="나눔고딕" panose="020D0604000000000000" pitchFamily="50" charset="-127"/>
+                </a:rPr>
+                <a:t>상</a:t>
+              </a:r>
+            </a:p>
+          </p:txBody>
+        </p:sp>
+        <p:sp>
+          <p:nvSpPr>
+            <p:cNvPr id="34" name="직사각형 33">
+              <a:extLst>
+                <a:ext uri="{FF2B5EF4-FFF2-40B4-BE49-F238E27FC236}">
+                  <a16:creationId xmlns:a16="http://schemas.microsoft.com/office/drawing/2014/main" id="{CF905C86-A55B-0071-128B-7849F6082F8A}"/>
+                </a:ext>
+              </a:extLst>
+            </p:cNvPr>
+            <p:cNvSpPr/>
+            <p:nvPr/>
+          </p:nvSpPr>
+          <p:spPr bwMode="gray">
+            <a:xfrm>
+              <a:off x="1958153" y="2662936"/>
+              <a:ext cx="2057666" cy="1096518"/>
+            </a:xfrm>
+            <a:prstGeom prst="rect">
+              <a:avLst/>
+            </a:prstGeom>
+            <a:noFill/>
+            <a:ln w="19050" algn="ctr">
+              <a:noFill/>
+              <a:miter lim="800000"/>
+              <a:headEnd/>
+              <a:tailEnd/>
+            </a:ln>
+          </p:spPr>
+          <p:txBody>
+            <a:bodyPr wrap="none" lIns="88900" tIns="88900" rIns="88900" bIns="88900" rtlCol="0" anchor="ctr"/>
+            <a:lstStyle/>
+            <a:p>
+              <a:pPr algn="ctr">
+                <a:lnSpc>
+                  <a:spcPct val="106000"/>
+                </a:lnSpc>
+                <a:buFont typeface="Wingdings 2" pitchFamily="18" charset="2"/>
+                <a:buNone/>
+              </a:pPr>
+              <a:r>
+                <a:rPr lang="ko-KR" altLang="en-US" sz="1600" b="1" dirty="0">
+                  <a:latin typeface="나눔고딕" panose="020D0604000000000000" pitchFamily="50" charset="-127"/>
+                  <a:ea typeface="나눔고딕" panose="020D0604000000000000" pitchFamily="50" charset="-127"/>
+                </a:rPr>
+                <a:t>식기 컬렉션</a:t>
+              </a:r>
+            </a:p>
+          </p:txBody>
+        </p:sp>
+      </p:grpSp>
+      <p:grpSp>
+        <p:nvGrpSpPr>
+          <p:cNvPr id="35" name="그룹 34">
+            <a:extLst>
+              <a:ext uri="{FF2B5EF4-FFF2-40B4-BE49-F238E27FC236}">
+                <a16:creationId xmlns:a16="http://schemas.microsoft.com/office/drawing/2014/main" id="{42B3B1D8-7CEE-D0FC-2D7F-71AFB6EC8B79}"/>
+              </a:ext>
+            </a:extLst>
+          </p:cNvPr>
+          <p:cNvGrpSpPr/>
+          <p:nvPr/>
+        </p:nvGrpSpPr>
+        <p:grpSpPr>
+          <a:xfrm>
+            <a:off x="8691417" y="3362934"/>
+            <a:ext cx="3697200" cy="1486800"/>
+            <a:chOff x="677717" y="2434934"/>
+            <a:chExt cx="3697200" cy="1486800"/>
+          </a:xfrm>
+        </p:grpSpPr>
+        <p:sp>
+          <p:nvSpPr>
+            <p:cNvPr id="36" name="자유형: 도형 35">
+              <a:extLst>
+                <a:ext uri="{FF2B5EF4-FFF2-40B4-BE49-F238E27FC236}">
+                  <a16:creationId xmlns:a16="http://schemas.microsoft.com/office/drawing/2014/main" id="{95ADB560-8CA0-BCB0-47A1-2AE467B6EF77}"/>
+                </a:ext>
+              </a:extLst>
+            </p:cNvPr>
+            <p:cNvSpPr/>
+            <p:nvPr/>
+          </p:nvSpPr>
+          <p:spPr bwMode="gray">
+            <a:xfrm>
+              <a:off x="677717" y="2434934"/>
+              <a:ext cx="3697200" cy="1486800"/>
+            </a:xfrm>
+            <a:custGeom>
+              <a:avLst/>
+              <a:gdLst>
+                <a:gd name="csX0" fmla="*/ 0 w 3697200"/>
+                <a:gd name="csY0" fmla="*/ 0 h 1486800"/>
+                <a:gd name="csX1" fmla="*/ 3697200 w 3697200"/>
+                <a:gd name="csY1" fmla="*/ 0 h 1486800"/>
+                <a:gd name="csX2" fmla="*/ 3697200 w 3697200"/>
+                <a:gd name="csY2" fmla="*/ 517650 h 1486800"/>
+                <a:gd name="csX3" fmla="*/ 3691379 w 3697200"/>
+                <a:gd name="csY3" fmla="*/ 517063 h 1486800"/>
+                <a:gd name="csX4" fmla="*/ 3465042 w 3697200"/>
+                <a:gd name="csY4" fmla="*/ 743400 h 1486800"/>
+                <a:gd name="csX5" fmla="*/ 3691379 w 3697200"/>
+                <a:gd name="csY5" fmla="*/ 969737 h 1486800"/>
+                <a:gd name="csX6" fmla="*/ 3697200 w 3697200"/>
+                <a:gd name="csY6" fmla="*/ 969150 h 1486800"/>
+                <a:gd name="csX7" fmla="*/ 3697200 w 3697200"/>
+                <a:gd name="csY7" fmla="*/ 1486800 h 1486800"/>
+                <a:gd name="csX8" fmla="*/ 0 w 3697200"/>
+                <a:gd name="csY8" fmla="*/ 1486800 h 1486800"/>
+                <a:gd name="csX9" fmla="*/ 0 w 3697200"/>
+                <a:gd name="csY9" fmla="*/ 969150 h 1486800"/>
+                <a:gd name="csX10" fmla="*/ 5821 w 3697200"/>
+                <a:gd name="csY10" fmla="*/ 969737 h 1486800"/>
+                <a:gd name="csX11" fmla="*/ 232158 w 3697200"/>
+                <a:gd name="csY11" fmla="*/ 743400 h 1486800"/>
+                <a:gd name="csX12" fmla="*/ 5821 w 3697200"/>
+                <a:gd name="csY12" fmla="*/ 517063 h 1486800"/>
+                <a:gd name="csX13" fmla="*/ 0 w 3697200"/>
+                <a:gd name="csY13" fmla="*/ 517650 h 1486800"/>
+              </a:gdLst>
+              <a:ahLst/>
+              <a:cxnLst>
+                <a:cxn ang="0">
+                  <a:pos x="csX0" y="csY0"/>
+                </a:cxn>
+                <a:cxn ang="0">
+                  <a:pos x="csX1" y="csY1"/>
+                </a:cxn>
+                <a:cxn ang="0">
+                  <a:pos x="csX2" y="csY2"/>
+                </a:cxn>
+                <a:cxn ang="0">
+                  <a:pos x="csX3" y="csY3"/>
+                </a:cxn>
+                <a:cxn ang="0">
+                  <a:pos x="csX4" y="csY4"/>
+                </a:cxn>
+                <a:cxn ang="0">
+                  <a:pos x="csX5" y="csY5"/>
+                </a:cxn>
+                <a:cxn ang="0">
+                  <a:pos x="csX6" y="csY6"/>
+                </a:cxn>
+                <a:cxn ang="0">
+                  <a:pos x="csX7" y="csY7"/>
+                </a:cxn>
+                <a:cxn ang="0">
+                  <a:pos x="csX8" y="csY8"/>
+                </a:cxn>
+                <a:cxn ang="0">
+                  <a:pos x="csX9" y="csY9"/>
+                </a:cxn>
+                <a:cxn ang="0">
+                  <a:pos x="csX10" y="csY10"/>
+                </a:cxn>
+                <a:cxn ang="0">
+                  <a:pos x="csX11" y="csY11"/>
+                </a:cxn>
+                <a:cxn ang="0">
+                  <a:pos x="csX12" y="csY12"/>
+                </a:cxn>
+                <a:cxn ang="0">
+                  <a:pos x="csX13" y="csY13"/>
+                </a:cxn>
+              </a:cxnLst>
+              <a:rect l="l" t="t" r="r" b="b"/>
+              <a:pathLst>
+                <a:path w="3697200" h="1486800">
+                  <a:moveTo>
+                    <a:pt x="0" y="0"/>
+                  </a:moveTo>
+                  <a:lnTo>
+                    <a:pt x="3697200" y="0"/>
+                  </a:lnTo>
+                  <a:lnTo>
+                    <a:pt x="3697200" y="517650"/>
+                  </a:lnTo>
+                  <a:lnTo>
+                    <a:pt x="3691379" y="517063"/>
+                  </a:lnTo>
+                  <a:cubicBezTo>
+                    <a:pt x="3566377" y="517063"/>
+                    <a:pt x="3465042" y="618398"/>
+                    <a:pt x="3465042" y="743400"/>
+                  </a:cubicBezTo>
+                  <a:cubicBezTo>
+                    <a:pt x="3465042" y="868402"/>
+                    <a:pt x="3566377" y="969737"/>
+                    <a:pt x="3691379" y="969737"/>
+                  </a:cubicBezTo>
+                  <a:lnTo>
+                    <a:pt x="3697200" y="969150"/>
+                  </a:lnTo>
+                  <a:lnTo>
+                    <a:pt x="3697200" y="1486800"/>
+                  </a:lnTo>
+                  <a:lnTo>
+                    <a:pt x="0" y="1486800"/>
+                  </a:lnTo>
+                  <a:lnTo>
+                    <a:pt x="0" y="969150"/>
+                  </a:lnTo>
+                  <a:lnTo>
+                    <a:pt x="5821" y="969737"/>
+                  </a:lnTo>
+                  <a:cubicBezTo>
+                    <a:pt x="130823" y="969737"/>
+                    <a:pt x="232158" y="868402"/>
+                    <a:pt x="232158" y="743400"/>
+                  </a:cubicBezTo>
+                  <a:cubicBezTo>
+                    <a:pt x="232158" y="618398"/>
+                    <a:pt x="130823" y="517063"/>
+                    <a:pt x="5821" y="517063"/>
+                  </a:cubicBezTo>
+                  <a:lnTo>
+                    <a:pt x="0" y="517650"/>
+                  </a:lnTo>
+                  <a:close/>
+                </a:path>
+              </a:pathLst>
+            </a:custGeom>
+            <a:solidFill>
+              <a:srgbClr val="DFEAC0"/>
+            </a:solidFill>
+            <a:ln w="3175" algn="ctr">
+              <a:solidFill>
+                <a:schemeClr val="bg1">
+                  <a:lumMod val="65000"/>
+                </a:schemeClr>
+              </a:solidFill>
+              <a:miter lim="800000"/>
+              <a:headEnd/>
+              <a:tailEnd/>
+            </a:ln>
+          </p:spPr>
+          <p:txBody>
+            <a:bodyPr wrap="square" lIns="88900" tIns="88900" rIns="88900" bIns="88900" rtlCol="0" anchor="ctr">
+              <a:noAutofit/>
+            </a:bodyPr>
+            <a:lstStyle/>
+            <a:p>
+              <a:pPr algn="ctr">
+                <a:lnSpc>
+                  <a:spcPct val="106000"/>
+                </a:lnSpc>
+                <a:buFont typeface="Wingdings 2" pitchFamily="18" charset="2"/>
+                <a:buNone/>
+              </a:pPr>
+              <a:endParaRPr lang="ko-KR" altLang="en-US" sz="1600" b="1" dirty="0">
+                <a:solidFill>
+                  <a:schemeClr val="bg1"/>
+                </a:solidFill>
+              </a:endParaRPr>
+            </a:p>
+          </p:txBody>
+        </p:sp>
+        <p:sp>
+          <p:nvSpPr>
+            <p:cNvPr id="37" name="자유형: 도형 36">
+              <a:extLst>
+                <a:ext uri="{FF2B5EF4-FFF2-40B4-BE49-F238E27FC236}">
+                  <a16:creationId xmlns:a16="http://schemas.microsoft.com/office/drawing/2014/main" id="{654767E5-1825-D795-82A4-0F201102730B}"/>
+                </a:ext>
+              </a:extLst>
+            </p:cNvPr>
+            <p:cNvSpPr/>
+            <p:nvPr/>
+          </p:nvSpPr>
+          <p:spPr bwMode="gray">
+            <a:xfrm>
+              <a:off x="970713" y="2610952"/>
+              <a:ext cx="3144088" cy="1200486"/>
+            </a:xfrm>
+            <a:custGeom>
+              <a:avLst/>
+              <a:gdLst>
+                <a:gd name="csX0" fmla="*/ 161925 w 2864644"/>
+                <a:gd name="csY0" fmla="*/ 0 h 1093788"/>
+                <a:gd name="csX1" fmla="*/ 2702719 w 2864644"/>
+                <a:gd name="csY1" fmla="*/ 0 h 1093788"/>
+                <a:gd name="csX2" fmla="*/ 2864644 w 2864644"/>
+                <a:gd name="csY2" fmla="*/ 161925 h 1093788"/>
+                <a:gd name="csX3" fmla="*/ 2864644 w 2864644"/>
+                <a:gd name="csY3" fmla="*/ 931863 h 1093788"/>
+                <a:gd name="csX4" fmla="*/ 2702719 w 2864644"/>
+                <a:gd name="csY4" fmla="*/ 1093788 h 1093788"/>
+                <a:gd name="csX5" fmla="*/ 161925 w 2864644"/>
+                <a:gd name="csY5" fmla="*/ 1093788 h 1093788"/>
+                <a:gd name="csX6" fmla="*/ 0 w 2864644"/>
+                <a:gd name="csY6" fmla="*/ 931863 h 1093788"/>
+                <a:gd name="csX7" fmla="*/ 0 w 2864644"/>
+                <a:gd name="csY7" fmla="*/ 161925 h 1093788"/>
+                <a:gd name="csX8" fmla="*/ 161925 w 2864644"/>
+                <a:gd name="csY8" fmla="*/ 0 h 1093788"/>
+              </a:gdLst>
+              <a:ahLst/>
+              <a:cxnLst>
+                <a:cxn ang="0">
+                  <a:pos x="csX0" y="csY0"/>
+                </a:cxn>
+                <a:cxn ang="0">
+                  <a:pos x="csX1" y="csY1"/>
+                </a:cxn>
+                <a:cxn ang="0">
+                  <a:pos x="csX2" y="csY2"/>
+                </a:cxn>
+                <a:cxn ang="0">
+                  <a:pos x="csX3" y="csY3"/>
+                </a:cxn>
+                <a:cxn ang="0">
+                  <a:pos x="csX4" y="csY4"/>
+                </a:cxn>
+                <a:cxn ang="0">
+                  <a:pos x="csX5" y="csY5"/>
+                </a:cxn>
+                <a:cxn ang="0">
+                  <a:pos x="csX6" y="csY6"/>
+                </a:cxn>
+                <a:cxn ang="0">
+                  <a:pos x="csX7" y="csY7"/>
+                </a:cxn>
+                <a:cxn ang="0">
+                  <a:pos x="csX8" y="csY8"/>
+                </a:cxn>
+              </a:cxnLst>
+              <a:rect l="l" t="t" r="r" b="b"/>
+              <a:pathLst>
+                <a:path w="2864644" h="1093788">
+                  <a:moveTo>
+                    <a:pt x="161925" y="0"/>
+                  </a:moveTo>
+                  <a:lnTo>
+                    <a:pt x="2702719" y="0"/>
+                  </a:lnTo>
+                  <a:cubicBezTo>
+                    <a:pt x="2702719" y="89429"/>
+                    <a:pt x="2775215" y="161925"/>
+                    <a:pt x="2864644" y="161925"/>
+                  </a:cubicBezTo>
+                  <a:lnTo>
+                    <a:pt x="2864644" y="931863"/>
+                  </a:lnTo>
+                  <a:cubicBezTo>
+                    <a:pt x="2775215" y="931863"/>
+                    <a:pt x="2702719" y="1004359"/>
+                    <a:pt x="2702719" y="1093788"/>
+                  </a:cubicBezTo>
+                  <a:lnTo>
+                    <a:pt x="161925" y="1093788"/>
+                  </a:lnTo>
+                  <a:cubicBezTo>
+                    <a:pt x="161925" y="1004359"/>
+                    <a:pt x="89429" y="931863"/>
+                    <a:pt x="0" y="931863"/>
+                  </a:cubicBezTo>
+                  <a:lnTo>
+                    <a:pt x="0" y="161925"/>
+                  </a:lnTo>
+                  <a:cubicBezTo>
+                    <a:pt x="89429" y="161925"/>
+                    <a:pt x="161925" y="89429"/>
+                    <a:pt x="161925" y="0"/>
+                  </a:cubicBezTo>
+                  <a:close/>
+                </a:path>
+              </a:pathLst>
+            </a:custGeom>
+            <a:solidFill>
+              <a:srgbClr val="E6E6E6"/>
+            </a:solidFill>
+            <a:ln w="3175" algn="ctr">
+              <a:solidFill>
+                <a:schemeClr val="bg1">
+                  <a:lumMod val="65000"/>
+                </a:schemeClr>
+              </a:solidFill>
+              <a:miter lim="800000"/>
+              <a:headEnd/>
+              <a:tailEnd/>
+            </a:ln>
+          </p:spPr>
+          <p:txBody>
+            <a:bodyPr wrap="square" lIns="88900" tIns="88900" rIns="88900" bIns="88900" rtlCol="0" anchor="ctr">
+              <a:noAutofit/>
+            </a:bodyPr>
+            <a:lstStyle/>
+            <a:p>
+              <a:pPr algn="ctr">
+                <a:lnSpc>
+                  <a:spcPct val="106000"/>
+                </a:lnSpc>
+                <a:buFont typeface="Wingdings 2" pitchFamily="18" charset="2"/>
+                <a:buNone/>
+              </a:pPr>
+              <a:r>
+                <a:rPr lang="en-US" altLang="ko-KR" sz="1600" b="1" dirty="0">
+                  <a:solidFill>
+                    <a:schemeClr val="bg1"/>
+                  </a:solidFill>
+                </a:rPr>
+                <a:t>`</a:t>
+              </a:r>
+              <a:endParaRPr lang="ko-KR" altLang="en-US" sz="1600" b="1" dirty="0">
+                <a:solidFill>
+                  <a:schemeClr val="bg1"/>
+                </a:solidFill>
+              </a:endParaRPr>
+            </a:p>
+          </p:txBody>
+        </p:sp>
+        <p:sp>
+          <p:nvSpPr>
+            <p:cNvPr id="38" name="직사각형 37">
+              <a:extLst>
+                <a:ext uri="{FF2B5EF4-FFF2-40B4-BE49-F238E27FC236}">
+                  <a16:creationId xmlns:a16="http://schemas.microsoft.com/office/drawing/2014/main" id="{89421513-3987-073C-51D5-F47AD22A1120}"/>
+                </a:ext>
+              </a:extLst>
+            </p:cNvPr>
+            <p:cNvSpPr/>
+            <p:nvPr/>
+          </p:nvSpPr>
+          <p:spPr bwMode="gray">
+            <a:xfrm>
+              <a:off x="1105658" y="2813050"/>
+              <a:ext cx="717550" cy="762000"/>
+            </a:xfrm>
+            <a:prstGeom prst="rect">
+              <a:avLst/>
+            </a:prstGeom>
+            <a:noFill/>
+            <a:ln w="19050" algn="ctr">
+              <a:noFill/>
+              <a:miter lim="800000"/>
+              <a:headEnd/>
+              <a:tailEnd/>
+            </a:ln>
+          </p:spPr>
+          <p:txBody>
+            <a:bodyPr wrap="none" lIns="88900" tIns="88900" rIns="88900" bIns="88900" rtlCol="0" anchor="ctr"/>
+            <a:lstStyle/>
+            <a:p>
+              <a:pPr algn="ctr">
+                <a:lnSpc>
+                  <a:spcPct val="106000"/>
+                </a:lnSpc>
+                <a:buFont typeface="Wingdings 2" pitchFamily="18" charset="2"/>
+                <a:buNone/>
+              </a:pPr>
+              <a:r>
+                <a:rPr lang="en-US" altLang="ko-KR" sz="4400" b="1" dirty="0">
+                  <a:latin typeface="나눔고딕" panose="020D0604000000000000" pitchFamily="50" charset="-127"/>
+                  <a:ea typeface="나눔고딕" panose="020D0604000000000000" pitchFamily="50" charset="-127"/>
+                </a:rPr>
+                <a:t>F</a:t>
+              </a:r>
+              <a:r>
+                <a:rPr lang="ko-KR" altLang="en-US" sz="4400" b="1" dirty="0">
+                  <a:latin typeface="나눔고딕" panose="020D0604000000000000" pitchFamily="50" charset="-127"/>
+                  <a:ea typeface="나눔고딕" panose="020D0604000000000000" pitchFamily="50" charset="-127"/>
+                </a:rPr>
+                <a:t>상</a:t>
+              </a:r>
+            </a:p>
+          </p:txBody>
+        </p:sp>
+        <p:sp>
+          <p:nvSpPr>
+            <p:cNvPr id="39" name="직사각형 38">
+              <a:extLst>
+                <a:ext uri="{FF2B5EF4-FFF2-40B4-BE49-F238E27FC236}">
+                  <a16:creationId xmlns:a16="http://schemas.microsoft.com/office/drawing/2014/main" id="{0A3ADE63-66E1-716D-1213-50B8F80F84D1}"/>
+                </a:ext>
+              </a:extLst>
+            </p:cNvPr>
+            <p:cNvSpPr/>
+            <p:nvPr/>
+          </p:nvSpPr>
+          <p:spPr bwMode="gray">
+            <a:xfrm>
+              <a:off x="1958153" y="2662936"/>
+              <a:ext cx="2057666" cy="1096518"/>
+            </a:xfrm>
+            <a:prstGeom prst="rect">
+              <a:avLst/>
+            </a:prstGeom>
+            <a:noFill/>
+            <a:ln w="19050" algn="ctr">
+              <a:noFill/>
+              <a:miter lim="800000"/>
+              <a:headEnd/>
+              <a:tailEnd/>
+            </a:ln>
+          </p:spPr>
+          <p:txBody>
+            <a:bodyPr wrap="none" lIns="88900" tIns="88900" rIns="88900" bIns="88900" rtlCol="0" anchor="ctr"/>
+            <a:lstStyle/>
+            <a:p>
+              <a:pPr algn="ctr">
+                <a:lnSpc>
+                  <a:spcPct val="106000"/>
+                </a:lnSpc>
+                <a:buFont typeface="Wingdings 2" pitchFamily="18" charset="2"/>
+                <a:buNone/>
+              </a:pPr>
+              <a:r>
+                <a:rPr lang="ko-KR" altLang="en-US" sz="1600" b="1" dirty="0" err="1">
+                  <a:latin typeface="나눔고딕" panose="020D0604000000000000" pitchFamily="50" charset="-127"/>
+                  <a:ea typeface="나눔고딕" panose="020D0604000000000000" pitchFamily="50" charset="-127"/>
+                </a:rPr>
+                <a:t>디포르메</a:t>
+              </a:r>
+              <a:endParaRPr lang="en-US" altLang="ko-KR" sz="1600" b="1" dirty="0">
+                <a:latin typeface="나눔고딕" panose="020D0604000000000000" pitchFamily="50" charset="-127"/>
+                <a:ea typeface="나눔고딕" panose="020D0604000000000000" pitchFamily="50" charset="-127"/>
+              </a:endParaRPr>
+            </a:p>
+            <a:p>
+              <a:pPr algn="ctr">
+                <a:lnSpc>
+                  <a:spcPct val="106000"/>
+                </a:lnSpc>
+                <a:buFont typeface="Wingdings 2" pitchFamily="18" charset="2"/>
+                <a:buNone/>
+              </a:pPr>
+              <a:r>
+                <a:rPr lang="ko-KR" altLang="en-US" sz="1600" b="1" dirty="0">
+                  <a:latin typeface="나눔고딕" panose="020D0604000000000000" pitchFamily="50" charset="-127"/>
+                  <a:ea typeface="나눔고딕" panose="020D0604000000000000" pitchFamily="50" charset="-127"/>
+                </a:rPr>
+                <a:t>아크릴 스탠드</a:t>
+              </a:r>
+            </a:p>
+          </p:txBody>
+        </p:sp>
+      </p:grpSp>
+      <p:grpSp>
+        <p:nvGrpSpPr>
+          <p:cNvPr id="40" name="그룹 39">
+            <a:extLst>
+              <a:ext uri="{FF2B5EF4-FFF2-40B4-BE49-F238E27FC236}">
+                <a16:creationId xmlns:a16="http://schemas.microsoft.com/office/drawing/2014/main" id="{F7358D3C-2890-E066-C5ED-9A45B6ED24F5}"/>
+              </a:ext>
+            </a:extLst>
+          </p:cNvPr>
+          <p:cNvGrpSpPr/>
+          <p:nvPr/>
+        </p:nvGrpSpPr>
+        <p:grpSpPr>
+          <a:xfrm>
+            <a:off x="4748067" y="5074086"/>
+            <a:ext cx="3697200" cy="1486800"/>
+            <a:chOff x="677717" y="2434934"/>
+            <a:chExt cx="3697200" cy="1486800"/>
+          </a:xfrm>
+        </p:grpSpPr>
+        <p:sp>
+          <p:nvSpPr>
+            <p:cNvPr id="41" name="자유형: 도형 40">
+              <a:extLst>
+                <a:ext uri="{FF2B5EF4-FFF2-40B4-BE49-F238E27FC236}">
+                  <a16:creationId xmlns:a16="http://schemas.microsoft.com/office/drawing/2014/main" id="{9553FB6F-AE9B-9601-122B-167F74A661E6}"/>
+                </a:ext>
+              </a:extLst>
+            </p:cNvPr>
+            <p:cNvSpPr/>
+            <p:nvPr/>
+          </p:nvSpPr>
+          <p:spPr bwMode="gray">
+            <a:xfrm>
+              <a:off x="677717" y="2434934"/>
+              <a:ext cx="3697200" cy="1486800"/>
+            </a:xfrm>
+            <a:custGeom>
+              <a:avLst/>
+              <a:gdLst>
+                <a:gd name="csX0" fmla="*/ 0 w 3697200"/>
+                <a:gd name="csY0" fmla="*/ 0 h 1486800"/>
+                <a:gd name="csX1" fmla="*/ 3697200 w 3697200"/>
+                <a:gd name="csY1" fmla="*/ 0 h 1486800"/>
+                <a:gd name="csX2" fmla="*/ 3697200 w 3697200"/>
+                <a:gd name="csY2" fmla="*/ 517650 h 1486800"/>
+                <a:gd name="csX3" fmla="*/ 3691379 w 3697200"/>
+                <a:gd name="csY3" fmla="*/ 517063 h 1486800"/>
+                <a:gd name="csX4" fmla="*/ 3465042 w 3697200"/>
+                <a:gd name="csY4" fmla="*/ 743400 h 1486800"/>
+                <a:gd name="csX5" fmla="*/ 3691379 w 3697200"/>
+                <a:gd name="csY5" fmla="*/ 969737 h 1486800"/>
+                <a:gd name="csX6" fmla="*/ 3697200 w 3697200"/>
+                <a:gd name="csY6" fmla="*/ 969150 h 1486800"/>
+                <a:gd name="csX7" fmla="*/ 3697200 w 3697200"/>
+                <a:gd name="csY7" fmla="*/ 1486800 h 1486800"/>
+                <a:gd name="csX8" fmla="*/ 0 w 3697200"/>
+                <a:gd name="csY8" fmla="*/ 1486800 h 1486800"/>
+                <a:gd name="csX9" fmla="*/ 0 w 3697200"/>
+                <a:gd name="csY9" fmla="*/ 969150 h 1486800"/>
+                <a:gd name="csX10" fmla="*/ 5821 w 3697200"/>
+                <a:gd name="csY10" fmla="*/ 969737 h 1486800"/>
+                <a:gd name="csX11" fmla="*/ 232158 w 3697200"/>
+                <a:gd name="csY11" fmla="*/ 743400 h 1486800"/>
+                <a:gd name="csX12" fmla="*/ 5821 w 3697200"/>
+                <a:gd name="csY12" fmla="*/ 517063 h 1486800"/>
+                <a:gd name="csX13" fmla="*/ 0 w 3697200"/>
+                <a:gd name="csY13" fmla="*/ 517650 h 1486800"/>
+              </a:gdLst>
+              <a:ahLst/>
+              <a:cxnLst>
+                <a:cxn ang="0">
+                  <a:pos x="csX0" y="csY0"/>
+                </a:cxn>
+                <a:cxn ang="0">
+                  <a:pos x="csX1" y="csY1"/>
+                </a:cxn>
+                <a:cxn ang="0">
+                  <a:pos x="csX2" y="csY2"/>
+                </a:cxn>
+                <a:cxn ang="0">
+                  <a:pos x="csX3" y="csY3"/>
+                </a:cxn>
+                <a:cxn ang="0">
+                  <a:pos x="csX4" y="csY4"/>
+                </a:cxn>
+                <a:cxn ang="0">
+                  <a:pos x="csX5" y="csY5"/>
+                </a:cxn>
+                <a:cxn ang="0">
+                  <a:pos x="csX6" y="csY6"/>
+                </a:cxn>
+                <a:cxn ang="0">
+                  <a:pos x="csX7" y="csY7"/>
+                </a:cxn>
+                <a:cxn ang="0">
+                  <a:pos x="csX8" y="csY8"/>
+                </a:cxn>
+                <a:cxn ang="0">
+                  <a:pos x="csX9" y="csY9"/>
+                </a:cxn>
+                <a:cxn ang="0">
+                  <a:pos x="csX10" y="csY10"/>
+                </a:cxn>
+                <a:cxn ang="0">
+                  <a:pos x="csX11" y="csY11"/>
+                </a:cxn>
+                <a:cxn ang="0">
+                  <a:pos x="csX12" y="csY12"/>
+                </a:cxn>
+                <a:cxn ang="0">
+                  <a:pos x="csX13" y="csY13"/>
+                </a:cxn>
+              </a:cxnLst>
+              <a:rect l="l" t="t" r="r" b="b"/>
+              <a:pathLst>
+                <a:path w="3697200" h="1486800">
+                  <a:moveTo>
+                    <a:pt x="0" y="0"/>
+                  </a:moveTo>
+                  <a:lnTo>
+                    <a:pt x="3697200" y="0"/>
+                  </a:lnTo>
+                  <a:lnTo>
+                    <a:pt x="3697200" y="517650"/>
+                  </a:lnTo>
+                  <a:lnTo>
+                    <a:pt x="3691379" y="517063"/>
+                  </a:lnTo>
+                  <a:cubicBezTo>
+                    <a:pt x="3566377" y="517063"/>
+                    <a:pt x="3465042" y="618398"/>
+                    <a:pt x="3465042" y="743400"/>
+                  </a:cubicBezTo>
+                  <a:cubicBezTo>
+                    <a:pt x="3465042" y="868402"/>
+                    <a:pt x="3566377" y="969737"/>
+                    <a:pt x="3691379" y="969737"/>
+                  </a:cubicBezTo>
+                  <a:lnTo>
+                    <a:pt x="3697200" y="969150"/>
+                  </a:lnTo>
+                  <a:lnTo>
+                    <a:pt x="3697200" y="1486800"/>
+                  </a:lnTo>
+                  <a:lnTo>
+                    <a:pt x="0" y="1486800"/>
+                  </a:lnTo>
+                  <a:lnTo>
+                    <a:pt x="0" y="969150"/>
+                  </a:lnTo>
+                  <a:lnTo>
+                    <a:pt x="5821" y="969737"/>
+                  </a:lnTo>
+                  <a:cubicBezTo>
+                    <a:pt x="130823" y="969737"/>
+                    <a:pt x="232158" y="868402"/>
+                    <a:pt x="232158" y="743400"/>
+                  </a:cubicBezTo>
+                  <a:cubicBezTo>
+                    <a:pt x="232158" y="618398"/>
+                    <a:pt x="130823" y="517063"/>
+                    <a:pt x="5821" y="517063"/>
+                  </a:cubicBezTo>
+                  <a:lnTo>
+                    <a:pt x="0" y="517650"/>
+                  </a:lnTo>
+                  <a:close/>
+                </a:path>
+              </a:pathLst>
+            </a:custGeom>
+            <a:solidFill>
+              <a:srgbClr val="DFEAC0"/>
+            </a:solidFill>
+            <a:ln w="3175" algn="ctr">
+              <a:solidFill>
+                <a:schemeClr val="bg1">
+                  <a:lumMod val="65000"/>
+                </a:schemeClr>
+              </a:solidFill>
+              <a:miter lim="800000"/>
+              <a:headEnd/>
+              <a:tailEnd/>
+            </a:ln>
+          </p:spPr>
+          <p:txBody>
+            <a:bodyPr wrap="square" lIns="88900" tIns="88900" rIns="88900" bIns="88900" rtlCol="0" anchor="ctr">
+              <a:noAutofit/>
+            </a:bodyPr>
+            <a:lstStyle/>
+            <a:p>
+              <a:pPr algn="ctr">
+                <a:lnSpc>
+                  <a:spcPct val="106000"/>
+                </a:lnSpc>
+                <a:buFont typeface="Wingdings 2" pitchFamily="18" charset="2"/>
+                <a:buNone/>
+              </a:pPr>
+              <a:endParaRPr lang="ko-KR" altLang="en-US" sz="1600" b="1" dirty="0">
+                <a:solidFill>
+                  <a:schemeClr val="bg1"/>
+                </a:solidFill>
+              </a:endParaRPr>
+            </a:p>
+          </p:txBody>
+        </p:sp>
+        <p:sp>
+          <p:nvSpPr>
+            <p:cNvPr id="42" name="자유형: 도형 41">
+              <a:extLst>
+                <a:ext uri="{FF2B5EF4-FFF2-40B4-BE49-F238E27FC236}">
+                  <a16:creationId xmlns:a16="http://schemas.microsoft.com/office/drawing/2014/main" id="{1A217229-AAA0-D821-A105-42E693F1753F}"/>
+                </a:ext>
+              </a:extLst>
+            </p:cNvPr>
+            <p:cNvSpPr/>
+            <p:nvPr/>
+          </p:nvSpPr>
+          <p:spPr bwMode="gray">
+            <a:xfrm>
+              <a:off x="970713" y="2610952"/>
+              <a:ext cx="3144088" cy="1200486"/>
+            </a:xfrm>
+            <a:custGeom>
+              <a:avLst/>
+              <a:gdLst>
+                <a:gd name="csX0" fmla="*/ 161925 w 2864644"/>
+                <a:gd name="csY0" fmla="*/ 0 h 1093788"/>
+                <a:gd name="csX1" fmla="*/ 2702719 w 2864644"/>
+                <a:gd name="csY1" fmla="*/ 0 h 1093788"/>
+                <a:gd name="csX2" fmla="*/ 2864644 w 2864644"/>
+                <a:gd name="csY2" fmla="*/ 161925 h 1093788"/>
+                <a:gd name="csX3" fmla="*/ 2864644 w 2864644"/>
+                <a:gd name="csY3" fmla="*/ 931863 h 1093788"/>
+                <a:gd name="csX4" fmla="*/ 2702719 w 2864644"/>
+                <a:gd name="csY4" fmla="*/ 1093788 h 1093788"/>
+                <a:gd name="csX5" fmla="*/ 161925 w 2864644"/>
+                <a:gd name="csY5" fmla="*/ 1093788 h 1093788"/>
+                <a:gd name="csX6" fmla="*/ 0 w 2864644"/>
+                <a:gd name="csY6" fmla="*/ 931863 h 1093788"/>
+                <a:gd name="csX7" fmla="*/ 0 w 2864644"/>
+                <a:gd name="csY7" fmla="*/ 161925 h 1093788"/>
+                <a:gd name="csX8" fmla="*/ 161925 w 2864644"/>
+                <a:gd name="csY8" fmla="*/ 0 h 1093788"/>
+              </a:gdLst>
+              <a:ahLst/>
+              <a:cxnLst>
+                <a:cxn ang="0">
+                  <a:pos x="csX0" y="csY0"/>
+                </a:cxn>
+                <a:cxn ang="0">
+                  <a:pos x="csX1" y="csY1"/>
+                </a:cxn>
+                <a:cxn ang="0">
+                  <a:pos x="csX2" y="csY2"/>
+                </a:cxn>
+                <a:cxn ang="0">
+                  <a:pos x="csX3" y="csY3"/>
+                </a:cxn>
+                <a:cxn ang="0">
+                  <a:pos x="csX4" y="csY4"/>
+                </a:cxn>
+                <a:cxn ang="0">
+                  <a:pos x="csX5" y="csY5"/>
+                </a:cxn>
+                <a:cxn ang="0">
+                  <a:pos x="csX6" y="csY6"/>
+                </a:cxn>
+                <a:cxn ang="0">
+                  <a:pos x="csX7" y="csY7"/>
+                </a:cxn>
+                <a:cxn ang="0">
+                  <a:pos x="csX8" y="csY8"/>
+                </a:cxn>
+              </a:cxnLst>
+              <a:rect l="l" t="t" r="r" b="b"/>
+              <a:pathLst>
+                <a:path w="2864644" h="1093788">
+                  <a:moveTo>
+                    <a:pt x="161925" y="0"/>
+                  </a:moveTo>
+                  <a:lnTo>
+                    <a:pt x="2702719" y="0"/>
+                  </a:lnTo>
+                  <a:cubicBezTo>
+                    <a:pt x="2702719" y="89429"/>
+                    <a:pt x="2775215" y="161925"/>
+                    <a:pt x="2864644" y="161925"/>
+                  </a:cubicBezTo>
+                  <a:lnTo>
+                    <a:pt x="2864644" y="931863"/>
+                  </a:lnTo>
+                  <a:cubicBezTo>
+                    <a:pt x="2775215" y="931863"/>
+                    <a:pt x="2702719" y="1004359"/>
+                    <a:pt x="2702719" y="1093788"/>
+                  </a:cubicBezTo>
+                  <a:lnTo>
+                    <a:pt x="161925" y="1093788"/>
+                  </a:lnTo>
+                  <a:cubicBezTo>
+                    <a:pt x="161925" y="1004359"/>
+                    <a:pt x="89429" y="931863"/>
+                    <a:pt x="0" y="931863"/>
+                  </a:cubicBezTo>
+                  <a:lnTo>
+                    <a:pt x="0" y="161925"/>
+                  </a:lnTo>
+                  <a:cubicBezTo>
+                    <a:pt x="89429" y="161925"/>
+                    <a:pt x="161925" y="89429"/>
+                    <a:pt x="161925" y="0"/>
+                  </a:cubicBezTo>
+                  <a:close/>
+                </a:path>
+              </a:pathLst>
+            </a:custGeom>
+            <a:solidFill>
+              <a:srgbClr val="E6E6E6"/>
+            </a:solidFill>
+            <a:ln w="3175" algn="ctr">
+              <a:solidFill>
+                <a:schemeClr val="bg1">
+                  <a:lumMod val="65000"/>
+                </a:schemeClr>
+              </a:solidFill>
+              <a:miter lim="800000"/>
+              <a:headEnd/>
+              <a:tailEnd/>
+            </a:ln>
+          </p:spPr>
+          <p:txBody>
+            <a:bodyPr wrap="square" lIns="88900" tIns="88900" rIns="88900" bIns="88900" rtlCol="0" anchor="ctr">
+              <a:noAutofit/>
+            </a:bodyPr>
+            <a:lstStyle/>
+            <a:p>
+              <a:pPr algn="ctr">
+                <a:lnSpc>
+                  <a:spcPct val="106000"/>
+                </a:lnSpc>
+                <a:buFont typeface="Wingdings 2" pitchFamily="18" charset="2"/>
+                <a:buNone/>
+              </a:pPr>
+              <a:r>
+                <a:rPr lang="en-US" altLang="ko-KR" sz="1600" b="1" dirty="0">
+                  <a:solidFill>
+                    <a:schemeClr val="bg1"/>
+                  </a:solidFill>
+                </a:rPr>
+                <a:t>`</a:t>
+              </a:r>
+              <a:endParaRPr lang="ko-KR" altLang="en-US" sz="1600" b="1" dirty="0">
+                <a:solidFill>
+                  <a:schemeClr val="bg1"/>
+                </a:solidFill>
+              </a:endParaRPr>
+            </a:p>
+          </p:txBody>
+        </p:sp>
+        <p:sp>
+          <p:nvSpPr>
+            <p:cNvPr id="43" name="직사각형 42">
+              <a:extLst>
+                <a:ext uri="{FF2B5EF4-FFF2-40B4-BE49-F238E27FC236}">
+                  <a16:creationId xmlns:a16="http://schemas.microsoft.com/office/drawing/2014/main" id="{5ECEF5B3-8BFE-C1F3-4CC2-21EFEEEB212A}"/>
+                </a:ext>
+              </a:extLst>
+            </p:cNvPr>
+            <p:cNvSpPr/>
+            <p:nvPr/>
+          </p:nvSpPr>
+          <p:spPr bwMode="gray">
+            <a:xfrm>
+              <a:off x="1105658" y="2813050"/>
+              <a:ext cx="717550" cy="762000"/>
+            </a:xfrm>
+            <a:prstGeom prst="rect">
+              <a:avLst/>
+            </a:prstGeom>
+            <a:noFill/>
+            <a:ln w="19050" algn="ctr">
+              <a:noFill/>
+              <a:miter lim="800000"/>
+              <a:headEnd/>
+              <a:tailEnd/>
+            </a:ln>
+          </p:spPr>
+          <p:txBody>
+            <a:bodyPr wrap="none" lIns="88900" tIns="88900" rIns="88900" bIns="88900" rtlCol="0" anchor="ctr"/>
+            <a:lstStyle/>
+            <a:p>
+              <a:pPr algn="ctr">
+                <a:lnSpc>
+                  <a:spcPct val="106000"/>
+                </a:lnSpc>
+                <a:buFont typeface="Wingdings 2" pitchFamily="18" charset="2"/>
+                <a:buNone/>
+              </a:pPr>
+              <a:r>
+                <a:rPr lang="en-US" altLang="ko-KR" sz="4400" b="1" dirty="0">
+                  <a:latin typeface="나눔고딕" panose="020D0604000000000000" pitchFamily="50" charset="-127"/>
+                  <a:ea typeface="나눔고딕" panose="020D0604000000000000" pitchFamily="50" charset="-127"/>
+                </a:rPr>
+                <a:t>G</a:t>
+              </a:r>
+              <a:r>
+                <a:rPr lang="ko-KR" altLang="en-US" sz="4400" b="1" dirty="0">
+                  <a:latin typeface="나눔고딕" panose="020D0604000000000000" pitchFamily="50" charset="-127"/>
+                  <a:ea typeface="나눔고딕" panose="020D0604000000000000" pitchFamily="50" charset="-127"/>
+                </a:rPr>
+                <a:t>상</a:t>
+              </a:r>
+            </a:p>
+          </p:txBody>
+        </p:sp>
+        <p:sp>
+          <p:nvSpPr>
+            <p:cNvPr id="44" name="직사각형 43">
+              <a:extLst>
+                <a:ext uri="{FF2B5EF4-FFF2-40B4-BE49-F238E27FC236}">
+                  <a16:creationId xmlns:a16="http://schemas.microsoft.com/office/drawing/2014/main" id="{E9EA55D9-79E1-826F-194D-300FE7B25002}"/>
+                </a:ext>
+              </a:extLst>
+            </p:cNvPr>
+            <p:cNvSpPr/>
+            <p:nvPr/>
+          </p:nvSpPr>
+          <p:spPr bwMode="gray">
+            <a:xfrm>
+              <a:off x="1958153" y="2662936"/>
+              <a:ext cx="2057666" cy="1096518"/>
+            </a:xfrm>
+            <a:prstGeom prst="rect">
+              <a:avLst/>
+            </a:prstGeom>
+            <a:noFill/>
+            <a:ln w="19050" algn="ctr">
+              <a:noFill/>
+              <a:miter lim="800000"/>
+              <a:headEnd/>
+              <a:tailEnd/>
+            </a:ln>
+          </p:spPr>
+          <p:txBody>
+            <a:bodyPr wrap="none" lIns="88900" tIns="88900" rIns="88900" bIns="88900" rtlCol="0" anchor="ctr"/>
+            <a:lstStyle/>
+            <a:p>
+              <a:pPr algn="ctr">
+                <a:lnSpc>
+                  <a:spcPct val="106000"/>
+                </a:lnSpc>
+                <a:buFont typeface="Wingdings 2" pitchFamily="18" charset="2"/>
+                <a:buNone/>
+              </a:pPr>
+              <a:r>
+                <a:rPr lang="ko-KR" altLang="en-US" sz="1600" b="1" dirty="0">
+                  <a:latin typeface="나눔고딕" panose="020D0604000000000000" pitchFamily="50" charset="-127"/>
+                  <a:ea typeface="나눔고딕" panose="020D0604000000000000" pitchFamily="50" charset="-127"/>
+                </a:rPr>
+                <a:t>문구 컬렉션</a:t>
+              </a:r>
+            </a:p>
+          </p:txBody>
+        </p:sp>
+      </p:grpSp>
+      <p:grpSp>
+        <p:nvGrpSpPr>
+          <p:cNvPr id="45" name="그룹 44">
+            <a:extLst>
+              <a:ext uri="{FF2B5EF4-FFF2-40B4-BE49-F238E27FC236}">
+                <a16:creationId xmlns:a16="http://schemas.microsoft.com/office/drawing/2014/main" id="{6CC3EBDC-6C1E-8F4C-121E-481FF9B364D3}"/>
+              </a:ext>
+            </a:extLst>
+          </p:cNvPr>
+          <p:cNvGrpSpPr/>
+          <p:nvPr/>
+        </p:nvGrpSpPr>
+        <p:grpSpPr>
+          <a:xfrm>
+            <a:off x="8691417" y="5074086"/>
+            <a:ext cx="3697200" cy="1486800"/>
+            <a:chOff x="677717" y="2434934"/>
+            <a:chExt cx="3697200" cy="1486800"/>
+          </a:xfrm>
+        </p:grpSpPr>
+        <p:sp>
+          <p:nvSpPr>
+            <p:cNvPr id="46" name="자유형: 도형 45">
+              <a:extLst>
+                <a:ext uri="{FF2B5EF4-FFF2-40B4-BE49-F238E27FC236}">
+                  <a16:creationId xmlns:a16="http://schemas.microsoft.com/office/drawing/2014/main" id="{62CE1419-2047-55D0-1D76-0AAA421EDD3E}"/>
+                </a:ext>
+              </a:extLst>
+            </p:cNvPr>
+            <p:cNvSpPr/>
+            <p:nvPr/>
+          </p:nvSpPr>
+          <p:spPr bwMode="gray">
+            <a:xfrm>
+              <a:off x="677717" y="2434934"/>
+              <a:ext cx="3697200" cy="1486800"/>
+            </a:xfrm>
+            <a:custGeom>
+              <a:avLst/>
+              <a:gdLst>
+                <a:gd name="csX0" fmla="*/ 0 w 3697200"/>
+                <a:gd name="csY0" fmla="*/ 0 h 1486800"/>
+                <a:gd name="csX1" fmla="*/ 3697200 w 3697200"/>
+                <a:gd name="csY1" fmla="*/ 0 h 1486800"/>
+                <a:gd name="csX2" fmla="*/ 3697200 w 3697200"/>
+                <a:gd name="csY2" fmla="*/ 517650 h 1486800"/>
+                <a:gd name="csX3" fmla="*/ 3691379 w 3697200"/>
+                <a:gd name="csY3" fmla="*/ 517063 h 1486800"/>
+                <a:gd name="csX4" fmla="*/ 3465042 w 3697200"/>
+                <a:gd name="csY4" fmla="*/ 743400 h 1486800"/>
+                <a:gd name="csX5" fmla="*/ 3691379 w 3697200"/>
+                <a:gd name="csY5" fmla="*/ 969737 h 1486800"/>
+                <a:gd name="csX6" fmla="*/ 3697200 w 3697200"/>
+                <a:gd name="csY6" fmla="*/ 969150 h 1486800"/>
+                <a:gd name="csX7" fmla="*/ 3697200 w 3697200"/>
+                <a:gd name="csY7" fmla="*/ 1486800 h 1486800"/>
+                <a:gd name="csX8" fmla="*/ 0 w 3697200"/>
+                <a:gd name="csY8" fmla="*/ 1486800 h 1486800"/>
+                <a:gd name="csX9" fmla="*/ 0 w 3697200"/>
+                <a:gd name="csY9" fmla="*/ 969150 h 1486800"/>
+                <a:gd name="csX10" fmla="*/ 5821 w 3697200"/>
+                <a:gd name="csY10" fmla="*/ 969737 h 1486800"/>
+                <a:gd name="csX11" fmla="*/ 232158 w 3697200"/>
+                <a:gd name="csY11" fmla="*/ 743400 h 1486800"/>
+                <a:gd name="csX12" fmla="*/ 5821 w 3697200"/>
+                <a:gd name="csY12" fmla="*/ 517063 h 1486800"/>
+                <a:gd name="csX13" fmla="*/ 0 w 3697200"/>
+                <a:gd name="csY13" fmla="*/ 517650 h 1486800"/>
+              </a:gdLst>
+              <a:ahLst/>
+              <a:cxnLst>
+                <a:cxn ang="0">
+                  <a:pos x="csX0" y="csY0"/>
+                </a:cxn>
+                <a:cxn ang="0">
+                  <a:pos x="csX1" y="csY1"/>
+                </a:cxn>
+                <a:cxn ang="0">
+                  <a:pos x="csX2" y="csY2"/>
+                </a:cxn>
+                <a:cxn ang="0">
+                  <a:pos x="csX3" y="csY3"/>
+                </a:cxn>
+                <a:cxn ang="0">
+                  <a:pos x="csX4" y="csY4"/>
+                </a:cxn>
+                <a:cxn ang="0">
+                  <a:pos x="csX5" y="csY5"/>
+                </a:cxn>
+                <a:cxn ang="0">
+                  <a:pos x="csX6" y="csY6"/>
+                </a:cxn>
+                <a:cxn ang="0">
+                  <a:pos x="csX7" y="csY7"/>
+                </a:cxn>
+                <a:cxn ang="0">
+                  <a:pos x="csX8" y="csY8"/>
+                </a:cxn>
+                <a:cxn ang="0">
+                  <a:pos x="csX9" y="csY9"/>
+                </a:cxn>
+                <a:cxn ang="0">
+                  <a:pos x="csX10" y="csY10"/>
+                </a:cxn>
+                <a:cxn ang="0">
+                  <a:pos x="csX11" y="csY11"/>
+                </a:cxn>
+                <a:cxn ang="0">
+                  <a:pos x="csX12" y="csY12"/>
+                </a:cxn>
+                <a:cxn ang="0">
+                  <a:pos x="csX13" y="csY13"/>
+                </a:cxn>
+              </a:cxnLst>
+              <a:rect l="l" t="t" r="r" b="b"/>
+              <a:pathLst>
+                <a:path w="3697200" h="1486800">
+                  <a:moveTo>
+                    <a:pt x="0" y="0"/>
+                  </a:moveTo>
+                  <a:lnTo>
+                    <a:pt x="3697200" y="0"/>
+                  </a:lnTo>
+                  <a:lnTo>
+                    <a:pt x="3697200" y="517650"/>
+                  </a:lnTo>
+                  <a:lnTo>
+                    <a:pt x="3691379" y="517063"/>
+                  </a:lnTo>
+                  <a:cubicBezTo>
+                    <a:pt x="3566377" y="517063"/>
+                    <a:pt x="3465042" y="618398"/>
+                    <a:pt x="3465042" y="743400"/>
+                  </a:cubicBezTo>
+                  <a:cubicBezTo>
+                    <a:pt x="3465042" y="868402"/>
+                    <a:pt x="3566377" y="969737"/>
+                    <a:pt x="3691379" y="969737"/>
+                  </a:cubicBezTo>
+                  <a:lnTo>
+                    <a:pt x="3697200" y="969150"/>
+                  </a:lnTo>
+                  <a:lnTo>
+                    <a:pt x="3697200" y="1486800"/>
+                  </a:lnTo>
+                  <a:lnTo>
+                    <a:pt x="0" y="1486800"/>
+                  </a:lnTo>
+                  <a:lnTo>
+                    <a:pt x="0" y="969150"/>
+                  </a:lnTo>
+                  <a:lnTo>
+                    <a:pt x="5821" y="969737"/>
+                  </a:lnTo>
+                  <a:cubicBezTo>
+                    <a:pt x="130823" y="969737"/>
+                    <a:pt x="232158" y="868402"/>
+                    <a:pt x="232158" y="743400"/>
+                  </a:cubicBezTo>
+                  <a:cubicBezTo>
+                    <a:pt x="232158" y="618398"/>
+                    <a:pt x="130823" y="517063"/>
+                    <a:pt x="5821" y="517063"/>
+                  </a:cubicBezTo>
+                  <a:lnTo>
+                    <a:pt x="0" y="517650"/>
+                  </a:lnTo>
+                  <a:close/>
+                </a:path>
+              </a:pathLst>
+            </a:custGeom>
+            <a:solidFill>
+              <a:srgbClr val="DFEAC0"/>
+            </a:solidFill>
+            <a:ln w="3175" algn="ctr">
+              <a:solidFill>
+                <a:schemeClr val="bg1">
+                  <a:lumMod val="65000"/>
+                </a:schemeClr>
+              </a:solidFill>
+              <a:miter lim="800000"/>
+              <a:headEnd/>
+              <a:tailEnd/>
+            </a:ln>
+          </p:spPr>
+          <p:txBody>
+            <a:bodyPr wrap="square" lIns="88900" tIns="88900" rIns="88900" bIns="88900" rtlCol="0" anchor="ctr">
+              <a:noAutofit/>
+            </a:bodyPr>
+            <a:lstStyle/>
+            <a:p>
+              <a:pPr algn="ctr">
+                <a:lnSpc>
+                  <a:spcPct val="106000"/>
+                </a:lnSpc>
+                <a:buFont typeface="Wingdings 2" pitchFamily="18" charset="2"/>
+                <a:buNone/>
+              </a:pPr>
+              <a:endParaRPr lang="ko-KR" altLang="en-US" sz="1600" b="1" dirty="0">
+                <a:solidFill>
+                  <a:schemeClr val="bg1"/>
+                </a:solidFill>
+              </a:endParaRPr>
+            </a:p>
+          </p:txBody>
+        </p:sp>
+        <p:sp>
+          <p:nvSpPr>
+            <p:cNvPr id="47" name="자유형: 도형 46">
+              <a:extLst>
+                <a:ext uri="{FF2B5EF4-FFF2-40B4-BE49-F238E27FC236}">
+                  <a16:creationId xmlns:a16="http://schemas.microsoft.com/office/drawing/2014/main" id="{3BEEA5E4-CEDE-A4CA-09FA-AD4F9643053F}"/>
+                </a:ext>
+              </a:extLst>
+            </p:cNvPr>
+            <p:cNvSpPr/>
+            <p:nvPr/>
+          </p:nvSpPr>
+          <p:spPr bwMode="gray">
+            <a:xfrm>
+              <a:off x="970713" y="2610952"/>
+              <a:ext cx="3144088" cy="1200486"/>
+            </a:xfrm>
+            <a:custGeom>
+              <a:avLst/>
+              <a:gdLst>
+                <a:gd name="csX0" fmla="*/ 161925 w 2864644"/>
+                <a:gd name="csY0" fmla="*/ 0 h 1093788"/>
+                <a:gd name="csX1" fmla="*/ 2702719 w 2864644"/>
+                <a:gd name="csY1" fmla="*/ 0 h 1093788"/>
+                <a:gd name="csX2" fmla="*/ 2864644 w 2864644"/>
+                <a:gd name="csY2" fmla="*/ 161925 h 1093788"/>
+                <a:gd name="csX3" fmla="*/ 2864644 w 2864644"/>
+                <a:gd name="csY3" fmla="*/ 931863 h 1093788"/>
+                <a:gd name="csX4" fmla="*/ 2702719 w 2864644"/>
+                <a:gd name="csY4" fmla="*/ 1093788 h 1093788"/>
+                <a:gd name="csX5" fmla="*/ 161925 w 2864644"/>
+                <a:gd name="csY5" fmla="*/ 1093788 h 1093788"/>
+                <a:gd name="csX6" fmla="*/ 0 w 2864644"/>
+                <a:gd name="csY6" fmla="*/ 931863 h 1093788"/>
+                <a:gd name="csX7" fmla="*/ 0 w 2864644"/>
+                <a:gd name="csY7" fmla="*/ 161925 h 1093788"/>
+                <a:gd name="csX8" fmla="*/ 161925 w 2864644"/>
+                <a:gd name="csY8" fmla="*/ 0 h 1093788"/>
+              </a:gdLst>
+              <a:ahLst/>
+              <a:cxnLst>
+                <a:cxn ang="0">
+                  <a:pos x="csX0" y="csY0"/>
+                </a:cxn>
+                <a:cxn ang="0">
+                  <a:pos x="csX1" y="csY1"/>
+                </a:cxn>
+                <a:cxn ang="0">
+                  <a:pos x="csX2" y="csY2"/>
+                </a:cxn>
+                <a:cxn ang="0">
+                  <a:pos x="csX3" y="csY3"/>
+                </a:cxn>
+                <a:cxn ang="0">
+                  <a:pos x="csX4" y="csY4"/>
+                </a:cxn>
+                <a:cxn ang="0">
+                  <a:pos x="csX5" y="csY5"/>
+                </a:cxn>
+                <a:cxn ang="0">
+                  <a:pos x="csX6" y="csY6"/>
+                </a:cxn>
+                <a:cxn ang="0">
+                  <a:pos x="csX7" y="csY7"/>
+                </a:cxn>
+                <a:cxn ang="0">
+                  <a:pos x="csX8" y="csY8"/>
+                </a:cxn>
+              </a:cxnLst>
+              <a:rect l="l" t="t" r="r" b="b"/>
+              <a:pathLst>
+                <a:path w="2864644" h="1093788">
+                  <a:moveTo>
+                    <a:pt x="161925" y="0"/>
+                  </a:moveTo>
+                  <a:lnTo>
+                    <a:pt x="2702719" y="0"/>
+                  </a:lnTo>
+                  <a:cubicBezTo>
+                    <a:pt x="2702719" y="89429"/>
+                    <a:pt x="2775215" y="161925"/>
+                    <a:pt x="2864644" y="161925"/>
+                  </a:cubicBezTo>
+                  <a:lnTo>
+                    <a:pt x="2864644" y="931863"/>
+                  </a:lnTo>
+                  <a:cubicBezTo>
+                    <a:pt x="2775215" y="931863"/>
+                    <a:pt x="2702719" y="1004359"/>
+                    <a:pt x="2702719" y="1093788"/>
+                  </a:cubicBezTo>
+                  <a:lnTo>
+                    <a:pt x="161925" y="1093788"/>
+                  </a:lnTo>
+                  <a:cubicBezTo>
+                    <a:pt x="161925" y="1004359"/>
+                    <a:pt x="89429" y="931863"/>
+                    <a:pt x="0" y="931863"/>
+                  </a:cubicBezTo>
+                  <a:lnTo>
+                    <a:pt x="0" y="161925"/>
+                  </a:lnTo>
+                  <a:cubicBezTo>
+                    <a:pt x="89429" y="161925"/>
+                    <a:pt x="161925" y="89429"/>
+                    <a:pt x="161925" y="0"/>
+                  </a:cubicBezTo>
+                  <a:close/>
+                </a:path>
+              </a:pathLst>
+            </a:custGeom>
+            <a:solidFill>
+              <a:srgbClr val="E6E6E6"/>
+            </a:solidFill>
+            <a:ln w="3175" algn="ctr">
+              <a:solidFill>
+                <a:schemeClr val="bg1">
+                  <a:lumMod val="65000"/>
+                </a:schemeClr>
+              </a:solidFill>
+              <a:miter lim="800000"/>
+              <a:headEnd/>
+              <a:tailEnd/>
+            </a:ln>
+          </p:spPr>
+          <p:txBody>
+            <a:bodyPr wrap="square" lIns="88900" tIns="88900" rIns="88900" bIns="88900" rtlCol="0" anchor="ctr">
+              <a:noAutofit/>
+            </a:bodyPr>
+            <a:lstStyle/>
+            <a:p>
+              <a:pPr algn="ctr">
+                <a:lnSpc>
+                  <a:spcPct val="106000"/>
+                </a:lnSpc>
+                <a:buFont typeface="Wingdings 2" pitchFamily="18" charset="2"/>
+                <a:buNone/>
+              </a:pPr>
+              <a:r>
+                <a:rPr lang="en-US" altLang="ko-KR" sz="1600" b="1" dirty="0">
+                  <a:solidFill>
+                    <a:schemeClr val="bg1"/>
+                  </a:solidFill>
+                </a:rPr>
+                <a:t>`</a:t>
+              </a:r>
+              <a:endParaRPr lang="ko-KR" altLang="en-US" sz="1600" b="1" dirty="0">
+                <a:solidFill>
+                  <a:schemeClr val="bg1"/>
+                </a:solidFill>
+              </a:endParaRPr>
+            </a:p>
+          </p:txBody>
+        </p:sp>
+        <p:sp>
+          <p:nvSpPr>
+            <p:cNvPr id="48" name="직사각형 47">
+              <a:extLst>
+                <a:ext uri="{FF2B5EF4-FFF2-40B4-BE49-F238E27FC236}">
+                  <a16:creationId xmlns:a16="http://schemas.microsoft.com/office/drawing/2014/main" id="{CBEDC5ED-E6ED-0689-2C02-8653F6766CDF}"/>
+                </a:ext>
+              </a:extLst>
+            </p:cNvPr>
+            <p:cNvSpPr/>
+            <p:nvPr/>
+          </p:nvSpPr>
+          <p:spPr bwMode="gray">
+            <a:xfrm>
+              <a:off x="1105658" y="2813050"/>
+              <a:ext cx="717550" cy="762000"/>
+            </a:xfrm>
+            <a:prstGeom prst="rect">
+              <a:avLst/>
+            </a:prstGeom>
+            <a:noFill/>
+            <a:ln w="19050" algn="ctr">
+              <a:noFill/>
+              <a:miter lim="800000"/>
+              <a:headEnd/>
+              <a:tailEnd/>
+            </a:ln>
+          </p:spPr>
+          <p:txBody>
+            <a:bodyPr wrap="none" lIns="88900" tIns="88900" rIns="88900" bIns="88900" rtlCol="0" anchor="ctr"/>
+            <a:lstStyle/>
+            <a:p>
+              <a:pPr algn="ctr">
+                <a:lnSpc>
+                  <a:spcPct val="106000"/>
+                </a:lnSpc>
+                <a:buFont typeface="Wingdings 2" pitchFamily="18" charset="2"/>
+                <a:buNone/>
+              </a:pPr>
+              <a:r>
+                <a:rPr lang="en-US" altLang="ko-KR" sz="4400" b="1" dirty="0">
+                  <a:latin typeface="나눔고딕" panose="020D0604000000000000" pitchFamily="50" charset="-127"/>
+                  <a:ea typeface="나눔고딕" panose="020D0604000000000000" pitchFamily="50" charset="-127"/>
+                </a:rPr>
+                <a:t>H</a:t>
+              </a:r>
+              <a:r>
+                <a:rPr lang="ko-KR" altLang="en-US" sz="4400" b="1" dirty="0">
+                  <a:latin typeface="나눔고딕" panose="020D0604000000000000" pitchFamily="50" charset="-127"/>
+                  <a:ea typeface="나눔고딕" panose="020D0604000000000000" pitchFamily="50" charset="-127"/>
+                </a:rPr>
+                <a:t>상</a:t>
+              </a:r>
+            </a:p>
+          </p:txBody>
+        </p:sp>
+        <p:sp>
+          <p:nvSpPr>
+            <p:cNvPr id="49" name="직사각형 48">
+              <a:extLst>
+                <a:ext uri="{FF2B5EF4-FFF2-40B4-BE49-F238E27FC236}">
+                  <a16:creationId xmlns:a16="http://schemas.microsoft.com/office/drawing/2014/main" id="{38A3EFCB-B2DD-5F01-ACD1-38E437702460}"/>
+                </a:ext>
+              </a:extLst>
+            </p:cNvPr>
+            <p:cNvSpPr/>
+            <p:nvPr/>
+          </p:nvSpPr>
+          <p:spPr bwMode="gray">
+            <a:xfrm>
+              <a:off x="1958153" y="2662936"/>
+              <a:ext cx="2057666" cy="1096518"/>
+            </a:xfrm>
+            <a:prstGeom prst="rect">
+              <a:avLst/>
+            </a:prstGeom>
+            <a:noFill/>
+            <a:ln w="19050" algn="ctr">
+              <a:noFill/>
+              <a:miter lim="800000"/>
+              <a:headEnd/>
+              <a:tailEnd/>
+            </a:ln>
+          </p:spPr>
+          <p:txBody>
+            <a:bodyPr wrap="none" lIns="88900" tIns="88900" rIns="88900" bIns="88900" rtlCol="0" anchor="ctr"/>
+            <a:lstStyle/>
+            <a:p>
+              <a:pPr algn="ctr">
+                <a:lnSpc>
+                  <a:spcPct val="106000"/>
+                </a:lnSpc>
+                <a:buFont typeface="Wingdings 2" pitchFamily="18" charset="2"/>
+                <a:buNone/>
+              </a:pPr>
+              <a:r>
+                <a:rPr lang="ko-KR" altLang="en-US" sz="1600" b="1" dirty="0">
+                  <a:latin typeface="나눔고딕" panose="020D0604000000000000" pitchFamily="50" charset="-127"/>
+                  <a:ea typeface="나눔고딕" panose="020D0604000000000000" pitchFamily="50" charset="-127"/>
+                </a:rPr>
+                <a:t>고무 컬렉션</a:t>
+              </a:r>
+            </a:p>
+          </p:txBody>
+        </p:sp>
+      </p:grpSp>
+      <p:grpSp>
+        <p:nvGrpSpPr>
+          <p:cNvPr id="51" name="그룹 50">
+            <a:extLst>
+              <a:ext uri="{FF2B5EF4-FFF2-40B4-BE49-F238E27FC236}">
+                <a16:creationId xmlns:a16="http://schemas.microsoft.com/office/drawing/2014/main" id="{5E87E4CB-5560-189C-B6F5-9DC04A3A4F6F}"/>
+              </a:ext>
+            </a:extLst>
+          </p:cNvPr>
+          <p:cNvGrpSpPr/>
+          <p:nvPr/>
+        </p:nvGrpSpPr>
+        <p:grpSpPr>
+          <a:xfrm>
+            <a:off x="557147" y="4961515"/>
+            <a:ext cx="3697200" cy="1486800"/>
+            <a:chOff x="677717" y="2434934"/>
+            <a:chExt cx="3697200" cy="1486800"/>
+          </a:xfrm>
+        </p:grpSpPr>
+        <p:sp>
+          <p:nvSpPr>
+            <p:cNvPr id="52" name="자유형: 도형 51">
+              <a:extLst>
+                <a:ext uri="{FF2B5EF4-FFF2-40B4-BE49-F238E27FC236}">
+                  <a16:creationId xmlns:a16="http://schemas.microsoft.com/office/drawing/2014/main" id="{02DE22DF-0EC4-9EEF-ED85-A732DC352E2C}"/>
+                </a:ext>
+              </a:extLst>
+            </p:cNvPr>
+            <p:cNvSpPr/>
+            <p:nvPr/>
+          </p:nvSpPr>
+          <p:spPr bwMode="gray">
+            <a:xfrm>
+              <a:off x="677717" y="2434934"/>
+              <a:ext cx="3697200" cy="1486800"/>
+            </a:xfrm>
+            <a:custGeom>
+              <a:avLst/>
+              <a:gdLst>
+                <a:gd name="csX0" fmla="*/ 0 w 3697200"/>
+                <a:gd name="csY0" fmla="*/ 0 h 1486800"/>
+                <a:gd name="csX1" fmla="*/ 3697200 w 3697200"/>
+                <a:gd name="csY1" fmla="*/ 0 h 1486800"/>
+                <a:gd name="csX2" fmla="*/ 3697200 w 3697200"/>
+                <a:gd name="csY2" fmla="*/ 517650 h 1486800"/>
+                <a:gd name="csX3" fmla="*/ 3691379 w 3697200"/>
+                <a:gd name="csY3" fmla="*/ 517063 h 1486800"/>
+                <a:gd name="csX4" fmla="*/ 3465042 w 3697200"/>
+                <a:gd name="csY4" fmla="*/ 743400 h 1486800"/>
+                <a:gd name="csX5" fmla="*/ 3691379 w 3697200"/>
+                <a:gd name="csY5" fmla="*/ 969737 h 1486800"/>
+                <a:gd name="csX6" fmla="*/ 3697200 w 3697200"/>
+                <a:gd name="csY6" fmla="*/ 969150 h 1486800"/>
+                <a:gd name="csX7" fmla="*/ 3697200 w 3697200"/>
+                <a:gd name="csY7" fmla="*/ 1486800 h 1486800"/>
+                <a:gd name="csX8" fmla="*/ 0 w 3697200"/>
+                <a:gd name="csY8" fmla="*/ 1486800 h 1486800"/>
+                <a:gd name="csX9" fmla="*/ 0 w 3697200"/>
+                <a:gd name="csY9" fmla="*/ 969150 h 1486800"/>
+                <a:gd name="csX10" fmla="*/ 5821 w 3697200"/>
+                <a:gd name="csY10" fmla="*/ 969737 h 1486800"/>
+                <a:gd name="csX11" fmla="*/ 232158 w 3697200"/>
+                <a:gd name="csY11" fmla="*/ 743400 h 1486800"/>
+                <a:gd name="csX12" fmla="*/ 5821 w 3697200"/>
+                <a:gd name="csY12" fmla="*/ 517063 h 1486800"/>
+                <a:gd name="csX13" fmla="*/ 0 w 3697200"/>
+                <a:gd name="csY13" fmla="*/ 517650 h 1486800"/>
+              </a:gdLst>
+              <a:ahLst/>
+              <a:cxnLst>
+                <a:cxn ang="0">
+                  <a:pos x="csX0" y="csY0"/>
+                </a:cxn>
+                <a:cxn ang="0">
+                  <a:pos x="csX1" y="csY1"/>
+                </a:cxn>
+                <a:cxn ang="0">
+                  <a:pos x="csX2" y="csY2"/>
+                </a:cxn>
+                <a:cxn ang="0">
+                  <a:pos x="csX3" y="csY3"/>
+                </a:cxn>
+                <a:cxn ang="0">
+                  <a:pos x="csX4" y="csY4"/>
+                </a:cxn>
+                <a:cxn ang="0">
+                  <a:pos x="csX5" y="csY5"/>
+                </a:cxn>
+                <a:cxn ang="0">
+                  <a:pos x="csX6" y="csY6"/>
+                </a:cxn>
+                <a:cxn ang="0">
+                  <a:pos x="csX7" y="csY7"/>
+                </a:cxn>
+                <a:cxn ang="0">
+                  <a:pos x="csX8" y="csY8"/>
+                </a:cxn>
+                <a:cxn ang="0">
+                  <a:pos x="csX9" y="csY9"/>
+                </a:cxn>
+                <a:cxn ang="0">
+                  <a:pos x="csX10" y="csY10"/>
+                </a:cxn>
+                <a:cxn ang="0">
+                  <a:pos x="csX11" y="csY11"/>
+                </a:cxn>
+                <a:cxn ang="0">
+                  <a:pos x="csX12" y="csY12"/>
+                </a:cxn>
+                <a:cxn ang="0">
+                  <a:pos x="csX13" y="csY13"/>
+                </a:cxn>
+              </a:cxnLst>
+              <a:rect l="l" t="t" r="r" b="b"/>
+              <a:pathLst>
+                <a:path w="3697200" h="1486800">
+                  <a:moveTo>
+                    <a:pt x="0" y="0"/>
+                  </a:moveTo>
+                  <a:lnTo>
+                    <a:pt x="3697200" y="0"/>
+                  </a:lnTo>
+                  <a:lnTo>
+                    <a:pt x="3697200" y="517650"/>
+                  </a:lnTo>
+                  <a:lnTo>
+                    <a:pt x="3691379" y="517063"/>
+                  </a:lnTo>
+                  <a:cubicBezTo>
+                    <a:pt x="3566377" y="517063"/>
+                    <a:pt x="3465042" y="618398"/>
+                    <a:pt x="3465042" y="743400"/>
+                  </a:cubicBezTo>
+                  <a:cubicBezTo>
+                    <a:pt x="3465042" y="868402"/>
+                    <a:pt x="3566377" y="969737"/>
+                    <a:pt x="3691379" y="969737"/>
+                  </a:cubicBezTo>
+                  <a:lnTo>
+                    <a:pt x="3697200" y="969150"/>
+                  </a:lnTo>
+                  <a:lnTo>
+                    <a:pt x="3697200" y="1486800"/>
+                  </a:lnTo>
+                  <a:lnTo>
+                    <a:pt x="0" y="1486800"/>
+                  </a:lnTo>
+                  <a:lnTo>
+                    <a:pt x="0" y="969150"/>
+                  </a:lnTo>
+                  <a:lnTo>
+                    <a:pt x="5821" y="969737"/>
+                  </a:lnTo>
+                  <a:cubicBezTo>
+                    <a:pt x="130823" y="969737"/>
+                    <a:pt x="232158" y="868402"/>
+                    <a:pt x="232158" y="743400"/>
+                  </a:cubicBezTo>
+                  <a:cubicBezTo>
+                    <a:pt x="232158" y="618398"/>
+                    <a:pt x="130823" y="517063"/>
+                    <a:pt x="5821" y="517063"/>
+                  </a:cubicBezTo>
+                  <a:lnTo>
+                    <a:pt x="0" y="517650"/>
+                  </a:lnTo>
+                  <a:close/>
+                </a:path>
+              </a:pathLst>
+            </a:custGeom>
+            <a:solidFill>
+              <a:srgbClr val="DFEAC0"/>
+            </a:solidFill>
+            <a:ln w="3175" algn="ctr">
+              <a:solidFill>
+                <a:schemeClr val="bg1">
+                  <a:lumMod val="65000"/>
+                </a:schemeClr>
+              </a:solidFill>
+              <a:miter lim="800000"/>
+              <a:headEnd/>
+              <a:tailEnd/>
+            </a:ln>
+          </p:spPr>
+          <p:txBody>
+            <a:bodyPr wrap="square" lIns="88900" tIns="88900" rIns="88900" bIns="88900" rtlCol="0" anchor="ctr">
+              <a:noAutofit/>
+            </a:bodyPr>
+            <a:lstStyle/>
+            <a:p>
+              <a:pPr algn="ctr">
+                <a:lnSpc>
+                  <a:spcPct val="106000"/>
+                </a:lnSpc>
+                <a:buFont typeface="Wingdings 2" pitchFamily="18" charset="2"/>
+                <a:buNone/>
+              </a:pPr>
+              <a:endParaRPr lang="ko-KR" altLang="en-US" sz="1600" b="1" dirty="0">
+                <a:solidFill>
+                  <a:schemeClr val="bg1"/>
+                </a:solidFill>
+              </a:endParaRPr>
+            </a:p>
+          </p:txBody>
+        </p:sp>
+        <p:sp>
+          <p:nvSpPr>
+            <p:cNvPr id="53" name="자유형: 도형 52">
+              <a:extLst>
+                <a:ext uri="{FF2B5EF4-FFF2-40B4-BE49-F238E27FC236}">
+                  <a16:creationId xmlns:a16="http://schemas.microsoft.com/office/drawing/2014/main" id="{CF304C0A-A91B-1CB5-EA65-91EEE0DE0CFE}"/>
+                </a:ext>
+              </a:extLst>
+            </p:cNvPr>
+            <p:cNvSpPr/>
+            <p:nvPr/>
+          </p:nvSpPr>
+          <p:spPr bwMode="gray">
+            <a:xfrm>
+              <a:off x="970713" y="2610952"/>
+              <a:ext cx="3144088" cy="1200486"/>
+            </a:xfrm>
+            <a:custGeom>
+              <a:avLst/>
+              <a:gdLst>
+                <a:gd name="csX0" fmla="*/ 161925 w 2864644"/>
+                <a:gd name="csY0" fmla="*/ 0 h 1093788"/>
+                <a:gd name="csX1" fmla="*/ 2702719 w 2864644"/>
+                <a:gd name="csY1" fmla="*/ 0 h 1093788"/>
+                <a:gd name="csX2" fmla="*/ 2864644 w 2864644"/>
+                <a:gd name="csY2" fmla="*/ 161925 h 1093788"/>
+                <a:gd name="csX3" fmla="*/ 2864644 w 2864644"/>
+                <a:gd name="csY3" fmla="*/ 931863 h 1093788"/>
+                <a:gd name="csX4" fmla="*/ 2702719 w 2864644"/>
+                <a:gd name="csY4" fmla="*/ 1093788 h 1093788"/>
+                <a:gd name="csX5" fmla="*/ 161925 w 2864644"/>
+                <a:gd name="csY5" fmla="*/ 1093788 h 1093788"/>
+                <a:gd name="csX6" fmla="*/ 0 w 2864644"/>
+                <a:gd name="csY6" fmla="*/ 931863 h 1093788"/>
+                <a:gd name="csX7" fmla="*/ 0 w 2864644"/>
+                <a:gd name="csY7" fmla="*/ 161925 h 1093788"/>
+                <a:gd name="csX8" fmla="*/ 161925 w 2864644"/>
+                <a:gd name="csY8" fmla="*/ 0 h 1093788"/>
+              </a:gdLst>
+              <a:ahLst/>
+              <a:cxnLst>
+                <a:cxn ang="0">
+                  <a:pos x="csX0" y="csY0"/>
+                </a:cxn>
+                <a:cxn ang="0">
+                  <a:pos x="csX1" y="csY1"/>
+                </a:cxn>
+                <a:cxn ang="0">
+                  <a:pos x="csX2" y="csY2"/>
+                </a:cxn>
+                <a:cxn ang="0">
+                  <a:pos x="csX3" y="csY3"/>
+                </a:cxn>
+                <a:cxn ang="0">
+                  <a:pos x="csX4" y="csY4"/>
+                </a:cxn>
+                <a:cxn ang="0">
+                  <a:pos x="csX5" y="csY5"/>
+                </a:cxn>
+                <a:cxn ang="0">
+                  <a:pos x="csX6" y="csY6"/>
+                </a:cxn>
+                <a:cxn ang="0">
+                  <a:pos x="csX7" y="csY7"/>
+                </a:cxn>
+                <a:cxn ang="0">
+                  <a:pos x="csX8" y="csY8"/>
+                </a:cxn>
+              </a:cxnLst>
+              <a:rect l="l" t="t" r="r" b="b"/>
+              <a:pathLst>
+                <a:path w="2864644" h="1093788">
+                  <a:moveTo>
+                    <a:pt x="161925" y="0"/>
+                  </a:moveTo>
+                  <a:lnTo>
+                    <a:pt x="2702719" y="0"/>
+                  </a:lnTo>
+                  <a:cubicBezTo>
+                    <a:pt x="2702719" y="89429"/>
+                    <a:pt x="2775215" y="161925"/>
+                    <a:pt x="2864644" y="161925"/>
+                  </a:cubicBezTo>
+                  <a:lnTo>
+                    <a:pt x="2864644" y="931863"/>
+                  </a:lnTo>
+                  <a:cubicBezTo>
+                    <a:pt x="2775215" y="931863"/>
+                    <a:pt x="2702719" y="1004359"/>
+                    <a:pt x="2702719" y="1093788"/>
+                  </a:cubicBezTo>
+                  <a:lnTo>
+                    <a:pt x="161925" y="1093788"/>
+                  </a:lnTo>
+                  <a:cubicBezTo>
+                    <a:pt x="161925" y="1004359"/>
+                    <a:pt x="89429" y="931863"/>
+                    <a:pt x="0" y="931863"/>
+                  </a:cubicBezTo>
+                  <a:lnTo>
+                    <a:pt x="0" y="161925"/>
+                  </a:lnTo>
+                  <a:cubicBezTo>
+                    <a:pt x="89429" y="161925"/>
+                    <a:pt x="161925" y="89429"/>
+                    <a:pt x="161925" y="0"/>
+                  </a:cubicBezTo>
+                  <a:close/>
+                </a:path>
+              </a:pathLst>
+            </a:custGeom>
+            <a:solidFill>
+              <a:srgbClr val="DFEAC0"/>
+            </a:solidFill>
+            <a:ln w="3175" algn="ctr">
+              <a:solidFill>
+                <a:schemeClr val="tx1"/>
+              </a:solidFill>
+              <a:prstDash val="lgDashDot"/>
+              <a:miter lim="800000"/>
+              <a:headEnd/>
+              <a:tailEnd/>
+            </a:ln>
+          </p:spPr>
+          <p:txBody>
+            <a:bodyPr wrap="square" lIns="88900" tIns="88900" rIns="88900" bIns="88900" rtlCol="0" anchor="ctr">
+              <a:noAutofit/>
+            </a:bodyPr>
+            <a:lstStyle/>
+            <a:p>
+              <a:pPr algn="ctr">
+                <a:lnSpc>
+                  <a:spcPct val="106000"/>
+                </a:lnSpc>
+                <a:buFont typeface="Wingdings 2" pitchFamily="18" charset="2"/>
+                <a:buNone/>
+              </a:pPr>
+              <a:r>
+                <a:rPr lang="ko-KR" altLang="en-US" b="1" dirty="0" err="1">
+                  <a:latin typeface="나눔고딕" panose="020D0604000000000000" pitchFamily="50" charset="-127"/>
+                  <a:ea typeface="나눔고딕" panose="020D0604000000000000" pitchFamily="50" charset="-127"/>
+                </a:rPr>
+                <a:t>카드캡터</a:t>
+              </a:r>
+              <a:r>
+                <a:rPr lang="ko-KR" altLang="en-US" b="1" dirty="0">
+                  <a:latin typeface="나눔고딕" panose="020D0604000000000000" pitchFamily="50" charset="-127"/>
+                  <a:ea typeface="나눔고딕" panose="020D0604000000000000" pitchFamily="50" charset="-127"/>
+                </a:rPr>
+                <a:t> 사쿠라 </a:t>
+              </a:r>
+              <a:r>
+                <a:rPr lang="ko-KR" altLang="en-US" b="1" dirty="0" err="1">
+                  <a:latin typeface="나눔고딕" panose="020D0604000000000000" pitchFamily="50" charset="-127"/>
+                  <a:ea typeface="나눔고딕" panose="020D0604000000000000" pitchFamily="50" charset="-127"/>
+                </a:rPr>
+                <a:t>쿠지</a:t>
+              </a:r>
+              <a:endParaRPr lang="en-US" altLang="ko-KR" b="1" dirty="0">
+                <a:latin typeface="나눔고딕" panose="020D0604000000000000" pitchFamily="50" charset="-127"/>
+                <a:ea typeface="나눔고딕" panose="020D0604000000000000" pitchFamily="50" charset="-127"/>
+              </a:endParaRPr>
+            </a:p>
+            <a:p>
+              <a:pPr algn="ctr">
+                <a:lnSpc>
+                  <a:spcPct val="106000"/>
+                </a:lnSpc>
+                <a:buFont typeface="Wingdings 2" pitchFamily="18" charset="2"/>
+                <a:buNone/>
+              </a:pPr>
+              <a:r>
+                <a:rPr lang="ko-KR" altLang="en-US" b="1" dirty="0">
+                  <a:latin typeface="나눔고딕" panose="020D0604000000000000" pitchFamily="50" charset="-127"/>
+                  <a:ea typeface="나눔고딕" panose="020D0604000000000000" pitchFamily="50" charset="-127"/>
+                </a:rPr>
+                <a:t>클리어 </a:t>
+              </a:r>
+              <a:r>
+                <a:rPr lang="ko-KR" altLang="en-US" b="1" dirty="0" err="1">
+                  <a:latin typeface="나눔고딕" panose="020D0604000000000000" pitchFamily="50" charset="-127"/>
+                  <a:ea typeface="나눔고딕" panose="020D0604000000000000" pitchFamily="50" charset="-127"/>
+                </a:rPr>
+                <a:t>카드편</a:t>
+              </a:r>
+              <a:endParaRPr lang="en-US" altLang="ko-KR" b="1" dirty="0">
+                <a:latin typeface="나눔고딕" panose="020D0604000000000000" pitchFamily="50" charset="-127"/>
+                <a:ea typeface="나눔고딕" panose="020D0604000000000000" pitchFamily="50" charset="-127"/>
+              </a:endParaRPr>
+            </a:p>
+          </p:txBody>
+        </p:sp>
+      </p:grpSp>
+      <p:grpSp>
+        <p:nvGrpSpPr>
+          <p:cNvPr id="57" name="Group 22">
+            <a:extLst>
+              <a:ext uri="{FF2B5EF4-FFF2-40B4-BE49-F238E27FC236}">
+                <a16:creationId xmlns:a16="http://schemas.microsoft.com/office/drawing/2014/main" id="{E7556074-D1EF-8EBC-A8D3-A89D15F22AFD}"/>
+              </a:ext>
+            </a:extLst>
+          </p:cNvPr>
+          <p:cNvGrpSpPr/>
+          <p:nvPr/>
+        </p:nvGrpSpPr>
+        <p:grpSpPr>
+          <a:xfrm>
+            <a:off x="1948788" y="2293679"/>
+            <a:ext cx="3696101" cy="1487986"/>
+            <a:chOff x="1482291" y="1684421"/>
+            <a:chExt cx="3696101" cy="1487986"/>
+          </a:xfrm>
+        </p:grpSpPr>
+        <p:sp>
+          <p:nvSpPr>
+            <p:cNvPr id="58" name="Freeform: Shape 11">
+              <a:extLst>
+                <a:ext uri="{FF2B5EF4-FFF2-40B4-BE49-F238E27FC236}">
+                  <a16:creationId xmlns:a16="http://schemas.microsoft.com/office/drawing/2014/main" id="{92569624-36CA-6CA2-5CC0-A86EEF5FEDD3}"/>
+                </a:ext>
+              </a:extLst>
+            </p:cNvPr>
+            <p:cNvSpPr/>
+            <p:nvPr/>
+          </p:nvSpPr>
+          <p:spPr bwMode="gray">
+            <a:xfrm>
+              <a:off x="1482291" y="1684421"/>
+              <a:ext cx="3696101" cy="1487986"/>
+            </a:xfrm>
+            <a:custGeom>
+              <a:avLst/>
+              <a:gdLst>
+                <a:gd name="csX0" fmla="*/ 0 w 3696101"/>
+                <a:gd name="csY0" fmla="*/ 0 h 1487986"/>
+                <a:gd name="csX1" fmla="*/ 3696101 w 3696101"/>
+                <a:gd name="csY1" fmla="*/ 0 h 1487986"/>
+                <a:gd name="csX2" fmla="*/ 3696101 w 3696101"/>
+                <a:gd name="csY2" fmla="*/ 552530 h 1487986"/>
+                <a:gd name="csX3" fmla="*/ 3685761 w 3696101"/>
+                <a:gd name="csY3" fmla="*/ 551487 h 1487986"/>
+                <a:gd name="csX4" fmla="*/ 3482915 w 3696101"/>
+                <a:gd name="csY4" fmla="*/ 754333 h 1487986"/>
+                <a:gd name="csX5" fmla="*/ 3685761 w 3696101"/>
+                <a:gd name="csY5" fmla="*/ 957179 h 1487986"/>
+                <a:gd name="csX6" fmla="*/ 3696101 w 3696101"/>
+                <a:gd name="csY6" fmla="*/ 956137 h 1487986"/>
+                <a:gd name="csX7" fmla="*/ 3696101 w 3696101"/>
+                <a:gd name="csY7" fmla="*/ 1487986 h 1487986"/>
+                <a:gd name="csX8" fmla="*/ 0 w 3696101"/>
+                <a:gd name="csY8" fmla="*/ 1487986 h 1487986"/>
+                <a:gd name="csX9" fmla="*/ 0 w 3696101"/>
+                <a:gd name="csY9" fmla="*/ 956137 h 1487986"/>
+                <a:gd name="csX10" fmla="*/ 30541 w 3696101"/>
+                <a:gd name="csY10" fmla="*/ 953058 h 1487986"/>
+                <a:gd name="csX11" fmla="*/ 192506 w 3696101"/>
+                <a:gd name="csY11" fmla="*/ 754333 h 1487986"/>
+                <a:gd name="csX12" fmla="*/ 30541 w 3696101"/>
+                <a:gd name="csY12" fmla="*/ 555608 h 1487986"/>
+                <a:gd name="csX13" fmla="*/ 0 w 3696101"/>
+                <a:gd name="csY13" fmla="*/ 552530 h 1487986"/>
+              </a:gdLst>
+              <a:ahLst/>
+              <a:cxnLst>
+                <a:cxn ang="0">
+                  <a:pos x="csX0" y="csY0"/>
+                </a:cxn>
+                <a:cxn ang="0">
+                  <a:pos x="csX1" y="csY1"/>
+                </a:cxn>
+                <a:cxn ang="0">
+                  <a:pos x="csX2" y="csY2"/>
+                </a:cxn>
+                <a:cxn ang="0">
+                  <a:pos x="csX3" y="csY3"/>
+                </a:cxn>
+                <a:cxn ang="0">
+                  <a:pos x="csX4" y="csY4"/>
+                </a:cxn>
+                <a:cxn ang="0">
+                  <a:pos x="csX5" y="csY5"/>
+                </a:cxn>
+                <a:cxn ang="0">
+                  <a:pos x="csX6" y="csY6"/>
+                </a:cxn>
+                <a:cxn ang="0">
+                  <a:pos x="csX7" y="csY7"/>
+                </a:cxn>
+                <a:cxn ang="0">
+                  <a:pos x="csX8" y="csY8"/>
+                </a:cxn>
+                <a:cxn ang="0">
+                  <a:pos x="csX9" y="csY9"/>
+                </a:cxn>
+                <a:cxn ang="0">
+                  <a:pos x="csX10" y="csY10"/>
+                </a:cxn>
+                <a:cxn ang="0">
+                  <a:pos x="csX11" y="csY11"/>
+                </a:cxn>
+                <a:cxn ang="0">
+                  <a:pos x="csX12" y="csY12"/>
+                </a:cxn>
+                <a:cxn ang="0">
+                  <a:pos x="csX13" y="csY13"/>
+                </a:cxn>
+              </a:cxnLst>
+              <a:rect l="l" t="t" r="r" b="b"/>
+              <a:pathLst>
+                <a:path w="3696101" h="1487986">
+                  <a:moveTo>
+                    <a:pt x="0" y="0"/>
+                  </a:moveTo>
+                  <a:lnTo>
+                    <a:pt x="3696101" y="0"/>
+                  </a:lnTo>
+                  <a:lnTo>
+                    <a:pt x="3696101" y="552530"/>
+                  </a:lnTo>
+                  <a:lnTo>
+                    <a:pt x="3685761" y="551487"/>
+                  </a:lnTo>
+                  <a:cubicBezTo>
+                    <a:pt x="3573732" y="551487"/>
+                    <a:pt x="3482915" y="642304"/>
+                    <a:pt x="3482915" y="754333"/>
+                  </a:cubicBezTo>
+                  <a:cubicBezTo>
+                    <a:pt x="3482915" y="866362"/>
+                    <a:pt x="3573732" y="957179"/>
+                    <a:pt x="3685761" y="957179"/>
+                  </a:cubicBezTo>
+                  <a:lnTo>
+                    <a:pt x="3696101" y="956137"/>
+                  </a:lnTo>
+                  <a:lnTo>
+                    <a:pt x="3696101" y="1487986"/>
+                  </a:lnTo>
+                  <a:lnTo>
+                    <a:pt x="0" y="1487986"/>
+                  </a:lnTo>
+                  <a:lnTo>
+                    <a:pt x="0" y="956137"/>
+                  </a:lnTo>
+                  <a:lnTo>
+                    <a:pt x="30541" y="953058"/>
+                  </a:lnTo>
+                  <a:cubicBezTo>
+                    <a:pt x="122974" y="934143"/>
+                    <a:pt x="192506" y="852358"/>
+                    <a:pt x="192506" y="754333"/>
+                  </a:cubicBezTo>
+                  <a:cubicBezTo>
+                    <a:pt x="192506" y="656308"/>
+                    <a:pt x="122974" y="574523"/>
+                    <a:pt x="30541" y="555608"/>
+                  </a:cubicBezTo>
+                  <a:lnTo>
+                    <a:pt x="0" y="552530"/>
+                  </a:lnTo>
+                  <a:close/>
+                </a:path>
+              </a:pathLst>
+            </a:custGeom>
+            <a:solidFill>
+              <a:schemeClr val="accent6">
+                <a:lumMod val="90000"/>
+              </a:schemeClr>
+            </a:solidFill>
+            <a:ln w="19050" algn="ctr">
+              <a:noFill/>
+              <a:miter lim="800000"/>
+              <a:headEnd/>
+              <a:tailEnd/>
+            </a:ln>
+          </p:spPr>
+          <p:txBody>
+            <a:bodyPr wrap="square" lIns="88900" tIns="88900" rIns="88900" bIns="88900" rtlCol="0" anchor="ctr">
+              <a:noAutofit/>
+            </a:bodyPr>
+            <a:lstStyle/>
+            <a:p>
+              <a:pPr algn="ctr">
+                <a:lnSpc>
+                  <a:spcPct val="106000"/>
+                </a:lnSpc>
+                <a:buFont typeface="Wingdings 2" pitchFamily="18" charset="2"/>
+                <a:buNone/>
+              </a:pPr>
+              <a:endParaRPr lang="ko-KR" altLang="en-US" sz="1600" b="1" dirty="0">
+                <a:solidFill>
+                  <a:schemeClr val="bg1"/>
+                </a:solidFill>
+              </a:endParaRPr>
+            </a:p>
+          </p:txBody>
+        </p:sp>
+        <p:sp>
+          <p:nvSpPr>
+            <p:cNvPr id="59" name="Freeform: Shape 21">
+              <a:extLst>
+                <a:ext uri="{FF2B5EF4-FFF2-40B4-BE49-F238E27FC236}">
+                  <a16:creationId xmlns:a16="http://schemas.microsoft.com/office/drawing/2014/main" id="{69469B89-C8D2-0EC6-A0B4-EDB3B9AE7AC8}"/>
+                </a:ext>
+              </a:extLst>
+            </p:cNvPr>
+            <p:cNvSpPr/>
+            <p:nvPr/>
+          </p:nvSpPr>
+          <p:spPr bwMode="gray">
+            <a:xfrm>
+              <a:off x="1891324" y="1881484"/>
+              <a:ext cx="2878034" cy="1093860"/>
+            </a:xfrm>
+            <a:custGeom>
+              <a:avLst/>
+              <a:gdLst>
+                <a:gd name="csX0" fmla="*/ 159968 w 2878034"/>
+                <a:gd name="csY0" fmla="*/ 0 h 1093860"/>
+                <a:gd name="csX1" fmla="*/ 320897 w 2878034"/>
+                <a:gd name="csY1" fmla="*/ 0 h 1093860"/>
+                <a:gd name="csX2" fmla="*/ 2557137 w 2878034"/>
+                <a:gd name="csY2" fmla="*/ 0 h 1093860"/>
+                <a:gd name="csX3" fmla="*/ 2718066 w 2878034"/>
+                <a:gd name="csY3" fmla="*/ 0 h 1093860"/>
+                <a:gd name="csX4" fmla="*/ 2878034 w 2878034"/>
+                <a:gd name="csY4" fmla="*/ 159968 h 1093860"/>
+                <a:gd name="csX5" fmla="*/ 2878034 w 2878034"/>
+                <a:gd name="csY5" fmla="*/ 933892 h 1093860"/>
+                <a:gd name="csX6" fmla="*/ 2718066 w 2878034"/>
+                <a:gd name="csY6" fmla="*/ 1093860 h 1093860"/>
+                <a:gd name="csX7" fmla="*/ 2557137 w 2878034"/>
+                <a:gd name="csY7" fmla="*/ 1093860 h 1093860"/>
+                <a:gd name="csX8" fmla="*/ 320897 w 2878034"/>
+                <a:gd name="csY8" fmla="*/ 1093860 h 1093860"/>
+                <a:gd name="csX9" fmla="*/ 159968 w 2878034"/>
+                <a:gd name="csY9" fmla="*/ 1093860 h 1093860"/>
+                <a:gd name="csX10" fmla="*/ 0 w 2878034"/>
+                <a:gd name="csY10" fmla="*/ 933892 h 1093860"/>
+                <a:gd name="csX11" fmla="*/ 0 w 2878034"/>
+                <a:gd name="csY11" fmla="*/ 159968 h 1093860"/>
+                <a:gd name="csX12" fmla="*/ 159968 w 2878034"/>
+                <a:gd name="csY12" fmla="*/ 0 h 1093860"/>
+              </a:gdLst>
+              <a:ahLst/>
+              <a:cxnLst>
+                <a:cxn ang="0">
+                  <a:pos x="csX0" y="csY0"/>
+                </a:cxn>
+                <a:cxn ang="0">
+                  <a:pos x="csX1" y="csY1"/>
+                </a:cxn>
+                <a:cxn ang="0">
+                  <a:pos x="csX2" y="csY2"/>
+                </a:cxn>
+                <a:cxn ang="0">
+                  <a:pos x="csX3" y="csY3"/>
+                </a:cxn>
+                <a:cxn ang="0">
+                  <a:pos x="csX4" y="csY4"/>
+                </a:cxn>
+                <a:cxn ang="0">
+                  <a:pos x="csX5" y="csY5"/>
+                </a:cxn>
+                <a:cxn ang="0">
+                  <a:pos x="csX6" y="csY6"/>
+                </a:cxn>
+                <a:cxn ang="0">
+                  <a:pos x="csX7" y="csY7"/>
+                </a:cxn>
+                <a:cxn ang="0">
+                  <a:pos x="csX8" y="csY8"/>
+                </a:cxn>
+                <a:cxn ang="0">
+                  <a:pos x="csX9" y="csY9"/>
+                </a:cxn>
+                <a:cxn ang="0">
+                  <a:pos x="csX10" y="csY10"/>
+                </a:cxn>
+                <a:cxn ang="0">
+                  <a:pos x="csX11" y="csY11"/>
+                </a:cxn>
+                <a:cxn ang="0">
+                  <a:pos x="csX12" y="csY12"/>
+                </a:cxn>
+              </a:cxnLst>
+              <a:rect l="l" t="t" r="r" b="b"/>
+              <a:pathLst>
+                <a:path w="2878034" h="1093860">
+                  <a:moveTo>
+                    <a:pt x="159968" y="0"/>
+                  </a:moveTo>
+                  <a:lnTo>
+                    <a:pt x="320897" y="0"/>
+                  </a:lnTo>
+                  <a:lnTo>
+                    <a:pt x="2557137" y="0"/>
+                  </a:lnTo>
+                  <a:lnTo>
+                    <a:pt x="2718066" y="0"/>
+                  </a:lnTo>
+                  <a:cubicBezTo>
+                    <a:pt x="2718066" y="88349"/>
+                    <a:pt x="2789686" y="159968"/>
+                    <a:pt x="2878034" y="159968"/>
+                  </a:cubicBezTo>
+                  <a:lnTo>
+                    <a:pt x="2878034" y="933892"/>
+                  </a:lnTo>
+                  <a:cubicBezTo>
+                    <a:pt x="2789686" y="933892"/>
+                    <a:pt x="2718066" y="1005512"/>
+                    <a:pt x="2718066" y="1093860"/>
+                  </a:cubicBezTo>
+                  <a:lnTo>
+                    <a:pt x="2557137" y="1093860"/>
+                  </a:lnTo>
+                  <a:lnTo>
+                    <a:pt x="320897" y="1093860"/>
+                  </a:lnTo>
+                  <a:lnTo>
+                    <a:pt x="159968" y="1093860"/>
+                  </a:lnTo>
+                  <a:cubicBezTo>
+                    <a:pt x="159968" y="1005512"/>
+                    <a:pt x="88348" y="933892"/>
+                    <a:pt x="0" y="933892"/>
+                  </a:cubicBezTo>
+                  <a:lnTo>
+                    <a:pt x="0" y="159968"/>
+                  </a:lnTo>
+                  <a:cubicBezTo>
+                    <a:pt x="88348" y="159968"/>
+                    <a:pt x="159968" y="88349"/>
+                    <a:pt x="159968" y="0"/>
+                  </a:cubicBezTo>
+                  <a:close/>
+                </a:path>
+              </a:pathLst>
+            </a:custGeom>
+            <a:solidFill>
+              <a:srgbClr val="DFEAC0"/>
+            </a:solidFill>
+            <a:ln w="6350" algn="ctr">
+              <a:solidFill>
+                <a:schemeClr val="tx1"/>
+              </a:solidFill>
+              <a:prstDash val="dash"/>
+              <a:miter lim="800000"/>
+              <a:headEnd/>
+              <a:tailEnd/>
+            </a:ln>
+          </p:spPr>
+          <p:txBody>
+            <a:bodyPr wrap="square" lIns="88900" tIns="88900" rIns="88900" bIns="88900" rtlCol="0" anchor="ctr">
+              <a:noAutofit/>
+            </a:bodyPr>
+            <a:lstStyle/>
+            <a:p>
+              <a:pPr algn="ctr">
+                <a:lnSpc>
+                  <a:spcPct val="106000"/>
+                </a:lnSpc>
+                <a:buFont typeface="Wingdings 2" pitchFamily="18" charset="2"/>
+                <a:buNone/>
+              </a:pPr>
+              <a:r>
+                <a:rPr lang="en-US" altLang="ko-KR" sz="2000" b="1" dirty="0"/>
+                <a:t>KUJI - Unopened</a:t>
+              </a:r>
+              <a:endParaRPr lang="ko-KR" altLang="en-US" sz="2000" b="1" dirty="0"/>
+            </a:p>
+          </p:txBody>
+        </p:sp>
+      </p:grpSp>
+    </p:spTree>
+    <p:extLst>
+      <p:ext uri="{BB962C8B-B14F-4D97-AF65-F5344CB8AC3E}">
+        <p14:creationId xmlns:p14="http://schemas.microsoft.com/office/powerpoint/2010/main" val="842157254"/>
       </p:ext>
     </p:extLst>
   </p:cSld>
@@ -33567,6 +38737,12 @@
 </file>
 
 <file path=ppt/tags/tag24.xml><?xml version="1.0" encoding="utf-8"?>
+<p:tagLst xmlns:a="http://schemas.openxmlformats.org/drawingml/2006/main" xmlns:r="http://schemas.openxmlformats.org/officeDocument/2006/relationships" xmlns:p="http://schemas.openxmlformats.org/presentationml/2006/main">
+  <p:tag name="THINKCELLSHAPEDONOTDELETE" val="thinkcellActiveDocDoNotDelete"/>
+</p:tagLst>
+</file>
+
+<file path=ppt/tags/tag25.xml><?xml version="1.0" encoding="utf-8"?>
 <p:tagLst xmlns:a="http://schemas.openxmlformats.org/drawingml/2006/main" xmlns:r="http://schemas.openxmlformats.org/officeDocument/2006/relationships" xmlns:p="http://schemas.openxmlformats.org/presentationml/2006/main">
   <p:tag name="THINKCELLSHAPEDONOTDELETE" val="thinkcellActiveDocDoNotDelete"/>
 </p:tagLst>

--- a/assets/images/images_ppt.pptx
+++ b/assets/images/images_ppt.pptx
@@ -8,6 +8,7 @@
     <p:sldId id="256" r:id="rId2"/>
     <p:sldId id="257" r:id="rId3"/>
     <p:sldId id="258" r:id="rId4"/>
+    <p:sldId id="259" r:id="rId5"/>
   </p:sldIdLst>
   <p:sldSz cx="12192000" cy="6858000"/>
   <p:notesSz cx="7315200" cy="9601200"/>
@@ -33148,7 +33149,7 @@
         </p:blipFill>
         <p:spPr>
           <a:xfrm>
-            <a:off x="1253426" y="3626496"/>
+            <a:off x="1382735" y="3626495"/>
             <a:ext cx="3694496" cy="1487553"/>
           </a:xfrm>
           <a:prstGeom prst="rect">
@@ -38640,6 +38641,6014 @@
 </p:sld>
 </file>
 
+<file path=ppt/slides/slide4.xml><?xml version="1.0" encoding="utf-8"?>
+<p:sld xmlns:a="http://schemas.openxmlformats.org/drawingml/2006/main" xmlns:r="http://schemas.openxmlformats.org/officeDocument/2006/relationships" xmlns:p="http://schemas.openxmlformats.org/presentationml/2006/main">
+  <p:cSld>
+    <p:spTree>
+      <p:nvGrpSpPr>
+        <p:cNvPr id="1" name="">
+          <a:extLst>
+            <a:ext uri="{FF2B5EF4-FFF2-40B4-BE49-F238E27FC236}">
+              <a16:creationId xmlns:a16="http://schemas.microsoft.com/office/drawing/2014/main" id="{25CB8E94-C990-B105-73E8-45CE4F618D6B}"/>
+            </a:ext>
+          </a:extLst>
+        </p:cNvPr>
+        <p:cNvGrpSpPr/>
+        <p:nvPr/>
+      </p:nvGrpSpPr>
+      <p:grpSpPr>
+        <a:xfrm>
+          <a:off x="0" y="0"/>
+          <a:ext cx="0" cy="0"/>
+          <a:chOff x="0" y="0"/>
+          <a:chExt cx="0" cy="0"/>
+        </a:xfrm>
+      </p:grpSpPr>
+      <p:graphicFrame>
+        <p:nvGraphicFramePr>
+          <p:cNvPr id="9" name="think-cell data - do not delete" hidden="1">
+            <a:extLst>
+              <a:ext uri="{FF2B5EF4-FFF2-40B4-BE49-F238E27FC236}">
+                <a16:creationId xmlns:a16="http://schemas.microsoft.com/office/drawing/2014/main" id="{C7FAA515-2606-ED46-FA63-2153D6B37E49}"/>
+              </a:ext>
+            </a:extLst>
+          </p:cNvPr>
+          <p:cNvGraphicFramePr>
+            <a:graphicFrameLocks noChangeAspect="1"/>
+          </p:cNvGraphicFramePr>
+          <p:nvPr>
+            <p:custDataLst>
+              <p:tags r:id="rId1"/>
+            </p:custDataLst>
+          </p:nvPr>
+        </p:nvGraphicFramePr>
+        <p:xfrm>
+          <a:off x="1588" y="1588"/>
+          <a:ext cx="1588" cy="1588"/>
+        </p:xfrm>
+        <a:graphic>
+          <a:graphicData uri="http://schemas.openxmlformats.org/presentationml/2006/ole">
+            <mc:AlternateContent xmlns:mc="http://schemas.openxmlformats.org/markup-compatibility/2006">
+              <mc:Choice xmlns:v="urn:schemas-microsoft-com:vml" Requires="v">
+                <p:oleObj name="think-cell Slide" r:id="rId3" imgW="404" imgH="406" progId="TCLayout.ActiveDocument.1">
+                  <p:embed/>
+                </p:oleObj>
+              </mc:Choice>
+              <mc:Fallback>
+                <p:oleObj name="think-cell Slide" r:id="rId3" imgW="404" imgH="406" progId="TCLayout.ActiveDocument.1">
+                  <p:embed/>
+                  <p:pic>
+                    <p:nvPicPr>
+                      <p:cNvPr id="9" name="think-cell data - do not delete" hidden="1">
+                        <a:extLst>
+                          <a:ext uri="{FF2B5EF4-FFF2-40B4-BE49-F238E27FC236}">
+                            <a16:creationId xmlns:a16="http://schemas.microsoft.com/office/drawing/2014/main" id="{F4B91352-8B66-7D27-5547-413E99463F9E}"/>
+                          </a:ext>
+                        </a:extLst>
+                      </p:cNvPr>
+                      <p:cNvPicPr/>
+                      <p:nvPr/>
+                    </p:nvPicPr>
+                    <p:blipFill>
+                      <a:blip r:embed="rId4"/>
+                      <a:stretch>
+                        <a:fillRect/>
+                      </a:stretch>
+                    </p:blipFill>
+                    <p:spPr>
+                      <a:xfrm>
+                        <a:off x="1588" y="1588"/>
+                        <a:ext cx="1588" cy="1588"/>
+                      </a:xfrm>
+                      <a:prstGeom prst="rect">
+                        <a:avLst/>
+                      </a:prstGeom>
+                    </p:spPr>
+                  </p:pic>
+                </p:oleObj>
+              </mc:Fallback>
+            </mc:AlternateContent>
+          </a:graphicData>
+        </a:graphic>
+      </p:graphicFrame>
+      <p:sp>
+        <p:nvSpPr>
+          <p:cNvPr id="3" name="Text Placeholder 2">
+            <a:extLst>
+              <a:ext uri="{FF2B5EF4-FFF2-40B4-BE49-F238E27FC236}">
+                <a16:creationId xmlns:a16="http://schemas.microsoft.com/office/drawing/2014/main" id="{40111AA1-DA2D-CE45-0621-B4612DE552E6}"/>
+              </a:ext>
+            </a:extLst>
+          </p:cNvPr>
+          <p:cNvSpPr>
+            <a:spLocks noGrp="1"/>
+          </p:cNvSpPr>
+          <p:nvPr>
+            <p:ph type="body" sz="quarter" idx="10"/>
+          </p:nvPr>
+        </p:nvSpPr>
+        <p:spPr/>
+        <p:txBody>
+          <a:bodyPr/>
+          <a:lstStyle/>
+          <a:p>
+            <a:endParaRPr lang="ko-KR" altLang="en-US"/>
+          </a:p>
+        </p:txBody>
+      </p:sp>
+      <p:grpSp>
+        <p:nvGrpSpPr>
+          <p:cNvPr id="20" name="그룹 19">
+            <a:extLst>
+              <a:ext uri="{FF2B5EF4-FFF2-40B4-BE49-F238E27FC236}">
+                <a16:creationId xmlns:a16="http://schemas.microsoft.com/office/drawing/2014/main" id="{BC9FC979-3B49-FF57-1B7E-C5ED8B0F464F}"/>
+              </a:ext>
+            </a:extLst>
+          </p:cNvPr>
+          <p:cNvGrpSpPr/>
+          <p:nvPr/>
+        </p:nvGrpSpPr>
+        <p:grpSpPr>
+          <a:xfrm>
+            <a:off x="576117" y="1190334"/>
+            <a:ext cx="3697200" cy="1486800"/>
+            <a:chOff x="677717" y="2434934"/>
+            <a:chExt cx="3697200" cy="1486800"/>
+          </a:xfrm>
+        </p:grpSpPr>
+        <p:sp>
+          <p:nvSpPr>
+            <p:cNvPr id="10" name="자유형: 도형 9">
+              <a:extLst>
+                <a:ext uri="{FF2B5EF4-FFF2-40B4-BE49-F238E27FC236}">
+                  <a16:creationId xmlns:a16="http://schemas.microsoft.com/office/drawing/2014/main" id="{521877BA-8433-14C1-B633-2D6D42B0C5D1}"/>
+                </a:ext>
+              </a:extLst>
+            </p:cNvPr>
+            <p:cNvSpPr/>
+            <p:nvPr/>
+          </p:nvSpPr>
+          <p:spPr bwMode="gray">
+            <a:xfrm>
+              <a:off x="677717" y="2434934"/>
+              <a:ext cx="3697200" cy="1486800"/>
+            </a:xfrm>
+            <a:custGeom>
+              <a:avLst/>
+              <a:gdLst>
+                <a:gd name="csX0" fmla="*/ 0 w 3697200"/>
+                <a:gd name="csY0" fmla="*/ 0 h 1486800"/>
+                <a:gd name="csX1" fmla="*/ 3697200 w 3697200"/>
+                <a:gd name="csY1" fmla="*/ 0 h 1486800"/>
+                <a:gd name="csX2" fmla="*/ 3697200 w 3697200"/>
+                <a:gd name="csY2" fmla="*/ 517650 h 1486800"/>
+                <a:gd name="csX3" fmla="*/ 3691379 w 3697200"/>
+                <a:gd name="csY3" fmla="*/ 517063 h 1486800"/>
+                <a:gd name="csX4" fmla="*/ 3465042 w 3697200"/>
+                <a:gd name="csY4" fmla="*/ 743400 h 1486800"/>
+                <a:gd name="csX5" fmla="*/ 3691379 w 3697200"/>
+                <a:gd name="csY5" fmla="*/ 969737 h 1486800"/>
+                <a:gd name="csX6" fmla="*/ 3697200 w 3697200"/>
+                <a:gd name="csY6" fmla="*/ 969150 h 1486800"/>
+                <a:gd name="csX7" fmla="*/ 3697200 w 3697200"/>
+                <a:gd name="csY7" fmla="*/ 1486800 h 1486800"/>
+                <a:gd name="csX8" fmla="*/ 0 w 3697200"/>
+                <a:gd name="csY8" fmla="*/ 1486800 h 1486800"/>
+                <a:gd name="csX9" fmla="*/ 0 w 3697200"/>
+                <a:gd name="csY9" fmla="*/ 969150 h 1486800"/>
+                <a:gd name="csX10" fmla="*/ 5821 w 3697200"/>
+                <a:gd name="csY10" fmla="*/ 969737 h 1486800"/>
+                <a:gd name="csX11" fmla="*/ 232158 w 3697200"/>
+                <a:gd name="csY11" fmla="*/ 743400 h 1486800"/>
+                <a:gd name="csX12" fmla="*/ 5821 w 3697200"/>
+                <a:gd name="csY12" fmla="*/ 517063 h 1486800"/>
+                <a:gd name="csX13" fmla="*/ 0 w 3697200"/>
+                <a:gd name="csY13" fmla="*/ 517650 h 1486800"/>
+              </a:gdLst>
+              <a:ahLst/>
+              <a:cxnLst>
+                <a:cxn ang="0">
+                  <a:pos x="csX0" y="csY0"/>
+                </a:cxn>
+                <a:cxn ang="0">
+                  <a:pos x="csX1" y="csY1"/>
+                </a:cxn>
+                <a:cxn ang="0">
+                  <a:pos x="csX2" y="csY2"/>
+                </a:cxn>
+                <a:cxn ang="0">
+                  <a:pos x="csX3" y="csY3"/>
+                </a:cxn>
+                <a:cxn ang="0">
+                  <a:pos x="csX4" y="csY4"/>
+                </a:cxn>
+                <a:cxn ang="0">
+                  <a:pos x="csX5" y="csY5"/>
+                </a:cxn>
+                <a:cxn ang="0">
+                  <a:pos x="csX6" y="csY6"/>
+                </a:cxn>
+                <a:cxn ang="0">
+                  <a:pos x="csX7" y="csY7"/>
+                </a:cxn>
+                <a:cxn ang="0">
+                  <a:pos x="csX8" y="csY8"/>
+                </a:cxn>
+                <a:cxn ang="0">
+                  <a:pos x="csX9" y="csY9"/>
+                </a:cxn>
+                <a:cxn ang="0">
+                  <a:pos x="csX10" y="csY10"/>
+                </a:cxn>
+                <a:cxn ang="0">
+                  <a:pos x="csX11" y="csY11"/>
+                </a:cxn>
+                <a:cxn ang="0">
+                  <a:pos x="csX12" y="csY12"/>
+                </a:cxn>
+                <a:cxn ang="0">
+                  <a:pos x="csX13" y="csY13"/>
+                </a:cxn>
+              </a:cxnLst>
+              <a:rect l="l" t="t" r="r" b="b"/>
+              <a:pathLst>
+                <a:path w="3697200" h="1486800">
+                  <a:moveTo>
+                    <a:pt x="0" y="0"/>
+                  </a:moveTo>
+                  <a:lnTo>
+                    <a:pt x="3697200" y="0"/>
+                  </a:lnTo>
+                  <a:lnTo>
+                    <a:pt x="3697200" y="517650"/>
+                  </a:lnTo>
+                  <a:lnTo>
+                    <a:pt x="3691379" y="517063"/>
+                  </a:lnTo>
+                  <a:cubicBezTo>
+                    <a:pt x="3566377" y="517063"/>
+                    <a:pt x="3465042" y="618398"/>
+                    <a:pt x="3465042" y="743400"/>
+                  </a:cubicBezTo>
+                  <a:cubicBezTo>
+                    <a:pt x="3465042" y="868402"/>
+                    <a:pt x="3566377" y="969737"/>
+                    <a:pt x="3691379" y="969737"/>
+                  </a:cubicBezTo>
+                  <a:lnTo>
+                    <a:pt x="3697200" y="969150"/>
+                  </a:lnTo>
+                  <a:lnTo>
+                    <a:pt x="3697200" y="1486800"/>
+                  </a:lnTo>
+                  <a:lnTo>
+                    <a:pt x="0" y="1486800"/>
+                  </a:lnTo>
+                  <a:lnTo>
+                    <a:pt x="0" y="969150"/>
+                  </a:lnTo>
+                  <a:lnTo>
+                    <a:pt x="5821" y="969737"/>
+                  </a:lnTo>
+                  <a:cubicBezTo>
+                    <a:pt x="130823" y="969737"/>
+                    <a:pt x="232158" y="868402"/>
+                    <a:pt x="232158" y="743400"/>
+                  </a:cubicBezTo>
+                  <a:cubicBezTo>
+                    <a:pt x="232158" y="618398"/>
+                    <a:pt x="130823" y="517063"/>
+                    <a:pt x="5821" y="517063"/>
+                  </a:cubicBezTo>
+                  <a:lnTo>
+                    <a:pt x="0" y="517650"/>
+                  </a:lnTo>
+                  <a:close/>
+                </a:path>
+              </a:pathLst>
+            </a:custGeom>
+            <a:solidFill>
+              <a:srgbClr val="DFEAC0"/>
+            </a:solidFill>
+            <a:ln w="3175" algn="ctr">
+              <a:solidFill>
+                <a:schemeClr val="bg1">
+                  <a:lumMod val="65000"/>
+                </a:schemeClr>
+              </a:solidFill>
+              <a:miter lim="800000"/>
+              <a:headEnd/>
+              <a:tailEnd/>
+            </a:ln>
+          </p:spPr>
+          <p:txBody>
+            <a:bodyPr wrap="square" lIns="88900" tIns="88900" rIns="88900" bIns="88900" rtlCol="0" anchor="ctr">
+              <a:noAutofit/>
+            </a:bodyPr>
+            <a:lstStyle/>
+            <a:p>
+              <a:pPr algn="ctr">
+                <a:lnSpc>
+                  <a:spcPct val="106000"/>
+                </a:lnSpc>
+                <a:buFont typeface="Wingdings 2" pitchFamily="18" charset="2"/>
+                <a:buNone/>
+              </a:pPr>
+              <a:endParaRPr lang="ko-KR" altLang="en-US" sz="1600" b="1" dirty="0">
+                <a:solidFill>
+                  <a:schemeClr val="bg1"/>
+                </a:solidFill>
+              </a:endParaRPr>
+            </a:p>
+          </p:txBody>
+        </p:sp>
+        <p:sp>
+          <p:nvSpPr>
+            <p:cNvPr id="17" name="자유형: 도형 16">
+              <a:extLst>
+                <a:ext uri="{FF2B5EF4-FFF2-40B4-BE49-F238E27FC236}">
+                  <a16:creationId xmlns:a16="http://schemas.microsoft.com/office/drawing/2014/main" id="{213FF5EE-6418-2634-25FC-15DB2DC2E027}"/>
+                </a:ext>
+              </a:extLst>
+            </p:cNvPr>
+            <p:cNvSpPr/>
+            <p:nvPr/>
+          </p:nvSpPr>
+          <p:spPr bwMode="gray">
+            <a:xfrm>
+              <a:off x="970713" y="2610952"/>
+              <a:ext cx="3144088" cy="1200486"/>
+            </a:xfrm>
+            <a:custGeom>
+              <a:avLst/>
+              <a:gdLst>
+                <a:gd name="csX0" fmla="*/ 161925 w 2864644"/>
+                <a:gd name="csY0" fmla="*/ 0 h 1093788"/>
+                <a:gd name="csX1" fmla="*/ 2702719 w 2864644"/>
+                <a:gd name="csY1" fmla="*/ 0 h 1093788"/>
+                <a:gd name="csX2" fmla="*/ 2864644 w 2864644"/>
+                <a:gd name="csY2" fmla="*/ 161925 h 1093788"/>
+                <a:gd name="csX3" fmla="*/ 2864644 w 2864644"/>
+                <a:gd name="csY3" fmla="*/ 931863 h 1093788"/>
+                <a:gd name="csX4" fmla="*/ 2702719 w 2864644"/>
+                <a:gd name="csY4" fmla="*/ 1093788 h 1093788"/>
+                <a:gd name="csX5" fmla="*/ 161925 w 2864644"/>
+                <a:gd name="csY5" fmla="*/ 1093788 h 1093788"/>
+                <a:gd name="csX6" fmla="*/ 0 w 2864644"/>
+                <a:gd name="csY6" fmla="*/ 931863 h 1093788"/>
+                <a:gd name="csX7" fmla="*/ 0 w 2864644"/>
+                <a:gd name="csY7" fmla="*/ 161925 h 1093788"/>
+                <a:gd name="csX8" fmla="*/ 161925 w 2864644"/>
+                <a:gd name="csY8" fmla="*/ 0 h 1093788"/>
+              </a:gdLst>
+              <a:ahLst/>
+              <a:cxnLst>
+                <a:cxn ang="0">
+                  <a:pos x="csX0" y="csY0"/>
+                </a:cxn>
+                <a:cxn ang="0">
+                  <a:pos x="csX1" y="csY1"/>
+                </a:cxn>
+                <a:cxn ang="0">
+                  <a:pos x="csX2" y="csY2"/>
+                </a:cxn>
+                <a:cxn ang="0">
+                  <a:pos x="csX3" y="csY3"/>
+                </a:cxn>
+                <a:cxn ang="0">
+                  <a:pos x="csX4" y="csY4"/>
+                </a:cxn>
+                <a:cxn ang="0">
+                  <a:pos x="csX5" y="csY5"/>
+                </a:cxn>
+                <a:cxn ang="0">
+                  <a:pos x="csX6" y="csY6"/>
+                </a:cxn>
+                <a:cxn ang="0">
+                  <a:pos x="csX7" y="csY7"/>
+                </a:cxn>
+                <a:cxn ang="0">
+                  <a:pos x="csX8" y="csY8"/>
+                </a:cxn>
+              </a:cxnLst>
+              <a:rect l="l" t="t" r="r" b="b"/>
+              <a:pathLst>
+                <a:path w="2864644" h="1093788">
+                  <a:moveTo>
+                    <a:pt x="161925" y="0"/>
+                  </a:moveTo>
+                  <a:lnTo>
+                    <a:pt x="2702719" y="0"/>
+                  </a:lnTo>
+                  <a:cubicBezTo>
+                    <a:pt x="2702719" y="89429"/>
+                    <a:pt x="2775215" y="161925"/>
+                    <a:pt x="2864644" y="161925"/>
+                  </a:cubicBezTo>
+                  <a:lnTo>
+                    <a:pt x="2864644" y="931863"/>
+                  </a:lnTo>
+                  <a:cubicBezTo>
+                    <a:pt x="2775215" y="931863"/>
+                    <a:pt x="2702719" y="1004359"/>
+                    <a:pt x="2702719" y="1093788"/>
+                  </a:cubicBezTo>
+                  <a:lnTo>
+                    <a:pt x="161925" y="1093788"/>
+                  </a:lnTo>
+                  <a:cubicBezTo>
+                    <a:pt x="161925" y="1004359"/>
+                    <a:pt x="89429" y="931863"/>
+                    <a:pt x="0" y="931863"/>
+                  </a:cubicBezTo>
+                  <a:lnTo>
+                    <a:pt x="0" y="161925"/>
+                  </a:lnTo>
+                  <a:cubicBezTo>
+                    <a:pt x="89429" y="161925"/>
+                    <a:pt x="161925" y="89429"/>
+                    <a:pt x="161925" y="0"/>
+                  </a:cubicBezTo>
+                  <a:close/>
+                </a:path>
+              </a:pathLst>
+            </a:custGeom>
+            <a:solidFill>
+              <a:srgbClr val="E6E6E6"/>
+            </a:solidFill>
+            <a:ln w="3175" algn="ctr">
+              <a:solidFill>
+                <a:schemeClr val="bg1">
+                  <a:lumMod val="65000"/>
+                </a:schemeClr>
+              </a:solidFill>
+              <a:miter lim="800000"/>
+              <a:headEnd/>
+              <a:tailEnd/>
+            </a:ln>
+          </p:spPr>
+          <p:txBody>
+            <a:bodyPr wrap="square" lIns="88900" tIns="88900" rIns="88900" bIns="88900" rtlCol="0" anchor="ctr">
+              <a:noAutofit/>
+            </a:bodyPr>
+            <a:lstStyle/>
+            <a:p>
+              <a:pPr algn="ctr">
+                <a:lnSpc>
+                  <a:spcPct val="106000"/>
+                </a:lnSpc>
+                <a:buFont typeface="Wingdings 2" pitchFamily="18" charset="2"/>
+                <a:buNone/>
+              </a:pPr>
+              <a:r>
+                <a:rPr lang="en-US" altLang="ko-KR" sz="1600" b="1" dirty="0">
+                  <a:solidFill>
+                    <a:schemeClr val="bg1"/>
+                  </a:solidFill>
+                </a:rPr>
+                <a:t>`</a:t>
+              </a:r>
+              <a:endParaRPr lang="ko-KR" altLang="en-US" sz="1600" b="1" dirty="0">
+                <a:solidFill>
+                  <a:schemeClr val="bg1"/>
+                </a:solidFill>
+              </a:endParaRPr>
+            </a:p>
+          </p:txBody>
+        </p:sp>
+        <p:sp>
+          <p:nvSpPr>
+            <p:cNvPr id="18" name="직사각형 17">
+              <a:extLst>
+                <a:ext uri="{FF2B5EF4-FFF2-40B4-BE49-F238E27FC236}">
+                  <a16:creationId xmlns:a16="http://schemas.microsoft.com/office/drawing/2014/main" id="{621C4643-7D0B-61C0-1E94-6158C2C66317}"/>
+                </a:ext>
+              </a:extLst>
+            </p:cNvPr>
+            <p:cNvSpPr/>
+            <p:nvPr/>
+          </p:nvSpPr>
+          <p:spPr bwMode="gray">
+            <a:xfrm>
+              <a:off x="1105658" y="2813050"/>
+              <a:ext cx="717550" cy="762000"/>
+            </a:xfrm>
+            <a:prstGeom prst="rect">
+              <a:avLst/>
+            </a:prstGeom>
+            <a:noFill/>
+            <a:ln w="19050" algn="ctr">
+              <a:noFill/>
+              <a:miter lim="800000"/>
+              <a:headEnd/>
+              <a:tailEnd/>
+            </a:ln>
+          </p:spPr>
+          <p:txBody>
+            <a:bodyPr wrap="none" lIns="88900" tIns="88900" rIns="88900" bIns="88900" rtlCol="0" anchor="ctr"/>
+            <a:lstStyle/>
+            <a:p>
+              <a:pPr algn="ctr">
+                <a:lnSpc>
+                  <a:spcPct val="106000"/>
+                </a:lnSpc>
+                <a:buFont typeface="Wingdings 2" pitchFamily="18" charset="2"/>
+                <a:buNone/>
+              </a:pPr>
+              <a:r>
+                <a:rPr lang="en-US" altLang="ko-KR" sz="4400" b="1" dirty="0">
+                  <a:latin typeface="나눔고딕" panose="020D0604000000000000" pitchFamily="50" charset="-127"/>
+                  <a:ea typeface="나눔고딕" panose="020D0604000000000000" pitchFamily="50" charset="-127"/>
+                </a:rPr>
+                <a:t>A</a:t>
+              </a:r>
+              <a:r>
+                <a:rPr lang="ko-KR" altLang="en-US" sz="4400" b="1" dirty="0">
+                  <a:latin typeface="나눔고딕" panose="020D0604000000000000" pitchFamily="50" charset="-127"/>
+                  <a:ea typeface="나눔고딕" panose="020D0604000000000000" pitchFamily="50" charset="-127"/>
+                </a:rPr>
+                <a:t>상</a:t>
+              </a:r>
+            </a:p>
+          </p:txBody>
+        </p:sp>
+        <p:sp>
+          <p:nvSpPr>
+            <p:cNvPr id="19" name="직사각형 18">
+              <a:extLst>
+                <a:ext uri="{FF2B5EF4-FFF2-40B4-BE49-F238E27FC236}">
+                  <a16:creationId xmlns:a16="http://schemas.microsoft.com/office/drawing/2014/main" id="{01B64BB3-9D18-A917-1DCC-0F8FCAA17F1D}"/>
+                </a:ext>
+              </a:extLst>
+            </p:cNvPr>
+            <p:cNvSpPr/>
+            <p:nvPr/>
+          </p:nvSpPr>
+          <p:spPr bwMode="gray">
+            <a:xfrm>
+              <a:off x="1977203" y="2662936"/>
+              <a:ext cx="2057666" cy="1096518"/>
+            </a:xfrm>
+            <a:prstGeom prst="rect">
+              <a:avLst/>
+            </a:prstGeom>
+            <a:noFill/>
+            <a:ln w="19050" algn="ctr">
+              <a:noFill/>
+              <a:miter lim="800000"/>
+              <a:headEnd/>
+              <a:tailEnd/>
+            </a:ln>
+          </p:spPr>
+          <p:txBody>
+            <a:bodyPr wrap="none" lIns="88900" tIns="88900" rIns="88900" bIns="88900" rtlCol="0" anchor="ctr"/>
+            <a:lstStyle/>
+            <a:p>
+              <a:pPr algn="ctr">
+                <a:lnSpc>
+                  <a:spcPct val="106000"/>
+                </a:lnSpc>
+                <a:buFont typeface="Wingdings 2" pitchFamily="18" charset="2"/>
+                <a:buNone/>
+              </a:pPr>
+              <a:r>
+                <a:rPr lang="ko-KR" altLang="en-US" b="1" dirty="0" err="1">
+                  <a:latin typeface="나눔고딕" panose="020D0604000000000000" pitchFamily="50" charset="-127"/>
+                  <a:ea typeface="나눔고딕" panose="020D0604000000000000" pitchFamily="50" charset="-127"/>
+                </a:rPr>
+                <a:t>시나모롤</a:t>
+              </a:r>
+              <a:r>
+                <a:rPr lang="ko-KR" altLang="en-US" b="1" dirty="0">
+                  <a:latin typeface="나눔고딕" panose="020D0604000000000000" pitchFamily="50" charset="-127"/>
+                  <a:ea typeface="나눔고딕" panose="020D0604000000000000" pitchFamily="50" charset="-127"/>
+                </a:rPr>
+                <a:t> </a:t>
+              </a:r>
+              <a:endParaRPr lang="en-US" altLang="ko-KR" b="1" dirty="0">
+                <a:latin typeface="나눔고딕" panose="020D0604000000000000" pitchFamily="50" charset="-127"/>
+                <a:ea typeface="나눔고딕" panose="020D0604000000000000" pitchFamily="50" charset="-127"/>
+              </a:endParaRPr>
+            </a:p>
+            <a:p>
+              <a:pPr algn="ctr">
+                <a:lnSpc>
+                  <a:spcPct val="106000"/>
+                </a:lnSpc>
+                <a:buFont typeface="Wingdings 2" pitchFamily="18" charset="2"/>
+                <a:buNone/>
+              </a:pPr>
+              <a:r>
+                <a:rPr lang="ko-KR" altLang="en-US" b="1" dirty="0">
+                  <a:latin typeface="나눔고딕" panose="020D0604000000000000" pitchFamily="50" charset="-127"/>
+                  <a:ea typeface="나눔고딕" panose="020D0604000000000000" pitchFamily="50" charset="-127"/>
+                </a:rPr>
+                <a:t>헤드폰</a:t>
+              </a:r>
+            </a:p>
+          </p:txBody>
+        </p:sp>
+      </p:grpSp>
+      <p:grpSp>
+        <p:nvGrpSpPr>
+          <p:cNvPr id="2" name="그룹 1">
+            <a:extLst>
+              <a:ext uri="{FF2B5EF4-FFF2-40B4-BE49-F238E27FC236}">
+                <a16:creationId xmlns:a16="http://schemas.microsoft.com/office/drawing/2014/main" id="{AD0778F4-C6C7-97FE-26B0-92DC80CAF5DC}"/>
+              </a:ext>
+            </a:extLst>
+          </p:cNvPr>
+          <p:cNvGrpSpPr/>
+          <p:nvPr/>
+        </p:nvGrpSpPr>
+        <p:grpSpPr>
+          <a:xfrm>
+            <a:off x="4748067" y="1190334"/>
+            <a:ext cx="3697200" cy="1486800"/>
+            <a:chOff x="677717" y="2434934"/>
+            <a:chExt cx="3697200" cy="1486800"/>
+          </a:xfrm>
+        </p:grpSpPr>
+        <p:sp>
+          <p:nvSpPr>
+            <p:cNvPr id="5" name="자유형: 도형 4">
+              <a:extLst>
+                <a:ext uri="{FF2B5EF4-FFF2-40B4-BE49-F238E27FC236}">
+                  <a16:creationId xmlns:a16="http://schemas.microsoft.com/office/drawing/2014/main" id="{362DD5EB-7512-1080-E6E7-522E1D3FACFE}"/>
+                </a:ext>
+              </a:extLst>
+            </p:cNvPr>
+            <p:cNvSpPr/>
+            <p:nvPr/>
+          </p:nvSpPr>
+          <p:spPr bwMode="gray">
+            <a:xfrm>
+              <a:off x="677717" y="2434934"/>
+              <a:ext cx="3697200" cy="1486800"/>
+            </a:xfrm>
+            <a:custGeom>
+              <a:avLst/>
+              <a:gdLst>
+                <a:gd name="csX0" fmla="*/ 0 w 3697200"/>
+                <a:gd name="csY0" fmla="*/ 0 h 1486800"/>
+                <a:gd name="csX1" fmla="*/ 3697200 w 3697200"/>
+                <a:gd name="csY1" fmla="*/ 0 h 1486800"/>
+                <a:gd name="csX2" fmla="*/ 3697200 w 3697200"/>
+                <a:gd name="csY2" fmla="*/ 517650 h 1486800"/>
+                <a:gd name="csX3" fmla="*/ 3691379 w 3697200"/>
+                <a:gd name="csY3" fmla="*/ 517063 h 1486800"/>
+                <a:gd name="csX4" fmla="*/ 3465042 w 3697200"/>
+                <a:gd name="csY4" fmla="*/ 743400 h 1486800"/>
+                <a:gd name="csX5" fmla="*/ 3691379 w 3697200"/>
+                <a:gd name="csY5" fmla="*/ 969737 h 1486800"/>
+                <a:gd name="csX6" fmla="*/ 3697200 w 3697200"/>
+                <a:gd name="csY6" fmla="*/ 969150 h 1486800"/>
+                <a:gd name="csX7" fmla="*/ 3697200 w 3697200"/>
+                <a:gd name="csY7" fmla="*/ 1486800 h 1486800"/>
+                <a:gd name="csX8" fmla="*/ 0 w 3697200"/>
+                <a:gd name="csY8" fmla="*/ 1486800 h 1486800"/>
+                <a:gd name="csX9" fmla="*/ 0 w 3697200"/>
+                <a:gd name="csY9" fmla="*/ 969150 h 1486800"/>
+                <a:gd name="csX10" fmla="*/ 5821 w 3697200"/>
+                <a:gd name="csY10" fmla="*/ 969737 h 1486800"/>
+                <a:gd name="csX11" fmla="*/ 232158 w 3697200"/>
+                <a:gd name="csY11" fmla="*/ 743400 h 1486800"/>
+                <a:gd name="csX12" fmla="*/ 5821 w 3697200"/>
+                <a:gd name="csY12" fmla="*/ 517063 h 1486800"/>
+                <a:gd name="csX13" fmla="*/ 0 w 3697200"/>
+                <a:gd name="csY13" fmla="*/ 517650 h 1486800"/>
+              </a:gdLst>
+              <a:ahLst/>
+              <a:cxnLst>
+                <a:cxn ang="0">
+                  <a:pos x="csX0" y="csY0"/>
+                </a:cxn>
+                <a:cxn ang="0">
+                  <a:pos x="csX1" y="csY1"/>
+                </a:cxn>
+                <a:cxn ang="0">
+                  <a:pos x="csX2" y="csY2"/>
+                </a:cxn>
+                <a:cxn ang="0">
+                  <a:pos x="csX3" y="csY3"/>
+                </a:cxn>
+                <a:cxn ang="0">
+                  <a:pos x="csX4" y="csY4"/>
+                </a:cxn>
+                <a:cxn ang="0">
+                  <a:pos x="csX5" y="csY5"/>
+                </a:cxn>
+                <a:cxn ang="0">
+                  <a:pos x="csX6" y="csY6"/>
+                </a:cxn>
+                <a:cxn ang="0">
+                  <a:pos x="csX7" y="csY7"/>
+                </a:cxn>
+                <a:cxn ang="0">
+                  <a:pos x="csX8" y="csY8"/>
+                </a:cxn>
+                <a:cxn ang="0">
+                  <a:pos x="csX9" y="csY9"/>
+                </a:cxn>
+                <a:cxn ang="0">
+                  <a:pos x="csX10" y="csY10"/>
+                </a:cxn>
+                <a:cxn ang="0">
+                  <a:pos x="csX11" y="csY11"/>
+                </a:cxn>
+                <a:cxn ang="0">
+                  <a:pos x="csX12" y="csY12"/>
+                </a:cxn>
+                <a:cxn ang="0">
+                  <a:pos x="csX13" y="csY13"/>
+                </a:cxn>
+              </a:cxnLst>
+              <a:rect l="l" t="t" r="r" b="b"/>
+              <a:pathLst>
+                <a:path w="3697200" h="1486800">
+                  <a:moveTo>
+                    <a:pt x="0" y="0"/>
+                  </a:moveTo>
+                  <a:lnTo>
+                    <a:pt x="3697200" y="0"/>
+                  </a:lnTo>
+                  <a:lnTo>
+                    <a:pt x="3697200" y="517650"/>
+                  </a:lnTo>
+                  <a:lnTo>
+                    <a:pt x="3691379" y="517063"/>
+                  </a:lnTo>
+                  <a:cubicBezTo>
+                    <a:pt x="3566377" y="517063"/>
+                    <a:pt x="3465042" y="618398"/>
+                    <a:pt x="3465042" y="743400"/>
+                  </a:cubicBezTo>
+                  <a:cubicBezTo>
+                    <a:pt x="3465042" y="868402"/>
+                    <a:pt x="3566377" y="969737"/>
+                    <a:pt x="3691379" y="969737"/>
+                  </a:cubicBezTo>
+                  <a:lnTo>
+                    <a:pt x="3697200" y="969150"/>
+                  </a:lnTo>
+                  <a:lnTo>
+                    <a:pt x="3697200" y="1486800"/>
+                  </a:lnTo>
+                  <a:lnTo>
+                    <a:pt x="0" y="1486800"/>
+                  </a:lnTo>
+                  <a:lnTo>
+                    <a:pt x="0" y="969150"/>
+                  </a:lnTo>
+                  <a:lnTo>
+                    <a:pt x="5821" y="969737"/>
+                  </a:lnTo>
+                  <a:cubicBezTo>
+                    <a:pt x="130823" y="969737"/>
+                    <a:pt x="232158" y="868402"/>
+                    <a:pt x="232158" y="743400"/>
+                  </a:cubicBezTo>
+                  <a:cubicBezTo>
+                    <a:pt x="232158" y="618398"/>
+                    <a:pt x="130823" y="517063"/>
+                    <a:pt x="5821" y="517063"/>
+                  </a:cubicBezTo>
+                  <a:lnTo>
+                    <a:pt x="0" y="517650"/>
+                  </a:lnTo>
+                  <a:close/>
+                </a:path>
+              </a:pathLst>
+            </a:custGeom>
+            <a:solidFill>
+              <a:srgbClr val="DFEAC0"/>
+            </a:solidFill>
+            <a:ln w="3175" algn="ctr">
+              <a:solidFill>
+                <a:schemeClr val="bg1">
+                  <a:lumMod val="65000"/>
+                </a:schemeClr>
+              </a:solidFill>
+              <a:miter lim="800000"/>
+              <a:headEnd/>
+              <a:tailEnd/>
+            </a:ln>
+          </p:spPr>
+          <p:txBody>
+            <a:bodyPr wrap="square" lIns="88900" tIns="88900" rIns="88900" bIns="88900" rtlCol="0" anchor="ctr">
+              <a:noAutofit/>
+            </a:bodyPr>
+            <a:lstStyle/>
+            <a:p>
+              <a:pPr algn="ctr">
+                <a:lnSpc>
+                  <a:spcPct val="106000"/>
+                </a:lnSpc>
+                <a:buFont typeface="Wingdings 2" pitchFamily="18" charset="2"/>
+                <a:buNone/>
+              </a:pPr>
+              <a:endParaRPr lang="ko-KR" altLang="en-US" sz="1600" b="1" dirty="0">
+                <a:solidFill>
+                  <a:schemeClr val="bg1"/>
+                </a:solidFill>
+              </a:endParaRPr>
+            </a:p>
+          </p:txBody>
+        </p:sp>
+        <p:sp>
+          <p:nvSpPr>
+            <p:cNvPr id="6" name="자유형: 도형 5">
+              <a:extLst>
+                <a:ext uri="{FF2B5EF4-FFF2-40B4-BE49-F238E27FC236}">
+                  <a16:creationId xmlns:a16="http://schemas.microsoft.com/office/drawing/2014/main" id="{EA761B4A-2E6F-BCEF-228C-1AFFA9282254}"/>
+                </a:ext>
+              </a:extLst>
+            </p:cNvPr>
+            <p:cNvSpPr/>
+            <p:nvPr/>
+          </p:nvSpPr>
+          <p:spPr bwMode="gray">
+            <a:xfrm>
+              <a:off x="970713" y="2610952"/>
+              <a:ext cx="3144088" cy="1200486"/>
+            </a:xfrm>
+            <a:custGeom>
+              <a:avLst/>
+              <a:gdLst>
+                <a:gd name="csX0" fmla="*/ 161925 w 2864644"/>
+                <a:gd name="csY0" fmla="*/ 0 h 1093788"/>
+                <a:gd name="csX1" fmla="*/ 2702719 w 2864644"/>
+                <a:gd name="csY1" fmla="*/ 0 h 1093788"/>
+                <a:gd name="csX2" fmla="*/ 2864644 w 2864644"/>
+                <a:gd name="csY2" fmla="*/ 161925 h 1093788"/>
+                <a:gd name="csX3" fmla="*/ 2864644 w 2864644"/>
+                <a:gd name="csY3" fmla="*/ 931863 h 1093788"/>
+                <a:gd name="csX4" fmla="*/ 2702719 w 2864644"/>
+                <a:gd name="csY4" fmla="*/ 1093788 h 1093788"/>
+                <a:gd name="csX5" fmla="*/ 161925 w 2864644"/>
+                <a:gd name="csY5" fmla="*/ 1093788 h 1093788"/>
+                <a:gd name="csX6" fmla="*/ 0 w 2864644"/>
+                <a:gd name="csY6" fmla="*/ 931863 h 1093788"/>
+                <a:gd name="csX7" fmla="*/ 0 w 2864644"/>
+                <a:gd name="csY7" fmla="*/ 161925 h 1093788"/>
+                <a:gd name="csX8" fmla="*/ 161925 w 2864644"/>
+                <a:gd name="csY8" fmla="*/ 0 h 1093788"/>
+              </a:gdLst>
+              <a:ahLst/>
+              <a:cxnLst>
+                <a:cxn ang="0">
+                  <a:pos x="csX0" y="csY0"/>
+                </a:cxn>
+                <a:cxn ang="0">
+                  <a:pos x="csX1" y="csY1"/>
+                </a:cxn>
+                <a:cxn ang="0">
+                  <a:pos x="csX2" y="csY2"/>
+                </a:cxn>
+                <a:cxn ang="0">
+                  <a:pos x="csX3" y="csY3"/>
+                </a:cxn>
+                <a:cxn ang="0">
+                  <a:pos x="csX4" y="csY4"/>
+                </a:cxn>
+                <a:cxn ang="0">
+                  <a:pos x="csX5" y="csY5"/>
+                </a:cxn>
+                <a:cxn ang="0">
+                  <a:pos x="csX6" y="csY6"/>
+                </a:cxn>
+                <a:cxn ang="0">
+                  <a:pos x="csX7" y="csY7"/>
+                </a:cxn>
+                <a:cxn ang="0">
+                  <a:pos x="csX8" y="csY8"/>
+                </a:cxn>
+              </a:cxnLst>
+              <a:rect l="l" t="t" r="r" b="b"/>
+              <a:pathLst>
+                <a:path w="2864644" h="1093788">
+                  <a:moveTo>
+                    <a:pt x="161925" y="0"/>
+                  </a:moveTo>
+                  <a:lnTo>
+                    <a:pt x="2702719" y="0"/>
+                  </a:lnTo>
+                  <a:cubicBezTo>
+                    <a:pt x="2702719" y="89429"/>
+                    <a:pt x="2775215" y="161925"/>
+                    <a:pt x="2864644" y="161925"/>
+                  </a:cubicBezTo>
+                  <a:lnTo>
+                    <a:pt x="2864644" y="931863"/>
+                  </a:lnTo>
+                  <a:cubicBezTo>
+                    <a:pt x="2775215" y="931863"/>
+                    <a:pt x="2702719" y="1004359"/>
+                    <a:pt x="2702719" y="1093788"/>
+                  </a:cubicBezTo>
+                  <a:lnTo>
+                    <a:pt x="161925" y="1093788"/>
+                  </a:lnTo>
+                  <a:cubicBezTo>
+                    <a:pt x="161925" y="1004359"/>
+                    <a:pt x="89429" y="931863"/>
+                    <a:pt x="0" y="931863"/>
+                  </a:cubicBezTo>
+                  <a:lnTo>
+                    <a:pt x="0" y="161925"/>
+                  </a:lnTo>
+                  <a:cubicBezTo>
+                    <a:pt x="89429" y="161925"/>
+                    <a:pt x="161925" y="89429"/>
+                    <a:pt x="161925" y="0"/>
+                  </a:cubicBezTo>
+                  <a:close/>
+                </a:path>
+              </a:pathLst>
+            </a:custGeom>
+            <a:solidFill>
+              <a:srgbClr val="E6E6E6"/>
+            </a:solidFill>
+            <a:ln w="3175" algn="ctr">
+              <a:solidFill>
+                <a:schemeClr val="bg1">
+                  <a:lumMod val="65000"/>
+                </a:schemeClr>
+              </a:solidFill>
+              <a:miter lim="800000"/>
+              <a:headEnd/>
+              <a:tailEnd/>
+            </a:ln>
+          </p:spPr>
+          <p:txBody>
+            <a:bodyPr wrap="square" lIns="88900" tIns="88900" rIns="88900" bIns="88900" rtlCol="0" anchor="ctr">
+              <a:noAutofit/>
+            </a:bodyPr>
+            <a:lstStyle/>
+            <a:p>
+              <a:pPr algn="ctr">
+                <a:lnSpc>
+                  <a:spcPct val="106000"/>
+                </a:lnSpc>
+                <a:buFont typeface="Wingdings 2" pitchFamily="18" charset="2"/>
+                <a:buNone/>
+              </a:pPr>
+              <a:r>
+                <a:rPr lang="en-US" altLang="ko-KR" sz="1600" b="1" dirty="0">
+                  <a:solidFill>
+                    <a:schemeClr val="bg1"/>
+                  </a:solidFill>
+                </a:rPr>
+                <a:t>`</a:t>
+              </a:r>
+              <a:endParaRPr lang="ko-KR" altLang="en-US" sz="1600" b="1" dirty="0">
+                <a:solidFill>
+                  <a:schemeClr val="bg1"/>
+                </a:solidFill>
+              </a:endParaRPr>
+            </a:p>
+          </p:txBody>
+        </p:sp>
+        <p:sp>
+          <p:nvSpPr>
+            <p:cNvPr id="7" name="직사각형 6">
+              <a:extLst>
+                <a:ext uri="{FF2B5EF4-FFF2-40B4-BE49-F238E27FC236}">
+                  <a16:creationId xmlns:a16="http://schemas.microsoft.com/office/drawing/2014/main" id="{10A55DD9-D672-462C-C45E-D67FE699D264}"/>
+                </a:ext>
+              </a:extLst>
+            </p:cNvPr>
+            <p:cNvSpPr/>
+            <p:nvPr/>
+          </p:nvSpPr>
+          <p:spPr bwMode="gray">
+            <a:xfrm>
+              <a:off x="1105658" y="2813050"/>
+              <a:ext cx="717550" cy="762000"/>
+            </a:xfrm>
+            <a:prstGeom prst="rect">
+              <a:avLst/>
+            </a:prstGeom>
+            <a:noFill/>
+            <a:ln w="19050" algn="ctr">
+              <a:noFill/>
+              <a:miter lim="800000"/>
+              <a:headEnd/>
+              <a:tailEnd/>
+            </a:ln>
+          </p:spPr>
+          <p:txBody>
+            <a:bodyPr wrap="none" lIns="88900" tIns="88900" rIns="88900" bIns="88900" rtlCol="0" anchor="ctr"/>
+            <a:lstStyle/>
+            <a:p>
+              <a:pPr algn="ctr">
+                <a:lnSpc>
+                  <a:spcPct val="106000"/>
+                </a:lnSpc>
+                <a:buFont typeface="Wingdings 2" pitchFamily="18" charset="2"/>
+                <a:buNone/>
+              </a:pPr>
+              <a:r>
+                <a:rPr lang="en-US" altLang="ko-KR" sz="4400" b="1" dirty="0">
+                  <a:latin typeface="나눔고딕" panose="020D0604000000000000" pitchFamily="50" charset="-127"/>
+                  <a:ea typeface="나눔고딕" panose="020D0604000000000000" pitchFamily="50" charset="-127"/>
+                </a:rPr>
+                <a:t>B</a:t>
+              </a:r>
+              <a:r>
+                <a:rPr lang="ko-KR" altLang="en-US" sz="4400" b="1" dirty="0">
+                  <a:latin typeface="나눔고딕" panose="020D0604000000000000" pitchFamily="50" charset="-127"/>
+                  <a:ea typeface="나눔고딕" panose="020D0604000000000000" pitchFamily="50" charset="-127"/>
+                </a:rPr>
+                <a:t>상</a:t>
+              </a:r>
+            </a:p>
+          </p:txBody>
+        </p:sp>
+        <p:sp>
+          <p:nvSpPr>
+            <p:cNvPr id="8" name="직사각형 7">
+              <a:extLst>
+                <a:ext uri="{FF2B5EF4-FFF2-40B4-BE49-F238E27FC236}">
+                  <a16:creationId xmlns:a16="http://schemas.microsoft.com/office/drawing/2014/main" id="{32EF69D4-F7E3-61C0-68FD-0E964A49F4BA}"/>
+                </a:ext>
+              </a:extLst>
+            </p:cNvPr>
+            <p:cNvSpPr/>
+            <p:nvPr/>
+          </p:nvSpPr>
+          <p:spPr bwMode="gray">
+            <a:xfrm>
+              <a:off x="1958153" y="2662936"/>
+              <a:ext cx="2057666" cy="1096518"/>
+            </a:xfrm>
+            <a:prstGeom prst="rect">
+              <a:avLst/>
+            </a:prstGeom>
+            <a:noFill/>
+            <a:ln w="19050" algn="ctr">
+              <a:noFill/>
+              <a:miter lim="800000"/>
+              <a:headEnd/>
+              <a:tailEnd/>
+            </a:ln>
+          </p:spPr>
+          <p:txBody>
+            <a:bodyPr wrap="none" lIns="88900" tIns="88900" rIns="88900" bIns="88900" rtlCol="0" anchor="ctr"/>
+            <a:lstStyle/>
+            <a:p>
+              <a:pPr algn="ctr">
+                <a:lnSpc>
+                  <a:spcPct val="106000"/>
+                </a:lnSpc>
+                <a:buFont typeface="Wingdings 2" pitchFamily="18" charset="2"/>
+                <a:buNone/>
+              </a:pPr>
+              <a:r>
+                <a:rPr lang="ko-KR" altLang="en-US" b="1" dirty="0" err="1">
+                  <a:latin typeface="나눔고딕" panose="020D0604000000000000" pitchFamily="50" charset="-127"/>
+                  <a:ea typeface="나눔고딕" panose="020D0604000000000000" pitchFamily="50" charset="-127"/>
+                </a:rPr>
+                <a:t>시나모롤</a:t>
+              </a:r>
+              <a:r>
+                <a:rPr lang="ko-KR" altLang="en-US" b="1" dirty="0">
+                  <a:latin typeface="나눔고딕" panose="020D0604000000000000" pitchFamily="50" charset="-127"/>
+                  <a:ea typeface="나눔고딕" panose="020D0604000000000000" pitchFamily="50" charset="-127"/>
+                </a:rPr>
+                <a:t> </a:t>
+              </a:r>
+              <a:endParaRPr lang="en-US" altLang="ko-KR" b="1" dirty="0">
+                <a:latin typeface="나눔고딕" panose="020D0604000000000000" pitchFamily="50" charset="-127"/>
+                <a:ea typeface="나눔고딕" panose="020D0604000000000000" pitchFamily="50" charset="-127"/>
+              </a:endParaRPr>
+            </a:p>
+            <a:p>
+              <a:pPr algn="ctr">
+                <a:lnSpc>
+                  <a:spcPct val="106000"/>
+                </a:lnSpc>
+                <a:buFont typeface="Wingdings 2" pitchFamily="18" charset="2"/>
+                <a:buNone/>
+              </a:pPr>
+              <a:r>
+                <a:rPr lang="ko-KR" altLang="en-US" b="1" dirty="0" err="1">
+                  <a:latin typeface="나눔고딕" panose="020D0604000000000000" pitchFamily="50" charset="-127"/>
+                  <a:ea typeface="나눔고딕" panose="020D0604000000000000" pitchFamily="50" charset="-127"/>
+                </a:rPr>
+                <a:t>누이구루미</a:t>
+              </a:r>
+              <a:endParaRPr lang="ko-KR" altLang="en-US" b="1" dirty="0">
+                <a:latin typeface="나눔고딕" panose="020D0604000000000000" pitchFamily="50" charset="-127"/>
+                <a:ea typeface="나눔고딕" panose="020D0604000000000000" pitchFamily="50" charset="-127"/>
+              </a:endParaRPr>
+            </a:p>
+          </p:txBody>
+        </p:sp>
+      </p:grpSp>
+      <p:grpSp>
+        <p:nvGrpSpPr>
+          <p:cNvPr id="11" name="그룹 10">
+            <a:extLst>
+              <a:ext uri="{FF2B5EF4-FFF2-40B4-BE49-F238E27FC236}">
+                <a16:creationId xmlns:a16="http://schemas.microsoft.com/office/drawing/2014/main" id="{C653DFCE-D718-E42F-559E-5691E83CCF69}"/>
+              </a:ext>
+            </a:extLst>
+          </p:cNvPr>
+          <p:cNvGrpSpPr/>
+          <p:nvPr/>
+        </p:nvGrpSpPr>
+        <p:grpSpPr>
+          <a:xfrm>
+            <a:off x="576117" y="3016250"/>
+            <a:ext cx="3697200" cy="1486800"/>
+            <a:chOff x="677717" y="2434934"/>
+            <a:chExt cx="3697200" cy="1486800"/>
+          </a:xfrm>
+        </p:grpSpPr>
+        <p:sp>
+          <p:nvSpPr>
+            <p:cNvPr id="12" name="자유형: 도형 11">
+              <a:extLst>
+                <a:ext uri="{FF2B5EF4-FFF2-40B4-BE49-F238E27FC236}">
+                  <a16:creationId xmlns:a16="http://schemas.microsoft.com/office/drawing/2014/main" id="{35945CF1-80A5-B9E2-7094-6AA5E1084A77}"/>
+                </a:ext>
+              </a:extLst>
+            </p:cNvPr>
+            <p:cNvSpPr/>
+            <p:nvPr/>
+          </p:nvSpPr>
+          <p:spPr bwMode="gray">
+            <a:xfrm>
+              <a:off x="677717" y="2434934"/>
+              <a:ext cx="3697200" cy="1486800"/>
+            </a:xfrm>
+            <a:custGeom>
+              <a:avLst/>
+              <a:gdLst>
+                <a:gd name="csX0" fmla="*/ 0 w 3697200"/>
+                <a:gd name="csY0" fmla="*/ 0 h 1486800"/>
+                <a:gd name="csX1" fmla="*/ 3697200 w 3697200"/>
+                <a:gd name="csY1" fmla="*/ 0 h 1486800"/>
+                <a:gd name="csX2" fmla="*/ 3697200 w 3697200"/>
+                <a:gd name="csY2" fmla="*/ 517650 h 1486800"/>
+                <a:gd name="csX3" fmla="*/ 3691379 w 3697200"/>
+                <a:gd name="csY3" fmla="*/ 517063 h 1486800"/>
+                <a:gd name="csX4" fmla="*/ 3465042 w 3697200"/>
+                <a:gd name="csY4" fmla="*/ 743400 h 1486800"/>
+                <a:gd name="csX5" fmla="*/ 3691379 w 3697200"/>
+                <a:gd name="csY5" fmla="*/ 969737 h 1486800"/>
+                <a:gd name="csX6" fmla="*/ 3697200 w 3697200"/>
+                <a:gd name="csY6" fmla="*/ 969150 h 1486800"/>
+                <a:gd name="csX7" fmla="*/ 3697200 w 3697200"/>
+                <a:gd name="csY7" fmla="*/ 1486800 h 1486800"/>
+                <a:gd name="csX8" fmla="*/ 0 w 3697200"/>
+                <a:gd name="csY8" fmla="*/ 1486800 h 1486800"/>
+                <a:gd name="csX9" fmla="*/ 0 w 3697200"/>
+                <a:gd name="csY9" fmla="*/ 969150 h 1486800"/>
+                <a:gd name="csX10" fmla="*/ 5821 w 3697200"/>
+                <a:gd name="csY10" fmla="*/ 969737 h 1486800"/>
+                <a:gd name="csX11" fmla="*/ 232158 w 3697200"/>
+                <a:gd name="csY11" fmla="*/ 743400 h 1486800"/>
+                <a:gd name="csX12" fmla="*/ 5821 w 3697200"/>
+                <a:gd name="csY12" fmla="*/ 517063 h 1486800"/>
+                <a:gd name="csX13" fmla="*/ 0 w 3697200"/>
+                <a:gd name="csY13" fmla="*/ 517650 h 1486800"/>
+              </a:gdLst>
+              <a:ahLst/>
+              <a:cxnLst>
+                <a:cxn ang="0">
+                  <a:pos x="csX0" y="csY0"/>
+                </a:cxn>
+                <a:cxn ang="0">
+                  <a:pos x="csX1" y="csY1"/>
+                </a:cxn>
+                <a:cxn ang="0">
+                  <a:pos x="csX2" y="csY2"/>
+                </a:cxn>
+                <a:cxn ang="0">
+                  <a:pos x="csX3" y="csY3"/>
+                </a:cxn>
+                <a:cxn ang="0">
+                  <a:pos x="csX4" y="csY4"/>
+                </a:cxn>
+                <a:cxn ang="0">
+                  <a:pos x="csX5" y="csY5"/>
+                </a:cxn>
+                <a:cxn ang="0">
+                  <a:pos x="csX6" y="csY6"/>
+                </a:cxn>
+                <a:cxn ang="0">
+                  <a:pos x="csX7" y="csY7"/>
+                </a:cxn>
+                <a:cxn ang="0">
+                  <a:pos x="csX8" y="csY8"/>
+                </a:cxn>
+                <a:cxn ang="0">
+                  <a:pos x="csX9" y="csY9"/>
+                </a:cxn>
+                <a:cxn ang="0">
+                  <a:pos x="csX10" y="csY10"/>
+                </a:cxn>
+                <a:cxn ang="0">
+                  <a:pos x="csX11" y="csY11"/>
+                </a:cxn>
+                <a:cxn ang="0">
+                  <a:pos x="csX12" y="csY12"/>
+                </a:cxn>
+                <a:cxn ang="0">
+                  <a:pos x="csX13" y="csY13"/>
+                </a:cxn>
+              </a:cxnLst>
+              <a:rect l="l" t="t" r="r" b="b"/>
+              <a:pathLst>
+                <a:path w="3697200" h="1486800">
+                  <a:moveTo>
+                    <a:pt x="0" y="0"/>
+                  </a:moveTo>
+                  <a:lnTo>
+                    <a:pt x="3697200" y="0"/>
+                  </a:lnTo>
+                  <a:lnTo>
+                    <a:pt x="3697200" y="517650"/>
+                  </a:lnTo>
+                  <a:lnTo>
+                    <a:pt x="3691379" y="517063"/>
+                  </a:lnTo>
+                  <a:cubicBezTo>
+                    <a:pt x="3566377" y="517063"/>
+                    <a:pt x="3465042" y="618398"/>
+                    <a:pt x="3465042" y="743400"/>
+                  </a:cubicBezTo>
+                  <a:cubicBezTo>
+                    <a:pt x="3465042" y="868402"/>
+                    <a:pt x="3566377" y="969737"/>
+                    <a:pt x="3691379" y="969737"/>
+                  </a:cubicBezTo>
+                  <a:lnTo>
+                    <a:pt x="3697200" y="969150"/>
+                  </a:lnTo>
+                  <a:lnTo>
+                    <a:pt x="3697200" y="1486800"/>
+                  </a:lnTo>
+                  <a:lnTo>
+                    <a:pt x="0" y="1486800"/>
+                  </a:lnTo>
+                  <a:lnTo>
+                    <a:pt x="0" y="969150"/>
+                  </a:lnTo>
+                  <a:lnTo>
+                    <a:pt x="5821" y="969737"/>
+                  </a:lnTo>
+                  <a:cubicBezTo>
+                    <a:pt x="130823" y="969737"/>
+                    <a:pt x="232158" y="868402"/>
+                    <a:pt x="232158" y="743400"/>
+                  </a:cubicBezTo>
+                  <a:cubicBezTo>
+                    <a:pt x="232158" y="618398"/>
+                    <a:pt x="130823" y="517063"/>
+                    <a:pt x="5821" y="517063"/>
+                  </a:cubicBezTo>
+                  <a:lnTo>
+                    <a:pt x="0" y="517650"/>
+                  </a:lnTo>
+                  <a:close/>
+                </a:path>
+              </a:pathLst>
+            </a:custGeom>
+            <a:solidFill>
+              <a:srgbClr val="DFEAC0"/>
+            </a:solidFill>
+            <a:ln w="3175" algn="ctr">
+              <a:solidFill>
+                <a:schemeClr val="bg1">
+                  <a:lumMod val="65000"/>
+                </a:schemeClr>
+              </a:solidFill>
+              <a:miter lim="800000"/>
+              <a:headEnd/>
+              <a:tailEnd/>
+            </a:ln>
+          </p:spPr>
+          <p:txBody>
+            <a:bodyPr wrap="square" lIns="88900" tIns="88900" rIns="88900" bIns="88900" rtlCol="0" anchor="ctr">
+              <a:noAutofit/>
+            </a:bodyPr>
+            <a:lstStyle/>
+            <a:p>
+              <a:pPr algn="ctr">
+                <a:lnSpc>
+                  <a:spcPct val="106000"/>
+                </a:lnSpc>
+                <a:buFont typeface="Wingdings 2" pitchFamily="18" charset="2"/>
+                <a:buNone/>
+              </a:pPr>
+              <a:endParaRPr lang="ko-KR" altLang="en-US" sz="1600" b="1" dirty="0">
+                <a:solidFill>
+                  <a:schemeClr val="bg1"/>
+                </a:solidFill>
+              </a:endParaRPr>
+            </a:p>
+          </p:txBody>
+        </p:sp>
+        <p:sp>
+          <p:nvSpPr>
+            <p:cNvPr id="13" name="자유형: 도형 12">
+              <a:extLst>
+                <a:ext uri="{FF2B5EF4-FFF2-40B4-BE49-F238E27FC236}">
+                  <a16:creationId xmlns:a16="http://schemas.microsoft.com/office/drawing/2014/main" id="{CDDE4181-F8B3-F579-EB24-7888A166622A}"/>
+                </a:ext>
+              </a:extLst>
+            </p:cNvPr>
+            <p:cNvSpPr/>
+            <p:nvPr/>
+          </p:nvSpPr>
+          <p:spPr bwMode="gray">
+            <a:xfrm>
+              <a:off x="970713" y="2610952"/>
+              <a:ext cx="3144088" cy="1200486"/>
+            </a:xfrm>
+            <a:custGeom>
+              <a:avLst/>
+              <a:gdLst>
+                <a:gd name="csX0" fmla="*/ 161925 w 2864644"/>
+                <a:gd name="csY0" fmla="*/ 0 h 1093788"/>
+                <a:gd name="csX1" fmla="*/ 2702719 w 2864644"/>
+                <a:gd name="csY1" fmla="*/ 0 h 1093788"/>
+                <a:gd name="csX2" fmla="*/ 2864644 w 2864644"/>
+                <a:gd name="csY2" fmla="*/ 161925 h 1093788"/>
+                <a:gd name="csX3" fmla="*/ 2864644 w 2864644"/>
+                <a:gd name="csY3" fmla="*/ 931863 h 1093788"/>
+                <a:gd name="csX4" fmla="*/ 2702719 w 2864644"/>
+                <a:gd name="csY4" fmla="*/ 1093788 h 1093788"/>
+                <a:gd name="csX5" fmla="*/ 161925 w 2864644"/>
+                <a:gd name="csY5" fmla="*/ 1093788 h 1093788"/>
+                <a:gd name="csX6" fmla="*/ 0 w 2864644"/>
+                <a:gd name="csY6" fmla="*/ 931863 h 1093788"/>
+                <a:gd name="csX7" fmla="*/ 0 w 2864644"/>
+                <a:gd name="csY7" fmla="*/ 161925 h 1093788"/>
+                <a:gd name="csX8" fmla="*/ 161925 w 2864644"/>
+                <a:gd name="csY8" fmla="*/ 0 h 1093788"/>
+              </a:gdLst>
+              <a:ahLst/>
+              <a:cxnLst>
+                <a:cxn ang="0">
+                  <a:pos x="csX0" y="csY0"/>
+                </a:cxn>
+                <a:cxn ang="0">
+                  <a:pos x="csX1" y="csY1"/>
+                </a:cxn>
+                <a:cxn ang="0">
+                  <a:pos x="csX2" y="csY2"/>
+                </a:cxn>
+                <a:cxn ang="0">
+                  <a:pos x="csX3" y="csY3"/>
+                </a:cxn>
+                <a:cxn ang="0">
+                  <a:pos x="csX4" y="csY4"/>
+                </a:cxn>
+                <a:cxn ang="0">
+                  <a:pos x="csX5" y="csY5"/>
+                </a:cxn>
+                <a:cxn ang="0">
+                  <a:pos x="csX6" y="csY6"/>
+                </a:cxn>
+                <a:cxn ang="0">
+                  <a:pos x="csX7" y="csY7"/>
+                </a:cxn>
+                <a:cxn ang="0">
+                  <a:pos x="csX8" y="csY8"/>
+                </a:cxn>
+              </a:cxnLst>
+              <a:rect l="l" t="t" r="r" b="b"/>
+              <a:pathLst>
+                <a:path w="2864644" h="1093788">
+                  <a:moveTo>
+                    <a:pt x="161925" y="0"/>
+                  </a:moveTo>
+                  <a:lnTo>
+                    <a:pt x="2702719" y="0"/>
+                  </a:lnTo>
+                  <a:cubicBezTo>
+                    <a:pt x="2702719" y="89429"/>
+                    <a:pt x="2775215" y="161925"/>
+                    <a:pt x="2864644" y="161925"/>
+                  </a:cubicBezTo>
+                  <a:lnTo>
+                    <a:pt x="2864644" y="931863"/>
+                  </a:lnTo>
+                  <a:cubicBezTo>
+                    <a:pt x="2775215" y="931863"/>
+                    <a:pt x="2702719" y="1004359"/>
+                    <a:pt x="2702719" y="1093788"/>
+                  </a:cubicBezTo>
+                  <a:lnTo>
+                    <a:pt x="161925" y="1093788"/>
+                  </a:lnTo>
+                  <a:cubicBezTo>
+                    <a:pt x="161925" y="1004359"/>
+                    <a:pt x="89429" y="931863"/>
+                    <a:pt x="0" y="931863"/>
+                  </a:cubicBezTo>
+                  <a:lnTo>
+                    <a:pt x="0" y="161925"/>
+                  </a:lnTo>
+                  <a:cubicBezTo>
+                    <a:pt x="89429" y="161925"/>
+                    <a:pt x="161925" y="89429"/>
+                    <a:pt x="161925" y="0"/>
+                  </a:cubicBezTo>
+                  <a:close/>
+                </a:path>
+              </a:pathLst>
+            </a:custGeom>
+            <a:solidFill>
+              <a:srgbClr val="E6E6E6"/>
+            </a:solidFill>
+            <a:ln w="3175" algn="ctr">
+              <a:solidFill>
+                <a:schemeClr val="bg1">
+                  <a:lumMod val="65000"/>
+                </a:schemeClr>
+              </a:solidFill>
+              <a:miter lim="800000"/>
+              <a:headEnd/>
+              <a:tailEnd/>
+            </a:ln>
+          </p:spPr>
+          <p:txBody>
+            <a:bodyPr wrap="square" lIns="88900" tIns="88900" rIns="88900" bIns="88900" rtlCol="0" anchor="ctr">
+              <a:noAutofit/>
+            </a:bodyPr>
+            <a:lstStyle/>
+            <a:p>
+              <a:pPr algn="ctr">
+                <a:lnSpc>
+                  <a:spcPct val="106000"/>
+                </a:lnSpc>
+                <a:buFont typeface="Wingdings 2" pitchFamily="18" charset="2"/>
+                <a:buNone/>
+              </a:pPr>
+              <a:r>
+                <a:rPr lang="en-US" altLang="ko-KR" sz="1600" b="1" dirty="0">
+                  <a:solidFill>
+                    <a:schemeClr val="bg1"/>
+                  </a:solidFill>
+                </a:rPr>
+                <a:t>`</a:t>
+              </a:r>
+              <a:endParaRPr lang="ko-KR" altLang="en-US" sz="1600" b="1" dirty="0">
+                <a:solidFill>
+                  <a:schemeClr val="bg1"/>
+                </a:solidFill>
+              </a:endParaRPr>
+            </a:p>
+          </p:txBody>
+        </p:sp>
+        <p:sp>
+          <p:nvSpPr>
+            <p:cNvPr id="14" name="직사각형 13">
+              <a:extLst>
+                <a:ext uri="{FF2B5EF4-FFF2-40B4-BE49-F238E27FC236}">
+                  <a16:creationId xmlns:a16="http://schemas.microsoft.com/office/drawing/2014/main" id="{9DA6287E-1AD6-F651-292A-7E5CFCB0E295}"/>
+                </a:ext>
+              </a:extLst>
+            </p:cNvPr>
+            <p:cNvSpPr/>
+            <p:nvPr/>
+          </p:nvSpPr>
+          <p:spPr bwMode="gray">
+            <a:xfrm>
+              <a:off x="1105658" y="2813050"/>
+              <a:ext cx="717550" cy="762000"/>
+            </a:xfrm>
+            <a:prstGeom prst="rect">
+              <a:avLst/>
+            </a:prstGeom>
+            <a:noFill/>
+            <a:ln w="19050" algn="ctr">
+              <a:noFill/>
+              <a:miter lim="800000"/>
+              <a:headEnd/>
+              <a:tailEnd/>
+            </a:ln>
+          </p:spPr>
+          <p:txBody>
+            <a:bodyPr wrap="none" lIns="88900" tIns="88900" rIns="88900" bIns="88900" rtlCol="0" anchor="ctr"/>
+            <a:lstStyle/>
+            <a:p>
+              <a:pPr algn="ctr">
+                <a:lnSpc>
+                  <a:spcPct val="106000"/>
+                </a:lnSpc>
+                <a:buFont typeface="Wingdings 2" pitchFamily="18" charset="2"/>
+                <a:buNone/>
+              </a:pPr>
+              <a:r>
+                <a:rPr lang="en-US" altLang="ko-KR" sz="4400" b="1" dirty="0">
+                  <a:latin typeface="나눔고딕" panose="020D0604000000000000" pitchFamily="50" charset="-127"/>
+                  <a:ea typeface="나눔고딕" panose="020D0604000000000000" pitchFamily="50" charset="-127"/>
+                </a:rPr>
+                <a:t>C</a:t>
+              </a:r>
+              <a:r>
+                <a:rPr lang="ko-KR" altLang="en-US" sz="4400" b="1" dirty="0">
+                  <a:latin typeface="나눔고딕" panose="020D0604000000000000" pitchFamily="50" charset="-127"/>
+                  <a:ea typeface="나눔고딕" panose="020D0604000000000000" pitchFamily="50" charset="-127"/>
+                </a:rPr>
+                <a:t>상</a:t>
+              </a:r>
+            </a:p>
+          </p:txBody>
+        </p:sp>
+        <p:sp>
+          <p:nvSpPr>
+            <p:cNvPr id="15" name="직사각형 14">
+              <a:extLst>
+                <a:ext uri="{FF2B5EF4-FFF2-40B4-BE49-F238E27FC236}">
+                  <a16:creationId xmlns:a16="http://schemas.microsoft.com/office/drawing/2014/main" id="{2D7CC9B6-28E6-AD5A-A98A-AA4E6F7E80B2}"/>
+                </a:ext>
+              </a:extLst>
+            </p:cNvPr>
+            <p:cNvSpPr/>
+            <p:nvPr/>
+          </p:nvSpPr>
+          <p:spPr bwMode="gray">
+            <a:xfrm>
+              <a:off x="1958153" y="2662936"/>
+              <a:ext cx="2057666" cy="1096518"/>
+            </a:xfrm>
+            <a:prstGeom prst="rect">
+              <a:avLst/>
+            </a:prstGeom>
+            <a:noFill/>
+            <a:ln w="19050" algn="ctr">
+              <a:noFill/>
+              <a:miter lim="800000"/>
+              <a:headEnd/>
+              <a:tailEnd/>
+            </a:ln>
+          </p:spPr>
+          <p:txBody>
+            <a:bodyPr wrap="none" lIns="88900" tIns="88900" rIns="88900" bIns="88900" rtlCol="0" anchor="ctr"/>
+            <a:lstStyle/>
+            <a:p>
+              <a:pPr algn="ctr">
+                <a:lnSpc>
+                  <a:spcPct val="106000"/>
+                </a:lnSpc>
+              </a:pPr>
+              <a:r>
+                <a:rPr lang="ko-KR" altLang="ko-KR" b="1" dirty="0" err="1">
+                  <a:latin typeface="나눔고딕" panose="020D0604000000000000" pitchFamily="50" charset="-127"/>
+                  <a:ea typeface="나눔고딕" panose="020D0604000000000000" pitchFamily="50" charset="-127"/>
+                </a:rPr>
+                <a:t>시나모롤</a:t>
+              </a:r>
+              <a:r>
+                <a:rPr lang="ko-KR" altLang="ko-KR" b="1" dirty="0">
+                  <a:latin typeface="나눔고딕" panose="020D0604000000000000" pitchFamily="50" charset="-127"/>
+                  <a:ea typeface="나눔고딕" panose="020D0604000000000000" pitchFamily="50" charset="-127"/>
+                </a:rPr>
+                <a:t> </a:t>
+              </a:r>
+              <a:endParaRPr lang="en-US" altLang="ko-KR" b="1" dirty="0">
+                <a:latin typeface="나눔고딕" panose="020D0604000000000000" pitchFamily="50" charset="-127"/>
+                <a:ea typeface="나눔고딕" panose="020D0604000000000000" pitchFamily="50" charset="-127"/>
+              </a:endParaRPr>
+            </a:p>
+            <a:p>
+              <a:pPr algn="ctr">
+                <a:lnSpc>
+                  <a:spcPct val="106000"/>
+                </a:lnSpc>
+              </a:pPr>
+              <a:r>
+                <a:rPr lang="ko-KR" altLang="ko-KR" b="1" dirty="0">
+                  <a:latin typeface="나눔고딕" panose="020D0604000000000000" pitchFamily="50" charset="-127"/>
+                  <a:ea typeface="나눔고딕" panose="020D0604000000000000" pitchFamily="50" charset="-127"/>
+                </a:rPr>
+                <a:t>데스크</a:t>
+              </a:r>
+              <a:r>
+                <a:rPr lang="en-US" altLang="ko-KR" b="1" dirty="0">
+                  <a:latin typeface="나눔고딕" panose="020D0604000000000000" pitchFamily="50" charset="-127"/>
+                  <a:ea typeface="나눔고딕" panose="020D0604000000000000" pitchFamily="50" charset="-127"/>
+                </a:rPr>
+                <a:t> </a:t>
+              </a:r>
+              <a:r>
+                <a:rPr lang="ko-KR" altLang="ko-KR" b="1" dirty="0">
+                  <a:latin typeface="나눔고딕" panose="020D0604000000000000" pitchFamily="50" charset="-127"/>
+                  <a:ea typeface="나눔고딕" panose="020D0604000000000000" pitchFamily="50" charset="-127"/>
+                </a:rPr>
+                <a:t>매트</a:t>
+              </a:r>
+            </a:p>
+          </p:txBody>
+        </p:sp>
+      </p:grpSp>
+      <p:grpSp>
+        <p:nvGrpSpPr>
+          <p:cNvPr id="25" name="그룹 24">
+            <a:extLst>
+              <a:ext uri="{FF2B5EF4-FFF2-40B4-BE49-F238E27FC236}">
+                <a16:creationId xmlns:a16="http://schemas.microsoft.com/office/drawing/2014/main" id="{E924D777-71D6-0C57-60EF-DC29BEB1D6E3}"/>
+              </a:ext>
+            </a:extLst>
+          </p:cNvPr>
+          <p:cNvGrpSpPr/>
+          <p:nvPr/>
+        </p:nvGrpSpPr>
+        <p:grpSpPr>
+          <a:xfrm>
+            <a:off x="4748067" y="3362934"/>
+            <a:ext cx="3697200" cy="1486800"/>
+            <a:chOff x="677717" y="2434934"/>
+            <a:chExt cx="3697200" cy="1486800"/>
+          </a:xfrm>
+        </p:grpSpPr>
+        <p:sp>
+          <p:nvSpPr>
+            <p:cNvPr id="26" name="자유형: 도형 25">
+              <a:extLst>
+                <a:ext uri="{FF2B5EF4-FFF2-40B4-BE49-F238E27FC236}">
+                  <a16:creationId xmlns:a16="http://schemas.microsoft.com/office/drawing/2014/main" id="{EA027692-34C8-52E1-F475-677122204D04}"/>
+                </a:ext>
+              </a:extLst>
+            </p:cNvPr>
+            <p:cNvSpPr/>
+            <p:nvPr/>
+          </p:nvSpPr>
+          <p:spPr bwMode="gray">
+            <a:xfrm>
+              <a:off x="677717" y="2434934"/>
+              <a:ext cx="3697200" cy="1486800"/>
+            </a:xfrm>
+            <a:custGeom>
+              <a:avLst/>
+              <a:gdLst>
+                <a:gd name="csX0" fmla="*/ 0 w 3697200"/>
+                <a:gd name="csY0" fmla="*/ 0 h 1486800"/>
+                <a:gd name="csX1" fmla="*/ 3697200 w 3697200"/>
+                <a:gd name="csY1" fmla="*/ 0 h 1486800"/>
+                <a:gd name="csX2" fmla="*/ 3697200 w 3697200"/>
+                <a:gd name="csY2" fmla="*/ 517650 h 1486800"/>
+                <a:gd name="csX3" fmla="*/ 3691379 w 3697200"/>
+                <a:gd name="csY3" fmla="*/ 517063 h 1486800"/>
+                <a:gd name="csX4" fmla="*/ 3465042 w 3697200"/>
+                <a:gd name="csY4" fmla="*/ 743400 h 1486800"/>
+                <a:gd name="csX5" fmla="*/ 3691379 w 3697200"/>
+                <a:gd name="csY5" fmla="*/ 969737 h 1486800"/>
+                <a:gd name="csX6" fmla="*/ 3697200 w 3697200"/>
+                <a:gd name="csY6" fmla="*/ 969150 h 1486800"/>
+                <a:gd name="csX7" fmla="*/ 3697200 w 3697200"/>
+                <a:gd name="csY7" fmla="*/ 1486800 h 1486800"/>
+                <a:gd name="csX8" fmla="*/ 0 w 3697200"/>
+                <a:gd name="csY8" fmla="*/ 1486800 h 1486800"/>
+                <a:gd name="csX9" fmla="*/ 0 w 3697200"/>
+                <a:gd name="csY9" fmla="*/ 969150 h 1486800"/>
+                <a:gd name="csX10" fmla="*/ 5821 w 3697200"/>
+                <a:gd name="csY10" fmla="*/ 969737 h 1486800"/>
+                <a:gd name="csX11" fmla="*/ 232158 w 3697200"/>
+                <a:gd name="csY11" fmla="*/ 743400 h 1486800"/>
+                <a:gd name="csX12" fmla="*/ 5821 w 3697200"/>
+                <a:gd name="csY12" fmla="*/ 517063 h 1486800"/>
+                <a:gd name="csX13" fmla="*/ 0 w 3697200"/>
+                <a:gd name="csY13" fmla="*/ 517650 h 1486800"/>
+              </a:gdLst>
+              <a:ahLst/>
+              <a:cxnLst>
+                <a:cxn ang="0">
+                  <a:pos x="csX0" y="csY0"/>
+                </a:cxn>
+                <a:cxn ang="0">
+                  <a:pos x="csX1" y="csY1"/>
+                </a:cxn>
+                <a:cxn ang="0">
+                  <a:pos x="csX2" y="csY2"/>
+                </a:cxn>
+                <a:cxn ang="0">
+                  <a:pos x="csX3" y="csY3"/>
+                </a:cxn>
+                <a:cxn ang="0">
+                  <a:pos x="csX4" y="csY4"/>
+                </a:cxn>
+                <a:cxn ang="0">
+                  <a:pos x="csX5" y="csY5"/>
+                </a:cxn>
+                <a:cxn ang="0">
+                  <a:pos x="csX6" y="csY6"/>
+                </a:cxn>
+                <a:cxn ang="0">
+                  <a:pos x="csX7" y="csY7"/>
+                </a:cxn>
+                <a:cxn ang="0">
+                  <a:pos x="csX8" y="csY8"/>
+                </a:cxn>
+                <a:cxn ang="0">
+                  <a:pos x="csX9" y="csY9"/>
+                </a:cxn>
+                <a:cxn ang="0">
+                  <a:pos x="csX10" y="csY10"/>
+                </a:cxn>
+                <a:cxn ang="0">
+                  <a:pos x="csX11" y="csY11"/>
+                </a:cxn>
+                <a:cxn ang="0">
+                  <a:pos x="csX12" y="csY12"/>
+                </a:cxn>
+                <a:cxn ang="0">
+                  <a:pos x="csX13" y="csY13"/>
+                </a:cxn>
+              </a:cxnLst>
+              <a:rect l="l" t="t" r="r" b="b"/>
+              <a:pathLst>
+                <a:path w="3697200" h="1486800">
+                  <a:moveTo>
+                    <a:pt x="0" y="0"/>
+                  </a:moveTo>
+                  <a:lnTo>
+                    <a:pt x="3697200" y="0"/>
+                  </a:lnTo>
+                  <a:lnTo>
+                    <a:pt x="3697200" y="517650"/>
+                  </a:lnTo>
+                  <a:lnTo>
+                    <a:pt x="3691379" y="517063"/>
+                  </a:lnTo>
+                  <a:cubicBezTo>
+                    <a:pt x="3566377" y="517063"/>
+                    <a:pt x="3465042" y="618398"/>
+                    <a:pt x="3465042" y="743400"/>
+                  </a:cubicBezTo>
+                  <a:cubicBezTo>
+                    <a:pt x="3465042" y="868402"/>
+                    <a:pt x="3566377" y="969737"/>
+                    <a:pt x="3691379" y="969737"/>
+                  </a:cubicBezTo>
+                  <a:lnTo>
+                    <a:pt x="3697200" y="969150"/>
+                  </a:lnTo>
+                  <a:lnTo>
+                    <a:pt x="3697200" y="1486800"/>
+                  </a:lnTo>
+                  <a:lnTo>
+                    <a:pt x="0" y="1486800"/>
+                  </a:lnTo>
+                  <a:lnTo>
+                    <a:pt x="0" y="969150"/>
+                  </a:lnTo>
+                  <a:lnTo>
+                    <a:pt x="5821" y="969737"/>
+                  </a:lnTo>
+                  <a:cubicBezTo>
+                    <a:pt x="130823" y="969737"/>
+                    <a:pt x="232158" y="868402"/>
+                    <a:pt x="232158" y="743400"/>
+                  </a:cubicBezTo>
+                  <a:cubicBezTo>
+                    <a:pt x="232158" y="618398"/>
+                    <a:pt x="130823" y="517063"/>
+                    <a:pt x="5821" y="517063"/>
+                  </a:cubicBezTo>
+                  <a:lnTo>
+                    <a:pt x="0" y="517650"/>
+                  </a:lnTo>
+                  <a:close/>
+                </a:path>
+              </a:pathLst>
+            </a:custGeom>
+            <a:solidFill>
+              <a:srgbClr val="DFEAC0"/>
+            </a:solidFill>
+            <a:ln w="3175" algn="ctr">
+              <a:solidFill>
+                <a:schemeClr val="bg1">
+                  <a:lumMod val="65000"/>
+                </a:schemeClr>
+              </a:solidFill>
+              <a:miter lim="800000"/>
+              <a:headEnd/>
+              <a:tailEnd/>
+            </a:ln>
+          </p:spPr>
+          <p:txBody>
+            <a:bodyPr wrap="square" lIns="88900" tIns="88900" rIns="88900" bIns="88900" rtlCol="0" anchor="ctr">
+              <a:noAutofit/>
+            </a:bodyPr>
+            <a:lstStyle/>
+            <a:p>
+              <a:pPr algn="ctr">
+                <a:lnSpc>
+                  <a:spcPct val="106000"/>
+                </a:lnSpc>
+                <a:buFont typeface="Wingdings 2" pitchFamily="18" charset="2"/>
+                <a:buNone/>
+              </a:pPr>
+              <a:endParaRPr lang="ko-KR" altLang="en-US" sz="1600" b="1" dirty="0">
+                <a:solidFill>
+                  <a:schemeClr val="bg1"/>
+                </a:solidFill>
+              </a:endParaRPr>
+            </a:p>
+          </p:txBody>
+        </p:sp>
+        <p:sp>
+          <p:nvSpPr>
+            <p:cNvPr id="27" name="자유형: 도형 26">
+              <a:extLst>
+                <a:ext uri="{FF2B5EF4-FFF2-40B4-BE49-F238E27FC236}">
+                  <a16:creationId xmlns:a16="http://schemas.microsoft.com/office/drawing/2014/main" id="{57FABACB-D52E-3EED-4A1E-9DF72FFCA56C}"/>
+                </a:ext>
+              </a:extLst>
+            </p:cNvPr>
+            <p:cNvSpPr/>
+            <p:nvPr/>
+          </p:nvSpPr>
+          <p:spPr bwMode="gray">
+            <a:xfrm>
+              <a:off x="970713" y="2610952"/>
+              <a:ext cx="3144088" cy="1200486"/>
+            </a:xfrm>
+            <a:custGeom>
+              <a:avLst/>
+              <a:gdLst>
+                <a:gd name="csX0" fmla="*/ 161925 w 2864644"/>
+                <a:gd name="csY0" fmla="*/ 0 h 1093788"/>
+                <a:gd name="csX1" fmla="*/ 2702719 w 2864644"/>
+                <a:gd name="csY1" fmla="*/ 0 h 1093788"/>
+                <a:gd name="csX2" fmla="*/ 2864644 w 2864644"/>
+                <a:gd name="csY2" fmla="*/ 161925 h 1093788"/>
+                <a:gd name="csX3" fmla="*/ 2864644 w 2864644"/>
+                <a:gd name="csY3" fmla="*/ 931863 h 1093788"/>
+                <a:gd name="csX4" fmla="*/ 2702719 w 2864644"/>
+                <a:gd name="csY4" fmla="*/ 1093788 h 1093788"/>
+                <a:gd name="csX5" fmla="*/ 161925 w 2864644"/>
+                <a:gd name="csY5" fmla="*/ 1093788 h 1093788"/>
+                <a:gd name="csX6" fmla="*/ 0 w 2864644"/>
+                <a:gd name="csY6" fmla="*/ 931863 h 1093788"/>
+                <a:gd name="csX7" fmla="*/ 0 w 2864644"/>
+                <a:gd name="csY7" fmla="*/ 161925 h 1093788"/>
+                <a:gd name="csX8" fmla="*/ 161925 w 2864644"/>
+                <a:gd name="csY8" fmla="*/ 0 h 1093788"/>
+              </a:gdLst>
+              <a:ahLst/>
+              <a:cxnLst>
+                <a:cxn ang="0">
+                  <a:pos x="csX0" y="csY0"/>
+                </a:cxn>
+                <a:cxn ang="0">
+                  <a:pos x="csX1" y="csY1"/>
+                </a:cxn>
+                <a:cxn ang="0">
+                  <a:pos x="csX2" y="csY2"/>
+                </a:cxn>
+                <a:cxn ang="0">
+                  <a:pos x="csX3" y="csY3"/>
+                </a:cxn>
+                <a:cxn ang="0">
+                  <a:pos x="csX4" y="csY4"/>
+                </a:cxn>
+                <a:cxn ang="0">
+                  <a:pos x="csX5" y="csY5"/>
+                </a:cxn>
+                <a:cxn ang="0">
+                  <a:pos x="csX6" y="csY6"/>
+                </a:cxn>
+                <a:cxn ang="0">
+                  <a:pos x="csX7" y="csY7"/>
+                </a:cxn>
+                <a:cxn ang="0">
+                  <a:pos x="csX8" y="csY8"/>
+                </a:cxn>
+              </a:cxnLst>
+              <a:rect l="l" t="t" r="r" b="b"/>
+              <a:pathLst>
+                <a:path w="2864644" h="1093788">
+                  <a:moveTo>
+                    <a:pt x="161925" y="0"/>
+                  </a:moveTo>
+                  <a:lnTo>
+                    <a:pt x="2702719" y="0"/>
+                  </a:lnTo>
+                  <a:cubicBezTo>
+                    <a:pt x="2702719" y="89429"/>
+                    <a:pt x="2775215" y="161925"/>
+                    <a:pt x="2864644" y="161925"/>
+                  </a:cubicBezTo>
+                  <a:lnTo>
+                    <a:pt x="2864644" y="931863"/>
+                  </a:lnTo>
+                  <a:cubicBezTo>
+                    <a:pt x="2775215" y="931863"/>
+                    <a:pt x="2702719" y="1004359"/>
+                    <a:pt x="2702719" y="1093788"/>
+                  </a:cubicBezTo>
+                  <a:lnTo>
+                    <a:pt x="161925" y="1093788"/>
+                  </a:lnTo>
+                  <a:cubicBezTo>
+                    <a:pt x="161925" y="1004359"/>
+                    <a:pt x="89429" y="931863"/>
+                    <a:pt x="0" y="931863"/>
+                  </a:cubicBezTo>
+                  <a:lnTo>
+                    <a:pt x="0" y="161925"/>
+                  </a:lnTo>
+                  <a:cubicBezTo>
+                    <a:pt x="89429" y="161925"/>
+                    <a:pt x="161925" y="89429"/>
+                    <a:pt x="161925" y="0"/>
+                  </a:cubicBezTo>
+                  <a:close/>
+                </a:path>
+              </a:pathLst>
+            </a:custGeom>
+            <a:solidFill>
+              <a:srgbClr val="E6E6E6"/>
+            </a:solidFill>
+            <a:ln w="3175" algn="ctr">
+              <a:solidFill>
+                <a:schemeClr val="bg1">
+                  <a:lumMod val="65000"/>
+                </a:schemeClr>
+              </a:solidFill>
+              <a:miter lim="800000"/>
+              <a:headEnd/>
+              <a:tailEnd/>
+            </a:ln>
+          </p:spPr>
+          <p:txBody>
+            <a:bodyPr wrap="square" lIns="88900" tIns="88900" rIns="88900" bIns="88900" rtlCol="0" anchor="ctr">
+              <a:noAutofit/>
+            </a:bodyPr>
+            <a:lstStyle/>
+            <a:p>
+              <a:pPr algn="ctr">
+                <a:lnSpc>
+                  <a:spcPct val="106000"/>
+                </a:lnSpc>
+                <a:buFont typeface="Wingdings 2" pitchFamily="18" charset="2"/>
+                <a:buNone/>
+              </a:pPr>
+              <a:r>
+                <a:rPr lang="en-US" altLang="ko-KR" sz="1600" b="1" dirty="0">
+                  <a:solidFill>
+                    <a:schemeClr val="bg1"/>
+                  </a:solidFill>
+                </a:rPr>
+                <a:t>`</a:t>
+              </a:r>
+              <a:endParaRPr lang="ko-KR" altLang="en-US" sz="1600" b="1" dirty="0">
+                <a:solidFill>
+                  <a:schemeClr val="bg1"/>
+                </a:solidFill>
+              </a:endParaRPr>
+            </a:p>
+          </p:txBody>
+        </p:sp>
+        <p:sp>
+          <p:nvSpPr>
+            <p:cNvPr id="28" name="직사각형 27">
+              <a:extLst>
+                <a:ext uri="{FF2B5EF4-FFF2-40B4-BE49-F238E27FC236}">
+                  <a16:creationId xmlns:a16="http://schemas.microsoft.com/office/drawing/2014/main" id="{5A016040-3E78-1F8A-F8F0-F64813EC396A}"/>
+                </a:ext>
+              </a:extLst>
+            </p:cNvPr>
+            <p:cNvSpPr/>
+            <p:nvPr/>
+          </p:nvSpPr>
+          <p:spPr bwMode="gray">
+            <a:xfrm>
+              <a:off x="1105658" y="2813050"/>
+              <a:ext cx="717550" cy="762000"/>
+            </a:xfrm>
+            <a:prstGeom prst="rect">
+              <a:avLst/>
+            </a:prstGeom>
+            <a:noFill/>
+            <a:ln w="19050" algn="ctr">
+              <a:noFill/>
+              <a:miter lim="800000"/>
+              <a:headEnd/>
+              <a:tailEnd/>
+            </a:ln>
+          </p:spPr>
+          <p:txBody>
+            <a:bodyPr wrap="none" lIns="88900" tIns="88900" rIns="88900" bIns="88900" rtlCol="0" anchor="ctr"/>
+            <a:lstStyle/>
+            <a:p>
+              <a:pPr algn="ctr">
+                <a:lnSpc>
+                  <a:spcPct val="106000"/>
+                </a:lnSpc>
+                <a:buFont typeface="Wingdings 2" pitchFamily="18" charset="2"/>
+                <a:buNone/>
+              </a:pPr>
+              <a:r>
+                <a:rPr lang="en-US" altLang="ko-KR" sz="4400" b="1" dirty="0">
+                  <a:latin typeface="나눔고딕" panose="020D0604000000000000" pitchFamily="50" charset="-127"/>
+                  <a:ea typeface="나눔고딕" panose="020D0604000000000000" pitchFamily="50" charset="-127"/>
+                </a:rPr>
+                <a:t>D</a:t>
+              </a:r>
+              <a:r>
+                <a:rPr lang="ko-KR" altLang="en-US" sz="4400" b="1" dirty="0">
+                  <a:latin typeface="나눔고딕" panose="020D0604000000000000" pitchFamily="50" charset="-127"/>
+                  <a:ea typeface="나눔고딕" panose="020D0604000000000000" pitchFamily="50" charset="-127"/>
+                </a:rPr>
+                <a:t>상</a:t>
+              </a:r>
+            </a:p>
+          </p:txBody>
+        </p:sp>
+        <p:sp>
+          <p:nvSpPr>
+            <p:cNvPr id="29" name="직사각형 28">
+              <a:extLst>
+                <a:ext uri="{FF2B5EF4-FFF2-40B4-BE49-F238E27FC236}">
+                  <a16:creationId xmlns:a16="http://schemas.microsoft.com/office/drawing/2014/main" id="{DA4FB735-CBED-39DF-0583-158256028F3A}"/>
+                </a:ext>
+              </a:extLst>
+            </p:cNvPr>
+            <p:cNvSpPr/>
+            <p:nvPr/>
+          </p:nvSpPr>
+          <p:spPr bwMode="gray">
+            <a:xfrm>
+              <a:off x="1958153" y="2662936"/>
+              <a:ext cx="2057666" cy="1096518"/>
+            </a:xfrm>
+            <a:prstGeom prst="rect">
+              <a:avLst/>
+            </a:prstGeom>
+            <a:noFill/>
+            <a:ln w="19050" algn="ctr">
+              <a:noFill/>
+              <a:miter lim="800000"/>
+              <a:headEnd/>
+              <a:tailEnd/>
+            </a:ln>
+          </p:spPr>
+          <p:txBody>
+            <a:bodyPr wrap="none" lIns="88900" tIns="88900" rIns="88900" bIns="88900" rtlCol="0" anchor="ctr"/>
+            <a:lstStyle/>
+            <a:p>
+              <a:pPr algn="ctr">
+                <a:lnSpc>
+                  <a:spcPct val="106000"/>
+                </a:lnSpc>
+                <a:buFont typeface="Wingdings 2" pitchFamily="18" charset="2"/>
+                <a:buNone/>
+              </a:pPr>
+              <a:r>
+                <a:rPr lang="ko-KR" altLang="en-US" b="1" dirty="0" err="1">
+                  <a:latin typeface="나눔고딕" panose="020D0604000000000000" pitchFamily="50" charset="-127"/>
+                  <a:ea typeface="나눔고딕" panose="020D0604000000000000" pitchFamily="50" charset="-127"/>
+                </a:rPr>
+                <a:t>시나모롤</a:t>
+              </a:r>
+              <a:r>
+                <a:rPr lang="ko-KR" altLang="en-US" b="1" dirty="0">
+                  <a:latin typeface="나눔고딕" panose="020D0604000000000000" pitchFamily="50" charset="-127"/>
+                  <a:ea typeface="나눔고딕" panose="020D0604000000000000" pitchFamily="50" charset="-127"/>
+                </a:rPr>
+                <a:t> </a:t>
+              </a:r>
+              <a:endParaRPr lang="en-US" altLang="ko-KR" b="1" dirty="0">
+                <a:latin typeface="나눔고딕" panose="020D0604000000000000" pitchFamily="50" charset="-127"/>
+                <a:ea typeface="나눔고딕" panose="020D0604000000000000" pitchFamily="50" charset="-127"/>
+              </a:endParaRPr>
+            </a:p>
+            <a:p>
+              <a:pPr algn="ctr">
+                <a:lnSpc>
+                  <a:spcPct val="106000"/>
+                </a:lnSpc>
+                <a:buFont typeface="Wingdings 2" pitchFamily="18" charset="2"/>
+                <a:buNone/>
+              </a:pPr>
+              <a:r>
+                <a:rPr lang="ko-KR" altLang="en-US" b="1" dirty="0">
+                  <a:latin typeface="나눔고딕" panose="020D0604000000000000" pitchFamily="50" charset="-127"/>
+                  <a:ea typeface="나눔고딕" panose="020D0604000000000000" pitchFamily="50" charset="-127"/>
+                </a:rPr>
+                <a:t>릴리프 유리컵</a:t>
+              </a:r>
+            </a:p>
+          </p:txBody>
+        </p:sp>
+      </p:grpSp>
+      <p:grpSp>
+        <p:nvGrpSpPr>
+          <p:cNvPr id="30" name="그룹 29">
+            <a:extLst>
+              <a:ext uri="{FF2B5EF4-FFF2-40B4-BE49-F238E27FC236}">
+                <a16:creationId xmlns:a16="http://schemas.microsoft.com/office/drawing/2014/main" id="{FC9AEBF6-DE08-A4F5-44EE-FD9F42461339}"/>
+              </a:ext>
+            </a:extLst>
+          </p:cNvPr>
+          <p:cNvGrpSpPr/>
+          <p:nvPr/>
+        </p:nvGrpSpPr>
+        <p:grpSpPr>
+          <a:xfrm>
+            <a:off x="8691417" y="1190334"/>
+            <a:ext cx="3697200" cy="1486800"/>
+            <a:chOff x="677717" y="2434934"/>
+            <a:chExt cx="3697200" cy="1486800"/>
+          </a:xfrm>
+        </p:grpSpPr>
+        <p:sp>
+          <p:nvSpPr>
+            <p:cNvPr id="31" name="자유형: 도형 30">
+              <a:extLst>
+                <a:ext uri="{FF2B5EF4-FFF2-40B4-BE49-F238E27FC236}">
+                  <a16:creationId xmlns:a16="http://schemas.microsoft.com/office/drawing/2014/main" id="{5D548447-B942-5621-C2CC-9D8BD6D348BB}"/>
+                </a:ext>
+              </a:extLst>
+            </p:cNvPr>
+            <p:cNvSpPr/>
+            <p:nvPr/>
+          </p:nvSpPr>
+          <p:spPr bwMode="gray">
+            <a:xfrm>
+              <a:off x="677717" y="2434934"/>
+              <a:ext cx="3697200" cy="1486800"/>
+            </a:xfrm>
+            <a:custGeom>
+              <a:avLst/>
+              <a:gdLst>
+                <a:gd name="csX0" fmla="*/ 0 w 3697200"/>
+                <a:gd name="csY0" fmla="*/ 0 h 1486800"/>
+                <a:gd name="csX1" fmla="*/ 3697200 w 3697200"/>
+                <a:gd name="csY1" fmla="*/ 0 h 1486800"/>
+                <a:gd name="csX2" fmla="*/ 3697200 w 3697200"/>
+                <a:gd name="csY2" fmla="*/ 517650 h 1486800"/>
+                <a:gd name="csX3" fmla="*/ 3691379 w 3697200"/>
+                <a:gd name="csY3" fmla="*/ 517063 h 1486800"/>
+                <a:gd name="csX4" fmla="*/ 3465042 w 3697200"/>
+                <a:gd name="csY4" fmla="*/ 743400 h 1486800"/>
+                <a:gd name="csX5" fmla="*/ 3691379 w 3697200"/>
+                <a:gd name="csY5" fmla="*/ 969737 h 1486800"/>
+                <a:gd name="csX6" fmla="*/ 3697200 w 3697200"/>
+                <a:gd name="csY6" fmla="*/ 969150 h 1486800"/>
+                <a:gd name="csX7" fmla="*/ 3697200 w 3697200"/>
+                <a:gd name="csY7" fmla="*/ 1486800 h 1486800"/>
+                <a:gd name="csX8" fmla="*/ 0 w 3697200"/>
+                <a:gd name="csY8" fmla="*/ 1486800 h 1486800"/>
+                <a:gd name="csX9" fmla="*/ 0 w 3697200"/>
+                <a:gd name="csY9" fmla="*/ 969150 h 1486800"/>
+                <a:gd name="csX10" fmla="*/ 5821 w 3697200"/>
+                <a:gd name="csY10" fmla="*/ 969737 h 1486800"/>
+                <a:gd name="csX11" fmla="*/ 232158 w 3697200"/>
+                <a:gd name="csY11" fmla="*/ 743400 h 1486800"/>
+                <a:gd name="csX12" fmla="*/ 5821 w 3697200"/>
+                <a:gd name="csY12" fmla="*/ 517063 h 1486800"/>
+                <a:gd name="csX13" fmla="*/ 0 w 3697200"/>
+                <a:gd name="csY13" fmla="*/ 517650 h 1486800"/>
+              </a:gdLst>
+              <a:ahLst/>
+              <a:cxnLst>
+                <a:cxn ang="0">
+                  <a:pos x="csX0" y="csY0"/>
+                </a:cxn>
+                <a:cxn ang="0">
+                  <a:pos x="csX1" y="csY1"/>
+                </a:cxn>
+                <a:cxn ang="0">
+                  <a:pos x="csX2" y="csY2"/>
+                </a:cxn>
+                <a:cxn ang="0">
+                  <a:pos x="csX3" y="csY3"/>
+                </a:cxn>
+                <a:cxn ang="0">
+                  <a:pos x="csX4" y="csY4"/>
+                </a:cxn>
+                <a:cxn ang="0">
+                  <a:pos x="csX5" y="csY5"/>
+                </a:cxn>
+                <a:cxn ang="0">
+                  <a:pos x="csX6" y="csY6"/>
+                </a:cxn>
+                <a:cxn ang="0">
+                  <a:pos x="csX7" y="csY7"/>
+                </a:cxn>
+                <a:cxn ang="0">
+                  <a:pos x="csX8" y="csY8"/>
+                </a:cxn>
+                <a:cxn ang="0">
+                  <a:pos x="csX9" y="csY9"/>
+                </a:cxn>
+                <a:cxn ang="0">
+                  <a:pos x="csX10" y="csY10"/>
+                </a:cxn>
+                <a:cxn ang="0">
+                  <a:pos x="csX11" y="csY11"/>
+                </a:cxn>
+                <a:cxn ang="0">
+                  <a:pos x="csX12" y="csY12"/>
+                </a:cxn>
+                <a:cxn ang="0">
+                  <a:pos x="csX13" y="csY13"/>
+                </a:cxn>
+              </a:cxnLst>
+              <a:rect l="l" t="t" r="r" b="b"/>
+              <a:pathLst>
+                <a:path w="3697200" h="1486800">
+                  <a:moveTo>
+                    <a:pt x="0" y="0"/>
+                  </a:moveTo>
+                  <a:lnTo>
+                    <a:pt x="3697200" y="0"/>
+                  </a:lnTo>
+                  <a:lnTo>
+                    <a:pt x="3697200" y="517650"/>
+                  </a:lnTo>
+                  <a:lnTo>
+                    <a:pt x="3691379" y="517063"/>
+                  </a:lnTo>
+                  <a:cubicBezTo>
+                    <a:pt x="3566377" y="517063"/>
+                    <a:pt x="3465042" y="618398"/>
+                    <a:pt x="3465042" y="743400"/>
+                  </a:cubicBezTo>
+                  <a:cubicBezTo>
+                    <a:pt x="3465042" y="868402"/>
+                    <a:pt x="3566377" y="969737"/>
+                    <a:pt x="3691379" y="969737"/>
+                  </a:cubicBezTo>
+                  <a:lnTo>
+                    <a:pt x="3697200" y="969150"/>
+                  </a:lnTo>
+                  <a:lnTo>
+                    <a:pt x="3697200" y="1486800"/>
+                  </a:lnTo>
+                  <a:lnTo>
+                    <a:pt x="0" y="1486800"/>
+                  </a:lnTo>
+                  <a:lnTo>
+                    <a:pt x="0" y="969150"/>
+                  </a:lnTo>
+                  <a:lnTo>
+                    <a:pt x="5821" y="969737"/>
+                  </a:lnTo>
+                  <a:cubicBezTo>
+                    <a:pt x="130823" y="969737"/>
+                    <a:pt x="232158" y="868402"/>
+                    <a:pt x="232158" y="743400"/>
+                  </a:cubicBezTo>
+                  <a:cubicBezTo>
+                    <a:pt x="232158" y="618398"/>
+                    <a:pt x="130823" y="517063"/>
+                    <a:pt x="5821" y="517063"/>
+                  </a:cubicBezTo>
+                  <a:lnTo>
+                    <a:pt x="0" y="517650"/>
+                  </a:lnTo>
+                  <a:close/>
+                </a:path>
+              </a:pathLst>
+            </a:custGeom>
+            <a:solidFill>
+              <a:srgbClr val="DFEAC0"/>
+            </a:solidFill>
+            <a:ln w="3175" algn="ctr">
+              <a:solidFill>
+                <a:schemeClr val="bg1">
+                  <a:lumMod val="65000"/>
+                </a:schemeClr>
+              </a:solidFill>
+              <a:miter lim="800000"/>
+              <a:headEnd/>
+              <a:tailEnd/>
+            </a:ln>
+          </p:spPr>
+          <p:txBody>
+            <a:bodyPr wrap="square" lIns="88900" tIns="88900" rIns="88900" bIns="88900" rtlCol="0" anchor="ctr">
+              <a:noAutofit/>
+            </a:bodyPr>
+            <a:lstStyle/>
+            <a:p>
+              <a:pPr algn="ctr">
+                <a:lnSpc>
+                  <a:spcPct val="106000"/>
+                </a:lnSpc>
+                <a:buFont typeface="Wingdings 2" pitchFamily="18" charset="2"/>
+                <a:buNone/>
+              </a:pPr>
+              <a:endParaRPr lang="ko-KR" altLang="en-US" sz="1600" b="1" dirty="0">
+                <a:solidFill>
+                  <a:schemeClr val="bg1"/>
+                </a:solidFill>
+              </a:endParaRPr>
+            </a:p>
+          </p:txBody>
+        </p:sp>
+        <p:sp>
+          <p:nvSpPr>
+            <p:cNvPr id="32" name="자유형: 도형 31">
+              <a:extLst>
+                <a:ext uri="{FF2B5EF4-FFF2-40B4-BE49-F238E27FC236}">
+                  <a16:creationId xmlns:a16="http://schemas.microsoft.com/office/drawing/2014/main" id="{4BDF7EB7-8A7B-ACB3-C4BC-0365B757B6FA}"/>
+                </a:ext>
+              </a:extLst>
+            </p:cNvPr>
+            <p:cNvSpPr/>
+            <p:nvPr/>
+          </p:nvSpPr>
+          <p:spPr bwMode="gray">
+            <a:xfrm>
+              <a:off x="970713" y="2610952"/>
+              <a:ext cx="3144088" cy="1200486"/>
+            </a:xfrm>
+            <a:custGeom>
+              <a:avLst/>
+              <a:gdLst>
+                <a:gd name="csX0" fmla="*/ 161925 w 2864644"/>
+                <a:gd name="csY0" fmla="*/ 0 h 1093788"/>
+                <a:gd name="csX1" fmla="*/ 2702719 w 2864644"/>
+                <a:gd name="csY1" fmla="*/ 0 h 1093788"/>
+                <a:gd name="csX2" fmla="*/ 2864644 w 2864644"/>
+                <a:gd name="csY2" fmla="*/ 161925 h 1093788"/>
+                <a:gd name="csX3" fmla="*/ 2864644 w 2864644"/>
+                <a:gd name="csY3" fmla="*/ 931863 h 1093788"/>
+                <a:gd name="csX4" fmla="*/ 2702719 w 2864644"/>
+                <a:gd name="csY4" fmla="*/ 1093788 h 1093788"/>
+                <a:gd name="csX5" fmla="*/ 161925 w 2864644"/>
+                <a:gd name="csY5" fmla="*/ 1093788 h 1093788"/>
+                <a:gd name="csX6" fmla="*/ 0 w 2864644"/>
+                <a:gd name="csY6" fmla="*/ 931863 h 1093788"/>
+                <a:gd name="csX7" fmla="*/ 0 w 2864644"/>
+                <a:gd name="csY7" fmla="*/ 161925 h 1093788"/>
+                <a:gd name="csX8" fmla="*/ 161925 w 2864644"/>
+                <a:gd name="csY8" fmla="*/ 0 h 1093788"/>
+              </a:gdLst>
+              <a:ahLst/>
+              <a:cxnLst>
+                <a:cxn ang="0">
+                  <a:pos x="csX0" y="csY0"/>
+                </a:cxn>
+                <a:cxn ang="0">
+                  <a:pos x="csX1" y="csY1"/>
+                </a:cxn>
+                <a:cxn ang="0">
+                  <a:pos x="csX2" y="csY2"/>
+                </a:cxn>
+                <a:cxn ang="0">
+                  <a:pos x="csX3" y="csY3"/>
+                </a:cxn>
+                <a:cxn ang="0">
+                  <a:pos x="csX4" y="csY4"/>
+                </a:cxn>
+                <a:cxn ang="0">
+                  <a:pos x="csX5" y="csY5"/>
+                </a:cxn>
+                <a:cxn ang="0">
+                  <a:pos x="csX6" y="csY6"/>
+                </a:cxn>
+                <a:cxn ang="0">
+                  <a:pos x="csX7" y="csY7"/>
+                </a:cxn>
+                <a:cxn ang="0">
+                  <a:pos x="csX8" y="csY8"/>
+                </a:cxn>
+              </a:cxnLst>
+              <a:rect l="l" t="t" r="r" b="b"/>
+              <a:pathLst>
+                <a:path w="2864644" h="1093788">
+                  <a:moveTo>
+                    <a:pt x="161925" y="0"/>
+                  </a:moveTo>
+                  <a:lnTo>
+                    <a:pt x="2702719" y="0"/>
+                  </a:lnTo>
+                  <a:cubicBezTo>
+                    <a:pt x="2702719" y="89429"/>
+                    <a:pt x="2775215" y="161925"/>
+                    <a:pt x="2864644" y="161925"/>
+                  </a:cubicBezTo>
+                  <a:lnTo>
+                    <a:pt x="2864644" y="931863"/>
+                  </a:lnTo>
+                  <a:cubicBezTo>
+                    <a:pt x="2775215" y="931863"/>
+                    <a:pt x="2702719" y="1004359"/>
+                    <a:pt x="2702719" y="1093788"/>
+                  </a:cubicBezTo>
+                  <a:lnTo>
+                    <a:pt x="161925" y="1093788"/>
+                  </a:lnTo>
+                  <a:cubicBezTo>
+                    <a:pt x="161925" y="1004359"/>
+                    <a:pt x="89429" y="931863"/>
+                    <a:pt x="0" y="931863"/>
+                  </a:cubicBezTo>
+                  <a:lnTo>
+                    <a:pt x="0" y="161925"/>
+                  </a:lnTo>
+                  <a:cubicBezTo>
+                    <a:pt x="89429" y="161925"/>
+                    <a:pt x="161925" y="89429"/>
+                    <a:pt x="161925" y="0"/>
+                  </a:cubicBezTo>
+                  <a:close/>
+                </a:path>
+              </a:pathLst>
+            </a:custGeom>
+            <a:solidFill>
+              <a:srgbClr val="E6E6E6"/>
+            </a:solidFill>
+            <a:ln w="3175" algn="ctr">
+              <a:solidFill>
+                <a:schemeClr val="bg1">
+                  <a:lumMod val="65000"/>
+                </a:schemeClr>
+              </a:solidFill>
+              <a:miter lim="800000"/>
+              <a:headEnd/>
+              <a:tailEnd/>
+            </a:ln>
+          </p:spPr>
+          <p:txBody>
+            <a:bodyPr wrap="square" lIns="88900" tIns="88900" rIns="88900" bIns="88900" rtlCol="0" anchor="ctr">
+              <a:noAutofit/>
+            </a:bodyPr>
+            <a:lstStyle/>
+            <a:p>
+              <a:pPr algn="ctr">
+                <a:lnSpc>
+                  <a:spcPct val="106000"/>
+                </a:lnSpc>
+                <a:buFont typeface="Wingdings 2" pitchFamily="18" charset="2"/>
+                <a:buNone/>
+              </a:pPr>
+              <a:r>
+                <a:rPr lang="en-US" altLang="ko-KR" sz="1600" b="1" dirty="0">
+                  <a:solidFill>
+                    <a:schemeClr val="bg1"/>
+                  </a:solidFill>
+                </a:rPr>
+                <a:t>`</a:t>
+              </a:r>
+              <a:endParaRPr lang="ko-KR" altLang="en-US" sz="1600" b="1" dirty="0">
+                <a:solidFill>
+                  <a:schemeClr val="bg1"/>
+                </a:solidFill>
+              </a:endParaRPr>
+            </a:p>
+          </p:txBody>
+        </p:sp>
+        <p:sp>
+          <p:nvSpPr>
+            <p:cNvPr id="33" name="직사각형 32">
+              <a:extLst>
+                <a:ext uri="{FF2B5EF4-FFF2-40B4-BE49-F238E27FC236}">
+                  <a16:creationId xmlns:a16="http://schemas.microsoft.com/office/drawing/2014/main" id="{A2511892-FA14-5824-8EAD-58E49D78488D}"/>
+                </a:ext>
+              </a:extLst>
+            </p:cNvPr>
+            <p:cNvSpPr/>
+            <p:nvPr/>
+          </p:nvSpPr>
+          <p:spPr bwMode="gray">
+            <a:xfrm>
+              <a:off x="1105658" y="2813050"/>
+              <a:ext cx="717550" cy="762000"/>
+            </a:xfrm>
+            <a:prstGeom prst="rect">
+              <a:avLst/>
+            </a:prstGeom>
+            <a:noFill/>
+            <a:ln w="19050" algn="ctr">
+              <a:noFill/>
+              <a:miter lim="800000"/>
+              <a:headEnd/>
+              <a:tailEnd/>
+            </a:ln>
+          </p:spPr>
+          <p:txBody>
+            <a:bodyPr wrap="none" lIns="88900" tIns="88900" rIns="88900" bIns="88900" rtlCol="0" anchor="ctr"/>
+            <a:lstStyle/>
+            <a:p>
+              <a:pPr algn="ctr">
+                <a:lnSpc>
+                  <a:spcPct val="106000"/>
+                </a:lnSpc>
+                <a:buFont typeface="Wingdings 2" pitchFamily="18" charset="2"/>
+                <a:buNone/>
+              </a:pPr>
+              <a:r>
+                <a:rPr lang="en-US" altLang="ko-KR" sz="4400" b="1" dirty="0">
+                  <a:latin typeface="나눔고딕" panose="020D0604000000000000" pitchFamily="50" charset="-127"/>
+                  <a:ea typeface="나눔고딕" panose="020D0604000000000000" pitchFamily="50" charset="-127"/>
+                </a:rPr>
+                <a:t>E</a:t>
+              </a:r>
+              <a:r>
+                <a:rPr lang="ko-KR" altLang="en-US" sz="4400" b="1" dirty="0">
+                  <a:latin typeface="나눔고딕" panose="020D0604000000000000" pitchFamily="50" charset="-127"/>
+                  <a:ea typeface="나눔고딕" panose="020D0604000000000000" pitchFamily="50" charset="-127"/>
+                </a:rPr>
+                <a:t>상</a:t>
+              </a:r>
+            </a:p>
+          </p:txBody>
+        </p:sp>
+        <p:sp>
+          <p:nvSpPr>
+            <p:cNvPr id="34" name="직사각형 33">
+              <a:extLst>
+                <a:ext uri="{FF2B5EF4-FFF2-40B4-BE49-F238E27FC236}">
+                  <a16:creationId xmlns:a16="http://schemas.microsoft.com/office/drawing/2014/main" id="{A72AF256-61C1-CB77-1EEC-8C24CD0DF301}"/>
+                </a:ext>
+              </a:extLst>
+            </p:cNvPr>
+            <p:cNvSpPr/>
+            <p:nvPr/>
+          </p:nvSpPr>
+          <p:spPr bwMode="gray">
+            <a:xfrm>
+              <a:off x="1958153" y="2662936"/>
+              <a:ext cx="2057666" cy="1096518"/>
+            </a:xfrm>
+            <a:prstGeom prst="rect">
+              <a:avLst/>
+            </a:prstGeom>
+            <a:noFill/>
+            <a:ln w="19050" algn="ctr">
+              <a:noFill/>
+              <a:miter lim="800000"/>
+              <a:headEnd/>
+              <a:tailEnd/>
+            </a:ln>
+          </p:spPr>
+          <p:txBody>
+            <a:bodyPr wrap="none" lIns="88900" tIns="88900" rIns="88900" bIns="88900" rtlCol="0" anchor="ctr"/>
+            <a:lstStyle/>
+            <a:p>
+              <a:pPr algn="ctr"/>
+              <a:r>
+                <a:rPr lang="ko-KR" altLang="ko-KR" b="1" dirty="0" err="1">
+                  <a:latin typeface="나눔고딕" panose="020D0604000000000000" pitchFamily="50" charset="-127"/>
+                  <a:ea typeface="나눔고딕" panose="020D0604000000000000" pitchFamily="50" charset="-127"/>
+                </a:rPr>
+                <a:t>시나모롤</a:t>
+              </a:r>
+              <a:r>
+                <a:rPr lang="ko-KR" altLang="ko-KR" b="1" dirty="0">
+                  <a:latin typeface="나눔고딕" panose="020D0604000000000000" pitchFamily="50" charset="-127"/>
+                  <a:ea typeface="나눔고딕" panose="020D0604000000000000" pitchFamily="50" charset="-127"/>
+                </a:rPr>
+                <a:t> </a:t>
+              </a:r>
+              <a:endParaRPr lang="en-US" altLang="ko-KR" b="1" dirty="0">
+                <a:latin typeface="나눔고딕" panose="020D0604000000000000" pitchFamily="50" charset="-127"/>
+                <a:ea typeface="나눔고딕" panose="020D0604000000000000" pitchFamily="50" charset="-127"/>
+              </a:endParaRPr>
+            </a:p>
+            <a:p>
+              <a:pPr algn="ctr"/>
+              <a:r>
+                <a:rPr lang="ko-KR" altLang="ko-KR" b="1" dirty="0">
+                  <a:latin typeface="나눔고딕" panose="020D0604000000000000" pitchFamily="50" charset="-127"/>
+                  <a:ea typeface="나눔고딕" panose="020D0604000000000000" pitchFamily="50" charset="-127"/>
+                </a:rPr>
+                <a:t>마스코트</a:t>
+              </a:r>
+            </a:p>
+          </p:txBody>
+        </p:sp>
+      </p:grpSp>
+      <p:grpSp>
+        <p:nvGrpSpPr>
+          <p:cNvPr id="35" name="그룹 34">
+            <a:extLst>
+              <a:ext uri="{FF2B5EF4-FFF2-40B4-BE49-F238E27FC236}">
+                <a16:creationId xmlns:a16="http://schemas.microsoft.com/office/drawing/2014/main" id="{D703E9C4-B133-F0C0-DF16-91A69C03A5A7}"/>
+              </a:ext>
+            </a:extLst>
+          </p:cNvPr>
+          <p:cNvGrpSpPr/>
+          <p:nvPr/>
+        </p:nvGrpSpPr>
+        <p:grpSpPr>
+          <a:xfrm>
+            <a:off x="8691417" y="3362934"/>
+            <a:ext cx="3697200" cy="1486800"/>
+            <a:chOff x="677717" y="2434934"/>
+            <a:chExt cx="3697200" cy="1486800"/>
+          </a:xfrm>
+        </p:grpSpPr>
+        <p:sp>
+          <p:nvSpPr>
+            <p:cNvPr id="36" name="자유형: 도형 35">
+              <a:extLst>
+                <a:ext uri="{FF2B5EF4-FFF2-40B4-BE49-F238E27FC236}">
+                  <a16:creationId xmlns:a16="http://schemas.microsoft.com/office/drawing/2014/main" id="{10E93190-DD02-09EF-35FC-7C0DD25DB531}"/>
+                </a:ext>
+              </a:extLst>
+            </p:cNvPr>
+            <p:cNvSpPr/>
+            <p:nvPr/>
+          </p:nvSpPr>
+          <p:spPr bwMode="gray">
+            <a:xfrm>
+              <a:off x="677717" y="2434934"/>
+              <a:ext cx="3697200" cy="1486800"/>
+            </a:xfrm>
+            <a:custGeom>
+              <a:avLst/>
+              <a:gdLst>
+                <a:gd name="csX0" fmla="*/ 0 w 3697200"/>
+                <a:gd name="csY0" fmla="*/ 0 h 1486800"/>
+                <a:gd name="csX1" fmla="*/ 3697200 w 3697200"/>
+                <a:gd name="csY1" fmla="*/ 0 h 1486800"/>
+                <a:gd name="csX2" fmla="*/ 3697200 w 3697200"/>
+                <a:gd name="csY2" fmla="*/ 517650 h 1486800"/>
+                <a:gd name="csX3" fmla="*/ 3691379 w 3697200"/>
+                <a:gd name="csY3" fmla="*/ 517063 h 1486800"/>
+                <a:gd name="csX4" fmla="*/ 3465042 w 3697200"/>
+                <a:gd name="csY4" fmla="*/ 743400 h 1486800"/>
+                <a:gd name="csX5" fmla="*/ 3691379 w 3697200"/>
+                <a:gd name="csY5" fmla="*/ 969737 h 1486800"/>
+                <a:gd name="csX6" fmla="*/ 3697200 w 3697200"/>
+                <a:gd name="csY6" fmla="*/ 969150 h 1486800"/>
+                <a:gd name="csX7" fmla="*/ 3697200 w 3697200"/>
+                <a:gd name="csY7" fmla="*/ 1486800 h 1486800"/>
+                <a:gd name="csX8" fmla="*/ 0 w 3697200"/>
+                <a:gd name="csY8" fmla="*/ 1486800 h 1486800"/>
+                <a:gd name="csX9" fmla="*/ 0 w 3697200"/>
+                <a:gd name="csY9" fmla="*/ 969150 h 1486800"/>
+                <a:gd name="csX10" fmla="*/ 5821 w 3697200"/>
+                <a:gd name="csY10" fmla="*/ 969737 h 1486800"/>
+                <a:gd name="csX11" fmla="*/ 232158 w 3697200"/>
+                <a:gd name="csY11" fmla="*/ 743400 h 1486800"/>
+                <a:gd name="csX12" fmla="*/ 5821 w 3697200"/>
+                <a:gd name="csY12" fmla="*/ 517063 h 1486800"/>
+                <a:gd name="csX13" fmla="*/ 0 w 3697200"/>
+                <a:gd name="csY13" fmla="*/ 517650 h 1486800"/>
+              </a:gdLst>
+              <a:ahLst/>
+              <a:cxnLst>
+                <a:cxn ang="0">
+                  <a:pos x="csX0" y="csY0"/>
+                </a:cxn>
+                <a:cxn ang="0">
+                  <a:pos x="csX1" y="csY1"/>
+                </a:cxn>
+                <a:cxn ang="0">
+                  <a:pos x="csX2" y="csY2"/>
+                </a:cxn>
+                <a:cxn ang="0">
+                  <a:pos x="csX3" y="csY3"/>
+                </a:cxn>
+                <a:cxn ang="0">
+                  <a:pos x="csX4" y="csY4"/>
+                </a:cxn>
+                <a:cxn ang="0">
+                  <a:pos x="csX5" y="csY5"/>
+                </a:cxn>
+                <a:cxn ang="0">
+                  <a:pos x="csX6" y="csY6"/>
+                </a:cxn>
+                <a:cxn ang="0">
+                  <a:pos x="csX7" y="csY7"/>
+                </a:cxn>
+                <a:cxn ang="0">
+                  <a:pos x="csX8" y="csY8"/>
+                </a:cxn>
+                <a:cxn ang="0">
+                  <a:pos x="csX9" y="csY9"/>
+                </a:cxn>
+                <a:cxn ang="0">
+                  <a:pos x="csX10" y="csY10"/>
+                </a:cxn>
+                <a:cxn ang="0">
+                  <a:pos x="csX11" y="csY11"/>
+                </a:cxn>
+                <a:cxn ang="0">
+                  <a:pos x="csX12" y="csY12"/>
+                </a:cxn>
+                <a:cxn ang="0">
+                  <a:pos x="csX13" y="csY13"/>
+                </a:cxn>
+              </a:cxnLst>
+              <a:rect l="l" t="t" r="r" b="b"/>
+              <a:pathLst>
+                <a:path w="3697200" h="1486800">
+                  <a:moveTo>
+                    <a:pt x="0" y="0"/>
+                  </a:moveTo>
+                  <a:lnTo>
+                    <a:pt x="3697200" y="0"/>
+                  </a:lnTo>
+                  <a:lnTo>
+                    <a:pt x="3697200" y="517650"/>
+                  </a:lnTo>
+                  <a:lnTo>
+                    <a:pt x="3691379" y="517063"/>
+                  </a:lnTo>
+                  <a:cubicBezTo>
+                    <a:pt x="3566377" y="517063"/>
+                    <a:pt x="3465042" y="618398"/>
+                    <a:pt x="3465042" y="743400"/>
+                  </a:cubicBezTo>
+                  <a:cubicBezTo>
+                    <a:pt x="3465042" y="868402"/>
+                    <a:pt x="3566377" y="969737"/>
+                    <a:pt x="3691379" y="969737"/>
+                  </a:cubicBezTo>
+                  <a:lnTo>
+                    <a:pt x="3697200" y="969150"/>
+                  </a:lnTo>
+                  <a:lnTo>
+                    <a:pt x="3697200" y="1486800"/>
+                  </a:lnTo>
+                  <a:lnTo>
+                    <a:pt x="0" y="1486800"/>
+                  </a:lnTo>
+                  <a:lnTo>
+                    <a:pt x="0" y="969150"/>
+                  </a:lnTo>
+                  <a:lnTo>
+                    <a:pt x="5821" y="969737"/>
+                  </a:lnTo>
+                  <a:cubicBezTo>
+                    <a:pt x="130823" y="969737"/>
+                    <a:pt x="232158" y="868402"/>
+                    <a:pt x="232158" y="743400"/>
+                  </a:cubicBezTo>
+                  <a:cubicBezTo>
+                    <a:pt x="232158" y="618398"/>
+                    <a:pt x="130823" y="517063"/>
+                    <a:pt x="5821" y="517063"/>
+                  </a:cubicBezTo>
+                  <a:lnTo>
+                    <a:pt x="0" y="517650"/>
+                  </a:lnTo>
+                  <a:close/>
+                </a:path>
+              </a:pathLst>
+            </a:custGeom>
+            <a:solidFill>
+              <a:srgbClr val="DFEAC0"/>
+            </a:solidFill>
+            <a:ln w="3175" algn="ctr">
+              <a:solidFill>
+                <a:schemeClr val="bg1">
+                  <a:lumMod val="65000"/>
+                </a:schemeClr>
+              </a:solidFill>
+              <a:miter lim="800000"/>
+              <a:headEnd/>
+              <a:tailEnd/>
+            </a:ln>
+          </p:spPr>
+          <p:txBody>
+            <a:bodyPr wrap="square" lIns="88900" tIns="88900" rIns="88900" bIns="88900" rtlCol="0" anchor="ctr">
+              <a:noAutofit/>
+            </a:bodyPr>
+            <a:lstStyle/>
+            <a:p>
+              <a:pPr algn="ctr">
+                <a:lnSpc>
+                  <a:spcPct val="106000"/>
+                </a:lnSpc>
+                <a:buFont typeface="Wingdings 2" pitchFamily="18" charset="2"/>
+                <a:buNone/>
+              </a:pPr>
+              <a:endParaRPr lang="ko-KR" altLang="en-US" sz="1600" b="1" dirty="0">
+                <a:solidFill>
+                  <a:schemeClr val="bg1"/>
+                </a:solidFill>
+              </a:endParaRPr>
+            </a:p>
+          </p:txBody>
+        </p:sp>
+        <p:sp>
+          <p:nvSpPr>
+            <p:cNvPr id="37" name="자유형: 도형 36">
+              <a:extLst>
+                <a:ext uri="{FF2B5EF4-FFF2-40B4-BE49-F238E27FC236}">
+                  <a16:creationId xmlns:a16="http://schemas.microsoft.com/office/drawing/2014/main" id="{08F49E2E-D360-8EF9-7A36-8AC7393533B2}"/>
+                </a:ext>
+              </a:extLst>
+            </p:cNvPr>
+            <p:cNvSpPr/>
+            <p:nvPr/>
+          </p:nvSpPr>
+          <p:spPr bwMode="gray">
+            <a:xfrm>
+              <a:off x="970713" y="2610952"/>
+              <a:ext cx="3144088" cy="1200486"/>
+            </a:xfrm>
+            <a:custGeom>
+              <a:avLst/>
+              <a:gdLst>
+                <a:gd name="csX0" fmla="*/ 161925 w 2864644"/>
+                <a:gd name="csY0" fmla="*/ 0 h 1093788"/>
+                <a:gd name="csX1" fmla="*/ 2702719 w 2864644"/>
+                <a:gd name="csY1" fmla="*/ 0 h 1093788"/>
+                <a:gd name="csX2" fmla="*/ 2864644 w 2864644"/>
+                <a:gd name="csY2" fmla="*/ 161925 h 1093788"/>
+                <a:gd name="csX3" fmla="*/ 2864644 w 2864644"/>
+                <a:gd name="csY3" fmla="*/ 931863 h 1093788"/>
+                <a:gd name="csX4" fmla="*/ 2702719 w 2864644"/>
+                <a:gd name="csY4" fmla="*/ 1093788 h 1093788"/>
+                <a:gd name="csX5" fmla="*/ 161925 w 2864644"/>
+                <a:gd name="csY5" fmla="*/ 1093788 h 1093788"/>
+                <a:gd name="csX6" fmla="*/ 0 w 2864644"/>
+                <a:gd name="csY6" fmla="*/ 931863 h 1093788"/>
+                <a:gd name="csX7" fmla="*/ 0 w 2864644"/>
+                <a:gd name="csY7" fmla="*/ 161925 h 1093788"/>
+                <a:gd name="csX8" fmla="*/ 161925 w 2864644"/>
+                <a:gd name="csY8" fmla="*/ 0 h 1093788"/>
+              </a:gdLst>
+              <a:ahLst/>
+              <a:cxnLst>
+                <a:cxn ang="0">
+                  <a:pos x="csX0" y="csY0"/>
+                </a:cxn>
+                <a:cxn ang="0">
+                  <a:pos x="csX1" y="csY1"/>
+                </a:cxn>
+                <a:cxn ang="0">
+                  <a:pos x="csX2" y="csY2"/>
+                </a:cxn>
+                <a:cxn ang="0">
+                  <a:pos x="csX3" y="csY3"/>
+                </a:cxn>
+                <a:cxn ang="0">
+                  <a:pos x="csX4" y="csY4"/>
+                </a:cxn>
+                <a:cxn ang="0">
+                  <a:pos x="csX5" y="csY5"/>
+                </a:cxn>
+                <a:cxn ang="0">
+                  <a:pos x="csX6" y="csY6"/>
+                </a:cxn>
+                <a:cxn ang="0">
+                  <a:pos x="csX7" y="csY7"/>
+                </a:cxn>
+                <a:cxn ang="0">
+                  <a:pos x="csX8" y="csY8"/>
+                </a:cxn>
+              </a:cxnLst>
+              <a:rect l="l" t="t" r="r" b="b"/>
+              <a:pathLst>
+                <a:path w="2864644" h="1093788">
+                  <a:moveTo>
+                    <a:pt x="161925" y="0"/>
+                  </a:moveTo>
+                  <a:lnTo>
+                    <a:pt x="2702719" y="0"/>
+                  </a:lnTo>
+                  <a:cubicBezTo>
+                    <a:pt x="2702719" y="89429"/>
+                    <a:pt x="2775215" y="161925"/>
+                    <a:pt x="2864644" y="161925"/>
+                  </a:cubicBezTo>
+                  <a:lnTo>
+                    <a:pt x="2864644" y="931863"/>
+                  </a:lnTo>
+                  <a:cubicBezTo>
+                    <a:pt x="2775215" y="931863"/>
+                    <a:pt x="2702719" y="1004359"/>
+                    <a:pt x="2702719" y="1093788"/>
+                  </a:cubicBezTo>
+                  <a:lnTo>
+                    <a:pt x="161925" y="1093788"/>
+                  </a:lnTo>
+                  <a:cubicBezTo>
+                    <a:pt x="161925" y="1004359"/>
+                    <a:pt x="89429" y="931863"/>
+                    <a:pt x="0" y="931863"/>
+                  </a:cubicBezTo>
+                  <a:lnTo>
+                    <a:pt x="0" y="161925"/>
+                  </a:lnTo>
+                  <a:cubicBezTo>
+                    <a:pt x="89429" y="161925"/>
+                    <a:pt x="161925" y="89429"/>
+                    <a:pt x="161925" y="0"/>
+                  </a:cubicBezTo>
+                  <a:close/>
+                </a:path>
+              </a:pathLst>
+            </a:custGeom>
+            <a:solidFill>
+              <a:srgbClr val="E6E6E6"/>
+            </a:solidFill>
+            <a:ln w="3175" algn="ctr">
+              <a:solidFill>
+                <a:schemeClr val="bg1">
+                  <a:lumMod val="65000"/>
+                </a:schemeClr>
+              </a:solidFill>
+              <a:miter lim="800000"/>
+              <a:headEnd/>
+              <a:tailEnd/>
+            </a:ln>
+          </p:spPr>
+          <p:txBody>
+            <a:bodyPr wrap="square" lIns="88900" tIns="88900" rIns="88900" bIns="88900" rtlCol="0" anchor="ctr">
+              <a:noAutofit/>
+            </a:bodyPr>
+            <a:lstStyle/>
+            <a:p>
+              <a:pPr algn="ctr">
+                <a:lnSpc>
+                  <a:spcPct val="106000"/>
+                </a:lnSpc>
+                <a:buFont typeface="Wingdings 2" pitchFamily="18" charset="2"/>
+                <a:buNone/>
+              </a:pPr>
+              <a:r>
+                <a:rPr lang="en-US" altLang="ko-KR" sz="1600" b="1" dirty="0">
+                  <a:solidFill>
+                    <a:schemeClr val="bg1"/>
+                  </a:solidFill>
+                </a:rPr>
+                <a:t>`</a:t>
+              </a:r>
+              <a:endParaRPr lang="ko-KR" altLang="en-US" sz="1600" b="1" dirty="0">
+                <a:solidFill>
+                  <a:schemeClr val="bg1"/>
+                </a:solidFill>
+              </a:endParaRPr>
+            </a:p>
+          </p:txBody>
+        </p:sp>
+        <p:sp>
+          <p:nvSpPr>
+            <p:cNvPr id="38" name="직사각형 37">
+              <a:extLst>
+                <a:ext uri="{FF2B5EF4-FFF2-40B4-BE49-F238E27FC236}">
+                  <a16:creationId xmlns:a16="http://schemas.microsoft.com/office/drawing/2014/main" id="{CECC42BC-1066-D644-266E-7C5518AA175D}"/>
+                </a:ext>
+              </a:extLst>
+            </p:cNvPr>
+            <p:cNvSpPr/>
+            <p:nvPr/>
+          </p:nvSpPr>
+          <p:spPr bwMode="gray">
+            <a:xfrm>
+              <a:off x="1105658" y="2813050"/>
+              <a:ext cx="717550" cy="762000"/>
+            </a:xfrm>
+            <a:prstGeom prst="rect">
+              <a:avLst/>
+            </a:prstGeom>
+            <a:noFill/>
+            <a:ln w="19050" algn="ctr">
+              <a:noFill/>
+              <a:miter lim="800000"/>
+              <a:headEnd/>
+              <a:tailEnd/>
+            </a:ln>
+          </p:spPr>
+          <p:txBody>
+            <a:bodyPr wrap="none" lIns="88900" tIns="88900" rIns="88900" bIns="88900" rtlCol="0" anchor="ctr"/>
+            <a:lstStyle/>
+            <a:p>
+              <a:pPr algn="ctr">
+                <a:lnSpc>
+                  <a:spcPct val="106000"/>
+                </a:lnSpc>
+                <a:buFont typeface="Wingdings 2" pitchFamily="18" charset="2"/>
+                <a:buNone/>
+              </a:pPr>
+              <a:r>
+                <a:rPr lang="en-US" altLang="ko-KR" sz="4400" b="1" dirty="0">
+                  <a:latin typeface="나눔고딕" panose="020D0604000000000000" pitchFamily="50" charset="-127"/>
+                  <a:ea typeface="나눔고딕" panose="020D0604000000000000" pitchFamily="50" charset="-127"/>
+                </a:rPr>
+                <a:t>F</a:t>
+              </a:r>
+              <a:r>
+                <a:rPr lang="ko-KR" altLang="en-US" sz="4400" b="1" dirty="0">
+                  <a:latin typeface="나눔고딕" panose="020D0604000000000000" pitchFamily="50" charset="-127"/>
+                  <a:ea typeface="나눔고딕" panose="020D0604000000000000" pitchFamily="50" charset="-127"/>
+                </a:rPr>
+                <a:t>상</a:t>
+              </a:r>
+            </a:p>
+          </p:txBody>
+        </p:sp>
+        <p:sp>
+          <p:nvSpPr>
+            <p:cNvPr id="39" name="직사각형 38">
+              <a:extLst>
+                <a:ext uri="{FF2B5EF4-FFF2-40B4-BE49-F238E27FC236}">
+                  <a16:creationId xmlns:a16="http://schemas.microsoft.com/office/drawing/2014/main" id="{FD76B7BB-B5C9-B32F-19CC-0AA187239DA2}"/>
+                </a:ext>
+              </a:extLst>
+            </p:cNvPr>
+            <p:cNvSpPr/>
+            <p:nvPr/>
+          </p:nvSpPr>
+          <p:spPr bwMode="gray">
+            <a:xfrm>
+              <a:off x="1958153" y="2662936"/>
+              <a:ext cx="2057666" cy="1096518"/>
+            </a:xfrm>
+            <a:prstGeom prst="rect">
+              <a:avLst/>
+            </a:prstGeom>
+            <a:noFill/>
+            <a:ln w="19050" algn="ctr">
+              <a:noFill/>
+              <a:miter lim="800000"/>
+              <a:headEnd/>
+              <a:tailEnd/>
+            </a:ln>
+          </p:spPr>
+          <p:txBody>
+            <a:bodyPr wrap="none" lIns="88900" tIns="88900" rIns="88900" bIns="88900" rtlCol="0" anchor="ctr"/>
+            <a:lstStyle/>
+            <a:p>
+              <a:pPr algn="ctr"/>
+              <a:r>
+                <a:rPr lang="ko-KR" altLang="ko-KR" b="1" dirty="0" err="1">
+                  <a:latin typeface="나눔고딕" panose="020D0604000000000000" pitchFamily="50" charset="-127"/>
+                  <a:ea typeface="나눔고딕" panose="020D0604000000000000" pitchFamily="50" charset="-127"/>
+                </a:rPr>
+                <a:t>시나모롤</a:t>
+              </a:r>
+              <a:r>
+                <a:rPr lang="ko-KR" altLang="ko-KR" b="1" dirty="0">
+                  <a:latin typeface="나눔고딕" panose="020D0604000000000000" pitchFamily="50" charset="-127"/>
+                  <a:ea typeface="나눔고딕" panose="020D0604000000000000" pitchFamily="50" charset="-127"/>
+                </a:rPr>
+                <a:t> </a:t>
+              </a:r>
+              <a:endParaRPr lang="en-US" altLang="ko-KR" b="1" dirty="0">
+                <a:latin typeface="나눔고딕" panose="020D0604000000000000" pitchFamily="50" charset="-127"/>
+                <a:ea typeface="나눔고딕" panose="020D0604000000000000" pitchFamily="50" charset="-127"/>
+              </a:endParaRPr>
+            </a:p>
+            <a:p>
+              <a:pPr algn="ctr"/>
+              <a:r>
+                <a:rPr lang="ko-KR" altLang="ko-KR" b="1" dirty="0" err="1">
+                  <a:latin typeface="나눔고딕" panose="020D0604000000000000" pitchFamily="50" charset="-127"/>
+                  <a:ea typeface="나눔고딕" panose="020D0604000000000000" pitchFamily="50" charset="-127"/>
+                </a:rPr>
+                <a:t>토트백</a:t>
+              </a:r>
+              <a:endParaRPr lang="ko-KR" altLang="ko-KR" b="1" dirty="0">
+                <a:latin typeface="나눔고딕" panose="020D0604000000000000" pitchFamily="50" charset="-127"/>
+                <a:ea typeface="나눔고딕" panose="020D0604000000000000" pitchFamily="50" charset="-127"/>
+              </a:endParaRPr>
+            </a:p>
+          </p:txBody>
+        </p:sp>
+      </p:grpSp>
+      <p:grpSp>
+        <p:nvGrpSpPr>
+          <p:cNvPr id="40" name="그룹 39">
+            <a:extLst>
+              <a:ext uri="{FF2B5EF4-FFF2-40B4-BE49-F238E27FC236}">
+                <a16:creationId xmlns:a16="http://schemas.microsoft.com/office/drawing/2014/main" id="{AE3BE3F7-3560-1299-C55F-1A165FFADA37}"/>
+              </a:ext>
+            </a:extLst>
+          </p:cNvPr>
+          <p:cNvGrpSpPr/>
+          <p:nvPr/>
+        </p:nvGrpSpPr>
+        <p:grpSpPr>
+          <a:xfrm>
+            <a:off x="4748067" y="5074086"/>
+            <a:ext cx="3697200" cy="1486800"/>
+            <a:chOff x="677717" y="2434934"/>
+            <a:chExt cx="3697200" cy="1486800"/>
+          </a:xfrm>
+        </p:grpSpPr>
+        <p:sp>
+          <p:nvSpPr>
+            <p:cNvPr id="41" name="자유형: 도형 40">
+              <a:extLst>
+                <a:ext uri="{FF2B5EF4-FFF2-40B4-BE49-F238E27FC236}">
+                  <a16:creationId xmlns:a16="http://schemas.microsoft.com/office/drawing/2014/main" id="{AD9128CD-5E00-5486-9AED-F85476E7F8A1}"/>
+                </a:ext>
+              </a:extLst>
+            </p:cNvPr>
+            <p:cNvSpPr/>
+            <p:nvPr/>
+          </p:nvSpPr>
+          <p:spPr bwMode="gray">
+            <a:xfrm>
+              <a:off x="677717" y="2434934"/>
+              <a:ext cx="3697200" cy="1486800"/>
+            </a:xfrm>
+            <a:custGeom>
+              <a:avLst/>
+              <a:gdLst>
+                <a:gd name="csX0" fmla="*/ 0 w 3697200"/>
+                <a:gd name="csY0" fmla="*/ 0 h 1486800"/>
+                <a:gd name="csX1" fmla="*/ 3697200 w 3697200"/>
+                <a:gd name="csY1" fmla="*/ 0 h 1486800"/>
+                <a:gd name="csX2" fmla="*/ 3697200 w 3697200"/>
+                <a:gd name="csY2" fmla="*/ 517650 h 1486800"/>
+                <a:gd name="csX3" fmla="*/ 3691379 w 3697200"/>
+                <a:gd name="csY3" fmla="*/ 517063 h 1486800"/>
+                <a:gd name="csX4" fmla="*/ 3465042 w 3697200"/>
+                <a:gd name="csY4" fmla="*/ 743400 h 1486800"/>
+                <a:gd name="csX5" fmla="*/ 3691379 w 3697200"/>
+                <a:gd name="csY5" fmla="*/ 969737 h 1486800"/>
+                <a:gd name="csX6" fmla="*/ 3697200 w 3697200"/>
+                <a:gd name="csY6" fmla="*/ 969150 h 1486800"/>
+                <a:gd name="csX7" fmla="*/ 3697200 w 3697200"/>
+                <a:gd name="csY7" fmla="*/ 1486800 h 1486800"/>
+                <a:gd name="csX8" fmla="*/ 0 w 3697200"/>
+                <a:gd name="csY8" fmla="*/ 1486800 h 1486800"/>
+                <a:gd name="csX9" fmla="*/ 0 w 3697200"/>
+                <a:gd name="csY9" fmla="*/ 969150 h 1486800"/>
+                <a:gd name="csX10" fmla="*/ 5821 w 3697200"/>
+                <a:gd name="csY10" fmla="*/ 969737 h 1486800"/>
+                <a:gd name="csX11" fmla="*/ 232158 w 3697200"/>
+                <a:gd name="csY11" fmla="*/ 743400 h 1486800"/>
+                <a:gd name="csX12" fmla="*/ 5821 w 3697200"/>
+                <a:gd name="csY12" fmla="*/ 517063 h 1486800"/>
+                <a:gd name="csX13" fmla="*/ 0 w 3697200"/>
+                <a:gd name="csY13" fmla="*/ 517650 h 1486800"/>
+              </a:gdLst>
+              <a:ahLst/>
+              <a:cxnLst>
+                <a:cxn ang="0">
+                  <a:pos x="csX0" y="csY0"/>
+                </a:cxn>
+                <a:cxn ang="0">
+                  <a:pos x="csX1" y="csY1"/>
+                </a:cxn>
+                <a:cxn ang="0">
+                  <a:pos x="csX2" y="csY2"/>
+                </a:cxn>
+                <a:cxn ang="0">
+                  <a:pos x="csX3" y="csY3"/>
+                </a:cxn>
+                <a:cxn ang="0">
+                  <a:pos x="csX4" y="csY4"/>
+                </a:cxn>
+                <a:cxn ang="0">
+                  <a:pos x="csX5" y="csY5"/>
+                </a:cxn>
+                <a:cxn ang="0">
+                  <a:pos x="csX6" y="csY6"/>
+                </a:cxn>
+                <a:cxn ang="0">
+                  <a:pos x="csX7" y="csY7"/>
+                </a:cxn>
+                <a:cxn ang="0">
+                  <a:pos x="csX8" y="csY8"/>
+                </a:cxn>
+                <a:cxn ang="0">
+                  <a:pos x="csX9" y="csY9"/>
+                </a:cxn>
+                <a:cxn ang="0">
+                  <a:pos x="csX10" y="csY10"/>
+                </a:cxn>
+                <a:cxn ang="0">
+                  <a:pos x="csX11" y="csY11"/>
+                </a:cxn>
+                <a:cxn ang="0">
+                  <a:pos x="csX12" y="csY12"/>
+                </a:cxn>
+                <a:cxn ang="0">
+                  <a:pos x="csX13" y="csY13"/>
+                </a:cxn>
+              </a:cxnLst>
+              <a:rect l="l" t="t" r="r" b="b"/>
+              <a:pathLst>
+                <a:path w="3697200" h="1486800">
+                  <a:moveTo>
+                    <a:pt x="0" y="0"/>
+                  </a:moveTo>
+                  <a:lnTo>
+                    <a:pt x="3697200" y="0"/>
+                  </a:lnTo>
+                  <a:lnTo>
+                    <a:pt x="3697200" y="517650"/>
+                  </a:lnTo>
+                  <a:lnTo>
+                    <a:pt x="3691379" y="517063"/>
+                  </a:lnTo>
+                  <a:cubicBezTo>
+                    <a:pt x="3566377" y="517063"/>
+                    <a:pt x="3465042" y="618398"/>
+                    <a:pt x="3465042" y="743400"/>
+                  </a:cubicBezTo>
+                  <a:cubicBezTo>
+                    <a:pt x="3465042" y="868402"/>
+                    <a:pt x="3566377" y="969737"/>
+                    <a:pt x="3691379" y="969737"/>
+                  </a:cubicBezTo>
+                  <a:lnTo>
+                    <a:pt x="3697200" y="969150"/>
+                  </a:lnTo>
+                  <a:lnTo>
+                    <a:pt x="3697200" y="1486800"/>
+                  </a:lnTo>
+                  <a:lnTo>
+                    <a:pt x="0" y="1486800"/>
+                  </a:lnTo>
+                  <a:lnTo>
+                    <a:pt x="0" y="969150"/>
+                  </a:lnTo>
+                  <a:lnTo>
+                    <a:pt x="5821" y="969737"/>
+                  </a:lnTo>
+                  <a:cubicBezTo>
+                    <a:pt x="130823" y="969737"/>
+                    <a:pt x="232158" y="868402"/>
+                    <a:pt x="232158" y="743400"/>
+                  </a:cubicBezTo>
+                  <a:cubicBezTo>
+                    <a:pt x="232158" y="618398"/>
+                    <a:pt x="130823" y="517063"/>
+                    <a:pt x="5821" y="517063"/>
+                  </a:cubicBezTo>
+                  <a:lnTo>
+                    <a:pt x="0" y="517650"/>
+                  </a:lnTo>
+                  <a:close/>
+                </a:path>
+              </a:pathLst>
+            </a:custGeom>
+            <a:solidFill>
+              <a:srgbClr val="DFEAC0"/>
+            </a:solidFill>
+            <a:ln w="3175" algn="ctr">
+              <a:solidFill>
+                <a:schemeClr val="bg1">
+                  <a:lumMod val="65000"/>
+                </a:schemeClr>
+              </a:solidFill>
+              <a:miter lim="800000"/>
+              <a:headEnd/>
+              <a:tailEnd/>
+            </a:ln>
+          </p:spPr>
+          <p:txBody>
+            <a:bodyPr wrap="square" lIns="88900" tIns="88900" rIns="88900" bIns="88900" rtlCol="0" anchor="ctr">
+              <a:noAutofit/>
+            </a:bodyPr>
+            <a:lstStyle/>
+            <a:p>
+              <a:pPr algn="ctr">
+                <a:lnSpc>
+                  <a:spcPct val="106000"/>
+                </a:lnSpc>
+                <a:buFont typeface="Wingdings 2" pitchFamily="18" charset="2"/>
+                <a:buNone/>
+              </a:pPr>
+              <a:endParaRPr lang="ko-KR" altLang="en-US" sz="1600" b="1" dirty="0">
+                <a:solidFill>
+                  <a:schemeClr val="bg1"/>
+                </a:solidFill>
+              </a:endParaRPr>
+            </a:p>
+          </p:txBody>
+        </p:sp>
+        <p:sp>
+          <p:nvSpPr>
+            <p:cNvPr id="42" name="자유형: 도형 41">
+              <a:extLst>
+                <a:ext uri="{FF2B5EF4-FFF2-40B4-BE49-F238E27FC236}">
+                  <a16:creationId xmlns:a16="http://schemas.microsoft.com/office/drawing/2014/main" id="{C7415409-6E6B-A33B-0D61-D5A65C5F3C02}"/>
+                </a:ext>
+              </a:extLst>
+            </p:cNvPr>
+            <p:cNvSpPr/>
+            <p:nvPr/>
+          </p:nvSpPr>
+          <p:spPr bwMode="gray">
+            <a:xfrm>
+              <a:off x="970713" y="2610952"/>
+              <a:ext cx="3144088" cy="1200486"/>
+            </a:xfrm>
+            <a:custGeom>
+              <a:avLst/>
+              <a:gdLst>
+                <a:gd name="csX0" fmla="*/ 161925 w 2864644"/>
+                <a:gd name="csY0" fmla="*/ 0 h 1093788"/>
+                <a:gd name="csX1" fmla="*/ 2702719 w 2864644"/>
+                <a:gd name="csY1" fmla="*/ 0 h 1093788"/>
+                <a:gd name="csX2" fmla="*/ 2864644 w 2864644"/>
+                <a:gd name="csY2" fmla="*/ 161925 h 1093788"/>
+                <a:gd name="csX3" fmla="*/ 2864644 w 2864644"/>
+                <a:gd name="csY3" fmla="*/ 931863 h 1093788"/>
+                <a:gd name="csX4" fmla="*/ 2702719 w 2864644"/>
+                <a:gd name="csY4" fmla="*/ 1093788 h 1093788"/>
+                <a:gd name="csX5" fmla="*/ 161925 w 2864644"/>
+                <a:gd name="csY5" fmla="*/ 1093788 h 1093788"/>
+                <a:gd name="csX6" fmla="*/ 0 w 2864644"/>
+                <a:gd name="csY6" fmla="*/ 931863 h 1093788"/>
+                <a:gd name="csX7" fmla="*/ 0 w 2864644"/>
+                <a:gd name="csY7" fmla="*/ 161925 h 1093788"/>
+                <a:gd name="csX8" fmla="*/ 161925 w 2864644"/>
+                <a:gd name="csY8" fmla="*/ 0 h 1093788"/>
+              </a:gdLst>
+              <a:ahLst/>
+              <a:cxnLst>
+                <a:cxn ang="0">
+                  <a:pos x="csX0" y="csY0"/>
+                </a:cxn>
+                <a:cxn ang="0">
+                  <a:pos x="csX1" y="csY1"/>
+                </a:cxn>
+                <a:cxn ang="0">
+                  <a:pos x="csX2" y="csY2"/>
+                </a:cxn>
+                <a:cxn ang="0">
+                  <a:pos x="csX3" y="csY3"/>
+                </a:cxn>
+                <a:cxn ang="0">
+                  <a:pos x="csX4" y="csY4"/>
+                </a:cxn>
+                <a:cxn ang="0">
+                  <a:pos x="csX5" y="csY5"/>
+                </a:cxn>
+                <a:cxn ang="0">
+                  <a:pos x="csX6" y="csY6"/>
+                </a:cxn>
+                <a:cxn ang="0">
+                  <a:pos x="csX7" y="csY7"/>
+                </a:cxn>
+                <a:cxn ang="0">
+                  <a:pos x="csX8" y="csY8"/>
+                </a:cxn>
+              </a:cxnLst>
+              <a:rect l="l" t="t" r="r" b="b"/>
+              <a:pathLst>
+                <a:path w="2864644" h="1093788">
+                  <a:moveTo>
+                    <a:pt x="161925" y="0"/>
+                  </a:moveTo>
+                  <a:lnTo>
+                    <a:pt x="2702719" y="0"/>
+                  </a:lnTo>
+                  <a:cubicBezTo>
+                    <a:pt x="2702719" y="89429"/>
+                    <a:pt x="2775215" y="161925"/>
+                    <a:pt x="2864644" y="161925"/>
+                  </a:cubicBezTo>
+                  <a:lnTo>
+                    <a:pt x="2864644" y="931863"/>
+                  </a:lnTo>
+                  <a:cubicBezTo>
+                    <a:pt x="2775215" y="931863"/>
+                    <a:pt x="2702719" y="1004359"/>
+                    <a:pt x="2702719" y="1093788"/>
+                  </a:cubicBezTo>
+                  <a:lnTo>
+                    <a:pt x="161925" y="1093788"/>
+                  </a:lnTo>
+                  <a:cubicBezTo>
+                    <a:pt x="161925" y="1004359"/>
+                    <a:pt x="89429" y="931863"/>
+                    <a:pt x="0" y="931863"/>
+                  </a:cubicBezTo>
+                  <a:lnTo>
+                    <a:pt x="0" y="161925"/>
+                  </a:lnTo>
+                  <a:cubicBezTo>
+                    <a:pt x="89429" y="161925"/>
+                    <a:pt x="161925" y="89429"/>
+                    <a:pt x="161925" y="0"/>
+                  </a:cubicBezTo>
+                  <a:close/>
+                </a:path>
+              </a:pathLst>
+            </a:custGeom>
+            <a:solidFill>
+              <a:srgbClr val="E6E6E6"/>
+            </a:solidFill>
+            <a:ln w="3175" algn="ctr">
+              <a:solidFill>
+                <a:schemeClr val="bg1">
+                  <a:lumMod val="65000"/>
+                </a:schemeClr>
+              </a:solidFill>
+              <a:miter lim="800000"/>
+              <a:headEnd/>
+              <a:tailEnd/>
+            </a:ln>
+          </p:spPr>
+          <p:txBody>
+            <a:bodyPr wrap="square" lIns="88900" tIns="88900" rIns="88900" bIns="88900" rtlCol="0" anchor="ctr">
+              <a:noAutofit/>
+            </a:bodyPr>
+            <a:lstStyle/>
+            <a:p>
+              <a:pPr algn="ctr">
+                <a:lnSpc>
+                  <a:spcPct val="106000"/>
+                </a:lnSpc>
+                <a:buFont typeface="Wingdings 2" pitchFamily="18" charset="2"/>
+                <a:buNone/>
+              </a:pPr>
+              <a:r>
+                <a:rPr lang="en-US" altLang="ko-KR" sz="1600" b="1" dirty="0">
+                  <a:solidFill>
+                    <a:schemeClr val="bg1"/>
+                  </a:solidFill>
+                </a:rPr>
+                <a:t>`</a:t>
+              </a:r>
+              <a:endParaRPr lang="ko-KR" altLang="en-US" sz="1600" b="1" dirty="0">
+                <a:solidFill>
+                  <a:schemeClr val="bg1"/>
+                </a:solidFill>
+              </a:endParaRPr>
+            </a:p>
+          </p:txBody>
+        </p:sp>
+        <p:sp>
+          <p:nvSpPr>
+            <p:cNvPr id="43" name="직사각형 42">
+              <a:extLst>
+                <a:ext uri="{FF2B5EF4-FFF2-40B4-BE49-F238E27FC236}">
+                  <a16:creationId xmlns:a16="http://schemas.microsoft.com/office/drawing/2014/main" id="{E9A5E540-766D-6C96-313A-5F7F88D5C74F}"/>
+                </a:ext>
+              </a:extLst>
+            </p:cNvPr>
+            <p:cNvSpPr/>
+            <p:nvPr/>
+          </p:nvSpPr>
+          <p:spPr bwMode="gray">
+            <a:xfrm>
+              <a:off x="1105658" y="2813050"/>
+              <a:ext cx="717550" cy="762000"/>
+            </a:xfrm>
+            <a:prstGeom prst="rect">
+              <a:avLst/>
+            </a:prstGeom>
+            <a:noFill/>
+            <a:ln w="19050" algn="ctr">
+              <a:noFill/>
+              <a:miter lim="800000"/>
+              <a:headEnd/>
+              <a:tailEnd/>
+            </a:ln>
+          </p:spPr>
+          <p:txBody>
+            <a:bodyPr wrap="none" lIns="88900" tIns="88900" rIns="88900" bIns="88900" rtlCol="0" anchor="ctr"/>
+            <a:lstStyle/>
+            <a:p>
+              <a:pPr algn="ctr">
+                <a:lnSpc>
+                  <a:spcPct val="106000"/>
+                </a:lnSpc>
+                <a:buFont typeface="Wingdings 2" pitchFamily="18" charset="2"/>
+                <a:buNone/>
+              </a:pPr>
+              <a:r>
+                <a:rPr lang="en-US" altLang="ko-KR" sz="4400" b="1" dirty="0">
+                  <a:latin typeface="나눔고딕" panose="020D0604000000000000" pitchFamily="50" charset="-127"/>
+                  <a:ea typeface="나눔고딕" panose="020D0604000000000000" pitchFamily="50" charset="-127"/>
+                </a:rPr>
+                <a:t>G</a:t>
+              </a:r>
+              <a:r>
+                <a:rPr lang="ko-KR" altLang="en-US" sz="4400" b="1" dirty="0">
+                  <a:latin typeface="나눔고딕" panose="020D0604000000000000" pitchFamily="50" charset="-127"/>
+                  <a:ea typeface="나눔고딕" panose="020D0604000000000000" pitchFamily="50" charset="-127"/>
+                </a:rPr>
+                <a:t>상</a:t>
+              </a:r>
+            </a:p>
+          </p:txBody>
+        </p:sp>
+        <p:sp>
+          <p:nvSpPr>
+            <p:cNvPr id="44" name="직사각형 43">
+              <a:extLst>
+                <a:ext uri="{FF2B5EF4-FFF2-40B4-BE49-F238E27FC236}">
+                  <a16:creationId xmlns:a16="http://schemas.microsoft.com/office/drawing/2014/main" id="{38ED8F13-3C36-E535-463F-C627F4ACDA00}"/>
+                </a:ext>
+              </a:extLst>
+            </p:cNvPr>
+            <p:cNvSpPr/>
+            <p:nvPr/>
+          </p:nvSpPr>
+          <p:spPr bwMode="gray">
+            <a:xfrm>
+              <a:off x="1958153" y="2662936"/>
+              <a:ext cx="2057666" cy="1096518"/>
+            </a:xfrm>
+            <a:prstGeom prst="rect">
+              <a:avLst/>
+            </a:prstGeom>
+            <a:noFill/>
+            <a:ln w="19050" algn="ctr">
+              <a:noFill/>
+              <a:miter lim="800000"/>
+              <a:headEnd/>
+              <a:tailEnd/>
+            </a:ln>
+          </p:spPr>
+          <p:txBody>
+            <a:bodyPr wrap="none" lIns="88900" tIns="88900" rIns="88900" bIns="88900" rtlCol="0" anchor="ctr"/>
+            <a:lstStyle/>
+            <a:p>
+              <a:pPr algn="ctr">
+                <a:lnSpc>
+                  <a:spcPct val="106000"/>
+                </a:lnSpc>
+                <a:buFont typeface="Wingdings 2" pitchFamily="18" charset="2"/>
+                <a:buNone/>
+              </a:pPr>
+              <a:r>
+                <a:rPr lang="ko-KR" altLang="en-US" b="1" dirty="0" err="1">
+                  <a:latin typeface="나눔고딕" panose="020D0604000000000000" pitchFamily="50" charset="-127"/>
+                  <a:ea typeface="나눔고딕" panose="020D0604000000000000" pitchFamily="50" charset="-127"/>
+                </a:rPr>
+                <a:t>시나모롤</a:t>
+              </a:r>
+              <a:r>
+                <a:rPr lang="ko-KR" altLang="en-US" b="1" dirty="0">
+                  <a:latin typeface="나눔고딕" panose="020D0604000000000000" pitchFamily="50" charset="-127"/>
+                  <a:ea typeface="나눔고딕" panose="020D0604000000000000" pitchFamily="50" charset="-127"/>
+                </a:rPr>
+                <a:t> </a:t>
+              </a:r>
+              <a:endParaRPr lang="en-US" altLang="ko-KR" b="1" dirty="0">
+                <a:latin typeface="나눔고딕" panose="020D0604000000000000" pitchFamily="50" charset="-127"/>
+                <a:ea typeface="나눔고딕" panose="020D0604000000000000" pitchFamily="50" charset="-127"/>
+              </a:endParaRPr>
+            </a:p>
+            <a:p>
+              <a:pPr algn="ctr">
+                <a:lnSpc>
+                  <a:spcPct val="106000"/>
+                </a:lnSpc>
+                <a:buFont typeface="Wingdings 2" pitchFamily="18" charset="2"/>
+                <a:buNone/>
+              </a:pPr>
+              <a:r>
+                <a:rPr lang="ko-KR" altLang="en-US" b="1" dirty="0">
+                  <a:latin typeface="나눔고딕" panose="020D0604000000000000" pitchFamily="50" charset="-127"/>
+                  <a:ea typeface="나눔고딕" panose="020D0604000000000000" pitchFamily="50" charset="-127"/>
+                </a:rPr>
+                <a:t>헤어 터번</a:t>
+              </a:r>
+            </a:p>
+          </p:txBody>
+        </p:sp>
+      </p:grpSp>
+      <p:grpSp>
+        <p:nvGrpSpPr>
+          <p:cNvPr id="45" name="그룹 44">
+            <a:extLst>
+              <a:ext uri="{FF2B5EF4-FFF2-40B4-BE49-F238E27FC236}">
+                <a16:creationId xmlns:a16="http://schemas.microsoft.com/office/drawing/2014/main" id="{1C84A5DE-AF2B-0894-4AA6-34602F0D3552}"/>
+              </a:ext>
+            </a:extLst>
+          </p:cNvPr>
+          <p:cNvGrpSpPr/>
+          <p:nvPr/>
+        </p:nvGrpSpPr>
+        <p:grpSpPr>
+          <a:xfrm>
+            <a:off x="8691417" y="5074086"/>
+            <a:ext cx="3697200" cy="1486800"/>
+            <a:chOff x="677717" y="2434934"/>
+            <a:chExt cx="3697200" cy="1486800"/>
+          </a:xfrm>
+        </p:grpSpPr>
+        <p:sp>
+          <p:nvSpPr>
+            <p:cNvPr id="46" name="자유형: 도형 45">
+              <a:extLst>
+                <a:ext uri="{FF2B5EF4-FFF2-40B4-BE49-F238E27FC236}">
+                  <a16:creationId xmlns:a16="http://schemas.microsoft.com/office/drawing/2014/main" id="{BCE482E9-FCDA-2A4D-8A16-A68BC5D4570C}"/>
+                </a:ext>
+              </a:extLst>
+            </p:cNvPr>
+            <p:cNvSpPr/>
+            <p:nvPr/>
+          </p:nvSpPr>
+          <p:spPr bwMode="gray">
+            <a:xfrm>
+              <a:off x="677717" y="2434934"/>
+              <a:ext cx="3697200" cy="1486800"/>
+            </a:xfrm>
+            <a:custGeom>
+              <a:avLst/>
+              <a:gdLst>
+                <a:gd name="csX0" fmla="*/ 0 w 3697200"/>
+                <a:gd name="csY0" fmla="*/ 0 h 1486800"/>
+                <a:gd name="csX1" fmla="*/ 3697200 w 3697200"/>
+                <a:gd name="csY1" fmla="*/ 0 h 1486800"/>
+                <a:gd name="csX2" fmla="*/ 3697200 w 3697200"/>
+                <a:gd name="csY2" fmla="*/ 517650 h 1486800"/>
+                <a:gd name="csX3" fmla="*/ 3691379 w 3697200"/>
+                <a:gd name="csY3" fmla="*/ 517063 h 1486800"/>
+                <a:gd name="csX4" fmla="*/ 3465042 w 3697200"/>
+                <a:gd name="csY4" fmla="*/ 743400 h 1486800"/>
+                <a:gd name="csX5" fmla="*/ 3691379 w 3697200"/>
+                <a:gd name="csY5" fmla="*/ 969737 h 1486800"/>
+                <a:gd name="csX6" fmla="*/ 3697200 w 3697200"/>
+                <a:gd name="csY6" fmla="*/ 969150 h 1486800"/>
+                <a:gd name="csX7" fmla="*/ 3697200 w 3697200"/>
+                <a:gd name="csY7" fmla="*/ 1486800 h 1486800"/>
+                <a:gd name="csX8" fmla="*/ 0 w 3697200"/>
+                <a:gd name="csY8" fmla="*/ 1486800 h 1486800"/>
+                <a:gd name="csX9" fmla="*/ 0 w 3697200"/>
+                <a:gd name="csY9" fmla="*/ 969150 h 1486800"/>
+                <a:gd name="csX10" fmla="*/ 5821 w 3697200"/>
+                <a:gd name="csY10" fmla="*/ 969737 h 1486800"/>
+                <a:gd name="csX11" fmla="*/ 232158 w 3697200"/>
+                <a:gd name="csY11" fmla="*/ 743400 h 1486800"/>
+                <a:gd name="csX12" fmla="*/ 5821 w 3697200"/>
+                <a:gd name="csY12" fmla="*/ 517063 h 1486800"/>
+                <a:gd name="csX13" fmla="*/ 0 w 3697200"/>
+                <a:gd name="csY13" fmla="*/ 517650 h 1486800"/>
+              </a:gdLst>
+              <a:ahLst/>
+              <a:cxnLst>
+                <a:cxn ang="0">
+                  <a:pos x="csX0" y="csY0"/>
+                </a:cxn>
+                <a:cxn ang="0">
+                  <a:pos x="csX1" y="csY1"/>
+                </a:cxn>
+                <a:cxn ang="0">
+                  <a:pos x="csX2" y="csY2"/>
+                </a:cxn>
+                <a:cxn ang="0">
+                  <a:pos x="csX3" y="csY3"/>
+                </a:cxn>
+                <a:cxn ang="0">
+                  <a:pos x="csX4" y="csY4"/>
+                </a:cxn>
+                <a:cxn ang="0">
+                  <a:pos x="csX5" y="csY5"/>
+                </a:cxn>
+                <a:cxn ang="0">
+                  <a:pos x="csX6" y="csY6"/>
+                </a:cxn>
+                <a:cxn ang="0">
+                  <a:pos x="csX7" y="csY7"/>
+                </a:cxn>
+                <a:cxn ang="0">
+                  <a:pos x="csX8" y="csY8"/>
+                </a:cxn>
+                <a:cxn ang="0">
+                  <a:pos x="csX9" y="csY9"/>
+                </a:cxn>
+                <a:cxn ang="0">
+                  <a:pos x="csX10" y="csY10"/>
+                </a:cxn>
+                <a:cxn ang="0">
+                  <a:pos x="csX11" y="csY11"/>
+                </a:cxn>
+                <a:cxn ang="0">
+                  <a:pos x="csX12" y="csY12"/>
+                </a:cxn>
+                <a:cxn ang="0">
+                  <a:pos x="csX13" y="csY13"/>
+                </a:cxn>
+              </a:cxnLst>
+              <a:rect l="l" t="t" r="r" b="b"/>
+              <a:pathLst>
+                <a:path w="3697200" h="1486800">
+                  <a:moveTo>
+                    <a:pt x="0" y="0"/>
+                  </a:moveTo>
+                  <a:lnTo>
+                    <a:pt x="3697200" y="0"/>
+                  </a:lnTo>
+                  <a:lnTo>
+                    <a:pt x="3697200" y="517650"/>
+                  </a:lnTo>
+                  <a:lnTo>
+                    <a:pt x="3691379" y="517063"/>
+                  </a:lnTo>
+                  <a:cubicBezTo>
+                    <a:pt x="3566377" y="517063"/>
+                    <a:pt x="3465042" y="618398"/>
+                    <a:pt x="3465042" y="743400"/>
+                  </a:cubicBezTo>
+                  <a:cubicBezTo>
+                    <a:pt x="3465042" y="868402"/>
+                    <a:pt x="3566377" y="969737"/>
+                    <a:pt x="3691379" y="969737"/>
+                  </a:cubicBezTo>
+                  <a:lnTo>
+                    <a:pt x="3697200" y="969150"/>
+                  </a:lnTo>
+                  <a:lnTo>
+                    <a:pt x="3697200" y="1486800"/>
+                  </a:lnTo>
+                  <a:lnTo>
+                    <a:pt x="0" y="1486800"/>
+                  </a:lnTo>
+                  <a:lnTo>
+                    <a:pt x="0" y="969150"/>
+                  </a:lnTo>
+                  <a:lnTo>
+                    <a:pt x="5821" y="969737"/>
+                  </a:lnTo>
+                  <a:cubicBezTo>
+                    <a:pt x="130823" y="969737"/>
+                    <a:pt x="232158" y="868402"/>
+                    <a:pt x="232158" y="743400"/>
+                  </a:cubicBezTo>
+                  <a:cubicBezTo>
+                    <a:pt x="232158" y="618398"/>
+                    <a:pt x="130823" y="517063"/>
+                    <a:pt x="5821" y="517063"/>
+                  </a:cubicBezTo>
+                  <a:lnTo>
+                    <a:pt x="0" y="517650"/>
+                  </a:lnTo>
+                  <a:close/>
+                </a:path>
+              </a:pathLst>
+            </a:custGeom>
+            <a:solidFill>
+              <a:srgbClr val="DFEAC0"/>
+            </a:solidFill>
+            <a:ln w="3175" algn="ctr">
+              <a:solidFill>
+                <a:schemeClr val="bg1">
+                  <a:lumMod val="65000"/>
+                </a:schemeClr>
+              </a:solidFill>
+              <a:miter lim="800000"/>
+              <a:headEnd/>
+              <a:tailEnd/>
+            </a:ln>
+          </p:spPr>
+          <p:txBody>
+            <a:bodyPr wrap="square" lIns="88900" tIns="88900" rIns="88900" bIns="88900" rtlCol="0" anchor="ctr">
+              <a:noAutofit/>
+            </a:bodyPr>
+            <a:lstStyle/>
+            <a:p>
+              <a:pPr algn="ctr">
+                <a:lnSpc>
+                  <a:spcPct val="106000"/>
+                </a:lnSpc>
+                <a:buFont typeface="Wingdings 2" pitchFamily="18" charset="2"/>
+                <a:buNone/>
+              </a:pPr>
+              <a:endParaRPr lang="ko-KR" altLang="en-US" sz="1600" b="1" dirty="0">
+                <a:solidFill>
+                  <a:schemeClr val="bg1"/>
+                </a:solidFill>
+              </a:endParaRPr>
+            </a:p>
+          </p:txBody>
+        </p:sp>
+        <p:sp>
+          <p:nvSpPr>
+            <p:cNvPr id="47" name="자유형: 도형 46">
+              <a:extLst>
+                <a:ext uri="{FF2B5EF4-FFF2-40B4-BE49-F238E27FC236}">
+                  <a16:creationId xmlns:a16="http://schemas.microsoft.com/office/drawing/2014/main" id="{1BD4C77B-9CE6-25C9-81DB-8C833F0F73C7}"/>
+                </a:ext>
+              </a:extLst>
+            </p:cNvPr>
+            <p:cNvSpPr/>
+            <p:nvPr/>
+          </p:nvSpPr>
+          <p:spPr bwMode="gray">
+            <a:xfrm>
+              <a:off x="970713" y="2610952"/>
+              <a:ext cx="3144088" cy="1200486"/>
+            </a:xfrm>
+            <a:custGeom>
+              <a:avLst/>
+              <a:gdLst>
+                <a:gd name="csX0" fmla="*/ 161925 w 2864644"/>
+                <a:gd name="csY0" fmla="*/ 0 h 1093788"/>
+                <a:gd name="csX1" fmla="*/ 2702719 w 2864644"/>
+                <a:gd name="csY1" fmla="*/ 0 h 1093788"/>
+                <a:gd name="csX2" fmla="*/ 2864644 w 2864644"/>
+                <a:gd name="csY2" fmla="*/ 161925 h 1093788"/>
+                <a:gd name="csX3" fmla="*/ 2864644 w 2864644"/>
+                <a:gd name="csY3" fmla="*/ 931863 h 1093788"/>
+                <a:gd name="csX4" fmla="*/ 2702719 w 2864644"/>
+                <a:gd name="csY4" fmla="*/ 1093788 h 1093788"/>
+                <a:gd name="csX5" fmla="*/ 161925 w 2864644"/>
+                <a:gd name="csY5" fmla="*/ 1093788 h 1093788"/>
+                <a:gd name="csX6" fmla="*/ 0 w 2864644"/>
+                <a:gd name="csY6" fmla="*/ 931863 h 1093788"/>
+                <a:gd name="csX7" fmla="*/ 0 w 2864644"/>
+                <a:gd name="csY7" fmla="*/ 161925 h 1093788"/>
+                <a:gd name="csX8" fmla="*/ 161925 w 2864644"/>
+                <a:gd name="csY8" fmla="*/ 0 h 1093788"/>
+              </a:gdLst>
+              <a:ahLst/>
+              <a:cxnLst>
+                <a:cxn ang="0">
+                  <a:pos x="csX0" y="csY0"/>
+                </a:cxn>
+                <a:cxn ang="0">
+                  <a:pos x="csX1" y="csY1"/>
+                </a:cxn>
+                <a:cxn ang="0">
+                  <a:pos x="csX2" y="csY2"/>
+                </a:cxn>
+                <a:cxn ang="0">
+                  <a:pos x="csX3" y="csY3"/>
+                </a:cxn>
+                <a:cxn ang="0">
+                  <a:pos x="csX4" y="csY4"/>
+                </a:cxn>
+                <a:cxn ang="0">
+                  <a:pos x="csX5" y="csY5"/>
+                </a:cxn>
+                <a:cxn ang="0">
+                  <a:pos x="csX6" y="csY6"/>
+                </a:cxn>
+                <a:cxn ang="0">
+                  <a:pos x="csX7" y="csY7"/>
+                </a:cxn>
+                <a:cxn ang="0">
+                  <a:pos x="csX8" y="csY8"/>
+                </a:cxn>
+              </a:cxnLst>
+              <a:rect l="l" t="t" r="r" b="b"/>
+              <a:pathLst>
+                <a:path w="2864644" h="1093788">
+                  <a:moveTo>
+                    <a:pt x="161925" y="0"/>
+                  </a:moveTo>
+                  <a:lnTo>
+                    <a:pt x="2702719" y="0"/>
+                  </a:lnTo>
+                  <a:cubicBezTo>
+                    <a:pt x="2702719" y="89429"/>
+                    <a:pt x="2775215" y="161925"/>
+                    <a:pt x="2864644" y="161925"/>
+                  </a:cubicBezTo>
+                  <a:lnTo>
+                    <a:pt x="2864644" y="931863"/>
+                  </a:lnTo>
+                  <a:cubicBezTo>
+                    <a:pt x="2775215" y="931863"/>
+                    <a:pt x="2702719" y="1004359"/>
+                    <a:pt x="2702719" y="1093788"/>
+                  </a:cubicBezTo>
+                  <a:lnTo>
+                    <a:pt x="161925" y="1093788"/>
+                  </a:lnTo>
+                  <a:cubicBezTo>
+                    <a:pt x="161925" y="1004359"/>
+                    <a:pt x="89429" y="931863"/>
+                    <a:pt x="0" y="931863"/>
+                  </a:cubicBezTo>
+                  <a:lnTo>
+                    <a:pt x="0" y="161925"/>
+                  </a:lnTo>
+                  <a:cubicBezTo>
+                    <a:pt x="89429" y="161925"/>
+                    <a:pt x="161925" y="89429"/>
+                    <a:pt x="161925" y="0"/>
+                  </a:cubicBezTo>
+                  <a:close/>
+                </a:path>
+              </a:pathLst>
+            </a:custGeom>
+            <a:solidFill>
+              <a:srgbClr val="E6E6E6"/>
+            </a:solidFill>
+            <a:ln w="3175" algn="ctr">
+              <a:solidFill>
+                <a:schemeClr val="bg1">
+                  <a:lumMod val="65000"/>
+                </a:schemeClr>
+              </a:solidFill>
+              <a:miter lim="800000"/>
+              <a:headEnd/>
+              <a:tailEnd/>
+            </a:ln>
+          </p:spPr>
+          <p:txBody>
+            <a:bodyPr wrap="square" lIns="88900" tIns="88900" rIns="88900" bIns="88900" rtlCol="0" anchor="ctr">
+              <a:noAutofit/>
+            </a:bodyPr>
+            <a:lstStyle/>
+            <a:p>
+              <a:pPr algn="ctr">
+                <a:lnSpc>
+                  <a:spcPct val="106000"/>
+                </a:lnSpc>
+                <a:buFont typeface="Wingdings 2" pitchFamily="18" charset="2"/>
+                <a:buNone/>
+              </a:pPr>
+              <a:r>
+                <a:rPr lang="en-US" altLang="ko-KR" sz="1600" b="1" dirty="0">
+                  <a:solidFill>
+                    <a:schemeClr val="bg1"/>
+                  </a:solidFill>
+                </a:rPr>
+                <a:t>`</a:t>
+              </a:r>
+              <a:endParaRPr lang="ko-KR" altLang="en-US" sz="1600" b="1" dirty="0">
+                <a:solidFill>
+                  <a:schemeClr val="bg1"/>
+                </a:solidFill>
+              </a:endParaRPr>
+            </a:p>
+          </p:txBody>
+        </p:sp>
+        <p:sp>
+          <p:nvSpPr>
+            <p:cNvPr id="48" name="직사각형 47">
+              <a:extLst>
+                <a:ext uri="{FF2B5EF4-FFF2-40B4-BE49-F238E27FC236}">
+                  <a16:creationId xmlns:a16="http://schemas.microsoft.com/office/drawing/2014/main" id="{6BF79229-6C8E-0A0D-E34D-61E67CD10326}"/>
+                </a:ext>
+              </a:extLst>
+            </p:cNvPr>
+            <p:cNvSpPr/>
+            <p:nvPr/>
+          </p:nvSpPr>
+          <p:spPr bwMode="gray">
+            <a:xfrm>
+              <a:off x="1105658" y="2813050"/>
+              <a:ext cx="717550" cy="762000"/>
+            </a:xfrm>
+            <a:prstGeom prst="rect">
+              <a:avLst/>
+            </a:prstGeom>
+            <a:noFill/>
+            <a:ln w="19050" algn="ctr">
+              <a:noFill/>
+              <a:miter lim="800000"/>
+              <a:headEnd/>
+              <a:tailEnd/>
+            </a:ln>
+          </p:spPr>
+          <p:txBody>
+            <a:bodyPr wrap="none" lIns="88900" tIns="88900" rIns="88900" bIns="88900" rtlCol="0" anchor="ctr"/>
+            <a:lstStyle/>
+            <a:p>
+              <a:pPr algn="ctr">
+                <a:lnSpc>
+                  <a:spcPct val="106000"/>
+                </a:lnSpc>
+                <a:buFont typeface="Wingdings 2" pitchFamily="18" charset="2"/>
+                <a:buNone/>
+              </a:pPr>
+              <a:r>
+                <a:rPr lang="en-US" altLang="ko-KR" sz="4400" b="1" dirty="0">
+                  <a:latin typeface="나눔고딕" panose="020D0604000000000000" pitchFamily="50" charset="-127"/>
+                  <a:ea typeface="나눔고딕" panose="020D0604000000000000" pitchFamily="50" charset="-127"/>
+                </a:rPr>
+                <a:t>H</a:t>
+              </a:r>
+              <a:r>
+                <a:rPr lang="ko-KR" altLang="en-US" sz="4400" b="1" dirty="0">
+                  <a:latin typeface="나눔고딕" panose="020D0604000000000000" pitchFamily="50" charset="-127"/>
+                  <a:ea typeface="나눔고딕" panose="020D0604000000000000" pitchFamily="50" charset="-127"/>
+                </a:rPr>
+                <a:t>상</a:t>
+              </a:r>
+            </a:p>
+          </p:txBody>
+        </p:sp>
+        <p:sp>
+          <p:nvSpPr>
+            <p:cNvPr id="49" name="직사각형 48">
+              <a:extLst>
+                <a:ext uri="{FF2B5EF4-FFF2-40B4-BE49-F238E27FC236}">
+                  <a16:creationId xmlns:a16="http://schemas.microsoft.com/office/drawing/2014/main" id="{8EFC102C-EC18-2791-4F7A-F60954566B64}"/>
+                </a:ext>
+              </a:extLst>
+            </p:cNvPr>
+            <p:cNvSpPr/>
+            <p:nvPr/>
+          </p:nvSpPr>
+          <p:spPr bwMode="gray">
+            <a:xfrm>
+              <a:off x="1958153" y="2662936"/>
+              <a:ext cx="2057666" cy="1096518"/>
+            </a:xfrm>
+            <a:prstGeom prst="rect">
+              <a:avLst/>
+            </a:prstGeom>
+            <a:noFill/>
+            <a:ln w="19050" algn="ctr">
+              <a:noFill/>
+              <a:miter lim="800000"/>
+              <a:headEnd/>
+              <a:tailEnd/>
+            </a:ln>
+          </p:spPr>
+          <p:txBody>
+            <a:bodyPr wrap="none" lIns="88900" tIns="88900" rIns="88900" bIns="88900" rtlCol="0" anchor="ctr"/>
+            <a:lstStyle/>
+            <a:p>
+              <a:pPr algn="ctr"/>
+              <a:r>
+                <a:rPr lang="ko-KR" altLang="ko-KR" b="1" dirty="0" err="1">
+                  <a:latin typeface="나눔고딕" panose="020D0604000000000000" pitchFamily="50" charset="-127"/>
+                  <a:ea typeface="나눔고딕" panose="020D0604000000000000" pitchFamily="50" charset="-127"/>
+                </a:rPr>
+                <a:t>시나모롤</a:t>
+              </a:r>
+              <a:r>
+                <a:rPr lang="ko-KR" altLang="ko-KR" b="1" dirty="0">
+                  <a:latin typeface="나눔고딕" panose="020D0604000000000000" pitchFamily="50" charset="-127"/>
+                  <a:ea typeface="나눔고딕" panose="020D0604000000000000" pitchFamily="50" charset="-127"/>
+                </a:rPr>
+                <a:t> </a:t>
+              </a:r>
+              <a:endParaRPr lang="en-US" altLang="ko-KR" b="1" dirty="0">
+                <a:latin typeface="나눔고딕" panose="020D0604000000000000" pitchFamily="50" charset="-127"/>
+                <a:ea typeface="나눔고딕" panose="020D0604000000000000" pitchFamily="50" charset="-127"/>
+              </a:endParaRPr>
+            </a:p>
+            <a:p>
+              <a:pPr algn="ctr"/>
+              <a:r>
+                <a:rPr lang="ko-KR" altLang="ko-KR" b="1" dirty="0">
+                  <a:latin typeface="나눔고딕" panose="020D0604000000000000" pitchFamily="50" charset="-127"/>
+                  <a:ea typeface="나눔고딕" panose="020D0604000000000000" pitchFamily="50" charset="-127"/>
+                </a:rPr>
+                <a:t>바구니</a:t>
+              </a:r>
+              <a:r>
+                <a:rPr lang="en-US" altLang="ko-KR" b="1" dirty="0">
+                  <a:latin typeface="나눔고딕" panose="020D0604000000000000" pitchFamily="50" charset="-127"/>
+                  <a:ea typeface="나눔고딕" panose="020D0604000000000000" pitchFamily="50" charset="-127"/>
+                </a:rPr>
+                <a:t> </a:t>
+              </a:r>
+              <a:r>
+                <a:rPr lang="ko-KR" altLang="ko-KR" b="1" dirty="0">
+                  <a:latin typeface="나눔고딕" panose="020D0604000000000000" pitchFamily="50" charset="-127"/>
+                  <a:ea typeface="나눔고딕" panose="020D0604000000000000" pitchFamily="50" charset="-127"/>
+                </a:rPr>
+                <a:t>(하늘색)</a:t>
+              </a:r>
+            </a:p>
+          </p:txBody>
+        </p:sp>
+      </p:grpSp>
+      <p:grpSp>
+        <p:nvGrpSpPr>
+          <p:cNvPr id="51" name="그룹 50">
+            <a:extLst>
+              <a:ext uri="{FF2B5EF4-FFF2-40B4-BE49-F238E27FC236}">
+                <a16:creationId xmlns:a16="http://schemas.microsoft.com/office/drawing/2014/main" id="{FE4E8432-1E62-36FD-03B0-E6504F9BE33D}"/>
+              </a:ext>
+            </a:extLst>
+          </p:cNvPr>
+          <p:cNvGrpSpPr/>
+          <p:nvPr/>
+        </p:nvGrpSpPr>
+        <p:grpSpPr>
+          <a:xfrm>
+            <a:off x="557147" y="4961515"/>
+            <a:ext cx="3697200" cy="1486800"/>
+            <a:chOff x="677717" y="2434934"/>
+            <a:chExt cx="3697200" cy="1486800"/>
+          </a:xfrm>
+        </p:grpSpPr>
+        <p:sp>
+          <p:nvSpPr>
+            <p:cNvPr id="52" name="자유형: 도형 51">
+              <a:extLst>
+                <a:ext uri="{FF2B5EF4-FFF2-40B4-BE49-F238E27FC236}">
+                  <a16:creationId xmlns:a16="http://schemas.microsoft.com/office/drawing/2014/main" id="{856DAA00-0C8C-C031-0BCC-2014ABA48CC4}"/>
+                </a:ext>
+              </a:extLst>
+            </p:cNvPr>
+            <p:cNvSpPr/>
+            <p:nvPr/>
+          </p:nvSpPr>
+          <p:spPr bwMode="gray">
+            <a:xfrm>
+              <a:off x="677717" y="2434934"/>
+              <a:ext cx="3697200" cy="1486800"/>
+            </a:xfrm>
+            <a:custGeom>
+              <a:avLst/>
+              <a:gdLst>
+                <a:gd name="csX0" fmla="*/ 0 w 3697200"/>
+                <a:gd name="csY0" fmla="*/ 0 h 1486800"/>
+                <a:gd name="csX1" fmla="*/ 3697200 w 3697200"/>
+                <a:gd name="csY1" fmla="*/ 0 h 1486800"/>
+                <a:gd name="csX2" fmla="*/ 3697200 w 3697200"/>
+                <a:gd name="csY2" fmla="*/ 517650 h 1486800"/>
+                <a:gd name="csX3" fmla="*/ 3691379 w 3697200"/>
+                <a:gd name="csY3" fmla="*/ 517063 h 1486800"/>
+                <a:gd name="csX4" fmla="*/ 3465042 w 3697200"/>
+                <a:gd name="csY4" fmla="*/ 743400 h 1486800"/>
+                <a:gd name="csX5" fmla="*/ 3691379 w 3697200"/>
+                <a:gd name="csY5" fmla="*/ 969737 h 1486800"/>
+                <a:gd name="csX6" fmla="*/ 3697200 w 3697200"/>
+                <a:gd name="csY6" fmla="*/ 969150 h 1486800"/>
+                <a:gd name="csX7" fmla="*/ 3697200 w 3697200"/>
+                <a:gd name="csY7" fmla="*/ 1486800 h 1486800"/>
+                <a:gd name="csX8" fmla="*/ 0 w 3697200"/>
+                <a:gd name="csY8" fmla="*/ 1486800 h 1486800"/>
+                <a:gd name="csX9" fmla="*/ 0 w 3697200"/>
+                <a:gd name="csY9" fmla="*/ 969150 h 1486800"/>
+                <a:gd name="csX10" fmla="*/ 5821 w 3697200"/>
+                <a:gd name="csY10" fmla="*/ 969737 h 1486800"/>
+                <a:gd name="csX11" fmla="*/ 232158 w 3697200"/>
+                <a:gd name="csY11" fmla="*/ 743400 h 1486800"/>
+                <a:gd name="csX12" fmla="*/ 5821 w 3697200"/>
+                <a:gd name="csY12" fmla="*/ 517063 h 1486800"/>
+                <a:gd name="csX13" fmla="*/ 0 w 3697200"/>
+                <a:gd name="csY13" fmla="*/ 517650 h 1486800"/>
+              </a:gdLst>
+              <a:ahLst/>
+              <a:cxnLst>
+                <a:cxn ang="0">
+                  <a:pos x="csX0" y="csY0"/>
+                </a:cxn>
+                <a:cxn ang="0">
+                  <a:pos x="csX1" y="csY1"/>
+                </a:cxn>
+                <a:cxn ang="0">
+                  <a:pos x="csX2" y="csY2"/>
+                </a:cxn>
+                <a:cxn ang="0">
+                  <a:pos x="csX3" y="csY3"/>
+                </a:cxn>
+                <a:cxn ang="0">
+                  <a:pos x="csX4" y="csY4"/>
+                </a:cxn>
+                <a:cxn ang="0">
+                  <a:pos x="csX5" y="csY5"/>
+                </a:cxn>
+                <a:cxn ang="0">
+                  <a:pos x="csX6" y="csY6"/>
+                </a:cxn>
+                <a:cxn ang="0">
+                  <a:pos x="csX7" y="csY7"/>
+                </a:cxn>
+                <a:cxn ang="0">
+                  <a:pos x="csX8" y="csY8"/>
+                </a:cxn>
+                <a:cxn ang="0">
+                  <a:pos x="csX9" y="csY9"/>
+                </a:cxn>
+                <a:cxn ang="0">
+                  <a:pos x="csX10" y="csY10"/>
+                </a:cxn>
+                <a:cxn ang="0">
+                  <a:pos x="csX11" y="csY11"/>
+                </a:cxn>
+                <a:cxn ang="0">
+                  <a:pos x="csX12" y="csY12"/>
+                </a:cxn>
+                <a:cxn ang="0">
+                  <a:pos x="csX13" y="csY13"/>
+                </a:cxn>
+              </a:cxnLst>
+              <a:rect l="l" t="t" r="r" b="b"/>
+              <a:pathLst>
+                <a:path w="3697200" h="1486800">
+                  <a:moveTo>
+                    <a:pt x="0" y="0"/>
+                  </a:moveTo>
+                  <a:lnTo>
+                    <a:pt x="3697200" y="0"/>
+                  </a:lnTo>
+                  <a:lnTo>
+                    <a:pt x="3697200" y="517650"/>
+                  </a:lnTo>
+                  <a:lnTo>
+                    <a:pt x="3691379" y="517063"/>
+                  </a:lnTo>
+                  <a:cubicBezTo>
+                    <a:pt x="3566377" y="517063"/>
+                    <a:pt x="3465042" y="618398"/>
+                    <a:pt x="3465042" y="743400"/>
+                  </a:cubicBezTo>
+                  <a:cubicBezTo>
+                    <a:pt x="3465042" y="868402"/>
+                    <a:pt x="3566377" y="969737"/>
+                    <a:pt x="3691379" y="969737"/>
+                  </a:cubicBezTo>
+                  <a:lnTo>
+                    <a:pt x="3697200" y="969150"/>
+                  </a:lnTo>
+                  <a:lnTo>
+                    <a:pt x="3697200" y="1486800"/>
+                  </a:lnTo>
+                  <a:lnTo>
+                    <a:pt x="0" y="1486800"/>
+                  </a:lnTo>
+                  <a:lnTo>
+                    <a:pt x="0" y="969150"/>
+                  </a:lnTo>
+                  <a:lnTo>
+                    <a:pt x="5821" y="969737"/>
+                  </a:lnTo>
+                  <a:cubicBezTo>
+                    <a:pt x="130823" y="969737"/>
+                    <a:pt x="232158" y="868402"/>
+                    <a:pt x="232158" y="743400"/>
+                  </a:cubicBezTo>
+                  <a:cubicBezTo>
+                    <a:pt x="232158" y="618398"/>
+                    <a:pt x="130823" y="517063"/>
+                    <a:pt x="5821" y="517063"/>
+                  </a:cubicBezTo>
+                  <a:lnTo>
+                    <a:pt x="0" y="517650"/>
+                  </a:lnTo>
+                  <a:close/>
+                </a:path>
+              </a:pathLst>
+            </a:custGeom>
+            <a:solidFill>
+              <a:srgbClr val="DFEAC0"/>
+            </a:solidFill>
+            <a:ln w="3175" algn="ctr">
+              <a:solidFill>
+                <a:schemeClr val="bg1">
+                  <a:lumMod val="65000"/>
+                </a:schemeClr>
+              </a:solidFill>
+              <a:miter lim="800000"/>
+              <a:headEnd/>
+              <a:tailEnd/>
+            </a:ln>
+          </p:spPr>
+          <p:txBody>
+            <a:bodyPr wrap="square" lIns="88900" tIns="88900" rIns="88900" bIns="88900" rtlCol="0" anchor="ctr">
+              <a:noAutofit/>
+            </a:bodyPr>
+            <a:lstStyle/>
+            <a:p>
+              <a:pPr algn="ctr">
+                <a:lnSpc>
+                  <a:spcPct val="106000"/>
+                </a:lnSpc>
+                <a:buFont typeface="Wingdings 2" pitchFamily="18" charset="2"/>
+                <a:buNone/>
+              </a:pPr>
+              <a:endParaRPr lang="ko-KR" altLang="en-US" sz="1600" b="1" dirty="0">
+                <a:solidFill>
+                  <a:schemeClr val="bg1"/>
+                </a:solidFill>
+              </a:endParaRPr>
+            </a:p>
+          </p:txBody>
+        </p:sp>
+        <p:sp>
+          <p:nvSpPr>
+            <p:cNvPr id="53" name="자유형: 도형 52">
+              <a:extLst>
+                <a:ext uri="{FF2B5EF4-FFF2-40B4-BE49-F238E27FC236}">
+                  <a16:creationId xmlns:a16="http://schemas.microsoft.com/office/drawing/2014/main" id="{78787580-B847-C71B-244E-9255DE0B2CAF}"/>
+                </a:ext>
+              </a:extLst>
+            </p:cNvPr>
+            <p:cNvSpPr/>
+            <p:nvPr/>
+          </p:nvSpPr>
+          <p:spPr bwMode="gray">
+            <a:xfrm>
+              <a:off x="970713" y="2610952"/>
+              <a:ext cx="3144088" cy="1200486"/>
+            </a:xfrm>
+            <a:custGeom>
+              <a:avLst/>
+              <a:gdLst>
+                <a:gd name="csX0" fmla="*/ 161925 w 2864644"/>
+                <a:gd name="csY0" fmla="*/ 0 h 1093788"/>
+                <a:gd name="csX1" fmla="*/ 2702719 w 2864644"/>
+                <a:gd name="csY1" fmla="*/ 0 h 1093788"/>
+                <a:gd name="csX2" fmla="*/ 2864644 w 2864644"/>
+                <a:gd name="csY2" fmla="*/ 161925 h 1093788"/>
+                <a:gd name="csX3" fmla="*/ 2864644 w 2864644"/>
+                <a:gd name="csY3" fmla="*/ 931863 h 1093788"/>
+                <a:gd name="csX4" fmla="*/ 2702719 w 2864644"/>
+                <a:gd name="csY4" fmla="*/ 1093788 h 1093788"/>
+                <a:gd name="csX5" fmla="*/ 161925 w 2864644"/>
+                <a:gd name="csY5" fmla="*/ 1093788 h 1093788"/>
+                <a:gd name="csX6" fmla="*/ 0 w 2864644"/>
+                <a:gd name="csY6" fmla="*/ 931863 h 1093788"/>
+                <a:gd name="csX7" fmla="*/ 0 w 2864644"/>
+                <a:gd name="csY7" fmla="*/ 161925 h 1093788"/>
+                <a:gd name="csX8" fmla="*/ 161925 w 2864644"/>
+                <a:gd name="csY8" fmla="*/ 0 h 1093788"/>
+              </a:gdLst>
+              <a:ahLst/>
+              <a:cxnLst>
+                <a:cxn ang="0">
+                  <a:pos x="csX0" y="csY0"/>
+                </a:cxn>
+                <a:cxn ang="0">
+                  <a:pos x="csX1" y="csY1"/>
+                </a:cxn>
+                <a:cxn ang="0">
+                  <a:pos x="csX2" y="csY2"/>
+                </a:cxn>
+                <a:cxn ang="0">
+                  <a:pos x="csX3" y="csY3"/>
+                </a:cxn>
+                <a:cxn ang="0">
+                  <a:pos x="csX4" y="csY4"/>
+                </a:cxn>
+                <a:cxn ang="0">
+                  <a:pos x="csX5" y="csY5"/>
+                </a:cxn>
+                <a:cxn ang="0">
+                  <a:pos x="csX6" y="csY6"/>
+                </a:cxn>
+                <a:cxn ang="0">
+                  <a:pos x="csX7" y="csY7"/>
+                </a:cxn>
+                <a:cxn ang="0">
+                  <a:pos x="csX8" y="csY8"/>
+                </a:cxn>
+              </a:cxnLst>
+              <a:rect l="l" t="t" r="r" b="b"/>
+              <a:pathLst>
+                <a:path w="2864644" h="1093788">
+                  <a:moveTo>
+                    <a:pt x="161925" y="0"/>
+                  </a:moveTo>
+                  <a:lnTo>
+                    <a:pt x="2702719" y="0"/>
+                  </a:lnTo>
+                  <a:cubicBezTo>
+                    <a:pt x="2702719" y="89429"/>
+                    <a:pt x="2775215" y="161925"/>
+                    <a:pt x="2864644" y="161925"/>
+                  </a:cubicBezTo>
+                  <a:lnTo>
+                    <a:pt x="2864644" y="931863"/>
+                  </a:lnTo>
+                  <a:cubicBezTo>
+                    <a:pt x="2775215" y="931863"/>
+                    <a:pt x="2702719" y="1004359"/>
+                    <a:pt x="2702719" y="1093788"/>
+                  </a:cubicBezTo>
+                  <a:lnTo>
+                    <a:pt x="161925" y="1093788"/>
+                  </a:lnTo>
+                  <a:cubicBezTo>
+                    <a:pt x="161925" y="1004359"/>
+                    <a:pt x="89429" y="931863"/>
+                    <a:pt x="0" y="931863"/>
+                  </a:cubicBezTo>
+                  <a:lnTo>
+                    <a:pt x="0" y="161925"/>
+                  </a:lnTo>
+                  <a:cubicBezTo>
+                    <a:pt x="89429" y="161925"/>
+                    <a:pt x="161925" y="89429"/>
+                    <a:pt x="161925" y="0"/>
+                  </a:cubicBezTo>
+                  <a:close/>
+                </a:path>
+              </a:pathLst>
+            </a:custGeom>
+            <a:solidFill>
+              <a:srgbClr val="DFEAC0"/>
+            </a:solidFill>
+            <a:ln w="3175" algn="ctr">
+              <a:solidFill>
+                <a:schemeClr val="tx1"/>
+              </a:solidFill>
+              <a:prstDash val="lgDashDot"/>
+              <a:miter lim="800000"/>
+              <a:headEnd/>
+              <a:tailEnd/>
+            </a:ln>
+          </p:spPr>
+          <p:txBody>
+            <a:bodyPr wrap="square" lIns="88900" tIns="88900" rIns="88900" bIns="88900" rtlCol="0" anchor="ctr">
+              <a:noAutofit/>
+            </a:bodyPr>
+            <a:lstStyle/>
+            <a:p>
+              <a:pPr algn="ctr">
+                <a:lnSpc>
+                  <a:spcPct val="106000"/>
+                </a:lnSpc>
+                <a:buFont typeface="Wingdings 2" pitchFamily="18" charset="2"/>
+                <a:buNone/>
+              </a:pPr>
+              <a:r>
+                <a:rPr lang="en-US" altLang="ko-KR" b="1" dirty="0">
+                  <a:latin typeface="나눔고딕" panose="020D0604000000000000" pitchFamily="50" charset="-127"/>
+                  <a:ea typeface="나눔고딕" panose="020D0604000000000000" pitchFamily="50" charset="-127"/>
+                </a:rPr>
+                <a:t>26</a:t>
+              </a:r>
+              <a:r>
+                <a:rPr lang="ko-KR" altLang="en-US" b="1" dirty="0">
+                  <a:latin typeface="나눔고딕" panose="020D0604000000000000" pitchFamily="50" charset="-127"/>
+                  <a:ea typeface="나눔고딕" panose="020D0604000000000000" pitchFamily="50" charset="-127"/>
+                </a:rPr>
+                <a:t>년 </a:t>
+              </a:r>
+              <a:r>
+                <a:rPr lang="en-US" altLang="ko-KR" b="1" dirty="0">
+                  <a:latin typeface="나눔고딕" panose="020D0604000000000000" pitchFamily="50" charset="-127"/>
+                  <a:ea typeface="나눔고딕" panose="020D0604000000000000" pitchFamily="50" charset="-127"/>
+                </a:rPr>
+                <a:t>07</a:t>
+              </a:r>
+              <a:r>
+                <a:rPr lang="ko-KR" altLang="en-US" b="1" dirty="0">
+                  <a:latin typeface="나눔고딕" panose="020D0604000000000000" pitchFamily="50" charset="-127"/>
+                  <a:ea typeface="나눔고딕" panose="020D0604000000000000" pitchFamily="50" charset="-127"/>
+                </a:rPr>
+                <a:t>월 </a:t>
+              </a:r>
+              <a:endParaRPr lang="en-US" altLang="ko-KR" b="1" dirty="0">
+                <a:latin typeface="나눔고딕" panose="020D0604000000000000" pitchFamily="50" charset="-127"/>
+                <a:ea typeface="나눔고딕" panose="020D0604000000000000" pitchFamily="50" charset="-127"/>
+              </a:endParaRPr>
+            </a:p>
+            <a:p>
+              <a:pPr algn="ctr">
+                <a:lnSpc>
+                  <a:spcPct val="106000"/>
+                </a:lnSpc>
+                <a:buFont typeface="Wingdings 2" pitchFamily="18" charset="2"/>
+                <a:buNone/>
+              </a:pPr>
+              <a:r>
+                <a:rPr lang="ko-KR" altLang="en-US" b="1" dirty="0" err="1">
+                  <a:latin typeface="나눔고딕" panose="020D0604000000000000" pitchFamily="50" charset="-127"/>
+                  <a:ea typeface="나눔고딕" panose="020D0604000000000000" pitchFamily="50" charset="-127"/>
+                </a:rPr>
+                <a:t>시나모롤</a:t>
+              </a:r>
+              <a:r>
+                <a:rPr lang="ko-KR" altLang="en-US" b="1" dirty="0">
+                  <a:latin typeface="나눔고딕" panose="020D0604000000000000" pitchFamily="50" charset="-127"/>
+                  <a:ea typeface="나눔고딕" panose="020D0604000000000000" pitchFamily="50" charset="-127"/>
+                </a:rPr>
+                <a:t> </a:t>
+              </a:r>
+              <a:r>
+                <a:rPr lang="ko-KR" altLang="en-US" b="1" dirty="0" err="1">
+                  <a:latin typeface="나눔고딕" panose="020D0604000000000000" pitchFamily="50" charset="-127"/>
+                  <a:ea typeface="나눔고딕" panose="020D0604000000000000" pitchFamily="50" charset="-127"/>
+                </a:rPr>
+                <a:t>아타리</a:t>
+              </a:r>
+              <a:r>
+                <a:rPr lang="ko-KR" altLang="en-US" b="1" dirty="0">
+                  <a:latin typeface="나눔고딕" panose="020D0604000000000000" pitchFamily="50" charset="-127"/>
+                  <a:ea typeface="나눔고딕" panose="020D0604000000000000" pitchFamily="50" charset="-127"/>
+                </a:rPr>
+                <a:t> </a:t>
+              </a:r>
+              <a:r>
+                <a:rPr lang="ko-KR" altLang="en-US" b="1" dirty="0" err="1">
+                  <a:latin typeface="나눔고딕" panose="020D0604000000000000" pitchFamily="50" charset="-127"/>
+                  <a:ea typeface="나눔고딕" panose="020D0604000000000000" pitchFamily="50" charset="-127"/>
+                </a:rPr>
+                <a:t>쿠지</a:t>
+              </a:r>
+              <a:endParaRPr lang="en-US" altLang="ko-KR" b="1" dirty="0">
+                <a:latin typeface="나눔고딕" panose="020D0604000000000000" pitchFamily="50" charset="-127"/>
+                <a:ea typeface="나눔고딕" panose="020D0604000000000000" pitchFamily="50" charset="-127"/>
+              </a:endParaRPr>
+            </a:p>
+          </p:txBody>
+        </p:sp>
+      </p:grpSp>
+      <p:grpSp>
+        <p:nvGrpSpPr>
+          <p:cNvPr id="4" name="그룹 3">
+            <a:extLst>
+              <a:ext uri="{FF2B5EF4-FFF2-40B4-BE49-F238E27FC236}">
+                <a16:creationId xmlns:a16="http://schemas.microsoft.com/office/drawing/2014/main" id="{E413D64B-DDAF-DD5F-862C-BBD53B6EC882}"/>
+              </a:ext>
+            </a:extLst>
+          </p:cNvPr>
+          <p:cNvGrpSpPr/>
+          <p:nvPr/>
+        </p:nvGrpSpPr>
+        <p:grpSpPr>
+          <a:xfrm>
+            <a:off x="12871531" y="1190334"/>
+            <a:ext cx="3697200" cy="1486800"/>
+            <a:chOff x="677717" y="2434934"/>
+            <a:chExt cx="3697200" cy="1486800"/>
+          </a:xfrm>
+        </p:grpSpPr>
+        <p:sp>
+          <p:nvSpPr>
+            <p:cNvPr id="16" name="자유형: 도형 15">
+              <a:extLst>
+                <a:ext uri="{FF2B5EF4-FFF2-40B4-BE49-F238E27FC236}">
+                  <a16:creationId xmlns:a16="http://schemas.microsoft.com/office/drawing/2014/main" id="{8E50CBC8-54B7-0ADD-D936-E6E3F1A0C49F}"/>
+                </a:ext>
+              </a:extLst>
+            </p:cNvPr>
+            <p:cNvSpPr/>
+            <p:nvPr/>
+          </p:nvSpPr>
+          <p:spPr bwMode="gray">
+            <a:xfrm>
+              <a:off x="677717" y="2434934"/>
+              <a:ext cx="3697200" cy="1486800"/>
+            </a:xfrm>
+            <a:custGeom>
+              <a:avLst/>
+              <a:gdLst>
+                <a:gd name="csX0" fmla="*/ 0 w 3697200"/>
+                <a:gd name="csY0" fmla="*/ 0 h 1486800"/>
+                <a:gd name="csX1" fmla="*/ 3697200 w 3697200"/>
+                <a:gd name="csY1" fmla="*/ 0 h 1486800"/>
+                <a:gd name="csX2" fmla="*/ 3697200 w 3697200"/>
+                <a:gd name="csY2" fmla="*/ 517650 h 1486800"/>
+                <a:gd name="csX3" fmla="*/ 3691379 w 3697200"/>
+                <a:gd name="csY3" fmla="*/ 517063 h 1486800"/>
+                <a:gd name="csX4" fmla="*/ 3465042 w 3697200"/>
+                <a:gd name="csY4" fmla="*/ 743400 h 1486800"/>
+                <a:gd name="csX5" fmla="*/ 3691379 w 3697200"/>
+                <a:gd name="csY5" fmla="*/ 969737 h 1486800"/>
+                <a:gd name="csX6" fmla="*/ 3697200 w 3697200"/>
+                <a:gd name="csY6" fmla="*/ 969150 h 1486800"/>
+                <a:gd name="csX7" fmla="*/ 3697200 w 3697200"/>
+                <a:gd name="csY7" fmla="*/ 1486800 h 1486800"/>
+                <a:gd name="csX8" fmla="*/ 0 w 3697200"/>
+                <a:gd name="csY8" fmla="*/ 1486800 h 1486800"/>
+                <a:gd name="csX9" fmla="*/ 0 w 3697200"/>
+                <a:gd name="csY9" fmla="*/ 969150 h 1486800"/>
+                <a:gd name="csX10" fmla="*/ 5821 w 3697200"/>
+                <a:gd name="csY10" fmla="*/ 969737 h 1486800"/>
+                <a:gd name="csX11" fmla="*/ 232158 w 3697200"/>
+                <a:gd name="csY11" fmla="*/ 743400 h 1486800"/>
+                <a:gd name="csX12" fmla="*/ 5821 w 3697200"/>
+                <a:gd name="csY12" fmla="*/ 517063 h 1486800"/>
+                <a:gd name="csX13" fmla="*/ 0 w 3697200"/>
+                <a:gd name="csY13" fmla="*/ 517650 h 1486800"/>
+              </a:gdLst>
+              <a:ahLst/>
+              <a:cxnLst>
+                <a:cxn ang="0">
+                  <a:pos x="csX0" y="csY0"/>
+                </a:cxn>
+                <a:cxn ang="0">
+                  <a:pos x="csX1" y="csY1"/>
+                </a:cxn>
+                <a:cxn ang="0">
+                  <a:pos x="csX2" y="csY2"/>
+                </a:cxn>
+                <a:cxn ang="0">
+                  <a:pos x="csX3" y="csY3"/>
+                </a:cxn>
+                <a:cxn ang="0">
+                  <a:pos x="csX4" y="csY4"/>
+                </a:cxn>
+                <a:cxn ang="0">
+                  <a:pos x="csX5" y="csY5"/>
+                </a:cxn>
+                <a:cxn ang="0">
+                  <a:pos x="csX6" y="csY6"/>
+                </a:cxn>
+                <a:cxn ang="0">
+                  <a:pos x="csX7" y="csY7"/>
+                </a:cxn>
+                <a:cxn ang="0">
+                  <a:pos x="csX8" y="csY8"/>
+                </a:cxn>
+                <a:cxn ang="0">
+                  <a:pos x="csX9" y="csY9"/>
+                </a:cxn>
+                <a:cxn ang="0">
+                  <a:pos x="csX10" y="csY10"/>
+                </a:cxn>
+                <a:cxn ang="0">
+                  <a:pos x="csX11" y="csY11"/>
+                </a:cxn>
+                <a:cxn ang="0">
+                  <a:pos x="csX12" y="csY12"/>
+                </a:cxn>
+                <a:cxn ang="0">
+                  <a:pos x="csX13" y="csY13"/>
+                </a:cxn>
+              </a:cxnLst>
+              <a:rect l="l" t="t" r="r" b="b"/>
+              <a:pathLst>
+                <a:path w="3697200" h="1486800">
+                  <a:moveTo>
+                    <a:pt x="0" y="0"/>
+                  </a:moveTo>
+                  <a:lnTo>
+                    <a:pt x="3697200" y="0"/>
+                  </a:lnTo>
+                  <a:lnTo>
+                    <a:pt x="3697200" y="517650"/>
+                  </a:lnTo>
+                  <a:lnTo>
+                    <a:pt x="3691379" y="517063"/>
+                  </a:lnTo>
+                  <a:cubicBezTo>
+                    <a:pt x="3566377" y="517063"/>
+                    <a:pt x="3465042" y="618398"/>
+                    <a:pt x="3465042" y="743400"/>
+                  </a:cubicBezTo>
+                  <a:cubicBezTo>
+                    <a:pt x="3465042" y="868402"/>
+                    <a:pt x="3566377" y="969737"/>
+                    <a:pt x="3691379" y="969737"/>
+                  </a:cubicBezTo>
+                  <a:lnTo>
+                    <a:pt x="3697200" y="969150"/>
+                  </a:lnTo>
+                  <a:lnTo>
+                    <a:pt x="3697200" y="1486800"/>
+                  </a:lnTo>
+                  <a:lnTo>
+                    <a:pt x="0" y="1486800"/>
+                  </a:lnTo>
+                  <a:lnTo>
+                    <a:pt x="0" y="969150"/>
+                  </a:lnTo>
+                  <a:lnTo>
+                    <a:pt x="5821" y="969737"/>
+                  </a:lnTo>
+                  <a:cubicBezTo>
+                    <a:pt x="130823" y="969737"/>
+                    <a:pt x="232158" y="868402"/>
+                    <a:pt x="232158" y="743400"/>
+                  </a:cubicBezTo>
+                  <a:cubicBezTo>
+                    <a:pt x="232158" y="618398"/>
+                    <a:pt x="130823" y="517063"/>
+                    <a:pt x="5821" y="517063"/>
+                  </a:cubicBezTo>
+                  <a:lnTo>
+                    <a:pt x="0" y="517650"/>
+                  </a:lnTo>
+                  <a:close/>
+                </a:path>
+              </a:pathLst>
+            </a:custGeom>
+            <a:solidFill>
+              <a:srgbClr val="DFEAC0"/>
+            </a:solidFill>
+            <a:ln w="3175" algn="ctr">
+              <a:solidFill>
+                <a:schemeClr val="bg1">
+                  <a:lumMod val="65000"/>
+                </a:schemeClr>
+              </a:solidFill>
+              <a:miter lim="800000"/>
+              <a:headEnd/>
+              <a:tailEnd/>
+            </a:ln>
+          </p:spPr>
+          <p:txBody>
+            <a:bodyPr wrap="square" lIns="88900" tIns="88900" rIns="88900" bIns="88900" rtlCol="0" anchor="ctr">
+              <a:noAutofit/>
+            </a:bodyPr>
+            <a:lstStyle/>
+            <a:p>
+              <a:pPr algn="ctr">
+                <a:lnSpc>
+                  <a:spcPct val="106000"/>
+                </a:lnSpc>
+                <a:buFont typeface="Wingdings 2" pitchFamily="18" charset="2"/>
+                <a:buNone/>
+              </a:pPr>
+              <a:endParaRPr lang="ko-KR" altLang="en-US" sz="1600" b="1" dirty="0">
+                <a:solidFill>
+                  <a:schemeClr val="bg1"/>
+                </a:solidFill>
+              </a:endParaRPr>
+            </a:p>
+          </p:txBody>
+        </p:sp>
+        <p:sp>
+          <p:nvSpPr>
+            <p:cNvPr id="21" name="자유형: 도형 20">
+              <a:extLst>
+                <a:ext uri="{FF2B5EF4-FFF2-40B4-BE49-F238E27FC236}">
+                  <a16:creationId xmlns:a16="http://schemas.microsoft.com/office/drawing/2014/main" id="{CB185065-7B15-9845-C857-7B788BE812C5}"/>
+                </a:ext>
+              </a:extLst>
+            </p:cNvPr>
+            <p:cNvSpPr/>
+            <p:nvPr/>
+          </p:nvSpPr>
+          <p:spPr bwMode="gray">
+            <a:xfrm>
+              <a:off x="970713" y="2610952"/>
+              <a:ext cx="3144088" cy="1200486"/>
+            </a:xfrm>
+            <a:custGeom>
+              <a:avLst/>
+              <a:gdLst>
+                <a:gd name="csX0" fmla="*/ 161925 w 2864644"/>
+                <a:gd name="csY0" fmla="*/ 0 h 1093788"/>
+                <a:gd name="csX1" fmla="*/ 2702719 w 2864644"/>
+                <a:gd name="csY1" fmla="*/ 0 h 1093788"/>
+                <a:gd name="csX2" fmla="*/ 2864644 w 2864644"/>
+                <a:gd name="csY2" fmla="*/ 161925 h 1093788"/>
+                <a:gd name="csX3" fmla="*/ 2864644 w 2864644"/>
+                <a:gd name="csY3" fmla="*/ 931863 h 1093788"/>
+                <a:gd name="csX4" fmla="*/ 2702719 w 2864644"/>
+                <a:gd name="csY4" fmla="*/ 1093788 h 1093788"/>
+                <a:gd name="csX5" fmla="*/ 161925 w 2864644"/>
+                <a:gd name="csY5" fmla="*/ 1093788 h 1093788"/>
+                <a:gd name="csX6" fmla="*/ 0 w 2864644"/>
+                <a:gd name="csY6" fmla="*/ 931863 h 1093788"/>
+                <a:gd name="csX7" fmla="*/ 0 w 2864644"/>
+                <a:gd name="csY7" fmla="*/ 161925 h 1093788"/>
+                <a:gd name="csX8" fmla="*/ 161925 w 2864644"/>
+                <a:gd name="csY8" fmla="*/ 0 h 1093788"/>
+              </a:gdLst>
+              <a:ahLst/>
+              <a:cxnLst>
+                <a:cxn ang="0">
+                  <a:pos x="csX0" y="csY0"/>
+                </a:cxn>
+                <a:cxn ang="0">
+                  <a:pos x="csX1" y="csY1"/>
+                </a:cxn>
+                <a:cxn ang="0">
+                  <a:pos x="csX2" y="csY2"/>
+                </a:cxn>
+                <a:cxn ang="0">
+                  <a:pos x="csX3" y="csY3"/>
+                </a:cxn>
+                <a:cxn ang="0">
+                  <a:pos x="csX4" y="csY4"/>
+                </a:cxn>
+                <a:cxn ang="0">
+                  <a:pos x="csX5" y="csY5"/>
+                </a:cxn>
+                <a:cxn ang="0">
+                  <a:pos x="csX6" y="csY6"/>
+                </a:cxn>
+                <a:cxn ang="0">
+                  <a:pos x="csX7" y="csY7"/>
+                </a:cxn>
+                <a:cxn ang="0">
+                  <a:pos x="csX8" y="csY8"/>
+                </a:cxn>
+              </a:cxnLst>
+              <a:rect l="l" t="t" r="r" b="b"/>
+              <a:pathLst>
+                <a:path w="2864644" h="1093788">
+                  <a:moveTo>
+                    <a:pt x="161925" y="0"/>
+                  </a:moveTo>
+                  <a:lnTo>
+                    <a:pt x="2702719" y="0"/>
+                  </a:lnTo>
+                  <a:cubicBezTo>
+                    <a:pt x="2702719" y="89429"/>
+                    <a:pt x="2775215" y="161925"/>
+                    <a:pt x="2864644" y="161925"/>
+                  </a:cubicBezTo>
+                  <a:lnTo>
+                    <a:pt x="2864644" y="931863"/>
+                  </a:lnTo>
+                  <a:cubicBezTo>
+                    <a:pt x="2775215" y="931863"/>
+                    <a:pt x="2702719" y="1004359"/>
+                    <a:pt x="2702719" y="1093788"/>
+                  </a:cubicBezTo>
+                  <a:lnTo>
+                    <a:pt x="161925" y="1093788"/>
+                  </a:lnTo>
+                  <a:cubicBezTo>
+                    <a:pt x="161925" y="1004359"/>
+                    <a:pt x="89429" y="931863"/>
+                    <a:pt x="0" y="931863"/>
+                  </a:cubicBezTo>
+                  <a:lnTo>
+                    <a:pt x="0" y="161925"/>
+                  </a:lnTo>
+                  <a:cubicBezTo>
+                    <a:pt x="89429" y="161925"/>
+                    <a:pt x="161925" y="89429"/>
+                    <a:pt x="161925" y="0"/>
+                  </a:cubicBezTo>
+                  <a:close/>
+                </a:path>
+              </a:pathLst>
+            </a:custGeom>
+            <a:solidFill>
+              <a:srgbClr val="E6E6E6"/>
+            </a:solidFill>
+            <a:ln w="3175" algn="ctr">
+              <a:solidFill>
+                <a:schemeClr val="bg1">
+                  <a:lumMod val="65000"/>
+                </a:schemeClr>
+              </a:solidFill>
+              <a:miter lim="800000"/>
+              <a:headEnd/>
+              <a:tailEnd/>
+            </a:ln>
+          </p:spPr>
+          <p:txBody>
+            <a:bodyPr wrap="square" lIns="88900" tIns="88900" rIns="88900" bIns="88900" rtlCol="0" anchor="ctr">
+              <a:noAutofit/>
+            </a:bodyPr>
+            <a:lstStyle/>
+            <a:p>
+              <a:pPr algn="ctr">
+                <a:lnSpc>
+                  <a:spcPct val="106000"/>
+                </a:lnSpc>
+                <a:buFont typeface="Wingdings 2" pitchFamily="18" charset="2"/>
+                <a:buNone/>
+              </a:pPr>
+              <a:r>
+                <a:rPr lang="en-US" altLang="ko-KR" sz="1600" b="1" dirty="0">
+                  <a:solidFill>
+                    <a:schemeClr val="bg1"/>
+                  </a:solidFill>
+                </a:rPr>
+                <a:t>`</a:t>
+              </a:r>
+              <a:endParaRPr lang="ko-KR" altLang="en-US" sz="1600" b="1" dirty="0">
+                <a:solidFill>
+                  <a:schemeClr val="bg1"/>
+                </a:solidFill>
+              </a:endParaRPr>
+            </a:p>
+          </p:txBody>
+        </p:sp>
+        <p:sp>
+          <p:nvSpPr>
+            <p:cNvPr id="22" name="직사각형 21">
+              <a:extLst>
+                <a:ext uri="{FF2B5EF4-FFF2-40B4-BE49-F238E27FC236}">
+                  <a16:creationId xmlns:a16="http://schemas.microsoft.com/office/drawing/2014/main" id="{65EF9217-10B2-9C09-60B3-EB5C00E3EDEA}"/>
+                </a:ext>
+              </a:extLst>
+            </p:cNvPr>
+            <p:cNvSpPr/>
+            <p:nvPr/>
+          </p:nvSpPr>
+          <p:spPr bwMode="gray">
+            <a:xfrm>
+              <a:off x="1105658" y="2813050"/>
+              <a:ext cx="717550" cy="762000"/>
+            </a:xfrm>
+            <a:prstGeom prst="rect">
+              <a:avLst/>
+            </a:prstGeom>
+            <a:noFill/>
+            <a:ln w="19050" algn="ctr">
+              <a:noFill/>
+              <a:miter lim="800000"/>
+              <a:headEnd/>
+              <a:tailEnd/>
+            </a:ln>
+          </p:spPr>
+          <p:txBody>
+            <a:bodyPr wrap="none" lIns="88900" tIns="88900" rIns="88900" bIns="88900" rtlCol="0" anchor="ctr"/>
+            <a:lstStyle/>
+            <a:p>
+              <a:pPr algn="ctr">
+                <a:lnSpc>
+                  <a:spcPct val="106000"/>
+                </a:lnSpc>
+                <a:buFont typeface="Wingdings 2" pitchFamily="18" charset="2"/>
+                <a:buNone/>
+              </a:pPr>
+              <a:r>
+                <a:rPr lang="en-US" altLang="ko-KR" sz="4400" b="1" dirty="0">
+                  <a:latin typeface="나눔고딕" panose="020D0604000000000000" pitchFamily="50" charset="-127"/>
+                  <a:ea typeface="나눔고딕" panose="020D0604000000000000" pitchFamily="50" charset="-127"/>
+                </a:rPr>
+                <a:t>I</a:t>
+              </a:r>
+              <a:r>
+                <a:rPr lang="ko-KR" altLang="en-US" sz="4400" b="1" dirty="0">
+                  <a:latin typeface="나눔고딕" panose="020D0604000000000000" pitchFamily="50" charset="-127"/>
+                  <a:ea typeface="나눔고딕" panose="020D0604000000000000" pitchFamily="50" charset="-127"/>
+                </a:rPr>
+                <a:t>상</a:t>
+              </a:r>
+            </a:p>
+          </p:txBody>
+        </p:sp>
+        <p:sp>
+          <p:nvSpPr>
+            <p:cNvPr id="23" name="직사각형 22">
+              <a:extLst>
+                <a:ext uri="{FF2B5EF4-FFF2-40B4-BE49-F238E27FC236}">
+                  <a16:creationId xmlns:a16="http://schemas.microsoft.com/office/drawing/2014/main" id="{71B53AA8-8B97-ECE0-3EF0-0758D93557B9}"/>
+                </a:ext>
+              </a:extLst>
+            </p:cNvPr>
+            <p:cNvSpPr/>
+            <p:nvPr/>
+          </p:nvSpPr>
+          <p:spPr bwMode="gray">
+            <a:xfrm>
+              <a:off x="1958153" y="2662936"/>
+              <a:ext cx="2057666" cy="1096518"/>
+            </a:xfrm>
+            <a:prstGeom prst="rect">
+              <a:avLst/>
+            </a:prstGeom>
+            <a:noFill/>
+            <a:ln w="19050" algn="ctr">
+              <a:noFill/>
+              <a:miter lim="800000"/>
+              <a:headEnd/>
+              <a:tailEnd/>
+            </a:ln>
+          </p:spPr>
+          <p:txBody>
+            <a:bodyPr wrap="none" lIns="88900" tIns="88900" rIns="88900" bIns="88900" rtlCol="0" anchor="ctr"/>
+            <a:lstStyle/>
+            <a:p>
+              <a:pPr algn="ctr"/>
+              <a:r>
+                <a:rPr lang="ko-KR" altLang="en-US" b="1" dirty="0" err="1">
+                  <a:latin typeface="나눔고딕" panose="020D0604000000000000" pitchFamily="50" charset="-127"/>
+                  <a:ea typeface="나눔고딕" panose="020D0604000000000000" pitchFamily="50" charset="-127"/>
+                </a:rPr>
+                <a:t>시나모롤</a:t>
+              </a:r>
+              <a:r>
+                <a:rPr lang="ko-KR" altLang="en-US" b="1" dirty="0">
+                  <a:latin typeface="나눔고딕" panose="020D0604000000000000" pitchFamily="50" charset="-127"/>
+                  <a:ea typeface="나눔고딕" panose="020D0604000000000000" pitchFamily="50" charset="-127"/>
+                </a:rPr>
+                <a:t> </a:t>
+              </a:r>
+              <a:endParaRPr lang="en-US" altLang="ko-KR" b="1" dirty="0">
+                <a:latin typeface="나눔고딕" panose="020D0604000000000000" pitchFamily="50" charset="-127"/>
+                <a:ea typeface="나눔고딕" panose="020D0604000000000000" pitchFamily="50" charset="-127"/>
+              </a:endParaRPr>
+            </a:p>
+            <a:p>
+              <a:pPr algn="ctr"/>
+              <a:r>
+                <a:rPr lang="ko-KR" altLang="en-US" b="1" dirty="0">
+                  <a:latin typeface="나눔고딕" panose="020D0604000000000000" pitchFamily="50" charset="-127"/>
+                  <a:ea typeface="나눔고딕" panose="020D0604000000000000" pitchFamily="50" charset="-127"/>
+                </a:rPr>
+                <a:t>바구니</a:t>
+              </a:r>
+              <a:r>
+                <a:rPr lang="en-US" altLang="ko-KR" b="1" dirty="0">
+                  <a:latin typeface="나눔고딕" panose="020D0604000000000000" pitchFamily="50" charset="-127"/>
+                  <a:ea typeface="나눔고딕" panose="020D0604000000000000" pitchFamily="50" charset="-127"/>
+                </a:rPr>
+                <a:t>(</a:t>
+              </a:r>
+              <a:r>
+                <a:rPr lang="ko-KR" altLang="en-US" b="1" dirty="0">
+                  <a:latin typeface="나눔고딕" panose="020D0604000000000000" pitchFamily="50" charset="-127"/>
+                  <a:ea typeface="나눔고딕" panose="020D0604000000000000" pitchFamily="50" charset="-127"/>
+                </a:rPr>
+                <a:t>흰색</a:t>
+              </a:r>
+              <a:r>
+                <a:rPr lang="en-US" altLang="ko-KR" b="1" dirty="0">
+                  <a:latin typeface="나눔고딕" panose="020D0604000000000000" pitchFamily="50" charset="-127"/>
+                  <a:ea typeface="나눔고딕" panose="020D0604000000000000" pitchFamily="50" charset="-127"/>
+                </a:rPr>
+                <a:t>)</a:t>
+              </a:r>
+              <a:endParaRPr lang="ko-KR" altLang="ko-KR" b="1" dirty="0">
+                <a:latin typeface="나눔고딕" panose="020D0604000000000000" pitchFamily="50" charset="-127"/>
+                <a:ea typeface="나눔고딕" panose="020D0604000000000000" pitchFamily="50" charset="-127"/>
+              </a:endParaRPr>
+            </a:p>
+          </p:txBody>
+        </p:sp>
+      </p:grpSp>
+      <p:grpSp>
+        <p:nvGrpSpPr>
+          <p:cNvPr id="24" name="그룹 23">
+            <a:extLst>
+              <a:ext uri="{FF2B5EF4-FFF2-40B4-BE49-F238E27FC236}">
+                <a16:creationId xmlns:a16="http://schemas.microsoft.com/office/drawing/2014/main" id="{72AF0818-736C-7DCB-751B-022C771DC6AF}"/>
+              </a:ext>
+            </a:extLst>
+          </p:cNvPr>
+          <p:cNvGrpSpPr/>
+          <p:nvPr/>
+        </p:nvGrpSpPr>
+        <p:grpSpPr>
+          <a:xfrm>
+            <a:off x="12871531" y="3362934"/>
+            <a:ext cx="3697200" cy="1486800"/>
+            <a:chOff x="677717" y="2434934"/>
+            <a:chExt cx="3697200" cy="1486800"/>
+          </a:xfrm>
+        </p:grpSpPr>
+        <p:sp>
+          <p:nvSpPr>
+            <p:cNvPr id="50" name="자유형: 도형 49">
+              <a:extLst>
+                <a:ext uri="{FF2B5EF4-FFF2-40B4-BE49-F238E27FC236}">
+                  <a16:creationId xmlns:a16="http://schemas.microsoft.com/office/drawing/2014/main" id="{81F5CB4B-6FA1-AE74-3AD7-1DDCFAE5D6D0}"/>
+                </a:ext>
+              </a:extLst>
+            </p:cNvPr>
+            <p:cNvSpPr/>
+            <p:nvPr/>
+          </p:nvSpPr>
+          <p:spPr bwMode="gray">
+            <a:xfrm>
+              <a:off x="677717" y="2434934"/>
+              <a:ext cx="3697200" cy="1486800"/>
+            </a:xfrm>
+            <a:custGeom>
+              <a:avLst/>
+              <a:gdLst>
+                <a:gd name="csX0" fmla="*/ 0 w 3697200"/>
+                <a:gd name="csY0" fmla="*/ 0 h 1486800"/>
+                <a:gd name="csX1" fmla="*/ 3697200 w 3697200"/>
+                <a:gd name="csY1" fmla="*/ 0 h 1486800"/>
+                <a:gd name="csX2" fmla="*/ 3697200 w 3697200"/>
+                <a:gd name="csY2" fmla="*/ 517650 h 1486800"/>
+                <a:gd name="csX3" fmla="*/ 3691379 w 3697200"/>
+                <a:gd name="csY3" fmla="*/ 517063 h 1486800"/>
+                <a:gd name="csX4" fmla="*/ 3465042 w 3697200"/>
+                <a:gd name="csY4" fmla="*/ 743400 h 1486800"/>
+                <a:gd name="csX5" fmla="*/ 3691379 w 3697200"/>
+                <a:gd name="csY5" fmla="*/ 969737 h 1486800"/>
+                <a:gd name="csX6" fmla="*/ 3697200 w 3697200"/>
+                <a:gd name="csY6" fmla="*/ 969150 h 1486800"/>
+                <a:gd name="csX7" fmla="*/ 3697200 w 3697200"/>
+                <a:gd name="csY7" fmla="*/ 1486800 h 1486800"/>
+                <a:gd name="csX8" fmla="*/ 0 w 3697200"/>
+                <a:gd name="csY8" fmla="*/ 1486800 h 1486800"/>
+                <a:gd name="csX9" fmla="*/ 0 w 3697200"/>
+                <a:gd name="csY9" fmla="*/ 969150 h 1486800"/>
+                <a:gd name="csX10" fmla="*/ 5821 w 3697200"/>
+                <a:gd name="csY10" fmla="*/ 969737 h 1486800"/>
+                <a:gd name="csX11" fmla="*/ 232158 w 3697200"/>
+                <a:gd name="csY11" fmla="*/ 743400 h 1486800"/>
+                <a:gd name="csX12" fmla="*/ 5821 w 3697200"/>
+                <a:gd name="csY12" fmla="*/ 517063 h 1486800"/>
+                <a:gd name="csX13" fmla="*/ 0 w 3697200"/>
+                <a:gd name="csY13" fmla="*/ 517650 h 1486800"/>
+              </a:gdLst>
+              <a:ahLst/>
+              <a:cxnLst>
+                <a:cxn ang="0">
+                  <a:pos x="csX0" y="csY0"/>
+                </a:cxn>
+                <a:cxn ang="0">
+                  <a:pos x="csX1" y="csY1"/>
+                </a:cxn>
+                <a:cxn ang="0">
+                  <a:pos x="csX2" y="csY2"/>
+                </a:cxn>
+                <a:cxn ang="0">
+                  <a:pos x="csX3" y="csY3"/>
+                </a:cxn>
+                <a:cxn ang="0">
+                  <a:pos x="csX4" y="csY4"/>
+                </a:cxn>
+                <a:cxn ang="0">
+                  <a:pos x="csX5" y="csY5"/>
+                </a:cxn>
+                <a:cxn ang="0">
+                  <a:pos x="csX6" y="csY6"/>
+                </a:cxn>
+                <a:cxn ang="0">
+                  <a:pos x="csX7" y="csY7"/>
+                </a:cxn>
+                <a:cxn ang="0">
+                  <a:pos x="csX8" y="csY8"/>
+                </a:cxn>
+                <a:cxn ang="0">
+                  <a:pos x="csX9" y="csY9"/>
+                </a:cxn>
+                <a:cxn ang="0">
+                  <a:pos x="csX10" y="csY10"/>
+                </a:cxn>
+                <a:cxn ang="0">
+                  <a:pos x="csX11" y="csY11"/>
+                </a:cxn>
+                <a:cxn ang="0">
+                  <a:pos x="csX12" y="csY12"/>
+                </a:cxn>
+                <a:cxn ang="0">
+                  <a:pos x="csX13" y="csY13"/>
+                </a:cxn>
+              </a:cxnLst>
+              <a:rect l="l" t="t" r="r" b="b"/>
+              <a:pathLst>
+                <a:path w="3697200" h="1486800">
+                  <a:moveTo>
+                    <a:pt x="0" y="0"/>
+                  </a:moveTo>
+                  <a:lnTo>
+                    <a:pt x="3697200" y="0"/>
+                  </a:lnTo>
+                  <a:lnTo>
+                    <a:pt x="3697200" y="517650"/>
+                  </a:lnTo>
+                  <a:lnTo>
+                    <a:pt x="3691379" y="517063"/>
+                  </a:lnTo>
+                  <a:cubicBezTo>
+                    <a:pt x="3566377" y="517063"/>
+                    <a:pt x="3465042" y="618398"/>
+                    <a:pt x="3465042" y="743400"/>
+                  </a:cubicBezTo>
+                  <a:cubicBezTo>
+                    <a:pt x="3465042" y="868402"/>
+                    <a:pt x="3566377" y="969737"/>
+                    <a:pt x="3691379" y="969737"/>
+                  </a:cubicBezTo>
+                  <a:lnTo>
+                    <a:pt x="3697200" y="969150"/>
+                  </a:lnTo>
+                  <a:lnTo>
+                    <a:pt x="3697200" y="1486800"/>
+                  </a:lnTo>
+                  <a:lnTo>
+                    <a:pt x="0" y="1486800"/>
+                  </a:lnTo>
+                  <a:lnTo>
+                    <a:pt x="0" y="969150"/>
+                  </a:lnTo>
+                  <a:lnTo>
+                    <a:pt x="5821" y="969737"/>
+                  </a:lnTo>
+                  <a:cubicBezTo>
+                    <a:pt x="130823" y="969737"/>
+                    <a:pt x="232158" y="868402"/>
+                    <a:pt x="232158" y="743400"/>
+                  </a:cubicBezTo>
+                  <a:cubicBezTo>
+                    <a:pt x="232158" y="618398"/>
+                    <a:pt x="130823" y="517063"/>
+                    <a:pt x="5821" y="517063"/>
+                  </a:cubicBezTo>
+                  <a:lnTo>
+                    <a:pt x="0" y="517650"/>
+                  </a:lnTo>
+                  <a:close/>
+                </a:path>
+              </a:pathLst>
+            </a:custGeom>
+            <a:solidFill>
+              <a:srgbClr val="DFEAC0"/>
+            </a:solidFill>
+            <a:ln w="3175" algn="ctr">
+              <a:solidFill>
+                <a:schemeClr val="bg1">
+                  <a:lumMod val="65000"/>
+                </a:schemeClr>
+              </a:solidFill>
+              <a:miter lim="800000"/>
+              <a:headEnd/>
+              <a:tailEnd/>
+            </a:ln>
+          </p:spPr>
+          <p:txBody>
+            <a:bodyPr wrap="square" lIns="88900" tIns="88900" rIns="88900" bIns="88900" rtlCol="0" anchor="ctr">
+              <a:noAutofit/>
+            </a:bodyPr>
+            <a:lstStyle/>
+            <a:p>
+              <a:pPr algn="ctr">
+                <a:lnSpc>
+                  <a:spcPct val="106000"/>
+                </a:lnSpc>
+                <a:buFont typeface="Wingdings 2" pitchFamily="18" charset="2"/>
+                <a:buNone/>
+              </a:pPr>
+              <a:endParaRPr lang="ko-KR" altLang="en-US" sz="1600" b="1" dirty="0">
+                <a:solidFill>
+                  <a:schemeClr val="bg1"/>
+                </a:solidFill>
+              </a:endParaRPr>
+            </a:p>
+          </p:txBody>
+        </p:sp>
+        <p:sp>
+          <p:nvSpPr>
+            <p:cNvPr id="54" name="자유형: 도형 53">
+              <a:extLst>
+                <a:ext uri="{FF2B5EF4-FFF2-40B4-BE49-F238E27FC236}">
+                  <a16:creationId xmlns:a16="http://schemas.microsoft.com/office/drawing/2014/main" id="{C9492416-B1D6-F0FA-F8A0-085AC96A3A0F}"/>
+                </a:ext>
+              </a:extLst>
+            </p:cNvPr>
+            <p:cNvSpPr/>
+            <p:nvPr/>
+          </p:nvSpPr>
+          <p:spPr bwMode="gray">
+            <a:xfrm>
+              <a:off x="970713" y="2610952"/>
+              <a:ext cx="3144088" cy="1200486"/>
+            </a:xfrm>
+            <a:custGeom>
+              <a:avLst/>
+              <a:gdLst>
+                <a:gd name="csX0" fmla="*/ 161925 w 2864644"/>
+                <a:gd name="csY0" fmla="*/ 0 h 1093788"/>
+                <a:gd name="csX1" fmla="*/ 2702719 w 2864644"/>
+                <a:gd name="csY1" fmla="*/ 0 h 1093788"/>
+                <a:gd name="csX2" fmla="*/ 2864644 w 2864644"/>
+                <a:gd name="csY2" fmla="*/ 161925 h 1093788"/>
+                <a:gd name="csX3" fmla="*/ 2864644 w 2864644"/>
+                <a:gd name="csY3" fmla="*/ 931863 h 1093788"/>
+                <a:gd name="csX4" fmla="*/ 2702719 w 2864644"/>
+                <a:gd name="csY4" fmla="*/ 1093788 h 1093788"/>
+                <a:gd name="csX5" fmla="*/ 161925 w 2864644"/>
+                <a:gd name="csY5" fmla="*/ 1093788 h 1093788"/>
+                <a:gd name="csX6" fmla="*/ 0 w 2864644"/>
+                <a:gd name="csY6" fmla="*/ 931863 h 1093788"/>
+                <a:gd name="csX7" fmla="*/ 0 w 2864644"/>
+                <a:gd name="csY7" fmla="*/ 161925 h 1093788"/>
+                <a:gd name="csX8" fmla="*/ 161925 w 2864644"/>
+                <a:gd name="csY8" fmla="*/ 0 h 1093788"/>
+              </a:gdLst>
+              <a:ahLst/>
+              <a:cxnLst>
+                <a:cxn ang="0">
+                  <a:pos x="csX0" y="csY0"/>
+                </a:cxn>
+                <a:cxn ang="0">
+                  <a:pos x="csX1" y="csY1"/>
+                </a:cxn>
+                <a:cxn ang="0">
+                  <a:pos x="csX2" y="csY2"/>
+                </a:cxn>
+                <a:cxn ang="0">
+                  <a:pos x="csX3" y="csY3"/>
+                </a:cxn>
+                <a:cxn ang="0">
+                  <a:pos x="csX4" y="csY4"/>
+                </a:cxn>
+                <a:cxn ang="0">
+                  <a:pos x="csX5" y="csY5"/>
+                </a:cxn>
+                <a:cxn ang="0">
+                  <a:pos x="csX6" y="csY6"/>
+                </a:cxn>
+                <a:cxn ang="0">
+                  <a:pos x="csX7" y="csY7"/>
+                </a:cxn>
+                <a:cxn ang="0">
+                  <a:pos x="csX8" y="csY8"/>
+                </a:cxn>
+              </a:cxnLst>
+              <a:rect l="l" t="t" r="r" b="b"/>
+              <a:pathLst>
+                <a:path w="2864644" h="1093788">
+                  <a:moveTo>
+                    <a:pt x="161925" y="0"/>
+                  </a:moveTo>
+                  <a:lnTo>
+                    <a:pt x="2702719" y="0"/>
+                  </a:lnTo>
+                  <a:cubicBezTo>
+                    <a:pt x="2702719" y="89429"/>
+                    <a:pt x="2775215" y="161925"/>
+                    <a:pt x="2864644" y="161925"/>
+                  </a:cubicBezTo>
+                  <a:lnTo>
+                    <a:pt x="2864644" y="931863"/>
+                  </a:lnTo>
+                  <a:cubicBezTo>
+                    <a:pt x="2775215" y="931863"/>
+                    <a:pt x="2702719" y="1004359"/>
+                    <a:pt x="2702719" y="1093788"/>
+                  </a:cubicBezTo>
+                  <a:lnTo>
+                    <a:pt x="161925" y="1093788"/>
+                  </a:lnTo>
+                  <a:cubicBezTo>
+                    <a:pt x="161925" y="1004359"/>
+                    <a:pt x="89429" y="931863"/>
+                    <a:pt x="0" y="931863"/>
+                  </a:cubicBezTo>
+                  <a:lnTo>
+                    <a:pt x="0" y="161925"/>
+                  </a:lnTo>
+                  <a:cubicBezTo>
+                    <a:pt x="89429" y="161925"/>
+                    <a:pt x="161925" y="89429"/>
+                    <a:pt x="161925" y="0"/>
+                  </a:cubicBezTo>
+                  <a:close/>
+                </a:path>
+              </a:pathLst>
+            </a:custGeom>
+            <a:solidFill>
+              <a:srgbClr val="E6E6E6"/>
+            </a:solidFill>
+            <a:ln w="3175" algn="ctr">
+              <a:solidFill>
+                <a:schemeClr val="bg1">
+                  <a:lumMod val="65000"/>
+                </a:schemeClr>
+              </a:solidFill>
+              <a:miter lim="800000"/>
+              <a:headEnd/>
+              <a:tailEnd/>
+            </a:ln>
+          </p:spPr>
+          <p:txBody>
+            <a:bodyPr wrap="square" lIns="88900" tIns="88900" rIns="88900" bIns="88900" rtlCol="0" anchor="ctr">
+              <a:noAutofit/>
+            </a:bodyPr>
+            <a:lstStyle/>
+            <a:p>
+              <a:pPr algn="ctr">
+                <a:lnSpc>
+                  <a:spcPct val="106000"/>
+                </a:lnSpc>
+                <a:buFont typeface="Wingdings 2" pitchFamily="18" charset="2"/>
+                <a:buNone/>
+              </a:pPr>
+              <a:r>
+                <a:rPr lang="en-US" altLang="ko-KR" sz="1600" b="1" dirty="0">
+                  <a:solidFill>
+                    <a:schemeClr val="bg1"/>
+                  </a:solidFill>
+                </a:rPr>
+                <a:t>`</a:t>
+              </a:r>
+              <a:endParaRPr lang="ko-KR" altLang="en-US" sz="1600" b="1" dirty="0">
+                <a:solidFill>
+                  <a:schemeClr val="bg1"/>
+                </a:solidFill>
+              </a:endParaRPr>
+            </a:p>
+          </p:txBody>
+        </p:sp>
+        <p:sp>
+          <p:nvSpPr>
+            <p:cNvPr id="55" name="직사각형 54">
+              <a:extLst>
+                <a:ext uri="{FF2B5EF4-FFF2-40B4-BE49-F238E27FC236}">
+                  <a16:creationId xmlns:a16="http://schemas.microsoft.com/office/drawing/2014/main" id="{75BE3238-5415-1301-BBA6-6979A31BF588}"/>
+                </a:ext>
+              </a:extLst>
+            </p:cNvPr>
+            <p:cNvSpPr/>
+            <p:nvPr/>
+          </p:nvSpPr>
+          <p:spPr bwMode="gray">
+            <a:xfrm>
+              <a:off x="1105658" y="2813050"/>
+              <a:ext cx="717550" cy="762000"/>
+            </a:xfrm>
+            <a:prstGeom prst="rect">
+              <a:avLst/>
+            </a:prstGeom>
+            <a:noFill/>
+            <a:ln w="19050" algn="ctr">
+              <a:noFill/>
+              <a:miter lim="800000"/>
+              <a:headEnd/>
+              <a:tailEnd/>
+            </a:ln>
+          </p:spPr>
+          <p:txBody>
+            <a:bodyPr wrap="none" lIns="88900" tIns="88900" rIns="88900" bIns="88900" rtlCol="0" anchor="ctr"/>
+            <a:lstStyle/>
+            <a:p>
+              <a:pPr algn="ctr">
+                <a:lnSpc>
+                  <a:spcPct val="106000"/>
+                </a:lnSpc>
+                <a:buFont typeface="Wingdings 2" pitchFamily="18" charset="2"/>
+                <a:buNone/>
+              </a:pPr>
+              <a:r>
+                <a:rPr lang="en-US" altLang="ko-KR" sz="4400" b="1" dirty="0">
+                  <a:latin typeface="나눔고딕" panose="020D0604000000000000" pitchFamily="50" charset="-127"/>
+                  <a:ea typeface="나눔고딕" panose="020D0604000000000000" pitchFamily="50" charset="-127"/>
+                </a:rPr>
+                <a:t>J</a:t>
+              </a:r>
+              <a:r>
+                <a:rPr lang="ko-KR" altLang="en-US" sz="4400" b="1" dirty="0">
+                  <a:latin typeface="나눔고딕" panose="020D0604000000000000" pitchFamily="50" charset="-127"/>
+                  <a:ea typeface="나눔고딕" panose="020D0604000000000000" pitchFamily="50" charset="-127"/>
+                </a:rPr>
+                <a:t>상</a:t>
+              </a:r>
+            </a:p>
+          </p:txBody>
+        </p:sp>
+        <p:sp>
+          <p:nvSpPr>
+            <p:cNvPr id="56" name="직사각형 55">
+              <a:extLst>
+                <a:ext uri="{FF2B5EF4-FFF2-40B4-BE49-F238E27FC236}">
+                  <a16:creationId xmlns:a16="http://schemas.microsoft.com/office/drawing/2014/main" id="{48D500E6-9380-A560-9E7F-18F5B7653F58}"/>
+                </a:ext>
+              </a:extLst>
+            </p:cNvPr>
+            <p:cNvSpPr/>
+            <p:nvPr/>
+          </p:nvSpPr>
+          <p:spPr bwMode="gray">
+            <a:xfrm>
+              <a:off x="1958153" y="2662936"/>
+              <a:ext cx="2057666" cy="1096518"/>
+            </a:xfrm>
+            <a:prstGeom prst="rect">
+              <a:avLst/>
+            </a:prstGeom>
+            <a:noFill/>
+            <a:ln w="19050" algn="ctr">
+              <a:noFill/>
+              <a:miter lim="800000"/>
+              <a:headEnd/>
+              <a:tailEnd/>
+            </a:ln>
+          </p:spPr>
+          <p:txBody>
+            <a:bodyPr wrap="none" lIns="88900" tIns="88900" rIns="88900" bIns="88900" rtlCol="0" anchor="ctr"/>
+            <a:lstStyle/>
+            <a:p>
+              <a:pPr algn="ctr"/>
+              <a:r>
+                <a:rPr lang="ko-KR" altLang="ko-KR" b="1" dirty="0" err="1">
+                  <a:latin typeface="나눔고딕" panose="020D0604000000000000" pitchFamily="50" charset="-127"/>
+                  <a:ea typeface="나눔고딕" panose="020D0604000000000000" pitchFamily="50" charset="-127"/>
+                </a:rPr>
+                <a:t>시나모롤</a:t>
+              </a:r>
+              <a:r>
+                <a:rPr lang="ko-KR" altLang="ko-KR" b="1" dirty="0">
+                  <a:latin typeface="나눔고딕" panose="020D0604000000000000" pitchFamily="50" charset="-127"/>
+                  <a:ea typeface="나눔고딕" panose="020D0604000000000000" pitchFamily="50" charset="-127"/>
+                </a:rPr>
+                <a:t> </a:t>
+              </a:r>
+              <a:endParaRPr lang="en-US" altLang="ko-KR" b="1" dirty="0">
+                <a:latin typeface="나눔고딕" panose="020D0604000000000000" pitchFamily="50" charset="-127"/>
+                <a:ea typeface="나눔고딕" panose="020D0604000000000000" pitchFamily="50" charset="-127"/>
+              </a:endParaRPr>
+            </a:p>
+            <a:p>
+              <a:pPr algn="ctr"/>
+              <a:r>
+                <a:rPr lang="ko-KR" altLang="ko-KR" b="1" dirty="0">
+                  <a:latin typeface="나눔고딕" panose="020D0604000000000000" pitchFamily="50" charset="-127"/>
+                  <a:ea typeface="나눔고딕" panose="020D0604000000000000" pitchFamily="50" charset="-127"/>
+                </a:rPr>
+                <a:t>리본 </a:t>
+              </a:r>
+              <a:r>
+                <a:rPr lang="ko-KR" altLang="ko-KR" b="1" dirty="0" err="1">
+                  <a:latin typeface="나눔고딕" panose="020D0604000000000000" pitchFamily="50" charset="-127"/>
+                  <a:ea typeface="나눔고딕" panose="020D0604000000000000" pitchFamily="50" charset="-127"/>
+                </a:rPr>
+                <a:t>챰</a:t>
+              </a:r>
+              <a:r>
+                <a:rPr lang="ko-KR" altLang="ko-KR" b="1" dirty="0">
+                  <a:latin typeface="나눔고딕" panose="020D0604000000000000" pitchFamily="50" charset="-127"/>
+                  <a:ea typeface="나눔고딕" panose="020D0604000000000000" pitchFamily="50" charset="-127"/>
+                </a:rPr>
+                <a:t>(하늘색)</a:t>
+              </a:r>
+            </a:p>
+          </p:txBody>
+        </p:sp>
+      </p:grpSp>
+      <p:grpSp>
+        <p:nvGrpSpPr>
+          <p:cNvPr id="60" name="그룹 59">
+            <a:extLst>
+              <a:ext uri="{FF2B5EF4-FFF2-40B4-BE49-F238E27FC236}">
+                <a16:creationId xmlns:a16="http://schemas.microsoft.com/office/drawing/2014/main" id="{D1A252C7-A460-46B2-2DD1-4EC2D112C32F}"/>
+              </a:ext>
+            </a:extLst>
+          </p:cNvPr>
+          <p:cNvGrpSpPr/>
+          <p:nvPr/>
+        </p:nvGrpSpPr>
+        <p:grpSpPr>
+          <a:xfrm>
+            <a:off x="12871531" y="5074086"/>
+            <a:ext cx="3697200" cy="1486800"/>
+            <a:chOff x="677717" y="2434934"/>
+            <a:chExt cx="3697200" cy="1486800"/>
+          </a:xfrm>
+        </p:grpSpPr>
+        <p:sp>
+          <p:nvSpPr>
+            <p:cNvPr id="61" name="자유형: 도형 60">
+              <a:extLst>
+                <a:ext uri="{FF2B5EF4-FFF2-40B4-BE49-F238E27FC236}">
+                  <a16:creationId xmlns:a16="http://schemas.microsoft.com/office/drawing/2014/main" id="{A25629D5-CEA7-FF4C-4260-21E361005A32}"/>
+                </a:ext>
+              </a:extLst>
+            </p:cNvPr>
+            <p:cNvSpPr/>
+            <p:nvPr/>
+          </p:nvSpPr>
+          <p:spPr bwMode="gray">
+            <a:xfrm>
+              <a:off x="677717" y="2434934"/>
+              <a:ext cx="3697200" cy="1486800"/>
+            </a:xfrm>
+            <a:custGeom>
+              <a:avLst/>
+              <a:gdLst>
+                <a:gd name="csX0" fmla="*/ 0 w 3697200"/>
+                <a:gd name="csY0" fmla="*/ 0 h 1486800"/>
+                <a:gd name="csX1" fmla="*/ 3697200 w 3697200"/>
+                <a:gd name="csY1" fmla="*/ 0 h 1486800"/>
+                <a:gd name="csX2" fmla="*/ 3697200 w 3697200"/>
+                <a:gd name="csY2" fmla="*/ 517650 h 1486800"/>
+                <a:gd name="csX3" fmla="*/ 3691379 w 3697200"/>
+                <a:gd name="csY3" fmla="*/ 517063 h 1486800"/>
+                <a:gd name="csX4" fmla="*/ 3465042 w 3697200"/>
+                <a:gd name="csY4" fmla="*/ 743400 h 1486800"/>
+                <a:gd name="csX5" fmla="*/ 3691379 w 3697200"/>
+                <a:gd name="csY5" fmla="*/ 969737 h 1486800"/>
+                <a:gd name="csX6" fmla="*/ 3697200 w 3697200"/>
+                <a:gd name="csY6" fmla="*/ 969150 h 1486800"/>
+                <a:gd name="csX7" fmla="*/ 3697200 w 3697200"/>
+                <a:gd name="csY7" fmla="*/ 1486800 h 1486800"/>
+                <a:gd name="csX8" fmla="*/ 0 w 3697200"/>
+                <a:gd name="csY8" fmla="*/ 1486800 h 1486800"/>
+                <a:gd name="csX9" fmla="*/ 0 w 3697200"/>
+                <a:gd name="csY9" fmla="*/ 969150 h 1486800"/>
+                <a:gd name="csX10" fmla="*/ 5821 w 3697200"/>
+                <a:gd name="csY10" fmla="*/ 969737 h 1486800"/>
+                <a:gd name="csX11" fmla="*/ 232158 w 3697200"/>
+                <a:gd name="csY11" fmla="*/ 743400 h 1486800"/>
+                <a:gd name="csX12" fmla="*/ 5821 w 3697200"/>
+                <a:gd name="csY12" fmla="*/ 517063 h 1486800"/>
+                <a:gd name="csX13" fmla="*/ 0 w 3697200"/>
+                <a:gd name="csY13" fmla="*/ 517650 h 1486800"/>
+              </a:gdLst>
+              <a:ahLst/>
+              <a:cxnLst>
+                <a:cxn ang="0">
+                  <a:pos x="csX0" y="csY0"/>
+                </a:cxn>
+                <a:cxn ang="0">
+                  <a:pos x="csX1" y="csY1"/>
+                </a:cxn>
+                <a:cxn ang="0">
+                  <a:pos x="csX2" y="csY2"/>
+                </a:cxn>
+                <a:cxn ang="0">
+                  <a:pos x="csX3" y="csY3"/>
+                </a:cxn>
+                <a:cxn ang="0">
+                  <a:pos x="csX4" y="csY4"/>
+                </a:cxn>
+                <a:cxn ang="0">
+                  <a:pos x="csX5" y="csY5"/>
+                </a:cxn>
+                <a:cxn ang="0">
+                  <a:pos x="csX6" y="csY6"/>
+                </a:cxn>
+                <a:cxn ang="0">
+                  <a:pos x="csX7" y="csY7"/>
+                </a:cxn>
+                <a:cxn ang="0">
+                  <a:pos x="csX8" y="csY8"/>
+                </a:cxn>
+                <a:cxn ang="0">
+                  <a:pos x="csX9" y="csY9"/>
+                </a:cxn>
+                <a:cxn ang="0">
+                  <a:pos x="csX10" y="csY10"/>
+                </a:cxn>
+                <a:cxn ang="0">
+                  <a:pos x="csX11" y="csY11"/>
+                </a:cxn>
+                <a:cxn ang="0">
+                  <a:pos x="csX12" y="csY12"/>
+                </a:cxn>
+                <a:cxn ang="0">
+                  <a:pos x="csX13" y="csY13"/>
+                </a:cxn>
+              </a:cxnLst>
+              <a:rect l="l" t="t" r="r" b="b"/>
+              <a:pathLst>
+                <a:path w="3697200" h="1486800">
+                  <a:moveTo>
+                    <a:pt x="0" y="0"/>
+                  </a:moveTo>
+                  <a:lnTo>
+                    <a:pt x="3697200" y="0"/>
+                  </a:lnTo>
+                  <a:lnTo>
+                    <a:pt x="3697200" y="517650"/>
+                  </a:lnTo>
+                  <a:lnTo>
+                    <a:pt x="3691379" y="517063"/>
+                  </a:lnTo>
+                  <a:cubicBezTo>
+                    <a:pt x="3566377" y="517063"/>
+                    <a:pt x="3465042" y="618398"/>
+                    <a:pt x="3465042" y="743400"/>
+                  </a:cubicBezTo>
+                  <a:cubicBezTo>
+                    <a:pt x="3465042" y="868402"/>
+                    <a:pt x="3566377" y="969737"/>
+                    <a:pt x="3691379" y="969737"/>
+                  </a:cubicBezTo>
+                  <a:lnTo>
+                    <a:pt x="3697200" y="969150"/>
+                  </a:lnTo>
+                  <a:lnTo>
+                    <a:pt x="3697200" y="1486800"/>
+                  </a:lnTo>
+                  <a:lnTo>
+                    <a:pt x="0" y="1486800"/>
+                  </a:lnTo>
+                  <a:lnTo>
+                    <a:pt x="0" y="969150"/>
+                  </a:lnTo>
+                  <a:lnTo>
+                    <a:pt x="5821" y="969737"/>
+                  </a:lnTo>
+                  <a:cubicBezTo>
+                    <a:pt x="130823" y="969737"/>
+                    <a:pt x="232158" y="868402"/>
+                    <a:pt x="232158" y="743400"/>
+                  </a:cubicBezTo>
+                  <a:cubicBezTo>
+                    <a:pt x="232158" y="618398"/>
+                    <a:pt x="130823" y="517063"/>
+                    <a:pt x="5821" y="517063"/>
+                  </a:cubicBezTo>
+                  <a:lnTo>
+                    <a:pt x="0" y="517650"/>
+                  </a:lnTo>
+                  <a:close/>
+                </a:path>
+              </a:pathLst>
+            </a:custGeom>
+            <a:solidFill>
+              <a:srgbClr val="DFEAC0"/>
+            </a:solidFill>
+            <a:ln w="3175" algn="ctr">
+              <a:solidFill>
+                <a:schemeClr val="bg1">
+                  <a:lumMod val="65000"/>
+                </a:schemeClr>
+              </a:solidFill>
+              <a:miter lim="800000"/>
+              <a:headEnd/>
+              <a:tailEnd/>
+            </a:ln>
+          </p:spPr>
+          <p:txBody>
+            <a:bodyPr wrap="square" lIns="88900" tIns="88900" rIns="88900" bIns="88900" rtlCol="0" anchor="ctr">
+              <a:noAutofit/>
+            </a:bodyPr>
+            <a:lstStyle/>
+            <a:p>
+              <a:pPr algn="ctr">
+                <a:lnSpc>
+                  <a:spcPct val="106000"/>
+                </a:lnSpc>
+                <a:buFont typeface="Wingdings 2" pitchFamily="18" charset="2"/>
+                <a:buNone/>
+              </a:pPr>
+              <a:endParaRPr lang="ko-KR" altLang="en-US" sz="1600" b="1" dirty="0">
+                <a:solidFill>
+                  <a:schemeClr val="bg1"/>
+                </a:solidFill>
+              </a:endParaRPr>
+            </a:p>
+          </p:txBody>
+        </p:sp>
+        <p:sp>
+          <p:nvSpPr>
+            <p:cNvPr id="62" name="자유형: 도형 61">
+              <a:extLst>
+                <a:ext uri="{FF2B5EF4-FFF2-40B4-BE49-F238E27FC236}">
+                  <a16:creationId xmlns:a16="http://schemas.microsoft.com/office/drawing/2014/main" id="{CCEC4CCD-8024-5449-3061-321C737466CD}"/>
+                </a:ext>
+              </a:extLst>
+            </p:cNvPr>
+            <p:cNvSpPr/>
+            <p:nvPr/>
+          </p:nvSpPr>
+          <p:spPr bwMode="gray">
+            <a:xfrm>
+              <a:off x="970713" y="2610952"/>
+              <a:ext cx="3144088" cy="1200486"/>
+            </a:xfrm>
+            <a:custGeom>
+              <a:avLst/>
+              <a:gdLst>
+                <a:gd name="csX0" fmla="*/ 161925 w 2864644"/>
+                <a:gd name="csY0" fmla="*/ 0 h 1093788"/>
+                <a:gd name="csX1" fmla="*/ 2702719 w 2864644"/>
+                <a:gd name="csY1" fmla="*/ 0 h 1093788"/>
+                <a:gd name="csX2" fmla="*/ 2864644 w 2864644"/>
+                <a:gd name="csY2" fmla="*/ 161925 h 1093788"/>
+                <a:gd name="csX3" fmla="*/ 2864644 w 2864644"/>
+                <a:gd name="csY3" fmla="*/ 931863 h 1093788"/>
+                <a:gd name="csX4" fmla="*/ 2702719 w 2864644"/>
+                <a:gd name="csY4" fmla="*/ 1093788 h 1093788"/>
+                <a:gd name="csX5" fmla="*/ 161925 w 2864644"/>
+                <a:gd name="csY5" fmla="*/ 1093788 h 1093788"/>
+                <a:gd name="csX6" fmla="*/ 0 w 2864644"/>
+                <a:gd name="csY6" fmla="*/ 931863 h 1093788"/>
+                <a:gd name="csX7" fmla="*/ 0 w 2864644"/>
+                <a:gd name="csY7" fmla="*/ 161925 h 1093788"/>
+                <a:gd name="csX8" fmla="*/ 161925 w 2864644"/>
+                <a:gd name="csY8" fmla="*/ 0 h 1093788"/>
+              </a:gdLst>
+              <a:ahLst/>
+              <a:cxnLst>
+                <a:cxn ang="0">
+                  <a:pos x="csX0" y="csY0"/>
+                </a:cxn>
+                <a:cxn ang="0">
+                  <a:pos x="csX1" y="csY1"/>
+                </a:cxn>
+                <a:cxn ang="0">
+                  <a:pos x="csX2" y="csY2"/>
+                </a:cxn>
+                <a:cxn ang="0">
+                  <a:pos x="csX3" y="csY3"/>
+                </a:cxn>
+                <a:cxn ang="0">
+                  <a:pos x="csX4" y="csY4"/>
+                </a:cxn>
+                <a:cxn ang="0">
+                  <a:pos x="csX5" y="csY5"/>
+                </a:cxn>
+                <a:cxn ang="0">
+                  <a:pos x="csX6" y="csY6"/>
+                </a:cxn>
+                <a:cxn ang="0">
+                  <a:pos x="csX7" y="csY7"/>
+                </a:cxn>
+                <a:cxn ang="0">
+                  <a:pos x="csX8" y="csY8"/>
+                </a:cxn>
+              </a:cxnLst>
+              <a:rect l="l" t="t" r="r" b="b"/>
+              <a:pathLst>
+                <a:path w="2864644" h="1093788">
+                  <a:moveTo>
+                    <a:pt x="161925" y="0"/>
+                  </a:moveTo>
+                  <a:lnTo>
+                    <a:pt x="2702719" y="0"/>
+                  </a:lnTo>
+                  <a:cubicBezTo>
+                    <a:pt x="2702719" y="89429"/>
+                    <a:pt x="2775215" y="161925"/>
+                    <a:pt x="2864644" y="161925"/>
+                  </a:cubicBezTo>
+                  <a:lnTo>
+                    <a:pt x="2864644" y="931863"/>
+                  </a:lnTo>
+                  <a:cubicBezTo>
+                    <a:pt x="2775215" y="931863"/>
+                    <a:pt x="2702719" y="1004359"/>
+                    <a:pt x="2702719" y="1093788"/>
+                  </a:cubicBezTo>
+                  <a:lnTo>
+                    <a:pt x="161925" y="1093788"/>
+                  </a:lnTo>
+                  <a:cubicBezTo>
+                    <a:pt x="161925" y="1004359"/>
+                    <a:pt x="89429" y="931863"/>
+                    <a:pt x="0" y="931863"/>
+                  </a:cubicBezTo>
+                  <a:lnTo>
+                    <a:pt x="0" y="161925"/>
+                  </a:lnTo>
+                  <a:cubicBezTo>
+                    <a:pt x="89429" y="161925"/>
+                    <a:pt x="161925" y="89429"/>
+                    <a:pt x="161925" y="0"/>
+                  </a:cubicBezTo>
+                  <a:close/>
+                </a:path>
+              </a:pathLst>
+            </a:custGeom>
+            <a:solidFill>
+              <a:srgbClr val="E6E6E6"/>
+            </a:solidFill>
+            <a:ln w="3175" algn="ctr">
+              <a:solidFill>
+                <a:schemeClr val="bg1">
+                  <a:lumMod val="65000"/>
+                </a:schemeClr>
+              </a:solidFill>
+              <a:miter lim="800000"/>
+              <a:headEnd/>
+              <a:tailEnd/>
+            </a:ln>
+          </p:spPr>
+          <p:txBody>
+            <a:bodyPr wrap="square" lIns="88900" tIns="88900" rIns="88900" bIns="88900" rtlCol="0" anchor="ctr">
+              <a:noAutofit/>
+            </a:bodyPr>
+            <a:lstStyle/>
+            <a:p>
+              <a:pPr algn="ctr">
+                <a:lnSpc>
+                  <a:spcPct val="106000"/>
+                </a:lnSpc>
+                <a:buFont typeface="Wingdings 2" pitchFamily="18" charset="2"/>
+                <a:buNone/>
+              </a:pPr>
+              <a:r>
+                <a:rPr lang="en-US" altLang="ko-KR" sz="1600" b="1" dirty="0">
+                  <a:solidFill>
+                    <a:schemeClr val="bg1"/>
+                  </a:solidFill>
+                </a:rPr>
+                <a:t>`</a:t>
+              </a:r>
+              <a:endParaRPr lang="ko-KR" altLang="en-US" sz="1600" b="1" dirty="0">
+                <a:solidFill>
+                  <a:schemeClr val="bg1"/>
+                </a:solidFill>
+              </a:endParaRPr>
+            </a:p>
+          </p:txBody>
+        </p:sp>
+        <p:sp>
+          <p:nvSpPr>
+            <p:cNvPr id="63" name="직사각형 62">
+              <a:extLst>
+                <a:ext uri="{FF2B5EF4-FFF2-40B4-BE49-F238E27FC236}">
+                  <a16:creationId xmlns:a16="http://schemas.microsoft.com/office/drawing/2014/main" id="{B4BC579E-3F6D-9BBB-2526-493C508E0FCC}"/>
+                </a:ext>
+              </a:extLst>
+            </p:cNvPr>
+            <p:cNvSpPr/>
+            <p:nvPr/>
+          </p:nvSpPr>
+          <p:spPr bwMode="gray">
+            <a:xfrm>
+              <a:off x="1105658" y="2813050"/>
+              <a:ext cx="717550" cy="762000"/>
+            </a:xfrm>
+            <a:prstGeom prst="rect">
+              <a:avLst/>
+            </a:prstGeom>
+            <a:noFill/>
+            <a:ln w="19050" algn="ctr">
+              <a:noFill/>
+              <a:miter lim="800000"/>
+              <a:headEnd/>
+              <a:tailEnd/>
+            </a:ln>
+          </p:spPr>
+          <p:txBody>
+            <a:bodyPr wrap="none" lIns="88900" tIns="88900" rIns="88900" bIns="88900" rtlCol="0" anchor="ctr"/>
+            <a:lstStyle/>
+            <a:p>
+              <a:pPr algn="ctr">
+                <a:lnSpc>
+                  <a:spcPct val="106000"/>
+                </a:lnSpc>
+                <a:buFont typeface="Wingdings 2" pitchFamily="18" charset="2"/>
+                <a:buNone/>
+              </a:pPr>
+              <a:r>
+                <a:rPr lang="en-US" altLang="ko-KR" sz="4400" b="1" dirty="0">
+                  <a:latin typeface="나눔고딕" panose="020D0604000000000000" pitchFamily="50" charset="-127"/>
+                  <a:ea typeface="나눔고딕" panose="020D0604000000000000" pitchFamily="50" charset="-127"/>
+                </a:rPr>
+                <a:t>K</a:t>
+              </a:r>
+              <a:r>
+                <a:rPr lang="ko-KR" altLang="en-US" sz="4400" b="1" dirty="0">
+                  <a:latin typeface="나눔고딕" panose="020D0604000000000000" pitchFamily="50" charset="-127"/>
+                  <a:ea typeface="나눔고딕" panose="020D0604000000000000" pitchFamily="50" charset="-127"/>
+                </a:rPr>
+                <a:t>상</a:t>
+              </a:r>
+            </a:p>
+          </p:txBody>
+        </p:sp>
+        <p:sp>
+          <p:nvSpPr>
+            <p:cNvPr id="64" name="직사각형 63">
+              <a:extLst>
+                <a:ext uri="{FF2B5EF4-FFF2-40B4-BE49-F238E27FC236}">
+                  <a16:creationId xmlns:a16="http://schemas.microsoft.com/office/drawing/2014/main" id="{3D146AE2-5D4C-7F3C-267B-886023313DBD}"/>
+                </a:ext>
+              </a:extLst>
+            </p:cNvPr>
+            <p:cNvSpPr/>
+            <p:nvPr/>
+          </p:nvSpPr>
+          <p:spPr bwMode="gray">
+            <a:xfrm>
+              <a:off x="1958153" y="2662936"/>
+              <a:ext cx="2057666" cy="1096518"/>
+            </a:xfrm>
+            <a:prstGeom prst="rect">
+              <a:avLst/>
+            </a:prstGeom>
+            <a:noFill/>
+            <a:ln w="19050" algn="ctr">
+              <a:noFill/>
+              <a:miter lim="800000"/>
+              <a:headEnd/>
+              <a:tailEnd/>
+            </a:ln>
+          </p:spPr>
+          <p:txBody>
+            <a:bodyPr wrap="none" lIns="88900" tIns="88900" rIns="88900" bIns="88900" rtlCol="0" anchor="ctr"/>
+            <a:lstStyle/>
+            <a:p>
+              <a:pPr algn="ctr"/>
+              <a:r>
+                <a:rPr lang="ko-KR" altLang="ko-KR" b="1" dirty="0" err="1">
+                  <a:latin typeface="나눔고딕" panose="020D0604000000000000" pitchFamily="50" charset="-127"/>
+                  <a:ea typeface="나눔고딕" panose="020D0604000000000000" pitchFamily="50" charset="-127"/>
+                </a:rPr>
+                <a:t>시나모롤</a:t>
+              </a:r>
+              <a:r>
+                <a:rPr lang="ko-KR" altLang="ko-KR" b="1" dirty="0">
+                  <a:latin typeface="나눔고딕" panose="020D0604000000000000" pitchFamily="50" charset="-127"/>
+                  <a:ea typeface="나눔고딕" panose="020D0604000000000000" pitchFamily="50" charset="-127"/>
+                </a:rPr>
+                <a:t> </a:t>
+              </a:r>
+              <a:endParaRPr lang="en-US" altLang="ko-KR" b="1" dirty="0">
+                <a:latin typeface="나눔고딕" panose="020D0604000000000000" pitchFamily="50" charset="-127"/>
+                <a:ea typeface="나눔고딕" panose="020D0604000000000000" pitchFamily="50" charset="-127"/>
+              </a:endParaRPr>
+            </a:p>
+            <a:p>
+              <a:pPr algn="ctr"/>
+              <a:r>
+                <a:rPr lang="ko-KR" altLang="ko-KR" b="1" dirty="0">
+                  <a:latin typeface="나눔고딕" panose="020D0604000000000000" pitchFamily="50" charset="-127"/>
+                  <a:ea typeface="나눔고딕" panose="020D0604000000000000" pitchFamily="50" charset="-127"/>
+                </a:rPr>
+                <a:t>리본 </a:t>
+              </a:r>
+              <a:r>
+                <a:rPr lang="ko-KR" altLang="ko-KR" b="1" dirty="0" err="1">
+                  <a:latin typeface="나눔고딕" panose="020D0604000000000000" pitchFamily="50" charset="-127"/>
+                  <a:ea typeface="나눔고딕" panose="020D0604000000000000" pitchFamily="50" charset="-127"/>
+                </a:rPr>
+                <a:t>챰</a:t>
+              </a:r>
+              <a:r>
+                <a:rPr lang="ko-KR" altLang="ko-KR" b="1" dirty="0">
+                  <a:latin typeface="나눔고딕" panose="020D0604000000000000" pitchFamily="50" charset="-127"/>
+                  <a:ea typeface="나눔고딕" panose="020D0604000000000000" pitchFamily="50" charset="-127"/>
+                </a:rPr>
+                <a:t>(</a:t>
+              </a:r>
+              <a:r>
+                <a:rPr lang="ko-KR" altLang="en-US" b="1" dirty="0">
+                  <a:latin typeface="나눔고딕" panose="020D0604000000000000" pitchFamily="50" charset="-127"/>
+                  <a:ea typeface="나눔고딕" panose="020D0604000000000000" pitchFamily="50" charset="-127"/>
+                </a:rPr>
+                <a:t>흰색</a:t>
+              </a:r>
+              <a:r>
+                <a:rPr lang="ko-KR" altLang="ko-KR" b="1" dirty="0">
+                  <a:latin typeface="나눔고딕" panose="020D0604000000000000" pitchFamily="50" charset="-127"/>
+                  <a:ea typeface="나눔고딕" panose="020D0604000000000000" pitchFamily="50" charset="-127"/>
+                </a:rPr>
+                <a:t>)</a:t>
+              </a:r>
+            </a:p>
+          </p:txBody>
+        </p:sp>
+      </p:grpSp>
+    </p:spTree>
+    <p:extLst>
+      <p:ext uri="{BB962C8B-B14F-4D97-AF65-F5344CB8AC3E}">
+        <p14:creationId xmlns:p14="http://schemas.microsoft.com/office/powerpoint/2010/main" val="3763867308"/>
+      </p:ext>
+    </p:extLst>
+  </p:cSld>
+  <p:clrMapOvr>
+    <a:masterClrMapping/>
+  </p:clrMapOvr>
+  <p:transition>
+    <p:fade/>
+  </p:transition>
+</p:sld>
+</file>
+
 <file path=ppt/tags/tag1.xml><?xml version="1.0" encoding="utf-8"?>
 <p:tagLst xmlns:a="http://schemas.openxmlformats.org/drawingml/2006/main" xmlns:r="http://schemas.openxmlformats.org/officeDocument/2006/relationships" xmlns:p="http://schemas.openxmlformats.org/presentationml/2006/main">
   <p:tag name="THINKCELLSHAPEDONOTDELETE" val="thinkcellActiveDocDoNotDelete"/>
@@ -38743,6 +44752,12 @@
 </file>
 
 <file path=ppt/tags/tag25.xml><?xml version="1.0" encoding="utf-8"?>
+<p:tagLst xmlns:a="http://schemas.openxmlformats.org/drawingml/2006/main" xmlns:r="http://schemas.openxmlformats.org/officeDocument/2006/relationships" xmlns:p="http://schemas.openxmlformats.org/presentationml/2006/main">
+  <p:tag name="THINKCELLSHAPEDONOTDELETE" val="thinkcellActiveDocDoNotDelete"/>
+</p:tagLst>
+</file>
+
+<file path=ppt/tags/tag26.xml><?xml version="1.0" encoding="utf-8"?>
 <p:tagLst xmlns:a="http://schemas.openxmlformats.org/drawingml/2006/main" xmlns:r="http://schemas.openxmlformats.org/officeDocument/2006/relationships" xmlns:p="http://schemas.openxmlformats.org/presentationml/2006/main">
   <p:tag name="THINKCELLSHAPEDONOTDELETE" val="thinkcellActiveDocDoNotDelete"/>
 </p:tagLst>
